--- a/Bases de Datos II/Clases/Clase 3 - Procedimientos almacenados/Presentacion.pptx
+++ b/Bases de Datos II/Clases/Clase 3 - Procedimientos almacenados/Presentacion.pptx
@@ -9,63 +9,55 @@
     <p:sldId id="257" r:id="rId8"/>
     <p:sldId id="258" r:id="rId9"/>
     <p:sldId id="259" r:id="rId10"/>
-    <p:sldId id="260" r:id="rId11"/>
-    <p:sldId id="261" r:id="rId12"/>
-    <p:sldId id="262" r:id="rId13"/>
-    <p:sldId id="263" r:id="rId14"/>
-    <p:sldId id="264" r:id="rId15"/>
-    <p:sldId id="265" r:id="rId16"/>
-    <p:sldId id="266" r:id="rId17"/>
-    <p:sldId id="267" r:id="rId18"/>
-    <p:sldId id="268" r:id="rId19"/>
-    <p:sldId id="269" r:id="rId20"/>
-    <p:sldId id="270" r:id="rId21"/>
-    <p:sldId id="271" r:id="rId22"/>
-    <p:sldId id="272" r:id="rId23"/>
-    <p:sldId id="273" r:id="rId24"/>
-    <p:sldId id="274" r:id="rId25"/>
-    <p:sldId id="275" r:id="rId26"/>
-    <p:sldId id="276" r:id="rId27"/>
-    <p:sldId id="277" r:id="rId28"/>
-    <p:sldId id="278" r:id="rId29"/>
-    <p:sldId id="279" r:id="rId30"/>
-    <p:sldId id="280" r:id="rId31"/>
-    <p:sldId id="281" r:id="rId32"/>
-    <p:sldId id="282" r:id="rId33"/>
-    <p:sldId id="283" r:id="rId34"/>
-    <p:sldId id="284" r:id="rId35"/>
-    <p:sldId id="285" r:id="rId36"/>
-    <p:sldId id="286" r:id="rId37"/>
-    <p:sldId id="287" r:id="rId38"/>
-    <p:sldId id="288" r:id="rId39"/>
-    <p:sldId id="289" r:id="rId40"/>
-    <p:sldId id="290" r:id="rId41"/>
-    <p:sldId id="291" r:id="rId42"/>
-    <p:sldId id="292" r:id="rId43"/>
-    <p:sldId id="293" r:id="rId44"/>
-    <p:sldId id="294" r:id="rId45"/>
-    <p:sldId id="295" r:id="rId46"/>
-    <p:sldId id="296" r:id="rId47"/>
-    <p:sldId id="297" r:id="rId48"/>
-    <p:sldId id="298" r:id="rId49"/>
-    <p:sldId id="299" r:id="rId50"/>
-    <p:sldId id="300" r:id="rId51"/>
-    <p:sldId id="301" r:id="rId52"/>
-    <p:sldId id="302" r:id="rId53"/>
-    <p:sldId id="303" r:id="rId54"/>
-    <p:sldId id="304" r:id="rId55"/>
-    <p:sldId id="305" r:id="rId56"/>
-    <p:sldId id="306" r:id="rId57"/>
-    <p:sldId id="307" r:id="rId58"/>
-    <p:sldId id="308" r:id="rId59"/>
-    <p:sldId id="309" r:id="rId60"/>
-    <p:sldId id="310" r:id="rId61"/>
-    <p:sldId id="311" r:id="rId62"/>
-    <p:sldId id="312" r:id="rId63"/>
-    <p:sldId id="313" r:id="rId64"/>
-    <p:sldId id="314" r:id="rId65"/>
-    <p:sldId id="315" r:id="rId66"/>
-    <p:sldId id="316" r:id="rId67"/>
+    <p:sldId id="260" r:id="rId12"/>
+    <p:sldId id="261" r:id="rId13"/>
+    <p:sldId id="262" r:id="rId14"/>
+    <p:sldId id="263" r:id="rId15"/>
+    <p:sldId id="264" r:id="rId16"/>
+    <p:sldId id="265" r:id="rId17"/>
+    <p:sldId id="266" r:id="rId18"/>
+    <p:sldId id="267" r:id="rId19"/>
+    <p:sldId id="268" r:id="rId20"/>
+    <p:sldId id="269" r:id="rId21"/>
+    <p:sldId id="270" r:id="rId22"/>
+    <p:sldId id="271" r:id="rId23"/>
+    <p:sldId id="272" r:id="rId24"/>
+    <p:sldId id="273" r:id="rId25"/>
+    <p:sldId id="274" r:id="rId26"/>
+    <p:sldId id="275" r:id="rId27"/>
+    <p:sldId id="276" r:id="rId28"/>
+    <p:sldId id="277" r:id="rId29"/>
+    <p:sldId id="278" r:id="rId30"/>
+    <p:sldId id="279" r:id="rId31"/>
+    <p:sldId id="280" r:id="rId32"/>
+    <p:sldId id="281" r:id="rId33"/>
+    <p:sldId id="282" r:id="rId34"/>
+    <p:sldId id="283" r:id="rId35"/>
+    <p:sldId id="284" r:id="rId36"/>
+    <p:sldId id="285" r:id="rId37"/>
+    <p:sldId id="286" r:id="rId38"/>
+    <p:sldId id="287" r:id="rId39"/>
+    <p:sldId id="288" r:id="rId40"/>
+    <p:sldId id="289" r:id="rId41"/>
+    <p:sldId id="290" r:id="rId42"/>
+    <p:sldId id="291" r:id="rId43"/>
+    <p:sldId id="292" r:id="rId44"/>
+    <p:sldId id="293" r:id="rId45"/>
+    <p:sldId id="294" r:id="rId46"/>
+    <p:sldId id="295" r:id="rId47"/>
+    <p:sldId id="296" r:id="rId48"/>
+    <p:sldId id="297" r:id="rId49"/>
+    <p:sldId id="298" r:id="rId50"/>
+    <p:sldId id="299" r:id="rId51"/>
+    <p:sldId id="300" r:id="rId52"/>
+    <p:sldId id="301" r:id="rId53"/>
+    <p:sldId id="302" r:id="rId54"/>
+    <p:sldId id="303" r:id="rId55"/>
+    <p:sldId id="304" r:id="rId56"/>
+    <p:sldId id="305" r:id="rId57"/>
+    <p:sldId id="306" r:id="rId58"/>
+    <p:sldId id="307" r:id="rId59"/>
+    <p:sldId id="308" r:id="rId60"/>
   </p:sldIdLst>
   <p:sldSz cx="12191695" cy="6858000" type="screen4x3"/>
   <p:notesSz cx="6858000" cy="9144000"/>
@@ -165,6 +157,1491 @@
     </a:lvl9pPr>
   </p:defaultTextStyle>
 </p:presentation>
+</file>
+
+<file path=ppt/notesMasters/notesMaster1.xml><?xml version="1.0" encoding="utf-8"?>
+<p:notesMaster xmlns:a="http://schemas.openxmlformats.org/drawingml/2006/main" xmlns:p="http://schemas.openxmlformats.org/presentationml/2006/main" xmlns:r="http://schemas.openxmlformats.org/officeDocument/2006/relationships">
+  <p:cSld>
+    <p:bg>
+      <p:bgRef idx="1001">
+        <a:schemeClr val="bg1"/>
+      </p:bgRef>
+    </p:bg>
+    <p:spTree>
+      <p:nvGrpSpPr>
+        <p:cNvPr id="1" name=""/>
+        <p:cNvGrpSpPr/>
+        <p:nvPr/>
+      </p:nvGrpSpPr>
+      <p:grpSpPr>
+        <a:xfrm>
+          <a:off x="0" y="0"/>
+          <a:ext cx="0" cy="0"/>
+          <a:chOff x="0" y="0"/>
+          <a:chExt cx="0" cy="0"/>
+        </a:xfrm>
+      </p:grpSpPr>
+      <p:sp>
+        <p:nvSpPr>
+          <p:cNvPr id="2" name="Header Placeholder 1"/>
+          <p:cNvSpPr>
+            <a:spLocks noGrp="1"/>
+          </p:cNvSpPr>
+          <p:nvPr>
+            <p:ph type="hdr" sz="quarter"/>
+          </p:nvPr>
+        </p:nvSpPr>
+        <p:spPr>
+          <a:xfrm>
+            <a:off x="0" y="0"/>
+            <a:ext cx="2971800" cy="457200"/>
+          </a:xfrm>
+          <a:prstGeom prst="rect">
+            <a:avLst/>
+          </a:prstGeom>
+        </p:spPr>
+        <p:txBody>
+          <a:bodyPr vert="horz" lIns="91440" tIns="45720" rIns="91440" bIns="45720" rtlCol="0"/>
+          <a:lstStyle>
+            <a:lvl1pPr algn="l">
+              <a:defRPr sz="1200"/>
+            </a:lvl1pPr>
+          </a:lstStyle>
+          <a:p>
+            <a:endParaRPr lang="en-US"/>
+          </a:p>
+        </p:txBody>
+      </p:sp>
+      <p:sp>
+        <p:nvSpPr>
+          <p:cNvPr id="3" name="Date Placeholder 2"/>
+          <p:cNvSpPr>
+            <a:spLocks noGrp="1"/>
+          </p:cNvSpPr>
+          <p:nvPr>
+            <p:ph type="dt" idx="1"/>
+          </p:nvPr>
+        </p:nvSpPr>
+        <p:spPr>
+          <a:xfrm>
+            <a:off x="3884613" y="0"/>
+            <a:ext cx="2971800" cy="457200"/>
+          </a:xfrm>
+          <a:prstGeom prst="rect">
+            <a:avLst/>
+          </a:prstGeom>
+        </p:spPr>
+        <p:txBody>
+          <a:bodyPr vert="horz" lIns="91440" tIns="45720" rIns="91440" bIns="45720" rtlCol="0"/>
+          <a:lstStyle>
+            <a:lvl1pPr algn="r">
+              <a:defRPr sz="1200"/>
+            </a:lvl1pPr>
+          </a:lstStyle>
+          <a:p>
+            <a:fld id="{0F89C1C7-3DCD-1040-A9CF-14679D8B5DDD}" type="datetimeFigureOut">
+              <a:rPr lang="en-US" smtClean="0"/>
+              <a:t>10/17/16</a:t>
+            </a:fld>
+            <a:endParaRPr lang="en-US"/>
+          </a:p>
+        </p:txBody>
+      </p:sp>
+      <p:sp>
+        <p:nvSpPr>
+          <p:cNvPr id="4" name="Slide Image Placeholder 3"/>
+          <p:cNvSpPr>
+            <a:spLocks noGrp="1" noRot="1" noChangeAspect="1"/>
+          </p:cNvSpPr>
+          <p:nvPr>
+            <p:ph type="sldImg" idx="2"/>
+          </p:nvPr>
+        </p:nvSpPr>
+        <p:spPr>
+          <a:xfrm>
+            <a:off x="1143000" y="685800"/>
+            <a:ext cx="4572000" cy="3429000"/>
+          </a:xfrm>
+          <a:prstGeom prst="rect">
+            <a:avLst/>
+          </a:prstGeom>
+          <a:noFill/>
+          <a:ln w="12700">
+            <a:solidFill>
+              <a:prstClr val="black"/>
+            </a:solidFill>
+          </a:ln>
+        </p:spPr>
+        <p:txBody>
+          <a:bodyPr vert="horz" lIns="91440" tIns="45720" rIns="91440" bIns="45720" rtlCol="0" anchor="ctr"/>
+          <a:lstStyle/>
+          <a:p>
+            <a:endParaRPr lang="en-US"/>
+          </a:p>
+        </p:txBody>
+      </p:sp>
+      <p:sp>
+        <p:nvSpPr>
+          <p:cNvPr id="5" name="Notes Placeholder 4"/>
+          <p:cNvSpPr>
+            <a:spLocks noGrp="1"/>
+          </p:cNvSpPr>
+          <p:nvPr>
+            <p:ph type="body" sz="quarter" idx="3"/>
+          </p:nvPr>
+        </p:nvSpPr>
+        <p:spPr>
+          <a:xfrm>
+            <a:off x="685800" y="4343400"/>
+            <a:ext cx="5486400" cy="4114800"/>
+          </a:xfrm>
+          <a:prstGeom prst="rect">
+            <a:avLst/>
+          </a:prstGeom>
+        </p:spPr>
+        <p:txBody>
+          <a:bodyPr vert="horz" lIns="91440" tIns="45720" rIns="91440" bIns="45720" rtlCol="0"/>
+          <a:lstStyle/>
+          <a:p>
+            <a:pPr lvl="0"/>
+            <a:r>
+              <a:rPr lang="en-US" smtClean="0"/>
+              <a:t>Click to edit Master text styles</a:t>
+            </a:r>
+          </a:p>
+          <a:p>
+            <a:pPr lvl="1"/>
+            <a:r>
+              <a:rPr lang="en-US" smtClean="0"/>
+              <a:t>Second level</a:t>
+            </a:r>
+          </a:p>
+          <a:p>
+            <a:pPr lvl="2"/>
+            <a:r>
+              <a:rPr lang="en-US" smtClean="0"/>
+              <a:t>Third level</a:t>
+            </a:r>
+          </a:p>
+          <a:p>
+            <a:pPr lvl="3"/>
+            <a:r>
+              <a:rPr lang="en-US" smtClean="0"/>
+              <a:t>Fourth level</a:t>
+            </a:r>
+          </a:p>
+          <a:p>
+            <a:pPr lvl="4"/>
+            <a:r>
+              <a:rPr lang="en-US" smtClean="0"/>
+              <a:t>Fifth level</a:t>
+            </a:r>
+            <a:endParaRPr lang="en-US"/>
+          </a:p>
+        </p:txBody>
+      </p:sp>
+      <p:sp>
+        <p:nvSpPr>
+          <p:cNvPr id="6" name="Footer Placeholder 5"/>
+          <p:cNvSpPr>
+            <a:spLocks noGrp="1"/>
+          </p:cNvSpPr>
+          <p:nvPr>
+            <p:ph type="ftr" sz="quarter" idx="4"/>
+          </p:nvPr>
+        </p:nvSpPr>
+        <p:spPr>
+          <a:xfrm>
+            <a:off x="0" y="8685213"/>
+            <a:ext cx="2971800" cy="457200"/>
+          </a:xfrm>
+          <a:prstGeom prst="rect">
+            <a:avLst/>
+          </a:prstGeom>
+        </p:spPr>
+        <p:txBody>
+          <a:bodyPr vert="horz" lIns="91440" tIns="45720" rIns="91440" bIns="45720" rtlCol="0" anchor="b"/>
+          <a:lstStyle>
+            <a:lvl1pPr algn="l">
+              <a:defRPr sz="1200"/>
+            </a:lvl1pPr>
+          </a:lstStyle>
+          <a:p>
+            <a:endParaRPr lang="en-US"/>
+          </a:p>
+        </p:txBody>
+      </p:sp>
+      <p:sp>
+        <p:nvSpPr>
+          <p:cNvPr id="7" name="Slide Number Placeholder 6"/>
+          <p:cNvSpPr>
+            <a:spLocks noGrp="1"/>
+          </p:cNvSpPr>
+          <p:nvPr>
+            <p:ph type="sldNum" sz="quarter" idx="5"/>
+          </p:nvPr>
+        </p:nvSpPr>
+        <p:spPr>
+          <a:xfrm>
+            <a:off x="3884613" y="8685213"/>
+            <a:ext cx="2971800" cy="457200"/>
+          </a:xfrm>
+          <a:prstGeom prst="rect">
+            <a:avLst/>
+          </a:prstGeom>
+        </p:spPr>
+        <p:txBody>
+          <a:bodyPr vert="horz" lIns="91440" tIns="45720" rIns="91440" bIns="45720" rtlCol="0" anchor="b"/>
+          <a:lstStyle>
+            <a:lvl1pPr algn="r">
+              <a:defRPr sz="1200"/>
+            </a:lvl1pPr>
+          </a:lstStyle>
+          <a:p>
+            <a:fld id="{BB5E49A5-4136-284D-997B-48E1D791AD67}" type="slidenum">
+              <a:rPr lang="en-US" smtClean="0"/>
+              <a:t>‹#›</a:t>
+            </a:fld>
+            <a:endParaRPr lang="en-US"/>
+          </a:p>
+        </p:txBody>
+      </p:sp>
+    </p:spTree>
+    <p:extLst>
+      <p:ext uri="{BB962C8B-B14F-4D97-AF65-F5344CB8AC3E}">
+        <p14:creationId xmlns:p14="http://schemas.microsoft.com/office/powerpoint/2010/main" val="2623252185"/>
+      </p:ext>
+    </p:extLst>
+  </p:cSld>
+  <p:clrMap bg1="lt1" tx1="dk1" bg2="lt2" tx2="dk2" accent1="accent1" accent2="accent2" accent3="accent3" accent4="accent4" accent5="accent5" accent6="accent6" hlink="hlink" folHlink="folHlink"/>
+  <p:notesStyle>
+    <a:lvl1pPr marL="0" algn="l" defTabSz="457200" rtl="0" eaLnBrk="1" latinLnBrk="0" hangingPunct="1">
+      <a:defRPr sz="1200" kern="1200">
+        <a:solidFill>
+          <a:schemeClr val="tx1"/>
+        </a:solidFill>
+        <a:latin typeface="+mn-lt"/>
+        <a:ea typeface="+mn-ea"/>
+        <a:cs typeface="+mn-cs"/>
+      </a:defRPr>
+    </a:lvl1pPr>
+    <a:lvl2pPr marL="457200" algn="l" defTabSz="457200" rtl="0" eaLnBrk="1" latinLnBrk="0" hangingPunct="1">
+      <a:defRPr sz="1200" kern="1200">
+        <a:solidFill>
+          <a:schemeClr val="tx1"/>
+        </a:solidFill>
+        <a:latin typeface="+mn-lt"/>
+        <a:ea typeface="+mn-ea"/>
+        <a:cs typeface="+mn-cs"/>
+      </a:defRPr>
+    </a:lvl2pPr>
+    <a:lvl3pPr marL="914400" algn="l" defTabSz="457200" rtl="0" eaLnBrk="1" latinLnBrk="0" hangingPunct="1">
+      <a:defRPr sz="1200" kern="1200">
+        <a:solidFill>
+          <a:schemeClr val="tx1"/>
+        </a:solidFill>
+        <a:latin typeface="+mn-lt"/>
+        <a:ea typeface="+mn-ea"/>
+        <a:cs typeface="+mn-cs"/>
+      </a:defRPr>
+    </a:lvl3pPr>
+    <a:lvl4pPr marL="1371600" algn="l" defTabSz="457200" rtl="0" eaLnBrk="1" latinLnBrk="0" hangingPunct="1">
+      <a:defRPr sz="1200" kern="1200">
+        <a:solidFill>
+          <a:schemeClr val="tx1"/>
+        </a:solidFill>
+        <a:latin typeface="+mn-lt"/>
+        <a:ea typeface="+mn-ea"/>
+        <a:cs typeface="+mn-cs"/>
+      </a:defRPr>
+    </a:lvl4pPr>
+    <a:lvl5pPr marL="1828800" algn="l" defTabSz="457200" rtl="0" eaLnBrk="1" latinLnBrk="0" hangingPunct="1">
+      <a:defRPr sz="1200" kern="1200">
+        <a:solidFill>
+          <a:schemeClr val="tx1"/>
+        </a:solidFill>
+        <a:latin typeface="+mn-lt"/>
+        <a:ea typeface="+mn-ea"/>
+        <a:cs typeface="+mn-cs"/>
+      </a:defRPr>
+    </a:lvl5pPr>
+    <a:lvl6pPr marL="2286000" algn="l" defTabSz="457200" rtl="0" eaLnBrk="1" latinLnBrk="0" hangingPunct="1">
+      <a:defRPr sz="1200" kern="1200">
+        <a:solidFill>
+          <a:schemeClr val="tx1"/>
+        </a:solidFill>
+        <a:latin typeface="+mn-lt"/>
+        <a:ea typeface="+mn-ea"/>
+        <a:cs typeface="+mn-cs"/>
+      </a:defRPr>
+    </a:lvl6pPr>
+    <a:lvl7pPr marL="2743200" algn="l" defTabSz="457200" rtl="0" eaLnBrk="1" latinLnBrk="0" hangingPunct="1">
+      <a:defRPr sz="1200" kern="1200">
+        <a:solidFill>
+          <a:schemeClr val="tx1"/>
+        </a:solidFill>
+        <a:latin typeface="+mn-lt"/>
+        <a:ea typeface="+mn-ea"/>
+        <a:cs typeface="+mn-cs"/>
+      </a:defRPr>
+    </a:lvl7pPr>
+    <a:lvl8pPr marL="3200400" algn="l" defTabSz="457200" rtl="0" eaLnBrk="1" latinLnBrk="0" hangingPunct="1">
+      <a:defRPr sz="1200" kern="1200">
+        <a:solidFill>
+          <a:schemeClr val="tx1"/>
+        </a:solidFill>
+        <a:latin typeface="+mn-lt"/>
+        <a:ea typeface="+mn-ea"/>
+        <a:cs typeface="+mn-cs"/>
+      </a:defRPr>
+    </a:lvl8pPr>
+    <a:lvl9pPr marL="3657600" algn="l" defTabSz="457200" rtl="0" eaLnBrk="1" latinLnBrk="0" hangingPunct="1">
+      <a:defRPr sz="1200" kern="1200">
+        <a:solidFill>
+          <a:schemeClr val="tx1"/>
+        </a:solidFill>
+        <a:latin typeface="+mn-lt"/>
+        <a:ea typeface="+mn-ea"/>
+        <a:cs typeface="+mn-cs"/>
+      </a:defRPr>
+    </a:lvl9pPr>
+  </p:notesStyle>
+</p:notesMaster>
+</file>
+
+<file path=ppt/notesSlides/notesSlide1.xml><?xml version="1.0" encoding="utf-8"?>
+<p:notes xmlns:a="http://schemas.openxmlformats.org/drawingml/2006/main" xmlns:p="http://schemas.openxmlformats.org/presentationml/2006/main" xmlns:r="http://schemas.openxmlformats.org/officeDocument/2006/relationships">
+  <p:cSld>
+    <p:spTree>
+      <p:nvGrpSpPr>
+        <p:cNvPr id="1" name=""/>
+        <p:cNvGrpSpPr/>
+        <p:nvPr/>
+      </p:nvGrpSpPr>
+      <p:grpSpPr>
+        <a:xfrm>
+          <a:off x="0" y="0"/>
+          <a:ext cx="0" cy="0"/>
+          <a:chOff x="0" y="0"/>
+          <a:chExt cx="0" cy="0"/>
+        </a:xfrm>
+      </p:grpSpPr>
+      <p:sp>
+        <p:nvSpPr>
+          <p:cNvPr id="2" name="Slide Image Placeholder 1"/>
+          <p:cNvSpPr>
+            <a:spLocks noGrp="1"/>
+          </p:cNvSpPr>
+          <p:nvPr>
+            <p:ph type="sldImg" idx="2"/>
+          </p:nvPr>
+        </p:nvSpPr>
+        <p:spPr/>
+      </p:sp>
+      <p:sp>
+        <p:nvSpPr>
+          <p:cNvPr id="3" name="Notes Placeholder 2"/>
+          <p:cNvSpPr>
+            <a:spLocks noGrp="1"/>
+          </p:cNvSpPr>
+          <p:nvPr>
+            <p:ph type="body" idx="3" sz="quarter"/>
+          </p:nvPr>
+        </p:nvSpPr>
+        <p:spPr/>
+        <p:txBody>
+          <a:bodyPr/>
+          <a:lstStyle/>
+          <a:p>
+            <a:r>
+              <a:t>En lugar de enviar cuatro sentencias y esperar cuatro respuestas por la red, la aplicacion envia una y recibe un resultado.</a:t>
+            </a:r>
+          </a:p>
+          <a:p>
+            <a:r>
+              <a:t>Conviene senalar de entrada una diferencia con Oracle que importa hoy, porque cambia como se depura.</a:t>
+            </a:r>
+          </a:p>
+          <a:p>
+            <a:r>
+              <a:t>En Oracle el procedimiento se compila al crearlo y, si algo esta mal, el objeto queda creado pero invalido.</a:t>
+            </a:r>
+          </a:p>
+          <a:p>
+            <a:r>
+              <a:t>Por eso la regla del dia es que crear el procedimiento no es evidencia de nada; la evidencia es el CALL corriendo.</a:t>
+            </a:r>
+          </a:p>
+        </p:txBody>
+      </p:sp>
+      <p:sp>
+        <p:nvSpPr>
+          <p:cNvPr id="4" name="Slide Number Placeholder 3"/>
+          <p:cNvSpPr>
+            <a:spLocks noGrp="1"/>
+          </p:cNvSpPr>
+          <p:nvPr>
+            <p:ph type="sldNum" idx="5" sz="quarter"/>
+          </p:nvPr>
+        </p:nvSpPr>
+        <p:spPr/>
+      </p:sp>
+    </p:spTree>
+  </p:cSld>
+  <p:clrMapOvr>
+    <a:masterClrMapping/>
+  </p:clrMapOvr>
+</p:notes>
+</file>
+
+<file path=ppt/notesSlides/notesSlide10.xml><?xml version="1.0" encoding="utf-8"?>
+<p:notes xmlns:a="http://schemas.openxmlformats.org/drawingml/2006/main" xmlns:p="http://schemas.openxmlformats.org/presentationml/2006/main" xmlns:r="http://schemas.openxmlformats.org/officeDocument/2006/relationships">
+  <p:cSld>
+    <p:spTree>
+      <p:nvGrpSpPr>
+        <p:cNvPr id="1" name=""/>
+        <p:cNvGrpSpPr/>
+        <p:nvPr/>
+      </p:nvGrpSpPr>
+      <p:grpSpPr>
+        <a:xfrm>
+          <a:off x="0" y="0"/>
+          <a:ext cx="0" cy="0"/>
+          <a:chOff x="0" y="0"/>
+          <a:chExt cx="0" cy="0"/>
+        </a:xfrm>
+      </p:grpSpPr>
+      <p:sp>
+        <p:nvSpPr>
+          <p:cNvPr id="2" name="Slide Image Placeholder 1"/>
+          <p:cNvSpPr>
+            <a:spLocks noGrp="1"/>
+          </p:cNvSpPr>
+          <p:nvPr>
+            <p:ph type="sldImg" idx="2"/>
+          </p:nvPr>
+        </p:nvSpPr>
+        <p:spPr/>
+      </p:sp>
+      <p:sp>
+        <p:nvSpPr>
+          <p:cNvPr id="3" name="Notes Placeholder 2"/>
+          <p:cNvSpPr>
+            <a:spLocks noGrp="1"/>
+          </p:cNvSpPr>
+          <p:nvPr>
+            <p:ph type="body" idx="3" sz="quarter"/>
+          </p:nvPr>
+        </p:nvSpPr>
+        <p:spPr/>
+        <p:txBody>
+          <a:bodyPr/>
+          <a:lstStyle/>
+          <a:p>
+            <a:r>
+              <a:t>Conviene cerrar la teoria con esta distincion, y decirla HOY, porque el estudiante la va a necesitar en el taller de hoy y no la semana entrante.</a:t>
+            </a:r>
+          </a:p>
+        </p:txBody>
+      </p:sp>
+      <p:sp>
+        <p:nvSpPr>
+          <p:cNvPr id="4" name="Slide Number Placeholder 3"/>
+          <p:cNvSpPr>
+            <a:spLocks noGrp="1"/>
+          </p:cNvSpPr>
+          <p:nvPr>
+            <p:ph type="sldNum" idx="5" sz="quarter"/>
+          </p:nvPr>
+        </p:nvSpPr>
+        <p:spPr/>
+      </p:sp>
+    </p:spTree>
+  </p:cSld>
+  <p:clrMapOvr>
+    <a:masterClrMapping/>
+  </p:clrMapOvr>
+</p:notes>
+</file>
+
+<file path=ppt/notesSlides/notesSlide11.xml><?xml version="1.0" encoding="utf-8"?>
+<p:notes xmlns:a="http://schemas.openxmlformats.org/drawingml/2006/main" xmlns:p="http://schemas.openxmlformats.org/presentationml/2006/main" xmlns:r="http://schemas.openxmlformats.org/officeDocument/2006/relationships">
+  <p:cSld>
+    <p:spTree>
+      <p:nvGrpSpPr>
+        <p:cNvPr id="1" name=""/>
+        <p:cNvGrpSpPr/>
+        <p:nvPr/>
+      </p:nvGrpSpPr>
+      <p:grpSpPr>
+        <a:xfrm>
+          <a:off x="0" y="0"/>
+          <a:ext cx="0" cy="0"/>
+          <a:chOff x="0" y="0"/>
+          <a:chExt cx="0" cy="0"/>
+        </a:xfrm>
+      </p:grpSpPr>
+      <p:sp>
+        <p:nvSpPr>
+          <p:cNvPr id="2" name="Slide Image Placeholder 1"/>
+          <p:cNvSpPr>
+            <a:spLocks noGrp="1"/>
+          </p:cNvSpPr>
+          <p:nvPr>
+            <p:ph type="sldImg" idx="2"/>
+          </p:nvPr>
+        </p:nvSpPr>
+        <p:spPr/>
+      </p:sp>
+      <p:sp>
+        <p:nvSpPr>
+          <p:cNvPr id="3" name="Notes Placeholder 2"/>
+          <p:cNvSpPr>
+            <a:spLocks noGrp="1"/>
+          </p:cNvSpPr>
+          <p:nvPr>
+            <p:ph type="body" idx="3" sz="quarter"/>
+          </p:nvPr>
+        </p:nvSpPr>
+        <p:spPr/>
+        <p:txBody>
+          <a:bodyPr/>
+          <a:lstStyle/>
+          <a:p>
+            <a:r>
+              <a:t>Conviene mencionar que RAISE tiene niveles —NOTICE, WARNING, EXCEPTION— y que solo el ultimo aborta.</a:t>
+            </a:r>
+          </a:p>
+        </p:txBody>
+      </p:sp>
+      <p:sp>
+        <p:nvSpPr>
+          <p:cNvPr id="4" name="Slide Number Placeholder 3"/>
+          <p:cNvSpPr>
+            <a:spLocks noGrp="1"/>
+          </p:cNvSpPr>
+          <p:nvPr>
+            <p:ph type="sldNum" idx="5" sz="quarter"/>
+          </p:nvPr>
+        </p:nvSpPr>
+        <p:spPr/>
+      </p:sp>
+    </p:spTree>
+  </p:cSld>
+  <p:clrMapOvr>
+    <a:masterClrMapping/>
+  </p:clrMapOvr>
+</p:notes>
+</file>
+
+<file path=ppt/notesSlides/notesSlide12.xml><?xml version="1.0" encoding="utf-8"?>
+<p:notes xmlns:a="http://schemas.openxmlformats.org/drawingml/2006/main" xmlns:p="http://schemas.openxmlformats.org/presentationml/2006/main" xmlns:r="http://schemas.openxmlformats.org/officeDocument/2006/relationships">
+  <p:cSld>
+    <p:spTree>
+      <p:nvGrpSpPr>
+        <p:cNvPr id="1" name=""/>
+        <p:cNvGrpSpPr/>
+        <p:nvPr/>
+      </p:nvGrpSpPr>
+      <p:grpSpPr>
+        <a:xfrm>
+          <a:off x="0" y="0"/>
+          <a:ext cx="0" cy="0"/>
+          <a:chOff x="0" y="0"/>
+          <a:chExt cx="0" cy="0"/>
+        </a:xfrm>
+      </p:grpSpPr>
+      <p:sp>
+        <p:nvSpPr>
+          <p:cNvPr id="2" name="Slide Image Placeholder 1"/>
+          <p:cNvSpPr>
+            <a:spLocks noGrp="1"/>
+          </p:cNvSpPr>
+          <p:nvPr>
+            <p:ph type="sldImg" idx="2"/>
+          </p:nvPr>
+        </p:nvSpPr>
+        <p:spPr/>
+      </p:sp>
+      <p:sp>
+        <p:nvSpPr>
+          <p:cNvPr id="3" name="Notes Placeholder 2"/>
+          <p:cNvSpPr>
+            <a:spLocks noGrp="1"/>
+          </p:cNvSpPr>
+          <p:nvPr>
+            <p:ph type="body" idx="3" sz="quarter"/>
+          </p:nvPr>
+        </p:nvSpPr>
+        <p:spPr/>
+        <p:txBody>
+          <a:bodyPr/>
+          <a:lstStyle/>
+          <a:p>
+            <a:r>
+              <a:t>Ahi funcionan CREATE PROCEDURE, el dollar-quoting, RAISE EXCEPTION, los bloques DO, SQLERRM y SQLSTATE, y la tabla resultado_prueba: la evidencia del taller es la salida del motor y no una promesa.</a:t>
+            </a:r>
+          </a:p>
+        </p:txBody>
+      </p:sp>
+      <p:sp>
+        <p:nvSpPr>
+          <p:cNvPr id="4" name="Slide Number Placeholder 3"/>
+          <p:cNvSpPr>
+            <a:spLocks noGrp="1"/>
+          </p:cNvSpPr>
+          <p:nvPr>
+            <p:ph type="sldNum" idx="5" sz="quarter"/>
+          </p:nvPr>
+        </p:nvSpPr>
+        <p:spPr/>
+      </p:sp>
+    </p:spTree>
+  </p:cSld>
+  <p:clrMapOvr>
+    <a:masterClrMapping/>
+  </p:clrMapOvr>
+</p:notes>
+</file>
+
+<file path=ppt/notesSlides/notesSlide13.xml><?xml version="1.0" encoding="utf-8"?>
+<p:notes xmlns:a="http://schemas.openxmlformats.org/drawingml/2006/main" xmlns:p="http://schemas.openxmlformats.org/presentationml/2006/main" xmlns:r="http://schemas.openxmlformats.org/officeDocument/2006/relationships">
+  <p:cSld>
+    <p:spTree>
+      <p:nvGrpSpPr>
+        <p:cNvPr id="1" name=""/>
+        <p:cNvGrpSpPr/>
+        <p:nvPr/>
+      </p:nvGrpSpPr>
+      <p:grpSpPr>
+        <a:xfrm>
+          <a:off x="0" y="0"/>
+          <a:ext cx="0" cy="0"/>
+          <a:chOff x="0" y="0"/>
+          <a:chExt cx="0" cy="0"/>
+        </a:xfrm>
+      </p:grpSpPr>
+      <p:sp>
+        <p:nvSpPr>
+          <p:cNvPr id="2" name="Slide Image Placeholder 1"/>
+          <p:cNvSpPr>
+            <a:spLocks noGrp="1"/>
+          </p:cNvSpPr>
+          <p:nvPr>
+            <p:ph type="sldImg" idx="2"/>
+          </p:nvPr>
+        </p:nvSpPr>
+        <p:spPr/>
+      </p:sp>
+      <p:sp>
+        <p:nvSpPr>
+          <p:cNvPr id="3" name="Notes Placeholder 2"/>
+          <p:cNvSpPr>
+            <a:spLocks noGrp="1"/>
+          </p:cNvSpPr>
+          <p:nvPr>
+            <p:ph type="body" idx="3" sz="quarter"/>
+          </p:nvPr>
+        </p:nvSpPr>
+        <p:spPr/>
+        <p:txBody>
+          <a:bodyPr/>
+          <a:lstStyle/>
+          <a:p>
+            <a:r>
+              <a:t>Eso significa que registrar dos veces la consulta de la misma cita ya esta impedido por el motor: el segundo INSERT choca contra la restriccion de unicidad y falla.</a:t>
+            </a:r>
+          </a:p>
+          <a:p>
+            <a:r>
+              <a:t>La respuesta tiene dos partes y las dos valen.</a:t>
+            </a:r>
+          </a:p>
+          <a:p>
+            <a:r>
+              <a:t>Conviene decir tambien lo que NO hay que hacer: quitar la restriccion porque ya esta el procedimiento.</a:t>
+            </a:r>
+          </a:p>
+          <a:p>
+            <a:r>
+              <a:t>Esa jerarquia —declarativo primero, procedimiento encima— es exactamente lo que la Clase 4 va a formalizar.</a:t>
+            </a:r>
+          </a:p>
+        </p:txBody>
+      </p:sp>
+      <p:sp>
+        <p:nvSpPr>
+          <p:cNvPr id="4" name="Slide Number Placeholder 3"/>
+          <p:cNvSpPr>
+            <a:spLocks noGrp="1"/>
+          </p:cNvSpPr>
+          <p:nvPr>
+            <p:ph type="sldNum" idx="5" sz="quarter"/>
+          </p:nvPr>
+        </p:nvSpPr>
+        <p:spPr/>
+      </p:sp>
+    </p:spTree>
+  </p:cSld>
+  <p:clrMapOvr>
+    <a:masterClrMapping/>
+  </p:clrMapOvr>
+</p:notes>
+</file>
+
+<file path=ppt/notesSlides/notesSlide14.xml><?xml version="1.0" encoding="utf-8"?>
+<p:notes xmlns:a="http://schemas.openxmlformats.org/drawingml/2006/main" xmlns:p="http://schemas.openxmlformats.org/presentationml/2006/main" xmlns:r="http://schemas.openxmlformats.org/officeDocument/2006/relationships">
+  <p:cSld>
+    <p:spTree>
+      <p:nvGrpSpPr>
+        <p:cNvPr id="1" name=""/>
+        <p:cNvGrpSpPr/>
+        <p:nvPr/>
+      </p:nvGrpSpPr>
+      <p:grpSpPr>
+        <a:xfrm>
+          <a:off x="0" y="0"/>
+          <a:ext cx="0" cy="0"/>
+          <a:chOff x="0" y="0"/>
+          <a:chExt cx="0" cy="0"/>
+        </a:xfrm>
+      </p:grpSpPr>
+      <p:sp>
+        <p:nvSpPr>
+          <p:cNvPr id="2" name="Slide Image Placeholder 1"/>
+          <p:cNvSpPr>
+            <a:spLocks noGrp="1"/>
+          </p:cNvSpPr>
+          <p:nvPr>
+            <p:ph type="sldImg" idx="2"/>
+          </p:nvPr>
+        </p:nvSpPr>
+        <p:spPr/>
+      </p:sp>
+      <p:sp>
+        <p:nvSpPr>
+          <p:cNvPr id="3" name="Notes Placeholder 2"/>
+          <p:cNvSpPr>
+            <a:spLocks noGrp="1"/>
+          </p:cNvSpPr>
+          <p:nvPr>
+            <p:ph type="body" idx="3" sz="quarter"/>
+          </p:nvPr>
+        </p:nvSpPr>
+        <p:spPr/>
+        <p:txBody>
+          <a:bodyPr/>
+          <a:lstStyle/>
+          <a:p>
+            <a:r>
+              <a:t>Se limpia con DROP PROCEDURE nombrando los tipos.</a:t>
+            </a:r>
+          </a:p>
+        </p:txBody>
+      </p:sp>
+      <p:sp>
+        <p:nvSpPr>
+          <p:cNvPr id="4" name="Slide Number Placeholder 3"/>
+          <p:cNvSpPr>
+            <a:spLocks noGrp="1"/>
+          </p:cNvSpPr>
+          <p:nvPr>
+            <p:ph type="sldNum" idx="5" sz="quarter"/>
+          </p:nvPr>
+        </p:nvSpPr>
+        <p:spPr/>
+      </p:sp>
+    </p:spTree>
+  </p:cSld>
+  <p:clrMapOvr>
+    <a:masterClrMapping/>
+  </p:clrMapOvr>
+</p:notes>
+</file>
+
+<file path=ppt/notesSlides/notesSlide2.xml><?xml version="1.0" encoding="utf-8"?>
+<p:notes xmlns:a="http://schemas.openxmlformats.org/drawingml/2006/main" xmlns:p="http://schemas.openxmlformats.org/presentationml/2006/main" xmlns:r="http://schemas.openxmlformats.org/officeDocument/2006/relationships">
+  <p:cSld>
+    <p:spTree>
+      <p:nvGrpSpPr>
+        <p:cNvPr id="1" name=""/>
+        <p:cNvGrpSpPr/>
+        <p:nvPr/>
+      </p:nvGrpSpPr>
+      <p:grpSpPr>
+        <a:xfrm>
+          <a:off x="0" y="0"/>
+          <a:ext cx="0" cy="0"/>
+          <a:chOff x="0" y="0"/>
+          <a:chExt cx="0" cy="0"/>
+        </a:xfrm>
+      </p:grpSpPr>
+      <p:sp>
+        <p:nvSpPr>
+          <p:cNvPr id="2" name="Slide Image Placeholder 1"/>
+          <p:cNvSpPr>
+            <a:spLocks noGrp="1"/>
+          </p:cNvSpPr>
+          <p:nvPr>
+            <p:ph type="sldImg" idx="2"/>
+          </p:nvPr>
+        </p:nvSpPr>
+        <p:spPr/>
+      </p:sp>
+      <p:sp>
+        <p:nvSpPr>
+          <p:cNvPr id="3" name="Notes Placeholder 2"/>
+          <p:cNvSpPr>
+            <a:spLocks noGrp="1"/>
+          </p:cNvSpPr>
+          <p:nvPr>
+            <p:ph type="body" idx="3" sz="quarter"/>
+          </p:nvPr>
+        </p:nvSpPr>
+        <p:spPr/>
+        <p:txBody>
+          <a:bodyPr/>
+          <a:lstStyle/>
+          <a:p>
+            <a:r>
+              <a:t>END; $proc$; y cada pieza tiene su razon.</a:t>
+            </a:r>
+          </a:p>
+          <a:p>
+            <a:r>
+              <a:t>LANGUAGE plpgsql hace falta porque PostgreSQL admite varios lenguajes procedimentales y no adivina cual se esta usando.</a:t>
+            </a:r>
+          </a:p>
+          <a:p>
+            <a:r>
+              <a:t>Un estudiante que agregue p_id_cita no comete un error de sintaxis, comete un error de diseno, y la rubrica lo mira.</a:t>
+            </a:r>
+          </a:p>
+        </p:txBody>
+      </p:sp>
+      <p:sp>
+        <p:nvSpPr>
+          <p:cNvPr id="4" name="Slide Number Placeholder 3"/>
+          <p:cNvSpPr>
+            <a:spLocks noGrp="1"/>
+          </p:cNvSpPr>
+          <p:nvPr>
+            <p:ph type="sldNum" idx="5" sz="quarter"/>
+          </p:nvPr>
+        </p:nvSpPr>
+        <p:spPr/>
+      </p:sp>
+    </p:spTree>
+  </p:cSld>
+  <p:clrMapOvr>
+    <a:masterClrMapping/>
+  </p:clrMapOvr>
+</p:notes>
+</file>
+
+<file path=ppt/notesSlides/notesSlide3.xml><?xml version="1.0" encoding="utf-8"?>
+<p:notes xmlns:a="http://schemas.openxmlformats.org/drawingml/2006/main" xmlns:p="http://schemas.openxmlformats.org/presentationml/2006/main" xmlns:r="http://schemas.openxmlformats.org/officeDocument/2006/relationships">
+  <p:cSld>
+    <p:spTree>
+      <p:nvGrpSpPr>
+        <p:cNvPr id="1" name=""/>
+        <p:cNvGrpSpPr/>
+        <p:nvPr/>
+      </p:nvGrpSpPr>
+      <p:grpSpPr>
+        <a:xfrm>
+          <a:off x="0" y="0"/>
+          <a:ext cx="0" cy="0"/>
+          <a:chOff x="0" y="0"/>
+          <a:chExt cx="0" cy="0"/>
+        </a:xfrm>
+      </p:grpSpPr>
+      <p:sp>
+        <p:nvSpPr>
+          <p:cNvPr id="2" name="Slide Image Placeholder 1"/>
+          <p:cNvSpPr>
+            <a:spLocks noGrp="1"/>
+          </p:cNvSpPr>
+          <p:nvPr>
+            <p:ph type="sldImg" idx="2"/>
+          </p:nvPr>
+        </p:nvSpPr>
+        <p:spPr/>
+      </p:sp>
+      <p:sp>
+        <p:nvSpPr>
+          <p:cNvPr id="3" name="Notes Placeholder 2"/>
+          <p:cNvSpPr>
+            <a:spLocks noGrp="1"/>
+          </p:cNvSpPr>
+          <p:nvPr>
+            <p:ph type="body" idx="3" sz="quarter"/>
+          </p:nvPr>
+        </p:nvSpPr>
+        <p:spPr/>
+        <p:txBody>
+          <a:bodyPr/>
+          <a:lstStyle/>
+          <a:p>
+            <a:r>
+              <a:t>Dentro del cuerpo un parametro IN se comporta como una variable local, asi que se le puede asignar, aunque hacerlo confunde a quien lee y no cambia nada afuera.</a:t>
+            </a:r>
+          </a:p>
+          <a:p>
+            <a:r>
+              <a:t>OUT devuelve un valor a quien llama, e INOUT entra con valor y sale modificado.</a:t>
+            </a:r>
+          </a:p>
+          <a:p>
+            <a:r>
+              <a:t>La otra razon es de diseno y es la que hay que defender en clase, porque es la decision que la solucion docente califica.</a:t>
+            </a:r>
+          </a:p>
+          <a:p>
+            <a:r>
+              <a:t>Devolver el error en un parametro OUT significa que el procedimiento hizo su trabajo, dejo la fila insertada y ademas puso un texto en una variable que la aplicacion PUEDE mirar.</a:t>
+            </a:r>
+          </a:p>
+        </p:txBody>
+      </p:sp>
+      <p:sp>
+        <p:nvSpPr>
+          <p:cNvPr id="4" name="Slide Number Placeholder 3"/>
+          <p:cNvSpPr>
+            <a:spLocks noGrp="1"/>
+          </p:cNvSpPr>
+          <p:nvPr>
+            <p:ph type="sldNum" idx="5" sz="quarter"/>
+          </p:nvPr>
+        </p:nvSpPr>
+        <p:spPr/>
+      </p:sp>
+    </p:spTree>
+  </p:cSld>
+  <p:clrMapOvr>
+    <a:masterClrMapping/>
+  </p:clrMapOvr>
+</p:notes>
+</file>
+
+<file path=ppt/notesSlides/notesSlide4.xml><?xml version="1.0" encoding="utf-8"?>
+<p:notes xmlns:a="http://schemas.openxmlformats.org/drawingml/2006/main" xmlns:p="http://schemas.openxmlformats.org/presentationml/2006/main" xmlns:r="http://schemas.openxmlformats.org/officeDocument/2006/relationships">
+  <p:cSld>
+    <p:spTree>
+      <p:nvGrpSpPr>
+        <p:cNvPr id="1" name=""/>
+        <p:cNvGrpSpPr/>
+        <p:nvPr/>
+      </p:nvGrpSpPr>
+      <p:grpSpPr>
+        <a:xfrm>
+          <a:off x="0" y="0"/>
+          <a:ext cx="0" cy="0"/>
+          <a:chOff x="0" y="0"/>
+          <a:chExt cx="0" cy="0"/>
+        </a:xfrm>
+      </p:grpSpPr>
+      <p:sp>
+        <p:nvSpPr>
+          <p:cNvPr id="2" name="Slide Image Placeholder 1"/>
+          <p:cNvSpPr>
+            <a:spLocks noGrp="1"/>
+          </p:cNvSpPr>
+          <p:nvPr>
+            <p:ph type="sldImg" idx="2"/>
+          </p:nvPr>
+        </p:nvSpPr>
+        <p:spPr/>
+      </p:sp>
+      <p:sp>
+        <p:nvSpPr>
+          <p:cNvPr id="3" name="Notes Placeholder 2"/>
+          <p:cNvSpPr>
+            <a:spLocks noGrp="1"/>
+          </p:cNvSpPr>
+          <p:nvPr>
+            <p:ph type="body" idx="3" sz="quarter"/>
+          </p:nvPr>
+        </p:nvSpPr>
+        <p:spPr/>
+        <p:txBody>
+          <a:bodyPr/>
+          <a:lstStyle/>
+          <a:p>
+            <a:r>
+              <a:t>No sale del procedimiento con un aviso, lanza un error que propaga hasta quien llamo, y todo lo que el procedimiento hubiera escrito antes se deshace.</a:t>
+            </a:r>
+          </a:p>
+          <a:p>
+            <a:r>
+              <a:t>Eso ultimo se menciona y no se desarrolla: hoy basta con el texto.</a:t>
+            </a:r>
+          </a:p>
+          <a:p>
+            <a:r>
+              <a:t>Quien espere la excepcion de Oracle escribe un procedimiento que, ante una mascota inexistente, compara nulo contra 'S', obtiene nulo, entra por el ELSE y termina insertando la cita.</a:t>
+            </a:r>
+          </a:p>
+          <a:p>
+            <a:r>
+              <a:t>Si el SELECT devuelve varias filas, en cambio, PL/pgSQL se queda con la primera sin avisar, salvo que se escriba STRICT, que entonces si lanza excepcion en los dos casos.</a:t>
+            </a:r>
+          </a:p>
+        </p:txBody>
+      </p:sp>
+      <p:sp>
+        <p:nvSpPr>
+          <p:cNvPr id="4" name="Slide Number Placeholder 3"/>
+          <p:cNvSpPr>
+            <a:spLocks noGrp="1"/>
+          </p:cNvSpPr>
+          <p:nvPr>
+            <p:ph type="sldNum" idx="5" sz="quarter"/>
+          </p:nvPr>
+        </p:nvSpPr>
+        <p:spPr/>
+      </p:sp>
+    </p:spTree>
+  </p:cSld>
+  <p:clrMapOvr>
+    <a:masterClrMapping/>
+  </p:clrMapOvr>
+</p:notes>
+</file>
+
+<file path=ppt/notesSlides/notesSlide5.xml><?xml version="1.0" encoding="utf-8"?>
+<p:notes xmlns:a="http://schemas.openxmlformats.org/drawingml/2006/main" xmlns:p="http://schemas.openxmlformats.org/presentationml/2006/main" xmlns:r="http://schemas.openxmlformats.org/officeDocument/2006/relationships">
+  <p:cSld>
+    <p:spTree>
+      <p:nvGrpSpPr>
+        <p:cNvPr id="1" name=""/>
+        <p:cNvGrpSpPr/>
+        <p:nvPr/>
+      </p:nvGrpSpPr>
+      <p:grpSpPr>
+        <a:xfrm>
+          <a:off x="0" y="0"/>
+          <a:ext cx="0" cy="0"/>
+          <a:chOff x="0" y="0"/>
+          <a:chExt cx="0" cy="0"/>
+        </a:xfrm>
+      </p:grpSpPr>
+      <p:sp>
+        <p:nvSpPr>
+          <p:cNvPr id="2" name="Slide Image Placeholder 1"/>
+          <p:cNvSpPr>
+            <a:spLocks noGrp="1"/>
+          </p:cNvSpPr>
+          <p:nvPr>
+            <p:ph type="sldImg" idx="2"/>
+          </p:nvPr>
+        </p:nvSpPr>
+        <p:spPr/>
+      </p:sp>
+      <p:sp>
+        <p:nvSpPr>
+          <p:cNvPr id="3" name="Notes Placeholder 2"/>
+          <p:cNvSpPr>
+            <a:spLocks noGrp="1"/>
+          </p:cNvSpPr>
+          <p:nvPr>
+            <p:ph type="body" idx="3" sz="quarter"/>
+          </p:nvPr>
+        </p:nvSpPr>
+        <p:spPr/>
+        <p:txBody>
+          <a:bodyPr/>
+          <a:lstStyle/>
+          <a:p>
+            <a:r>
+              <a:t>A favor de la base de datos hay tres argumentos duros.</a:t>
+            </a:r>
+          </a:p>
+          <a:p>
+            <a:r>
+              <a:t>Segundo, se ahorran viajes de red cuando la operacion implica varias sentencias encadenadas.</a:t>
+            </a:r>
+          </a:p>
+          <a:p>
+            <a:r>
+              <a:t>Eso es minimo privilegio hecho codigo, y conviene senalar el matiz: en PostgreSQL el cuerpo se ejecuta con los privilegios de quien llama, salvo que el procedimiento se declare SECURITY DEFINER, que es lo que lo hace ejecutarse con los del propietario.</a:t>
+            </a:r>
+          </a:p>
+          <a:p>
+            <a:r>
+              <a:t>Sin esa clausula, dar EXECUTE no alcanza.</a:t>
+            </a:r>
+          </a:p>
+        </p:txBody>
+      </p:sp>
+      <p:sp>
+        <p:nvSpPr>
+          <p:cNvPr id="4" name="Slide Number Placeholder 3"/>
+          <p:cNvSpPr>
+            <a:spLocks noGrp="1"/>
+          </p:cNvSpPr>
+          <p:nvPr>
+            <p:ph type="sldNum" idx="5" sz="quarter"/>
+          </p:nvPr>
+        </p:nvSpPr>
+        <p:spPr/>
+      </p:sp>
+    </p:spTree>
+  </p:cSld>
+  <p:clrMapOvr>
+    <a:masterClrMapping/>
+  </p:clrMapOvr>
+</p:notes>
+</file>
+
+<file path=ppt/notesSlides/notesSlide6.xml><?xml version="1.0" encoding="utf-8"?>
+<p:notes xmlns:a="http://schemas.openxmlformats.org/drawingml/2006/main" xmlns:p="http://schemas.openxmlformats.org/presentationml/2006/main" xmlns:r="http://schemas.openxmlformats.org/officeDocument/2006/relationships">
+  <p:cSld>
+    <p:spTree>
+      <p:nvGrpSpPr>
+        <p:cNvPr id="1" name=""/>
+        <p:cNvGrpSpPr/>
+        <p:nvPr/>
+      </p:nvGrpSpPr>
+      <p:grpSpPr>
+        <a:xfrm>
+          <a:off x="0" y="0"/>
+          <a:ext cx="0" cy="0"/>
+          <a:chOff x="0" y="0"/>
+          <a:chExt cx="0" cy="0"/>
+        </a:xfrm>
+      </p:grpSpPr>
+      <p:sp>
+        <p:nvSpPr>
+          <p:cNvPr id="2" name="Slide Image Placeholder 1"/>
+          <p:cNvSpPr>
+            <a:spLocks noGrp="1"/>
+          </p:cNvSpPr>
+          <p:nvPr>
+            <p:ph type="sldImg" idx="2"/>
+          </p:nvPr>
+        </p:nvSpPr>
+        <p:spPr/>
+      </p:sp>
+      <p:sp>
+        <p:nvSpPr>
+          <p:cNvPr id="3" name="Notes Placeholder 2"/>
+          <p:cNvSpPr>
+            <a:spLocks noGrp="1"/>
+          </p:cNvSpPr>
+          <p:nvPr>
+            <p:ph type="body" idx="3" sz="quarter"/>
+          </p:nvPr>
+        </p:nvSpPr>
+        <p:spPr/>
+        <p:txBody>
+          <a:bodyPr/>
+          <a:lstStyle/>
+          <a:p>
+            <a:r>
+              <a:t>Ocurre cuando la aplicacion arma la consulta pegando texto que escribio el usuario, y ese texto termina interpretado por el motor como codigo y no como dato.</a:t>
+            </a:r>
+          </a:p>
+          <a:p>
+            <a:r>
+              <a:t>En VetCare seria una pantalla de busqueda que construye SELECT * FROM mascota WHERE nombre = seguido de lo que el usuario digito entre comillas.</a:t>
+            </a:r>
+          </a:p>
+          <a:p>
+            <a:r>
+              <a:t>DELETE FROM cita; -- el motor recibe dos sentencias y la segunda borra la agenda.</a:t>
+            </a:r>
+          </a:p>
+          <a:p>
+            <a:r>
+              <a:t>Si dentro del cuerpo alguien escribe EXECUTE 'SELECT...</a:t>
+            </a:r>
+          </a:p>
+          <a:p>
+            <a:r>
+              <a:t>WHERE nombre = ' || p_nombre, el agujero se reabre igual, ahora escondido un nivel mas abajo y por lo tanto mas dificil de auditar.</a:t>
+            </a:r>
+          </a:p>
+        </p:txBody>
+      </p:sp>
+      <p:sp>
+        <p:nvSpPr>
+          <p:cNvPr id="4" name="Slide Number Placeholder 3"/>
+          <p:cNvSpPr>
+            <a:spLocks noGrp="1"/>
+          </p:cNvSpPr>
+          <p:nvPr>
+            <p:ph type="sldNum" idx="5" sz="quarter"/>
+          </p:nvPr>
+        </p:nvSpPr>
+        <p:spPr/>
+      </p:sp>
+    </p:spTree>
+  </p:cSld>
+  <p:clrMapOvr>
+    <a:masterClrMapping/>
+  </p:clrMapOvr>
+</p:notes>
+</file>
+
+<file path=ppt/notesSlides/notesSlide7.xml><?xml version="1.0" encoding="utf-8"?>
+<p:notes xmlns:a="http://schemas.openxmlformats.org/drawingml/2006/main" xmlns:p="http://schemas.openxmlformats.org/presentationml/2006/main" xmlns:r="http://schemas.openxmlformats.org/officeDocument/2006/relationships">
+  <p:cSld>
+    <p:spTree>
+      <p:nvGrpSpPr>
+        <p:cNvPr id="1" name=""/>
+        <p:cNvGrpSpPr/>
+        <p:nvPr/>
+      </p:nvGrpSpPr>
+      <p:grpSpPr>
+        <a:xfrm>
+          <a:off x="0" y="0"/>
+          <a:ext cx="0" cy="0"/>
+          <a:chOff x="0" y="0"/>
+          <a:chExt cx="0" cy="0"/>
+        </a:xfrm>
+      </p:grpSpPr>
+      <p:sp>
+        <p:nvSpPr>
+          <p:cNvPr id="2" name="Slide Image Placeholder 1"/>
+          <p:cNvSpPr>
+            <a:spLocks noGrp="1"/>
+          </p:cNvSpPr>
+          <p:nvPr>
+            <p:ph type="sldImg" idx="2"/>
+          </p:nvPr>
+        </p:nvSpPr>
+        <p:spPr/>
+      </p:sp>
+      <p:sp>
+        <p:nvSpPr>
+          <p:cNvPr id="3" name="Notes Placeholder 2"/>
+          <p:cNvSpPr>
+            <a:spLocks noGrp="1"/>
+          </p:cNvSpPr>
+          <p:nvPr>
+            <p:ph type="body" idx="3" sz="quarter"/>
+          </p:nvPr>
+        </p:nvSpPr>
+        <p:spPr/>
+        <p:txBody>
+          <a:bodyPr/>
+          <a:lstStyle/>
+          <a:p>
+            <a:r>
+              <a:t>Aparecen tres casos sin probar y una captura que no demuestra nada.</a:t>
+            </a:r>
+          </a:p>
+          <a:p>
+            <a:r>
+              <a:t>EXCEPTION WHEN OTHERS THEN...</a:t>
+            </a:r>
+          </a:p>
+          <a:p>
+            <a:r>
+              <a:t>Su clausula EXCEPTION atrapa el error, lo convierte en una fila de resultado y deja que el siguiente bloque corra.</a:t>
+            </a:r>
+          </a:p>
+          <a:p>
+            <a:r>
+              <a:t>Un bloque por caso, cuatro bloques, cuatro filas.</a:t>
+            </a:r>
+          </a:p>
+          <a:p>
+            <a:r>
+              <a:t>Una bateria sin ese conteo prueba que el procedimiento se queja, no que no escribe.</a:t>
+            </a:r>
+          </a:p>
+          <a:p>
+            <a:r>
+              <a:t>Tiene dos consecuencias.</a:t>
+            </a:r>
+          </a:p>
+          <a:p>
+            <a:r>
+              <a:t>Dos, y es la que importa hoy, que el procedimiento del taller NO lleva COMMIT: si lo llevara, llamarlo desde dentro de un bloque con EXCEPTION fallaria, porque PostgreSQL no permite confirmar la transaccion mientras hay un savepoint activo.</a:t>
+            </a:r>
+          </a:p>
+        </p:txBody>
+      </p:sp>
+      <p:sp>
+        <p:nvSpPr>
+          <p:cNvPr id="4" name="Slide Number Placeholder 3"/>
+          <p:cNvSpPr>
+            <a:spLocks noGrp="1"/>
+          </p:cNvSpPr>
+          <p:nvPr>
+            <p:ph type="sldNum" idx="5" sz="quarter"/>
+          </p:nvPr>
+        </p:nvSpPr>
+        <p:spPr/>
+      </p:sp>
+    </p:spTree>
+  </p:cSld>
+  <p:clrMapOvr>
+    <a:masterClrMapping/>
+  </p:clrMapOvr>
+</p:notes>
+</file>
+
+<file path=ppt/notesSlides/notesSlide8.xml><?xml version="1.0" encoding="utf-8"?>
+<p:notes xmlns:a="http://schemas.openxmlformats.org/drawingml/2006/main" xmlns:p="http://schemas.openxmlformats.org/presentationml/2006/main" xmlns:r="http://schemas.openxmlformats.org/officeDocument/2006/relationships">
+  <p:cSld>
+    <p:spTree>
+      <p:nvGrpSpPr>
+        <p:cNvPr id="1" name=""/>
+        <p:cNvGrpSpPr/>
+        <p:nvPr/>
+      </p:nvGrpSpPr>
+      <p:grpSpPr>
+        <a:xfrm>
+          <a:off x="0" y="0"/>
+          <a:ext cx="0" cy="0"/>
+          <a:chOff x="0" y="0"/>
+          <a:chExt cx="0" cy="0"/>
+        </a:xfrm>
+      </p:grpSpPr>
+      <p:sp>
+        <p:nvSpPr>
+          <p:cNvPr id="2" name="Slide Image Placeholder 1"/>
+          <p:cNvSpPr>
+            <a:spLocks noGrp="1"/>
+          </p:cNvSpPr>
+          <p:nvPr>
+            <p:ph type="sldImg" idx="2"/>
+          </p:nvPr>
+        </p:nvSpPr>
+        <p:spPr/>
+      </p:sp>
+      <p:sp>
+        <p:nvSpPr>
+          <p:cNvPr id="3" name="Notes Placeholder 2"/>
+          <p:cNvSpPr>
+            <a:spLocks noGrp="1"/>
+          </p:cNvSpPr>
+          <p:nvPr>
+            <p:ph type="body" idx="3" sz="quarter"/>
+          </p:nvPr>
+        </p:nvSpPr>
+        <p:spPr/>
+        <p:txBody>
+          <a:bodyPr/>
+          <a:lstStyle/>
+          <a:p>
+            <a:r>
+              <a:t>Aqui esta el matiz que separa una bateria que prueba algo de una que se prueba a si misma, y conviene dictarlo despacio porque la solucion docente lo califica.</a:t>
+            </a:r>
+          </a:p>
+          <a:p>
+            <a:r>
+              <a:t>Lo que hay que verificar es el TEXTO de la excepcion, y para eso PL/pgSQL expone la variable SQLERRM con el mensaje y SQLSTATE con el codigo.</a:t>
+            </a:r>
+          </a:p>
+          <a:p>
+            <a:r>
+              <a:t>Si paso significa la operacion se completo, los tres casos negativos quedan en falso incluso con el procedimiento perfecto.</a:t>
+            </a:r>
+          </a:p>
+          <a:p>
+            <a:r>
+              <a:t>Conviene decir en voz alta la consecuencia, porque es la que evita reclamos: no se descuenta por elegir una u otra, se descuenta por las cuatro filas en verdadero sin haber verificado el texto.</a:t>
+            </a:r>
+          </a:p>
+        </p:txBody>
+      </p:sp>
+      <p:sp>
+        <p:nvSpPr>
+          <p:cNvPr id="4" name="Slide Number Placeholder 3"/>
+          <p:cNvSpPr>
+            <a:spLocks noGrp="1"/>
+          </p:cNvSpPr>
+          <p:nvPr>
+            <p:ph type="sldNum" idx="5" sz="quarter"/>
+          </p:nvPr>
+        </p:nvSpPr>
+        <p:spPr/>
+      </p:sp>
+    </p:spTree>
+  </p:cSld>
+  <p:clrMapOvr>
+    <a:masterClrMapping/>
+  </p:clrMapOvr>
+</p:notes>
+</file>
+
+<file path=ppt/notesSlides/notesSlide9.xml><?xml version="1.0" encoding="utf-8"?>
+<p:notes xmlns:a="http://schemas.openxmlformats.org/drawingml/2006/main" xmlns:p="http://schemas.openxmlformats.org/presentationml/2006/main" xmlns:r="http://schemas.openxmlformats.org/officeDocument/2006/relationships">
+  <p:cSld>
+    <p:spTree>
+      <p:nvGrpSpPr>
+        <p:cNvPr id="1" name=""/>
+        <p:cNvGrpSpPr/>
+        <p:nvPr/>
+      </p:nvGrpSpPr>
+      <p:grpSpPr>
+        <a:xfrm>
+          <a:off x="0" y="0"/>
+          <a:ext cx="0" cy="0"/>
+          <a:chOff x="0" y="0"/>
+          <a:chExt cx="0" cy="0"/>
+        </a:xfrm>
+      </p:grpSpPr>
+      <p:sp>
+        <p:nvSpPr>
+          <p:cNvPr id="2" name="Slide Image Placeholder 1"/>
+          <p:cNvSpPr>
+            <a:spLocks noGrp="1"/>
+          </p:cNvSpPr>
+          <p:nvPr>
+            <p:ph type="sldImg" idx="2"/>
+          </p:nvPr>
+        </p:nvSpPr>
+        <p:spPr/>
+      </p:sp>
+      <p:sp>
+        <p:nvSpPr>
+          <p:cNvPr id="3" name="Notes Placeholder 2"/>
+          <p:cNvSpPr>
+            <a:spLocks noGrp="1"/>
+          </p:cNvSpPr>
+          <p:nvPr>
+            <p:ph type="body" idx="3" sz="quarter"/>
+          </p:nvPr>
+        </p:nvSpPr>
+        <p:spPr/>
+        <p:txBody>
+          <a:bodyPr/>
+          <a:lstStyle/>
+          <a:p>
+            <a:r>
+              <a:t>Un contrato sirve si permite escribir la llamada y manejar los errores sin leer el cuerpo.</a:t>
+            </a:r>
+          </a:p>
+          <a:p>
+            <a:r>
+              <a:t>Sin ella, quien llama no sabe si tiene que limpiar algo.</a:t>
+            </a:r>
+          </a:p>
+        </p:txBody>
+      </p:sp>
+      <p:sp>
+        <p:nvSpPr>
+          <p:cNvPr id="4" name="Slide Number Placeholder 3"/>
+          <p:cNvSpPr>
+            <a:spLocks noGrp="1"/>
+          </p:cNvSpPr>
+          <p:nvPr>
+            <p:ph type="sldNum" idx="5" sz="quarter"/>
+          </p:nvPr>
+        </p:nvSpPr>
+        <p:spPr/>
+      </p:sp>
+    </p:spTree>
+  </p:cSld>
+  <p:clrMapOvr>
+    <a:masterClrMapping/>
+  </p:clrMapOvr>
+</p:notes>
 </file>
 
 <file path=ppt/slideLayouts/slideLayout1.xml><?xml version="1.0" encoding="utf-8"?>
@@ -6666,7 +8143,7 @@
                 </a:solidFill>
                 <a:latin typeface="Calibri"/>
               </a:rPr>
-              <a:t>Encuadre de hoy · Objetivo PI</a:t>
+              <a:t>Encuadre de hoy · Tema y objetivo</a:t>
             </a:r>
           </a:p>
         </p:txBody>
@@ -6714,7 +8191,7 @@
                 </a:solidFill>
                 <a:latin typeface="Calibri"/>
               </a:rPr>
-              <a:t>Hoy avanzamos el PI en:</a:t>
+              <a:t>Tema de hoy:</a:t>
             </a:r>
             <a:r>
               <a:rPr sz="2000" b="0" i="0">
@@ -6723,7 +8200,7 @@
                 </a:solidFill>
                 <a:latin typeface="Calibri"/>
               </a:rPr>
-              <a:t> &gt;=1 procedimiento de negocio (agendar cita / registrar consulta)</a:t>
+              <a:t> Procedimientos almacenados · VetCare</a:t>
             </a:r>
           </a:p>
           <a:p>
@@ -6768,6 +8245,13 @@
               </a:rPr>
               <a:t>120 min</a:t>
             </a:r>
+          </a:p>
+          <a:p>
+            <a:pPr>
+              <a:spcAft>
+                <a:spcPts val="800"/>
+              </a:spcAft>
+            </a:pPr>
             <a:r>
               <a:rPr sz="2000" b="0" i="0">
                 <a:solidFill>
@@ -6775,7 +8259,7 @@
                 </a:solidFill>
                 <a:latin typeface="Calibri"/>
               </a:rPr>
-              <a:t> · Teoría breve · Taller PI</a:t>
+              <a:t>–   Gratis + navegador · free tier · sin software de pago obligatorio.</a:t>
             </a:r>
           </a:p>
           <a:p>
@@ -6791,17 +8275,15 @@
                 </a:solidFill>
                 <a:latin typeface="Calibri"/>
               </a:rPr>
-              <a:t>–   </a:t>
-            </a:r>
-            <a:r>
-              <a:rPr sz="2000" b="1" i="0">
-                <a:solidFill>
-                  <a:srgbClr val="333333"/>
-                </a:solidFill>
-                <a:latin typeface="Calibri"/>
-              </a:rPr>
-              <a:t>Entregable de hoy:</a:t>
-            </a:r>
+              <a:t>–   Recorrido: teoría del tema, una lámina por concepto, y demo del docente sobre VetCare DB.</a:t>
+            </a:r>
+          </a:p>
+          <a:p>
+            <a:pPr>
+              <a:spcAft>
+                <a:spcPts val="800"/>
+              </a:spcAft>
+            </a:pPr>
             <a:r>
               <a:rPr sz="2000" b="0" i="0">
                 <a:solidFill>
@@ -6809,55 +8291,7 @@
                 </a:solidFill>
                 <a:latin typeface="Calibri"/>
               </a:rPr>
-              <a:t> 2 procedimientos en PL/pgSQL corriendo en la plataforma del curso + bateria de pruebas con su tabla resultado_prueba + contrato del proc (6 bloques)</a:t>
-            </a:r>
-          </a:p>
-          <a:p>
-            <a:pPr>
-              <a:spcAft>
-                <a:spcPts val="800"/>
-              </a:spcAft>
-            </a:pPr>
-            <a:r>
-              <a:rPr sz="2000" b="0" i="0">
-                <a:solidFill>
-                  <a:srgbClr val="333333"/>
-                </a:solidFill>
-                <a:latin typeface="Calibri"/>
-              </a:rPr>
-              <a:t>–   Gratis + navegador · free tier · sin software de pago obligatorio.</a:t>
-            </a:r>
-          </a:p>
-          <a:p>
-            <a:pPr>
-              <a:spcAft>
-                <a:spcPts val="800"/>
-              </a:spcAft>
-            </a:pPr>
-            <a:r>
-              <a:rPr sz="2000" b="0" i="0">
-                <a:solidFill>
-                  <a:srgbClr val="333333"/>
-                </a:solidFill>
-                <a:latin typeface="Calibri"/>
-              </a:rPr>
-              <a:t>–   La teoría no es un tema aislado: alimenta evidencias de la rúbrica del PI.</a:t>
-            </a:r>
-          </a:p>
-          <a:p>
-            <a:pPr>
-              <a:spcAft>
-                <a:spcPts val="800"/>
-              </a:spcAft>
-            </a:pPr>
-            <a:r>
-              <a:rPr sz="2000" b="0" i="0">
-                <a:solidFill>
-                  <a:srgbClr val="333333"/>
-                </a:solidFill>
-                <a:latin typeface="Calibri"/>
-              </a:rPr>
-              <a:t>–   Al salir: avance concreto en su paquete VetCare.</a:t>
+              <a:t>–   Cada lámina se sostiene sola: sirve para repasar aunque hayas faltado.</a:t>
             </a:r>
           </a:p>
         </p:txBody>
@@ -10221,7 +11655,7 @@
                 </a:solidFill>
                 <a:latin typeface="Calibri"/>
               </a:rPr>
-              <a:t>Taller guiado = tarea del PI</a:t>
+              <a:t>Práctica (opcional, guía en la carpeta)</a:t>
             </a:r>
           </a:p>
         </p:txBody>
@@ -10336,7 +11770,7 @@
                 </a:solidFill>
                 <a:latin typeface="Calibri"/>
               </a:rPr>
-              <a:t>Criterios de exito · cierre · dudas del PI</a:t>
+              <a:t>Cierre conceptual · dudas</a:t>
             </a:r>
           </a:p>
         </p:txBody>
@@ -19632,13 +21066,13 @@
         <p:spPr>
           <a:xfrm>
             <a:off x="0" y="0"/>
-            <a:ext cx="12191695" cy="1170432"/>
+            <a:ext cx="12191695" cy="164592"/>
           </a:xfrm>
           <a:prstGeom prst="rect">
             <a:avLst/>
           </a:prstGeom>
           <a:solidFill>
-            <a:srgbClr val="095292"/>
+            <a:srgbClr val="269CCB"/>
           </a:solidFill>
           <a:ln>
             <a:noFill/>
@@ -19666,251 +21100,9 @@
           </a:p>
         </p:txBody>
       </p:sp>
-      <p:sp>
-        <p:nvSpPr>
-          <p:cNvPr id="3" name="Rectangle 2"/>
-          <p:cNvSpPr/>
-          <p:nvPr/>
-        </p:nvSpPr>
-        <p:spPr>
-          <a:xfrm>
-            <a:off x="0" y="1170432"/>
-            <a:ext cx="12191695" cy="41148"/>
-          </a:xfrm>
-          <a:prstGeom prst="rect">
-            <a:avLst/>
-          </a:prstGeom>
-          <a:solidFill>
-            <a:srgbClr val="FFD000"/>
-          </a:solidFill>
-          <a:ln>
-            <a:noFill/>
-          </a:ln>
-        </p:spPr>
-        <p:style>
-          <a:lnRef idx="1">
-            <a:schemeClr val="accent1"/>
-          </a:lnRef>
-          <a:fillRef idx="3">
-            <a:schemeClr val="accent1"/>
-          </a:fillRef>
-          <a:effectRef idx="2">
-            <a:schemeClr val="accent1"/>
-          </a:effectRef>
-          <a:fontRef idx="minor">
-            <a:schemeClr val="lt1"/>
-          </a:fontRef>
-        </p:style>
-        <p:txBody>
-          <a:bodyPr rtlCol="0" anchor="ctr"/>
-          <a:lstStyle/>
-          <a:p>
-            <a:pPr algn="ctr"/>
-          </a:p>
-        </p:txBody>
-      </p:sp>
-      <p:sp>
-        <p:nvSpPr>
-          <p:cNvPr id="4" name="TextBox 3"/>
-          <p:cNvSpPr txBox="1"/>
-          <p:nvPr/>
-        </p:nvSpPr>
-        <p:spPr>
-          <a:xfrm>
-            <a:off x="457200" y="164592"/>
-            <a:ext cx="11277295" cy="384048"/>
-          </a:xfrm>
-          <a:prstGeom prst="rect">
-            <a:avLst/>
-          </a:prstGeom>
-          <a:noFill/>
-        </p:spPr>
-        <p:txBody>
-          <a:bodyPr wrap="square">
-            <a:spAutoFit/>
-          </a:bodyPr>
-          <a:lstStyle/>
-          <a:p>
-            <a:r>
-              <a:rPr sz="2600" b="1" i="0">
-                <a:solidFill>
-                  <a:srgbClr val="FFFFFF"/>
-                </a:solidFill>
-                <a:latin typeface="Calibri"/>
-              </a:rPr>
-              <a:t>Herramientas de hoy</a:t>
-            </a:r>
-          </a:p>
-        </p:txBody>
-      </p:sp>
-      <p:sp>
-        <p:nvSpPr>
-          <p:cNvPr id="5" name="TextBox 4"/>
-          <p:cNvSpPr txBox="1"/>
-          <p:nvPr/>
-        </p:nvSpPr>
-        <p:spPr>
-          <a:xfrm>
-            <a:off x="457200" y="566928"/>
-            <a:ext cx="11277295" cy="411480"/>
-          </a:xfrm>
-          <a:prstGeom prst="rect">
-            <a:avLst/>
-          </a:prstGeom>
-          <a:noFill/>
-        </p:spPr>
-        <p:txBody>
-          <a:bodyPr wrap="square">
-            <a:spAutoFit/>
-          </a:bodyPr>
-          <a:lstStyle/>
-          <a:p>
-            <a:r>
-              <a:rPr sz="1400" b="0" i="0">
-                <a:solidFill>
-                  <a:srgbClr val="B8D8EE"/>
-                </a:solidFill>
-                <a:latin typeface="Calibri"/>
-              </a:rPr>
-              <a:t>Gratis · navegador o free tier</a:t>
-            </a:r>
-          </a:p>
-        </p:txBody>
-      </p:sp>
-      <p:sp>
-        <p:nvSpPr>
-          <p:cNvPr id="6" name="Rounded Rectangle 5"/>
-          <p:cNvSpPr/>
-          <p:nvPr/>
-        </p:nvSpPr>
-        <p:spPr>
-          <a:xfrm>
-            <a:off x="457200" y="1591056"/>
-            <a:ext cx="3624986" cy="2299716"/>
-          </a:xfrm>
-          <a:prstGeom prst="roundRect">
-            <a:avLst>
-              <a:gd name="adj" fmla="val 12000"/>
-            </a:avLst>
-          </a:prstGeom>
-          <a:solidFill>
-            <a:srgbClr val="F2F2F2"/>
-          </a:solidFill>
-          <a:ln>
-            <a:noFill/>
-          </a:ln>
-        </p:spPr>
-        <p:style>
-          <a:lnRef idx="1">
-            <a:schemeClr val="accent1"/>
-          </a:lnRef>
-          <a:fillRef idx="3">
-            <a:schemeClr val="accent1"/>
-          </a:fillRef>
-          <a:effectRef idx="2">
-            <a:schemeClr val="accent1"/>
-          </a:effectRef>
-          <a:fontRef idx="minor">
-            <a:schemeClr val="lt1"/>
-          </a:fontRef>
-        </p:style>
-        <p:txBody>
-          <a:bodyPr rtlCol="0" anchor="ctr"/>
-          <a:lstStyle/>
-          <a:p>
-            <a:pPr algn="ctr"/>
-          </a:p>
-        </p:txBody>
-      </p:sp>
-      <p:sp>
-        <p:nvSpPr>
-          <p:cNvPr id="7" name="Rectangle 6"/>
-          <p:cNvSpPr/>
-          <p:nvPr/>
-        </p:nvSpPr>
-        <p:spPr>
-          <a:xfrm>
-            <a:off x="457200" y="1591056"/>
-            <a:ext cx="3624986" cy="64008"/>
-          </a:xfrm>
-          <a:prstGeom prst="rect">
-            <a:avLst/>
-          </a:prstGeom>
-          <a:solidFill>
-            <a:srgbClr val="095292"/>
-          </a:solidFill>
-          <a:ln>
-            <a:noFill/>
-          </a:ln>
-        </p:spPr>
-        <p:style>
-          <a:lnRef idx="1">
-            <a:schemeClr val="accent1"/>
-          </a:lnRef>
-          <a:fillRef idx="3">
-            <a:schemeClr val="accent1"/>
-          </a:fillRef>
-          <a:effectRef idx="2">
-            <a:schemeClr val="accent1"/>
-          </a:effectRef>
-          <a:fontRef idx="minor">
-            <a:schemeClr val="lt1"/>
-          </a:fontRef>
-        </p:style>
-        <p:txBody>
-          <a:bodyPr rtlCol="0" anchor="ctr"/>
-          <a:lstStyle/>
-          <a:p>
-            <a:pPr algn="ctr"/>
-          </a:p>
-        </p:txBody>
-      </p:sp>
-      <p:sp>
-        <p:nvSpPr>
-          <p:cNvPr id="8" name="Rectangle 7"/>
-          <p:cNvSpPr/>
-          <p:nvPr/>
-        </p:nvSpPr>
-        <p:spPr>
-          <a:xfrm>
-            <a:off x="457200" y="1655064"/>
-            <a:ext cx="3624986" cy="27432"/>
-          </a:xfrm>
-          <a:prstGeom prst="rect">
-            <a:avLst/>
-          </a:prstGeom>
-          <a:solidFill>
-            <a:srgbClr val="FFD000"/>
-          </a:solidFill>
-          <a:ln>
-            <a:noFill/>
-          </a:ln>
-        </p:spPr>
-        <p:style>
-          <a:lnRef idx="1">
-            <a:schemeClr val="accent1"/>
-          </a:lnRef>
-          <a:fillRef idx="3">
-            <a:schemeClr val="accent1"/>
-          </a:fillRef>
-          <a:effectRef idx="2">
-            <a:schemeClr val="accent1"/>
-          </a:effectRef>
-          <a:fontRef idx="minor">
-            <a:schemeClr val="lt1"/>
-          </a:fontRef>
-        </p:style>
-        <p:txBody>
-          <a:bodyPr rtlCol="0" anchor="ctr"/>
-          <a:lstStyle/>
-          <a:p>
-            <a:pPr algn="ctr"/>
-          </a:p>
-        </p:txBody>
-      </p:sp>
       <p:pic>
         <p:nvPicPr>
-          <p:cNvPr id="9" name="Picture 8" descr="examlab.png"/>
+          <p:cNvPr id="3" name="Picture 2" descr="logo_uniajc_color.png"/>
           <p:cNvPicPr>
             <a:picLocks noChangeAspect="1"/>
           </p:cNvPicPr>
@@ -19924,8 +21116,8 @@
         </p:blipFill>
         <p:spPr>
           <a:xfrm>
-            <a:off x="1659331" y="1847087"/>
-            <a:ext cx="1220724" cy="1220724"/>
+            <a:off x="10271455" y="5998464"/>
+            <a:ext cx="1463040" cy="643233"/>
           </a:xfrm>
           <a:prstGeom prst="rect">
             <a:avLst/>
@@ -19934,14 +21126,14 @@
       </p:pic>
       <p:sp>
         <p:nvSpPr>
-          <p:cNvPr id="10" name="TextBox 9"/>
+          <p:cNvPr id="4" name="TextBox 3"/>
           <p:cNvSpPr txBox="1"/>
           <p:nvPr/>
         </p:nvSpPr>
         <p:spPr>
           <a:xfrm>
-            <a:off x="530352" y="3159251"/>
-            <a:ext cx="3478682" cy="621792"/>
+            <a:off x="457200" y="1737360"/>
+            <a:ext cx="11277295" cy="1097280"/>
           </a:xfrm>
           <a:prstGeom prst="rect">
             <a:avLst/>
@@ -19949,660 +21141,32 @@
           <a:noFill/>
         </p:spPr>
         <p:txBody>
-          <a:bodyPr wrap="square" anchor="t"/>
+          <a:bodyPr wrap="square" anchor="ctr"/>
           <a:lstStyle/>
           <a:p>
             <a:pPr algn="ctr"/>
             <a:r>
-              <a:rPr sz="1300" b="1" i="0">
+              <a:rPr sz="3400" b="1" i="0">
                 <a:solidFill>
                   <a:srgbClr val="095292"/>
                 </a:solidFill>
                 <a:latin typeface="Calibri"/>
               </a:rPr>
-              <a:t>la plataforma del curso</a:t>
-            </a:r>
-          </a:p>
-          <a:p>
-            <a:pPr algn="ctr">
-              <a:spcBef>
-                <a:spcPts val="200"/>
-              </a:spcBef>
-            </a:pPr>
-            <a:r>
-              <a:rPr sz="1000" b="0" i="0">
-                <a:solidFill>
-                  <a:srgbClr val="666666"/>
-                </a:solidFill>
-                <a:latin typeface="Calibri"/>
-              </a:rPr>
-              <a:t>PL/pgSQL: aqui corre</a:t>
-            </a:r>
-          </a:p>
-        </p:txBody>
-      </p:sp>
-      <p:sp>
-        <p:nvSpPr>
-          <p:cNvPr id="11" name="Rounded Rectangle 10"/>
-          <p:cNvSpPr/>
-          <p:nvPr/>
-        </p:nvSpPr>
-        <p:spPr>
-          <a:xfrm>
-            <a:off x="4283354" y="1591056"/>
-            <a:ext cx="3624986" cy="2299716"/>
-          </a:xfrm>
-          <a:prstGeom prst="roundRect">
-            <a:avLst>
-              <a:gd name="adj" fmla="val 12000"/>
-            </a:avLst>
-          </a:prstGeom>
-          <a:solidFill>
-            <a:srgbClr val="F2F2F2"/>
-          </a:solidFill>
-          <a:ln>
-            <a:noFill/>
-          </a:ln>
-        </p:spPr>
-        <p:style>
-          <a:lnRef idx="1">
-            <a:schemeClr val="accent1"/>
-          </a:lnRef>
-          <a:fillRef idx="3">
-            <a:schemeClr val="accent1"/>
-          </a:fillRef>
-          <a:effectRef idx="2">
-            <a:schemeClr val="accent1"/>
-          </a:effectRef>
-          <a:fontRef idx="minor">
-            <a:schemeClr val="lt1"/>
-          </a:fontRef>
-        </p:style>
-        <p:txBody>
-          <a:bodyPr rtlCol="0" anchor="ctr"/>
-          <a:lstStyle/>
-          <a:p>
-            <a:pPr algn="ctr"/>
-          </a:p>
-        </p:txBody>
-      </p:sp>
-      <p:sp>
-        <p:nvSpPr>
-          <p:cNvPr id="12" name="Rectangle 11"/>
-          <p:cNvSpPr/>
-          <p:nvPr/>
-        </p:nvSpPr>
-        <p:spPr>
-          <a:xfrm>
-            <a:off x="4283354" y="1591056"/>
-            <a:ext cx="3624986" cy="64008"/>
-          </a:xfrm>
-          <a:prstGeom prst="rect">
-            <a:avLst/>
-          </a:prstGeom>
-          <a:solidFill>
-            <a:srgbClr val="095292"/>
-          </a:solidFill>
-          <a:ln>
-            <a:noFill/>
-          </a:ln>
-        </p:spPr>
-        <p:style>
-          <a:lnRef idx="1">
-            <a:schemeClr val="accent1"/>
-          </a:lnRef>
-          <a:fillRef idx="3">
-            <a:schemeClr val="accent1"/>
-          </a:fillRef>
-          <a:effectRef idx="2">
-            <a:schemeClr val="accent1"/>
-          </a:effectRef>
-          <a:fontRef idx="minor">
-            <a:schemeClr val="lt1"/>
-          </a:fontRef>
-        </p:style>
-        <p:txBody>
-          <a:bodyPr rtlCol="0" anchor="ctr"/>
-          <a:lstStyle/>
-          <a:p>
-            <a:pPr algn="ctr"/>
-          </a:p>
-        </p:txBody>
-      </p:sp>
-      <p:sp>
-        <p:nvSpPr>
-          <p:cNvPr id="13" name="Rectangle 12"/>
-          <p:cNvSpPr/>
-          <p:nvPr/>
-        </p:nvSpPr>
-        <p:spPr>
-          <a:xfrm>
-            <a:off x="4283354" y="1655064"/>
-            <a:ext cx="3624986" cy="27432"/>
-          </a:xfrm>
-          <a:prstGeom prst="rect">
-            <a:avLst/>
-          </a:prstGeom>
-          <a:solidFill>
-            <a:srgbClr val="FFD000"/>
-          </a:solidFill>
-          <a:ln>
-            <a:noFill/>
-          </a:ln>
-        </p:spPr>
-        <p:style>
-          <a:lnRef idx="1">
-            <a:schemeClr val="accent1"/>
-          </a:lnRef>
-          <a:fillRef idx="3">
-            <a:schemeClr val="accent1"/>
-          </a:fillRef>
-          <a:effectRef idx="2">
-            <a:schemeClr val="accent1"/>
-          </a:effectRef>
-          <a:fontRef idx="minor">
-            <a:schemeClr val="lt1"/>
-          </a:fontRef>
-        </p:style>
-        <p:txBody>
-          <a:bodyPr rtlCol="0" anchor="ctr"/>
-          <a:lstStyle/>
-          <a:p>
-            <a:pPr algn="ctr"/>
-          </a:p>
-        </p:txBody>
-      </p:sp>
-      <p:pic>
-        <p:nvPicPr>
-          <p:cNvPr id="14" name="Picture 13" descr="google_docs.png"/>
-          <p:cNvPicPr>
-            <a:picLocks noChangeAspect="1"/>
-          </p:cNvPicPr>
-          <p:nvPr/>
-        </p:nvPicPr>
-        <p:blipFill>
-          <a:blip r:embed="rId3"/>
-          <a:stretch>
-            <a:fillRect/>
-          </a:stretch>
-        </p:blipFill>
-        <p:spPr>
-          <a:xfrm>
-            <a:off x="5485485" y="1847087"/>
-            <a:ext cx="1220724" cy="1220724"/>
-          </a:xfrm>
-          <a:prstGeom prst="rect">
-            <a:avLst/>
-          </a:prstGeom>
-        </p:spPr>
-      </p:pic>
-      <p:sp>
-        <p:nvSpPr>
-          <p:cNvPr id="15" name="TextBox 14"/>
+              <a:t>Clase 3 · Procedimientos almacenados · VetCare</a:t>
+            </a:r>
+          </a:p>
+        </p:txBody>
+      </p:sp>
+      <p:sp>
+        <p:nvSpPr>
+          <p:cNvPr id="5" name="TextBox 4"/>
           <p:cNvSpPr txBox="1"/>
           <p:nvPr/>
         </p:nvSpPr>
         <p:spPr>
           <a:xfrm>
-            <a:off x="4356506" y="3159251"/>
-            <a:ext cx="3478682" cy="621792"/>
-          </a:xfrm>
-          <a:prstGeom prst="rect">
-            <a:avLst/>
-          </a:prstGeom>
-          <a:noFill/>
-        </p:spPr>
-        <p:txBody>
-          <a:bodyPr wrap="square" anchor="t"/>
-          <a:lstStyle/>
-          <a:p>
-            <a:pPr algn="ctr"/>
-            <a:r>
-              <a:rPr sz="1300" b="1" i="0">
-                <a:solidFill>
-                  <a:srgbClr val="095292"/>
-                </a:solidFill>
-                <a:latin typeface="Calibri"/>
-              </a:rPr>
-              <a:t>Google Docs</a:t>
-            </a:r>
-          </a:p>
-          <a:p>
-            <a:pPr algn="ctr">
-              <a:spcBef>
-                <a:spcPts val="200"/>
-              </a:spcBef>
-            </a:pPr>
-            <a:r>
-              <a:rPr sz="1000" b="0" i="0">
-                <a:solidFill>
-                  <a:srgbClr val="666666"/>
-                </a:solidFill>
-                <a:latin typeface="Calibri"/>
-              </a:rPr>
-              <a:t>Contrato del proc</a:t>
-            </a:r>
-          </a:p>
-        </p:txBody>
-      </p:sp>
-      <p:sp>
-        <p:nvSpPr>
-          <p:cNvPr id="16" name="Rounded Rectangle 15"/>
-          <p:cNvSpPr/>
-          <p:nvPr/>
-        </p:nvSpPr>
-        <p:spPr>
-          <a:xfrm>
-            <a:off x="8109508" y="1591056"/>
-            <a:ext cx="3624986" cy="2299716"/>
-          </a:xfrm>
-          <a:prstGeom prst="roundRect">
-            <a:avLst>
-              <a:gd name="adj" fmla="val 12000"/>
-            </a:avLst>
-          </a:prstGeom>
-          <a:solidFill>
-            <a:srgbClr val="F2F2F2"/>
-          </a:solidFill>
-          <a:ln>
-            <a:noFill/>
-          </a:ln>
-        </p:spPr>
-        <p:style>
-          <a:lnRef idx="1">
-            <a:schemeClr val="accent1"/>
-          </a:lnRef>
-          <a:fillRef idx="3">
-            <a:schemeClr val="accent1"/>
-          </a:fillRef>
-          <a:effectRef idx="2">
-            <a:schemeClr val="accent1"/>
-          </a:effectRef>
-          <a:fontRef idx="minor">
-            <a:schemeClr val="lt1"/>
-          </a:fontRef>
-        </p:style>
-        <p:txBody>
-          <a:bodyPr rtlCol="0" anchor="ctr"/>
-          <a:lstStyle/>
-          <a:p>
-            <a:pPr algn="ctr"/>
-          </a:p>
-        </p:txBody>
-      </p:sp>
-      <p:sp>
-        <p:nvSpPr>
-          <p:cNvPr id="17" name="Rectangle 16"/>
-          <p:cNvSpPr/>
-          <p:nvPr/>
-        </p:nvSpPr>
-        <p:spPr>
-          <a:xfrm>
-            <a:off x="8109508" y="1591056"/>
-            <a:ext cx="3624986" cy="64008"/>
-          </a:xfrm>
-          <a:prstGeom prst="rect">
-            <a:avLst/>
-          </a:prstGeom>
-          <a:solidFill>
-            <a:srgbClr val="095292"/>
-          </a:solidFill>
-          <a:ln>
-            <a:noFill/>
-          </a:ln>
-        </p:spPr>
-        <p:style>
-          <a:lnRef idx="1">
-            <a:schemeClr val="accent1"/>
-          </a:lnRef>
-          <a:fillRef idx="3">
-            <a:schemeClr val="accent1"/>
-          </a:fillRef>
-          <a:effectRef idx="2">
-            <a:schemeClr val="accent1"/>
-          </a:effectRef>
-          <a:fontRef idx="minor">
-            <a:schemeClr val="lt1"/>
-          </a:fontRef>
-        </p:style>
-        <p:txBody>
-          <a:bodyPr rtlCol="0" anchor="ctr"/>
-          <a:lstStyle/>
-          <a:p>
-            <a:pPr algn="ctr"/>
-          </a:p>
-        </p:txBody>
-      </p:sp>
-      <p:sp>
-        <p:nvSpPr>
-          <p:cNvPr id="18" name="Rectangle 17"/>
-          <p:cNvSpPr/>
-          <p:nvPr/>
-        </p:nvSpPr>
-        <p:spPr>
-          <a:xfrm>
-            <a:off x="8109508" y="1655064"/>
-            <a:ext cx="3624986" cy="27432"/>
-          </a:xfrm>
-          <a:prstGeom prst="rect">
-            <a:avLst/>
-          </a:prstGeom>
-          <a:solidFill>
-            <a:srgbClr val="FFD000"/>
-          </a:solidFill>
-          <a:ln>
-            <a:noFill/>
-          </a:ln>
-        </p:spPr>
-        <p:style>
-          <a:lnRef idx="1">
-            <a:schemeClr val="accent1"/>
-          </a:lnRef>
-          <a:fillRef idx="3">
-            <a:schemeClr val="accent1"/>
-          </a:fillRef>
-          <a:effectRef idx="2">
-            <a:schemeClr val="accent1"/>
-          </a:effectRef>
-          <a:fontRef idx="minor">
-            <a:schemeClr val="lt1"/>
-          </a:fontRef>
-        </p:style>
-        <p:txBody>
-          <a:bodyPr rtlCol="0" anchor="ctr"/>
-          <a:lstStyle/>
-          <a:p>
-            <a:pPr algn="ctr"/>
-          </a:p>
-        </p:txBody>
-      </p:sp>
-      <p:pic>
-        <p:nvPicPr>
-          <p:cNvPr id="19" name="Picture 18" descr="dbfiddle.png"/>
-          <p:cNvPicPr>
-            <a:picLocks noChangeAspect="1"/>
-          </p:cNvPicPr>
-          <p:nvPr/>
-        </p:nvPicPr>
-        <p:blipFill>
-          <a:blip r:embed="rId4"/>
-          <a:stretch>
-            <a:fillRect/>
-          </a:stretch>
-        </p:blipFill>
-        <p:spPr>
-          <a:xfrm>
-            <a:off x="9311640" y="1847087"/>
-            <a:ext cx="1220724" cy="1220724"/>
-          </a:xfrm>
-          <a:prstGeom prst="rect">
-            <a:avLst/>
-          </a:prstGeom>
-        </p:spPr>
-      </p:pic>
-      <p:sp>
-        <p:nvSpPr>
-          <p:cNvPr id="20" name="TextBox 19"/>
-          <p:cNvSpPr txBox="1"/>
-          <p:nvPr/>
-        </p:nvSpPr>
-        <p:spPr>
-          <a:xfrm>
-            <a:off x="8182660" y="3159251"/>
-            <a:ext cx="3478682" cy="621792"/>
-          </a:xfrm>
-          <a:prstGeom prst="rect">
-            <a:avLst/>
-          </a:prstGeom>
-          <a:noFill/>
-        </p:spPr>
-        <p:txBody>
-          <a:bodyPr wrap="square" anchor="t"/>
-          <a:lstStyle/>
-          <a:p>
-            <a:pPr algn="ctr"/>
-            <a:r>
-              <a:rPr sz="1300" b="1" i="0">
-                <a:solidFill>
-                  <a:srgbClr val="095292"/>
-                </a:solidFill>
-                <a:latin typeface="Calibri"/>
-              </a:rPr>
-              <a:t>DB Fiddle</a:t>
-            </a:r>
-          </a:p>
-          <a:p>
-            <a:pPr algn="ctr">
-              <a:spcBef>
-                <a:spcPts val="200"/>
-              </a:spcBef>
-            </a:pPr>
-            <a:r>
-              <a:rPr sz="1000" b="0" i="0">
-                <a:solidFill>
-                  <a:srgbClr val="666666"/>
-                </a:solidFill>
-                <a:latin typeface="Calibri"/>
-              </a:rPr>
-              <a:t>Alterno: PostgreSQL</a:t>
-            </a:r>
-          </a:p>
-        </p:txBody>
-      </p:sp>
-      <p:sp>
-        <p:nvSpPr>
-          <p:cNvPr id="21" name="Rounded Rectangle 20"/>
-          <p:cNvSpPr/>
-          <p:nvPr/>
-        </p:nvSpPr>
-        <p:spPr>
-          <a:xfrm>
-            <a:off x="4283354" y="4055364"/>
-            <a:ext cx="3624986" cy="2299716"/>
-          </a:xfrm>
-          <a:prstGeom prst="roundRect">
-            <a:avLst>
-              <a:gd name="adj" fmla="val 12000"/>
-            </a:avLst>
-          </a:prstGeom>
-          <a:solidFill>
-            <a:srgbClr val="F2F2F2"/>
-          </a:solidFill>
-          <a:ln>
-            <a:noFill/>
-          </a:ln>
-        </p:spPr>
-        <p:style>
-          <a:lnRef idx="1">
-            <a:schemeClr val="accent1"/>
-          </a:lnRef>
-          <a:fillRef idx="3">
-            <a:schemeClr val="accent1"/>
-          </a:fillRef>
-          <a:effectRef idx="2">
-            <a:schemeClr val="accent1"/>
-          </a:effectRef>
-          <a:fontRef idx="minor">
-            <a:schemeClr val="lt1"/>
-          </a:fontRef>
-        </p:style>
-        <p:txBody>
-          <a:bodyPr rtlCol="0" anchor="ctr"/>
-          <a:lstStyle/>
-          <a:p>
-            <a:pPr algn="ctr"/>
-          </a:p>
-        </p:txBody>
-      </p:sp>
-      <p:sp>
-        <p:nvSpPr>
-          <p:cNvPr id="22" name="Rectangle 21"/>
-          <p:cNvSpPr/>
-          <p:nvPr/>
-        </p:nvSpPr>
-        <p:spPr>
-          <a:xfrm>
-            <a:off x="4283354" y="4055364"/>
-            <a:ext cx="3624986" cy="64008"/>
-          </a:xfrm>
-          <a:prstGeom prst="rect">
-            <a:avLst/>
-          </a:prstGeom>
-          <a:solidFill>
-            <a:srgbClr val="095292"/>
-          </a:solidFill>
-          <a:ln>
-            <a:noFill/>
-          </a:ln>
-        </p:spPr>
-        <p:style>
-          <a:lnRef idx="1">
-            <a:schemeClr val="accent1"/>
-          </a:lnRef>
-          <a:fillRef idx="3">
-            <a:schemeClr val="accent1"/>
-          </a:fillRef>
-          <a:effectRef idx="2">
-            <a:schemeClr val="accent1"/>
-          </a:effectRef>
-          <a:fontRef idx="minor">
-            <a:schemeClr val="lt1"/>
-          </a:fontRef>
-        </p:style>
-        <p:txBody>
-          <a:bodyPr rtlCol="0" anchor="ctr"/>
-          <a:lstStyle/>
-          <a:p>
-            <a:pPr algn="ctr"/>
-          </a:p>
-        </p:txBody>
-      </p:sp>
-      <p:sp>
-        <p:nvSpPr>
-          <p:cNvPr id="23" name="Rectangle 22"/>
-          <p:cNvSpPr/>
-          <p:nvPr/>
-        </p:nvSpPr>
-        <p:spPr>
-          <a:xfrm>
-            <a:off x="4283354" y="4119372"/>
-            <a:ext cx="3624986" cy="27432"/>
-          </a:xfrm>
-          <a:prstGeom prst="rect">
-            <a:avLst/>
-          </a:prstGeom>
-          <a:solidFill>
-            <a:srgbClr val="FFD000"/>
-          </a:solidFill>
-          <a:ln>
-            <a:noFill/>
-          </a:ln>
-        </p:spPr>
-        <p:style>
-          <a:lnRef idx="1">
-            <a:schemeClr val="accent1"/>
-          </a:lnRef>
-          <a:fillRef idx="3">
-            <a:schemeClr val="accent1"/>
-          </a:fillRef>
-          <a:effectRef idx="2">
-            <a:schemeClr val="accent1"/>
-          </a:effectRef>
-          <a:fontRef idx="minor">
-            <a:schemeClr val="lt1"/>
-          </a:fontRef>
-        </p:style>
-        <p:txBody>
-          <a:bodyPr rtlCol="0" anchor="ctr"/>
-          <a:lstStyle/>
-          <a:p>
-            <a:pPr algn="ctr"/>
-          </a:p>
-        </p:txBody>
-      </p:sp>
-      <p:pic>
-        <p:nvPicPr>
-          <p:cNvPr id="24" name="Picture 23" descr="oracle_livesql.png"/>
-          <p:cNvPicPr>
-            <a:picLocks noChangeAspect="1"/>
-          </p:cNvPicPr>
-          <p:nvPr/>
-        </p:nvPicPr>
-        <p:blipFill>
-          <a:blip r:embed="rId5"/>
-          <a:stretch>
-            <a:fillRect/>
-          </a:stretch>
-        </p:blipFill>
-        <p:spPr>
-          <a:xfrm>
-            <a:off x="5485485" y="4311396"/>
-            <a:ext cx="1220724" cy="1220724"/>
-          </a:xfrm>
-          <a:prstGeom prst="rect">
-            <a:avLst/>
-          </a:prstGeom>
-        </p:spPr>
-      </p:pic>
-      <p:sp>
-        <p:nvSpPr>
-          <p:cNvPr id="25" name="TextBox 24"/>
-          <p:cNvSpPr txBox="1"/>
-          <p:nvPr/>
-        </p:nvSpPr>
-        <p:spPr>
-          <a:xfrm>
-            <a:off x="4356506" y="5623560"/>
-            <a:ext cx="3478682" cy="621792"/>
-          </a:xfrm>
-          <a:prstGeom prst="rect">
-            <a:avLst/>
-          </a:prstGeom>
-          <a:noFill/>
-        </p:spPr>
-        <p:txBody>
-          <a:bodyPr wrap="square" anchor="t"/>
-          <a:lstStyle/>
-          <a:p>
-            <a:pPr algn="ctr"/>
-            <a:r>
-              <a:rPr sz="1300" b="1" i="0">
-                <a:solidFill>
-                  <a:srgbClr val="095292"/>
-                </a:solidFill>
-                <a:latin typeface="Calibri"/>
-              </a:rPr>
-              <a:t>Oracle Live SQL</a:t>
-            </a:r>
-          </a:p>
-          <a:p>
-            <a:pPr algn="ctr">
-              <a:spcBef>
-                <a:spcPts val="200"/>
-              </a:spcBef>
-            </a:pPr>
-            <a:r>
-              <a:rPr sz="1000" b="0" i="0">
-                <a:solidFill>
-                  <a:srgbClr val="666666"/>
-                </a:solidFill>
-                <a:latin typeface="Calibri"/>
-              </a:rPr>
-              <a:t>Solo contraste</a:t>
-            </a:r>
-          </a:p>
-        </p:txBody>
-      </p:sp>
-      <p:sp>
-        <p:nvSpPr>
-          <p:cNvPr id="26" name="TextBox 25"/>
-          <p:cNvSpPr txBox="1"/>
-          <p:nvPr/>
-        </p:nvSpPr>
-        <p:spPr>
-          <a:xfrm>
-            <a:off x="11185855" y="6473952"/>
-            <a:ext cx="640080" cy="274320"/>
+            <a:off x="457200" y="3017520"/>
+            <a:ext cx="11277295" cy="1645920"/>
           </a:xfrm>
           <a:prstGeom prst="rect">
             <a:avLst/>
@@ -20615,141 +21179,65 @@
           </a:bodyPr>
           <a:lstStyle/>
           <a:p>
-            <a:pPr algn="r"/>
-            <a:r>
-              <a:rPr sz="1100" b="0" i="0">
-                <a:solidFill>
-                  <a:srgbClr val="666666"/>
-                </a:solidFill>
-                <a:latin typeface="Calibri"/>
-              </a:rPr>
-              <a:t>53</a:t>
-            </a:r>
-          </a:p>
-        </p:txBody>
-      </p:sp>
-    </p:spTree>
-  </p:cSld>
-  <p:clrMapOvr>
-    <a:masterClrMapping/>
-  </p:clrMapOvr>
-</p:sld>
-</file>
-
-<file path=ppt/slides/slide54.xml><?xml version="1.0" encoding="utf-8"?>
-<p:sld xmlns:a="http://schemas.openxmlformats.org/drawingml/2006/main" xmlns:p="http://schemas.openxmlformats.org/presentationml/2006/main" xmlns:r="http://schemas.openxmlformats.org/officeDocument/2006/relationships">
-  <p:cSld>
-    <p:bg>
-      <p:bgPr>
-        <a:solidFill>
-          <a:srgbClr val="FFFFFF"/>
-        </a:solidFill>
-        <a:effectLst/>
-      </p:bgPr>
-    </p:bg>
-    <p:spTree>
-      <p:nvGrpSpPr>
-        <p:cNvPr id="1" name=""/>
-        <p:cNvGrpSpPr/>
-        <p:nvPr/>
-      </p:nvGrpSpPr>
-      <p:grpSpPr/>
-      <p:sp>
-        <p:nvSpPr>
-          <p:cNvPr id="2" name="Rectangle 1"/>
-          <p:cNvSpPr/>
-          <p:nvPr/>
-        </p:nvSpPr>
-        <p:spPr>
-          <a:xfrm>
-            <a:off x="0" y="0"/>
-            <a:ext cx="12191695" cy="960120"/>
-          </a:xfrm>
-          <a:prstGeom prst="rect">
-            <a:avLst/>
-          </a:prstGeom>
-          <a:solidFill>
-            <a:srgbClr val="095292"/>
-          </a:solidFill>
-          <a:ln>
-            <a:noFill/>
-          </a:ln>
-        </p:spPr>
-        <p:style>
-          <a:lnRef idx="1">
-            <a:schemeClr val="accent1"/>
-          </a:lnRef>
-          <a:fillRef idx="3">
-            <a:schemeClr val="accent1"/>
-          </a:fillRef>
-          <a:effectRef idx="2">
-            <a:schemeClr val="accent1"/>
-          </a:effectRef>
-          <a:fontRef idx="minor">
-            <a:schemeClr val="lt1"/>
-          </a:fontRef>
-        </p:style>
-        <p:txBody>
-          <a:bodyPr rtlCol="0" anchor="ctr"/>
-          <a:lstStyle/>
-          <a:p>
-            <a:pPr algn="ctr"/>
-          </a:p>
-        </p:txBody>
-      </p:sp>
-      <p:sp>
-        <p:nvSpPr>
-          <p:cNvPr id="3" name="Rectangle 2"/>
-          <p:cNvSpPr/>
-          <p:nvPr/>
-        </p:nvSpPr>
-        <p:spPr>
-          <a:xfrm>
-            <a:off x="0" y="960120"/>
-            <a:ext cx="12191695" cy="41148"/>
-          </a:xfrm>
-          <a:prstGeom prst="rect">
-            <a:avLst/>
-          </a:prstGeom>
-          <a:solidFill>
-            <a:srgbClr val="FFD000"/>
-          </a:solidFill>
-          <a:ln>
-            <a:noFill/>
-          </a:ln>
-        </p:spPr>
-        <p:style>
-          <a:lnRef idx="1">
-            <a:schemeClr val="accent1"/>
-          </a:lnRef>
-          <a:fillRef idx="3">
-            <a:schemeClr val="accent1"/>
-          </a:fillRef>
-          <a:effectRef idx="2">
-            <a:schemeClr val="accent1"/>
-          </a:effectRef>
-          <a:fontRef idx="minor">
-            <a:schemeClr val="lt1"/>
-          </a:fontRef>
-        </p:style>
-        <p:txBody>
-          <a:bodyPr rtlCol="0" anchor="ctr"/>
-          <a:lstStyle/>
-          <a:p>
-            <a:pPr algn="ctr"/>
-          </a:p>
-        </p:txBody>
-      </p:sp>
-      <p:sp>
-        <p:nvSpPr>
-          <p:cNvPr id="4" name="TextBox 3"/>
+            <a:pPr algn="ctr">
+              <a:spcAft>
+                <a:spcPts val="600"/>
+              </a:spcAft>
+            </a:pPr>
+            <a:r>
+              <a:rPr sz="1600" b="0" i="0">
+                <a:solidFill>
+                  <a:srgbClr val="333333"/>
+                </a:solidFill>
+                <a:latin typeface="Calibri"/>
+              </a:rPr>
+              <a:t>Que es un procedimiento almacenado, y las dos palabras que importan</a:t>
+            </a:r>
+          </a:p>
+          <a:p>
+            <a:pPr algn="ctr">
+              <a:spcAft>
+                <a:spcPts val="600"/>
+              </a:spcAft>
+            </a:pPr>
+            <a:r>
+              <a:rPr sz="1600" b="0" i="0">
+                <a:solidFill>
+                  <a:srgbClr val="333333"/>
+                </a:solidFill>
+                <a:latin typeface="Calibri"/>
+              </a:rPr>
+              <a:t>Que es un procedimiento almacenado, y las dos...</a:t>
+            </a:r>
+          </a:p>
+          <a:p>
+            <a:pPr algn="ctr">
+              <a:spcAft>
+                <a:spcPts val="600"/>
+              </a:spcAft>
+            </a:pPr>
+            <a:r>
+              <a:rPr sz="1600" b="0" i="0">
+                <a:solidFill>
+                  <a:srgbClr val="333333"/>
+                </a:solidFill>
+                <a:latin typeface="Calibri"/>
+              </a:rPr>
+              <a:t>El molde de PL/pgSQL, y por que el cuerpo va entre signos de dolar</a:t>
+            </a:r>
+          </a:p>
+        </p:txBody>
+      </p:sp>
+      <p:sp>
+        <p:nvSpPr>
+          <p:cNvPr id="6" name="TextBox 5"/>
           <p:cNvSpPr txBox="1"/>
           <p:nvPr/>
         </p:nvSpPr>
         <p:spPr>
           <a:xfrm>
-            <a:off x="457200" y="164592"/>
-            <a:ext cx="11277295" cy="502920"/>
+            <a:off x="457200" y="4754880"/>
+            <a:ext cx="11277295" cy="640080"/>
           </a:xfrm>
           <a:prstGeom prst="rect">
             <a:avLst/>
@@ -20762,3730 +21250,15 @@
           </a:bodyPr>
           <a:lstStyle/>
           <a:p>
-            <a:r>
-              <a:rPr sz="2600" b="1" i="0">
-                <a:solidFill>
-                  <a:srgbClr val="FFFFFF"/>
-                </a:solidFill>
-                <a:latin typeface="Calibri"/>
-              </a:rPr>
-              <a:t>Taller PI VetCare — contexto / por que importa</a:t>
-            </a:r>
-          </a:p>
-        </p:txBody>
-      </p:sp>
-      <p:sp>
-        <p:nvSpPr>
-          <p:cNvPr id="5" name="TextBox 4"/>
-          <p:cNvSpPr txBox="1"/>
-          <p:nvPr/>
-        </p:nvSpPr>
-        <p:spPr>
-          <a:xfrm>
-            <a:off x="457200" y="1170432"/>
-            <a:ext cx="11277295" cy="5230368"/>
-          </a:xfrm>
-          <a:prstGeom prst="rect">
-            <a:avLst/>
-          </a:prstGeom>
-          <a:noFill/>
-        </p:spPr>
-        <p:txBody>
-          <a:bodyPr wrap="square">
-            <a:spAutoFit/>
-          </a:bodyPr>
-          <a:lstStyle/>
-          <a:p>
-            <a:pPr>
-              <a:spcAft>
-                <a:spcPts val="800"/>
-              </a:spcAft>
-            </a:pPr>
-            <a:r>
-              <a:rPr sz="2000" b="0" i="0">
-                <a:solidFill>
-                  <a:srgbClr val="333333"/>
-                </a:solidFill>
-                <a:latin typeface="Calibri"/>
-              </a:rPr>
-              <a:t>–   </a:t>
-            </a:r>
+            <a:pPr algn="ctr"/>
             <a:r>
               <a:rPr sz="2000" b="1" i="0">
                 <a:solidFill>
-                  <a:srgbClr val="333333"/>
-                </a:solidFill>
-                <a:latin typeface="Calibri"/>
-              </a:rPr>
-              <a:t>Por qué importa al PI:</a:t>
-            </a:r>
-            <a:r>
-              <a:rPr sz="2000" b="0" i="0">
-                <a:solidFill>
-                  <a:srgbClr val="333333"/>
-                </a:solidFill>
-                <a:latin typeface="Calibri"/>
-              </a:rPr>
-              <a:t> la regla de negocio deja de vivir en la pantalla y queda dentro de la base, donde vale para </a:t>
-            </a:r>
-            <a:r>
-              <a:rPr sz="2000" b="1" i="0">
-                <a:solidFill>
-                  <a:srgbClr val="333333"/>
-                </a:solidFill>
-                <a:latin typeface="Calibri"/>
-              </a:rPr>
-              <a:t>cualquier</a:t>
-            </a:r>
-            <a:r>
-              <a:rPr sz="2000" b="0" i="0">
-                <a:solidFill>
-                  <a:srgbClr val="333333"/>
-                </a:solidFill>
-                <a:latin typeface="Calibri"/>
-              </a:rPr>
-              <a:t> cliente que se conecte.</a:t>
-            </a:r>
-          </a:p>
-          <a:p>
-            <a:pPr>
-              <a:spcAft>
-                <a:spcPts val="800"/>
-              </a:spcAft>
-            </a:pPr>
-            <a:r>
-              <a:rPr sz="2000" b="0" i="0">
-                <a:solidFill>
-                  <a:srgbClr val="333333"/>
-                </a:solidFill>
-                <a:latin typeface="Calibri"/>
-              </a:rPr>
-              <a:t>–   Un procedimiento probado es la única forma de que «una mascota inactiva no agenda» siga siendo cierto cuando aparezcan la app, un script de carga y soporte.</a:t>
-            </a:r>
-          </a:p>
-          <a:p>
-            <a:pPr>
-              <a:spcAft>
-                <a:spcPts val="800"/>
-              </a:spcAft>
-            </a:pPr>
-            <a:r>
-              <a:rPr sz="2000" b="0" i="0">
-                <a:solidFill>
-                  <a:srgbClr val="333333"/>
-                </a:solidFill>
-                <a:latin typeface="Calibri"/>
-              </a:rPr>
-              <a:t>–   El contrato que escribes hoy es lo que la Clase 12 le entrega a quien programe la aplicación: firma, errores y qué hacer con cada uno.</a:t>
-            </a:r>
-          </a:p>
-        </p:txBody>
-      </p:sp>
-      <p:sp>
-        <p:nvSpPr>
-          <p:cNvPr id="6" name="TextBox 5"/>
-          <p:cNvSpPr txBox="1"/>
-          <p:nvPr/>
-        </p:nvSpPr>
-        <p:spPr>
-          <a:xfrm>
-            <a:off x="11185855" y="6473952"/>
-            <a:ext cx="640080" cy="274320"/>
-          </a:xfrm>
-          <a:prstGeom prst="rect">
-            <a:avLst/>
-          </a:prstGeom>
-          <a:noFill/>
-        </p:spPr>
-        <p:txBody>
-          <a:bodyPr wrap="square">
-            <a:spAutoFit/>
-          </a:bodyPr>
-          <a:lstStyle/>
-          <a:p>
-            <a:pPr algn="r"/>
-            <a:r>
-              <a:rPr sz="1100" b="0" i="0">
-                <a:solidFill>
-                  <a:srgbClr val="666666"/>
-                </a:solidFill>
-                <a:latin typeface="Calibri"/>
-              </a:rPr>
-              <a:t>54</a:t>
-            </a:r>
-          </a:p>
-        </p:txBody>
-      </p:sp>
-    </p:spTree>
-  </p:cSld>
-  <p:clrMapOvr>
-    <a:masterClrMapping/>
-  </p:clrMapOvr>
-</p:sld>
-</file>
-
-<file path=ppt/slides/slide55.xml><?xml version="1.0" encoding="utf-8"?>
-<p:sld xmlns:a="http://schemas.openxmlformats.org/drawingml/2006/main" xmlns:p="http://schemas.openxmlformats.org/presentationml/2006/main" xmlns:r="http://schemas.openxmlformats.org/officeDocument/2006/relationships">
-  <p:cSld>
-    <p:bg>
-      <p:bgPr>
-        <a:solidFill>
-          <a:srgbClr val="FFFFFF"/>
-        </a:solidFill>
-        <a:effectLst/>
-      </p:bgPr>
-    </p:bg>
-    <p:spTree>
-      <p:nvGrpSpPr>
-        <p:cNvPr id="1" name=""/>
-        <p:cNvGrpSpPr/>
-        <p:nvPr/>
-      </p:nvGrpSpPr>
-      <p:grpSpPr/>
-      <p:sp>
-        <p:nvSpPr>
-          <p:cNvPr id="2" name="Rectangle 1"/>
-          <p:cNvSpPr/>
-          <p:nvPr/>
-        </p:nvSpPr>
-        <p:spPr>
-          <a:xfrm>
-            <a:off x="0" y="0"/>
-            <a:ext cx="12191695" cy="960120"/>
-          </a:xfrm>
-          <a:prstGeom prst="rect">
-            <a:avLst/>
-          </a:prstGeom>
-          <a:solidFill>
-            <a:srgbClr val="095292"/>
-          </a:solidFill>
-          <a:ln>
-            <a:noFill/>
-          </a:ln>
-        </p:spPr>
-        <p:style>
-          <a:lnRef idx="1">
-            <a:schemeClr val="accent1"/>
-          </a:lnRef>
-          <a:fillRef idx="3">
-            <a:schemeClr val="accent1"/>
-          </a:fillRef>
-          <a:effectRef idx="2">
-            <a:schemeClr val="accent1"/>
-          </a:effectRef>
-          <a:fontRef idx="minor">
-            <a:schemeClr val="lt1"/>
-          </a:fontRef>
-        </p:style>
-        <p:txBody>
-          <a:bodyPr rtlCol="0" anchor="ctr"/>
-          <a:lstStyle/>
-          <a:p>
-            <a:pPr algn="ctr"/>
-          </a:p>
-        </p:txBody>
-      </p:sp>
-      <p:sp>
-        <p:nvSpPr>
-          <p:cNvPr id="3" name="Rectangle 2"/>
-          <p:cNvSpPr/>
-          <p:nvPr/>
-        </p:nvSpPr>
-        <p:spPr>
-          <a:xfrm>
-            <a:off x="0" y="960120"/>
-            <a:ext cx="12191695" cy="41148"/>
-          </a:xfrm>
-          <a:prstGeom prst="rect">
-            <a:avLst/>
-          </a:prstGeom>
-          <a:solidFill>
-            <a:srgbClr val="FFD000"/>
-          </a:solidFill>
-          <a:ln>
-            <a:noFill/>
-          </a:ln>
-        </p:spPr>
-        <p:style>
-          <a:lnRef idx="1">
-            <a:schemeClr val="accent1"/>
-          </a:lnRef>
-          <a:fillRef idx="3">
-            <a:schemeClr val="accent1"/>
-          </a:fillRef>
-          <a:effectRef idx="2">
-            <a:schemeClr val="accent1"/>
-          </a:effectRef>
-          <a:fontRef idx="minor">
-            <a:schemeClr val="lt1"/>
-          </a:fontRef>
-        </p:style>
-        <p:txBody>
-          <a:bodyPr rtlCol="0" anchor="ctr"/>
-          <a:lstStyle/>
-          <a:p>
-            <a:pPr algn="ctr"/>
-          </a:p>
-        </p:txBody>
-      </p:sp>
-      <p:sp>
-        <p:nvSpPr>
-          <p:cNvPr id="4" name="TextBox 3"/>
-          <p:cNvSpPr txBox="1"/>
-          <p:nvPr/>
-        </p:nvSpPr>
-        <p:spPr>
-          <a:xfrm>
-            <a:off x="457200" y="164592"/>
-            <a:ext cx="11277295" cy="502920"/>
-          </a:xfrm>
-          <a:prstGeom prst="rect">
-            <a:avLst/>
-          </a:prstGeom>
-          <a:noFill/>
-        </p:spPr>
-        <p:txBody>
-          <a:bodyPr wrap="square">
-            <a:spAutoFit/>
-          </a:bodyPr>
-          <a:lstStyle/>
-          <a:p>
-            <a:r>
-              <a:rPr sz="2600" b="1" i="0">
-                <a:solidFill>
-                  <a:srgbClr val="FFFFFF"/>
-                </a:solidFill>
-                <a:latin typeface="Calibri"/>
-              </a:rPr>
-              <a:t>Taller PI VetCare — objetivo y criterios</a:t>
-            </a:r>
-          </a:p>
-        </p:txBody>
-      </p:sp>
-      <p:sp>
-        <p:nvSpPr>
-          <p:cNvPr id="5" name="TextBox 4"/>
-          <p:cNvSpPr txBox="1"/>
-          <p:nvPr/>
-        </p:nvSpPr>
-        <p:spPr>
-          <a:xfrm>
-            <a:off x="457200" y="1170432"/>
-            <a:ext cx="11277295" cy="5230368"/>
-          </a:xfrm>
-          <a:prstGeom prst="rect">
-            <a:avLst/>
-          </a:prstGeom>
-          <a:noFill/>
-        </p:spPr>
-        <p:txBody>
-          <a:bodyPr wrap="square">
-            <a:spAutoFit/>
-          </a:bodyPr>
-          <a:lstStyle/>
-          <a:p>
-            <a:pPr>
-              <a:spcAft>
-                <a:spcPts val="800"/>
-              </a:spcAft>
-            </a:pPr>
-            <a:r>
-              <a:rPr sz="2000" b="0" i="0">
-                <a:solidFill>
-                  <a:srgbClr val="333333"/>
-                </a:solidFill>
-                <a:latin typeface="Calibri"/>
-              </a:rPr>
-              <a:t>–   </a:t>
-            </a:r>
-            <a:r>
-              <a:rPr sz="2000" b="1" i="0">
-                <a:solidFill>
-                  <a:srgbClr val="333333"/>
-                </a:solidFill>
-                <a:latin typeface="Calibri"/>
-              </a:rPr>
-              <a:t>Objetivo:</a:t>
-            </a:r>
-            <a:r>
-              <a:rPr sz="2000" b="0" i="0">
-                <a:solidFill>
-                  <a:srgbClr val="333333"/>
-                </a:solidFill>
-                <a:latin typeface="Calibri"/>
-              </a:rPr>
-              <a:t> Dos procedimientos de negocio en PL/pgSQL corriendo en la plataforma del curso, su batería de pruebas con evidencia, y el contrato de los dos documentado.</a:t>
-            </a:r>
-          </a:p>
-          <a:p>
-            <a:pPr>
-              <a:spcAft>
-                <a:spcPts val="800"/>
-              </a:spcAft>
-            </a:pPr>
-            <a:r>
-              <a:rPr sz="2000" b="0" i="0">
-                <a:solidFill>
-                  <a:srgbClr val="333333"/>
-                </a:solidFill>
-                <a:latin typeface="Calibri"/>
-              </a:rPr>
-              <a:t>–   </a:t>
-            </a:r>
-            <a:r>
-              <a:rPr sz="2000" b="1" i="0">
-                <a:solidFill>
-                  <a:srgbClr val="333333"/>
-                </a:solidFill>
-                <a:latin typeface="Calibri"/>
-              </a:rPr>
-              <a:t>Exito:</a:t>
-            </a:r>
-            <a:r>
-              <a:rPr sz="2000" b="0" i="0">
-                <a:solidFill>
-                  <a:srgbClr val="333333"/>
-                </a:solidFill>
-                <a:latin typeface="Calibri"/>
-              </a:rPr>
-              <a:t> «sp_agendar_cita» con sus 3 parámetros y sus 3 validaciones, cada una con su «RAISE EXCEPTION» y su mensaje literal.</a:t>
-            </a:r>
-          </a:p>
-          <a:p>
-            <a:pPr>
-              <a:spcAft>
-                <a:spcPts val="800"/>
-              </a:spcAft>
-            </a:pPr>
-            <a:r>
-              <a:rPr sz="2000" b="0" i="0">
-                <a:solidFill>
-                  <a:srgbClr val="333333"/>
-                </a:solidFill>
-                <a:latin typeface="Calibri"/>
-              </a:rPr>
-              <a:t>–   </a:t>
-            </a:r>
-            <a:r>
-              <a:rPr sz="2000" b="1" i="0">
-                <a:solidFill>
-                  <a:srgbClr val="333333"/>
-                </a:solidFill>
-                <a:latin typeface="Calibri"/>
-              </a:rPr>
-              <a:t>Exito:</a:t>
-            </a:r>
-            <a:r>
-              <a:rPr sz="2000" b="0" i="0">
-                <a:solidFill>
-                  <a:srgbClr val="333333"/>
-                </a:solidFill>
-                <a:latin typeface="Calibri"/>
-              </a:rPr>
-              <a:t> Batería de 4 bloques «DO» que </a:t>
-            </a:r>
-            <a:r>
-              <a:rPr sz="2000" b="1" i="0">
-                <a:solidFill>
-                  <a:srgbClr val="333333"/>
-                </a:solidFill>
-                <a:latin typeface="Calibri"/>
-              </a:rPr>
-              <a:t>no aborta el script</a:t>
-            </a:r>
-            <a:r>
-              <a:rPr sz="2000" b="0" i="0">
-                <a:solidFill>
-                  <a:srgbClr val="333333"/>
-                </a:solidFill>
-                <a:latin typeface="Calibri"/>
-              </a:rPr>
-              <a:t> y escribe 4 filas en «resultado_prueba» con el «SQLERRM» real.</a:t>
-            </a:r>
-          </a:p>
-          <a:p>
-            <a:pPr>
-              <a:spcAft>
-                <a:spcPts val="800"/>
-              </a:spcAft>
-            </a:pPr>
-            <a:r>
-              <a:rPr sz="2000" b="0" i="0">
-                <a:solidFill>
-                  <a:srgbClr val="333333"/>
-                </a:solidFill>
-                <a:latin typeface="Calibri"/>
-              </a:rPr>
-              <a:t>–   </a:t>
-            </a:r>
-            <a:r>
-              <a:rPr sz="2000" b="1" i="0">
-                <a:solidFill>
-                  <a:srgbClr val="333333"/>
-                </a:solidFill>
-                <a:latin typeface="Calibri"/>
-              </a:rPr>
-              <a:t>Exito:</a:t>
-            </a:r>
-            <a:r>
-              <a:rPr sz="2000" b="0" i="0">
-                <a:solidFill>
-                  <a:srgbClr val="333333"/>
-                </a:solidFill>
-                <a:latin typeface="Calibri"/>
-              </a:rPr>
-              <a:t> El «COUNT(*)» de «cita» demuestra que pasó de </a:t>
-            </a:r>
-            <a:r>
-              <a:rPr sz="2000" b="1" i="0">
-                <a:solidFill>
-                  <a:srgbClr val="333333"/>
-                </a:solidFill>
-                <a:latin typeface="Calibri"/>
-              </a:rPr>
-              <a:t>10 a 11</a:t>
-            </a:r>
-            <a:r>
-              <a:rPr sz="2000" b="0" i="0">
-                <a:solidFill>
-                  <a:srgbClr val="333333"/>
-                </a:solidFill>
-                <a:latin typeface="Calibri"/>
-              </a:rPr>
-              <a:t> filas: las tres validaciones no insertaron nada.</a:t>
-            </a:r>
-          </a:p>
-          <a:p>
-            <a:pPr>
-              <a:spcAft>
-                <a:spcPts val="800"/>
-              </a:spcAft>
-            </a:pPr>
-            <a:r>
-              <a:rPr sz="2000" b="0" i="0">
-                <a:solidFill>
-                  <a:srgbClr val="333333"/>
-                </a:solidFill>
-                <a:latin typeface="Calibri"/>
-              </a:rPr>
-              <a:t>–   </a:t>
-            </a:r>
-            <a:r>
-              <a:rPr sz="2000" b="1" i="0">
-                <a:solidFill>
-                  <a:srgbClr val="333333"/>
-                </a:solidFill>
-                <a:latin typeface="Calibri"/>
-              </a:rPr>
-              <a:t>Exito:</a:t>
-            </a:r>
-            <a:r>
-              <a:rPr sz="2000" b="0" i="0">
-                <a:solidFill>
-                  <a:srgbClr val="333333"/>
-                </a:solidFill>
-                <a:latin typeface="Calibri"/>
-              </a:rPr>
-              <a:t> «sp_registrar_consulta» detectando la consulta duplicada con «EXISTS» </a:t>
-            </a:r>
-            <a:r>
-              <a:rPr sz="2000" b="1" i="0">
-                <a:solidFill>
-                  <a:srgbClr val="333333"/>
-                </a:solidFill>
-                <a:latin typeface="Calibri"/>
-              </a:rPr>
-              <a:t>antes</a:t>
-            </a:r>
-            <a:r>
-              <a:rPr sz="2000" b="0" i="0">
-                <a:solidFill>
-                  <a:srgbClr val="333333"/>
-                </a:solidFill>
-                <a:latin typeface="Calibri"/>
-              </a:rPr>
-              <a:t> de chocar contra el «UNIQUE».</a:t>
-            </a:r>
-          </a:p>
-          <a:p>
-            <a:pPr>
-              <a:spcAft>
-                <a:spcPts val="800"/>
-              </a:spcAft>
-            </a:pPr>
-            <a:r>
-              <a:rPr sz="2000" b="0" i="0">
-                <a:solidFill>
-                  <a:srgbClr val="333333"/>
-                </a:solidFill>
-                <a:latin typeface="Calibri"/>
-              </a:rPr>
-              <a:t>–   </a:t>
-            </a:r>
-            <a:r>
-              <a:rPr sz="2000" b="1" i="0">
-                <a:solidFill>
-                  <a:srgbClr val="333333"/>
-                </a:solidFill>
-                <a:latin typeface="Calibri"/>
-              </a:rPr>
-              <a:t>Exito:</a:t>
-            </a:r>
-            <a:r>
-              <a:rPr sz="2000" b="0" i="0">
-                <a:solidFill>
-                  <a:srgbClr val="333333"/>
-                </a:solidFill>
-                <a:latin typeface="Calibri"/>
-              </a:rPr>
-              <a:t> Contrato de los dos procedimientos con sus 6 bloques y la tabla de errores completa (7 filas); las firmas coinciden con el código entregado.</a:t>
-            </a:r>
-          </a:p>
-          <a:p>
-            <a:pPr>
-              <a:spcAft>
-                <a:spcPts val="800"/>
-              </a:spcAft>
-            </a:pPr>
-            <a:r>
-              <a:rPr sz="2000" b="0" i="0">
-                <a:solidFill>
-                  <a:srgbClr val="333333"/>
-                </a:solidFill>
-                <a:latin typeface="Calibri"/>
-              </a:rPr>
-              <a:t>–   </a:t>
-            </a:r>
-            <a:r>
-              <a:rPr sz="2000" b="1" i="0">
-                <a:solidFill>
-                  <a:srgbClr val="333333"/>
-                </a:solidFill>
-                <a:latin typeface="Calibri"/>
-              </a:rPr>
-              <a:t>Exito:</a:t>
-            </a:r>
-            <a:r>
-              <a:rPr sz="2000" b="0" i="0">
-                <a:solidFill>
-                  <a:srgbClr val="333333"/>
-                </a:solidFill>
-                <a:latin typeface="Calibri"/>
-              </a:rPr>
-              <a:t> Entrega en la fecha que indique el docente.</a:t>
-            </a:r>
-          </a:p>
-        </p:txBody>
-      </p:sp>
-      <p:sp>
-        <p:nvSpPr>
-          <p:cNvPr id="6" name="TextBox 5"/>
-          <p:cNvSpPr txBox="1"/>
-          <p:nvPr/>
-        </p:nvSpPr>
-        <p:spPr>
-          <a:xfrm>
-            <a:off x="11185855" y="6473952"/>
-            <a:ext cx="640080" cy="274320"/>
-          </a:xfrm>
-          <a:prstGeom prst="rect">
-            <a:avLst/>
-          </a:prstGeom>
-          <a:noFill/>
-        </p:spPr>
-        <p:txBody>
-          <a:bodyPr wrap="square">
-            <a:spAutoFit/>
-          </a:bodyPr>
-          <a:lstStyle/>
-          <a:p>
-            <a:pPr algn="r"/>
-            <a:r>
-              <a:rPr sz="1100" b="0" i="0">
-                <a:solidFill>
-                  <a:srgbClr val="666666"/>
-                </a:solidFill>
-                <a:latin typeface="Calibri"/>
-              </a:rPr>
-              <a:t>55</a:t>
-            </a:r>
-          </a:p>
-        </p:txBody>
-      </p:sp>
-    </p:spTree>
-  </p:cSld>
-  <p:clrMapOvr>
-    <a:masterClrMapping/>
-  </p:clrMapOvr>
-</p:sld>
-</file>
-
-<file path=ppt/slides/slide56.xml><?xml version="1.0" encoding="utf-8"?>
-<p:sld xmlns:a="http://schemas.openxmlformats.org/drawingml/2006/main" xmlns:p="http://schemas.openxmlformats.org/presentationml/2006/main" xmlns:r="http://schemas.openxmlformats.org/officeDocument/2006/relationships">
-  <p:cSld>
-    <p:bg>
-      <p:bgPr>
-        <a:solidFill>
-          <a:srgbClr val="FFFFFF"/>
-        </a:solidFill>
-        <a:effectLst/>
-      </p:bgPr>
-    </p:bg>
-    <p:spTree>
-      <p:nvGrpSpPr>
-        <p:cNvPr id="1" name=""/>
-        <p:cNvGrpSpPr/>
-        <p:nvPr/>
-      </p:nvGrpSpPr>
-      <p:grpSpPr/>
-      <p:sp>
-        <p:nvSpPr>
-          <p:cNvPr id="2" name="Rectangle 1"/>
-          <p:cNvSpPr/>
-          <p:nvPr/>
-        </p:nvSpPr>
-        <p:spPr>
-          <a:xfrm>
-            <a:off x="0" y="0"/>
-            <a:ext cx="12191695" cy="960120"/>
-          </a:xfrm>
-          <a:prstGeom prst="rect">
-            <a:avLst/>
-          </a:prstGeom>
-          <a:solidFill>
-            <a:srgbClr val="095292"/>
-          </a:solidFill>
-          <a:ln>
-            <a:noFill/>
-          </a:ln>
-        </p:spPr>
-        <p:style>
-          <a:lnRef idx="1">
-            <a:schemeClr val="accent1"/>
-          </a:lnRef>
-          <a:fillRef idx="3">
-            <a:schemeClr val="accent1"/>
-          </a:fillRef>
-          <a:effectRef idx="2">
-            <a:schemeClr val="accent1"/>
-          </a:effectRef>
-          <a:fontRef idx="minor">
-            <a:schemeClr val="lt1"/>
-          </a:fontRef>
-        </p:style>
-        <p:txBody>
-          <a:bodyPr rtlCol="0" anchor="ctr"/>
-          <a:lstStyle/>
-          <a:p>
-            <a:pPr algn="ctr"/>
-          </a:p>
-        </p:txBody>
-      </p:sp>
-      <p:sp>
-        <p:nvSpPr>
-          <p:cNvPr id="3" name="Rectangle 2"/>
-          <p:cNvSpPr/>
-          <p:nvPr/>
-        </p:nvSpPr>
-        <p:spPr>
-          <a:xfrm>
-            <a:off x="0" y="960120"/>
-            <a:ext cx="12191695" cy="41148"/>
-          </a:xfrm>
-          <a:prstGeom prst="rect">
-            <a:avLst/>
-          </a:prstGeom>
-          <a:solidFill>
-            <a:srgbClr val="FFD000"/>
-          </a:solidFill>
-          <a:ln>
-            <a:noFill/>
-          </a:ln>
-        </p:spPr>
-        <p:style>
-          <a:lnRef idx="1">
-            <a:schemeClr val="accent1"/>
-          </a:lnRef>
-          <a:fillRef idx="3">
-            <a:schemeClr val="accent1"/>
-          </a:fillRef>
-          <a:effectRef idx="2">
-            <a:schemeClr val="accent1"/>
-          </a:effectRef>
-          <a:fontRef idx="minor">
-            <a:schemeClr val="lt1"/>
-          </a:fontRef>
-        </p:style>
-        <p:txBody>
-          <a:bodyPr rtlCol="0" anchor="ctr"/>
-          <a:lstStyle/>
-          <a:p>
-            <a:pPr algn="ctr"/>
-          </a:p>
-        </p:txBody>
-      </p:sp>
-      <p:sp>
-        <p:nvSpPr>
-          <p:cNvPr id="4" name="TextBox 3"/>
-          <p:cNvSpPr txBox="1"/>
-          <p:nvPr/>
-        </p:nvSpPr>
-        <p:spPr>
-          <a:xfrm>
-            <a:off x="457200" y="164592"/>
-            <a:ext cx="11277295" cy="502920"/>
-          </a:xfrm>
-          <a:prstGeom prst="rect">
-            <a:avLst/>
-          </a:prstGeom>
-          <a:noFill/>
-        </p:spPr>
-        <p:txBody>
-          <a:bodyPr wrap="square">
-            <a:spAutoFit/>
-          </a:bodyPr>
-          <a:lstStyle/>
-          <a:p>
-            <a:r>
-              <a:rPr sz="2600" b="1" i="0">
-                <a:solidFill>
-                  <a:srgbClr val="FFFFFF"/>
-                </a:solidFill>
-                <a:latin typeface="Calibri"/>
-              </a:rPr>
-              <a:t>Taller PI VetCare — escenario / datos de partida</a:t>
-            </a:r>
-          </a:p>
-        </p:txBody>
-      </p:sp>
-      <p:sp>
-        <p:nvSpPr>
-          <p:cNvPr id="5" name="TextBox 4"/>
-          <p:cNvSpPr txBox="1"/>
-          <p:nvPr/>
-        </p:nvSpPr>
-        <p:spPr>
-          <a:xfrm>
-            <a:off x="457200" y="1170432"/>
-            <a:ext cx="11277295" cy="5230368"/>
-          </a:xfrm>
-          <a:prstGeom prst="rect">
-            <a:avLst/>
-          </a:prstGeom>
-          <a:noFill/>
-        </p:spPr>
-        <p:txBody>
-          <a:bodyPr wrap="square">
-            <a:spAutoFit/>
-          </a:bodyPr>
-          <a:lstStyle/>
-          <a:p>
-            <a:pPr>
-              <a:spcAft>
-                <a:spcPts val="800"/>
-              </a:spcAft>
-            </a:pPr>
-            <a:r>
-              <a:rPr sz="2000" b="0" i="0">
-                <a:solidFill>
-                  <a:srgbClr val="333333"/>
-                </a:solidFill>
-                <a:latin typeface="Calibri"/>
-              </a:rPr>
-              <a:t>–   Esquema de VetCare ya creado y poblado: </a:t>
-            </a:r>
-            <a:r>
-              <a:rPr sz="2000" b="1" i="0">
-                <a:solidFill>
-                  <a:srgbClr val="333333"/>
-                </a:solidFill>
-                <a:latin typeface="Calibri"/>
-              </a:rPr>
-              <a:t>8 mascotas</a:t>
-            </a:r>
-            <a:r>
-              <a:rPr sz="2000" b="0" i="0">
-                <a:solidFill>
-                  <a:srgbClr val="333333"/>
-                </a:solidFill>
-                <a:latin typeface="Calibri"/>
-              </a:rPr>
-              <a:t> —la </a:t>
-            </a:r>
-            <a:r>
-              <a:rPr sz="2000" b="1" i="0">
-                <a:solidFill>
-                  <a:srgbClr val="333333"/>
-                </a:solidFill>
-                <a:latin typeface="Calibri"/>
-              </a:rPr>
-              <a:t>3 (Rocky)</a:t>
-            </a:r>
-            <a:r>
-              <a:rPr sz="2000" b="0" i="0">
-                <a:solidFill>
-                  <a:srgbClr val="333333"/>
-                </a:solidFill>
-                <a:latin typeface="Calibri"/>
-              </a:rPr>
-              <a:t> y la </a:t>
-            </a:r>
-            <a:r>
-              <a:rPr sz="2000" b="1" i="0">
-                <a:solidFill>
-                  <a:srgbClr val="333333"/>
-                </a:solidFill>
-                <a:latin typeface="Calibri"/>
-              </a:rPr>
-              <a:t>8 (Kiara)</a:t>
-            </a:r>
-            <a:r>
-              <a:rPr sz="2000" b="0" i="0">
-                <a:solidFill>
-                  <a:srgbClr val="333333"/>
-                </a:solidFill>
-                <a:latin typeface="Calibri"/>
-              </a:rPr>
-              <a:t> están </a:t>
-            </a:r>
-            <a:r>
-              <a:rPr sz="2000" b="1" i="0">
-                <a:solidFill>
-                  <a:srgbClr val="333333"/>
-                </a:solidFill>
-                <a:latin typeface="Calibri"/>
-              </a:rPr>
-              <a:t>INACTIVAS</a:t>
-            </a:r>
-            <a:r>
-              <a:rPr sz="2000" b="0" i="0">
-                <a:solidFill>
-                  <a:srgbClr val="333333"/>
-                </a:solidFill>
-                <a:latin typeface="Calibri"/>
-              </a:rPr>
-              <a:t>—, 4 veterinarios y 10 citas.</a:t>
-            </a:r>
-          </a:p>
-          <a:p>
-            <a:pPr>
-              <a:spcAft>
-                <a:spcPts val="800"/>
-              </a:spcAft>
-            </a:pPr>
-            <a:r>
-              <a:rPr sz="2000" b="0" i="0">
-                <a:solidFill>
-                  <a:srgbClr val="333333"/>
-                </a:solidFill>
-                <a:latin typeface="Calibri"/>
-              </a:rPr>
-              <a:t>–   Ya existe una cita del </a:t>
-            </a:r>
-            <a:r>
-              <a:rPr sz="2000" b="1" i="0">
-                <a:solidFill>
-                  <a:srgbClr val="333333"/>
-                </a:solidFill>
-                <a:latin typeface="Calibri"/>
-              </a:rPr>
-              <a:t>veterinario 1</a:t>
-            </a:r>
-            <a:r>
-              <a:rPr sz="2000" b="0" i="0">
-                <a:solidFill>
-                  <a:srgbClr val="333333"/>
-                </a:solidFill>
-                <a:latin typeface="Calibri"/>
-              </a:rPr>
-              <a:t> el «2026-09-01 08:00:00»: es la que dispara la validación de veterinario ocupado.</a:t>
-            </a:r>
-          </a:p>
-          <a:p>
-            <a:pPr>
-              <a:spcAft>
-                <a:spcPts val="800"/>
-              </a:spcAft>
-            </a:pPr>
-            <a:r>
-              <a:rPr sz="2000" b="0" i="0">
-                <a:solidFill>
-                  <a:srgbClr val="333333"/>
-                </a:solidFill>
-                <a:latin typeface="Calibri"/>
-              </a:rPr>
-              <a:t>–   </a:t>
-            </a:r>
-            <a:r>
-              <a:rPr sz="2000" b="1" i="0">
-                <a:solidFill>
-                  <a:srgbClr val="333333"/>
-                </a:solidFill>
-                <a:latin typeface="Calibri"/>
-              </a:rPr>
-              <a:t>Motor:</a:t>
-            </a:r>
-            <a:r>
-              <a:rPr sz="2000" b="0" i="0">
-                <a:solidFill>
-                  <a:srgbClr val="333333"/>
-                </a:solidFill>
-                <a:latin typeface="Calibri"/>
-              </a:rPr>
-              <a:t> PostgreSQL dentro de la plataforma del curso. El molde es «CREATE PROCEDURE ... LANGUAGE plpgsql AS $proc$ ... $proc$;» — no hay «IS», ni «VARCHAR2», ni «/» final.</a:t>
-            </a:r>
-          </a:p>
-          <a:p>
-            <a:pPr>
-              <a:spcAft>
-                <a:spcPts val="800"/>
-              </a:spcAft>
-            </a:pPr>
-            <a:r>
-              <a:rPr sz="2000" b="0" i="0">
-                <a:solidFill>
-                  <a:srgbClr val="333333"/>
-                </a:solidFill>
-                <a:latin typeface="Calibri"/>
-              </a:rPr>
-              <a:t>–   El contrato se escribe en Google Docs y se pega en la pregunta 5; la plantilla en blanco de sus 6 bloques y de la tabla de errores está en este documento.</a:t>
-            </a:r>
-          </a:p>
-        </p:txBody>
-      </p:sp>
-      <p:sp>
-        <p:nvSpPr>
-          <p:cNvPr id="6" name="TextBox 5"/>
-          <p:cNvSpPr txBox="1"/>
-          <p:nvPr/>
-        </p:nvSpPr>
-        <p:spPr>
-          <a:xfrm>
-            <a:off x="11185855" y="6473952"/>
-            <a:ext cx="640080" cy="274320"/>
-          </a:xfrm>
-          <a:prstGeom prst="rect">
-            <a:avLst/>
-          </a:prstGeom>
-          <a:noFill/>
-        </p:spPr>
-        <p:txBody>
-          <a:bodyPr wrap="square">
-            <a:spAutoFit/>
-          </a:bodyPr>
-          <a:lstStyle/>
-          <a:p>
-            <a:pPr algn="r"/>
-            <a:r>
-              <a:rPr sz="1100" b="0" i="0">
-                <a:solidFill>
-                  <a:srgbClr val="666666"/>
-                </a:solidFill>
-                <a:latin typeface="Calibri"/>
-              </a:rPr>
-              <a:t>56</a:t>
-            </a:r>
-          </a:p>
-        </p:txBody>
-      </p:sp>
-    </p:spTree>
-  </p:cSld>
-  <p:clrMapOvr>
-    <a:masterClrMapping/>
-  </p:clrMapOvr>
-</p:sld>
-</file>
-
-<file path=ppt/slides/slide57.xml><?xml version="1.0" encoding="utf-8"?>
-<p:sld xmlns:a="http://schemas.openxmlformats.org/drawingml/2006/main" xmlns:p="http://schemas.openxmlformats.org/presentationml/2006/main" xmlns:r="http://schemas.openxmlformats.org/officeDocument/2006/relationships">
-  <p:cSld>
-    <p:bg>
-      <p:bgPr>
-        <a:solidFill>
-          <a:srgbClr val="FFFFFF"/>
-        </a:solidFill>
-        <a:effectLst/>
-      </p:bgPr>
-    </p:bg>
-    <p:spTree>
-      <p:nvGrpSpPr>
-        <p:cNvPr id="1" name=""/>
-        <p:cNvGrpSpPr/>
-        <p:nvPr/>
-      </p:nvGrpSpPr>
-      <p:grpSpPr/>
-      <p:sp>
-        <p:nvSpPr>
-          <p:cNvPr id="2" name="Rectangle 1"/>
-          <p:cNvSpPr/>
-          <p:nvPr/>
-        </p:nvSpPr>
-        <p:spPr>
-          <a:xfrm>
-            <a:off x="0" y="0"/>
-            <a:ext cx="12191695" cy="960120"/>
-          </a:xfrm>
-          <a:prstGeom prst="rect">
-            <a:avLst/>
-          </a:prstGeom>
-          <a:solidFill>
-            <a:srgbClr val="095292"/>
-          </a:solidFill>
-          <a:ln>
-            <a:noFill/>
-          </a:ln>
-        </p:spPr>
-        <p:style>
-          <a:lnRef idx="1">
-            <a:schemeClr val="accent1"/>
-          </a:lnRef>
-          <a:fillRef idx="3">
-            <a:schemeClr val="accent1"/>
-          </a:fillRef>
-          <a:effectRef idx="2">
-            <a:schemeClr val="accent1"/>
-          </a:effectRef>
-          <a:fontRef idx="minor">
-            <a:schemeClr val="lt1"/>
-          </a:fontRef>
-        </p:style>
-        <p:txBody>
-          <a:bodyPr rtlCol="0" anchor="ctr"/>
-          <a:lstStyle/>
-          <a:p>
-            <a:pPr algn="ctr"/>
-          </a:p>
-        </p:txBody>
-      </p:sp>
-      <p:sp>
-        <p:nvSpPr>
-          <p:cNvPr id="3" name="Rectangle 2"/>
-          <p:cNvSpPr/>
-          <p:nvPr/>
-        </p:nvSpPr>
-        <p:spPr>
-          <a:xfrm>
-            <a:off x="0" y="960120"/>
-            <a:ext cx="12191695" cy="41148"/>
-          </a:xfrm>
-          <a:prstGeom prst="rect">
-            <a:avLst/>
-          </a:prstGeom>
-          <a:solidFill>
-            <a:srgbClr val="FFD000"/>
-          </a:solidFill>
-          <a:ln>
-            <a:noFill/>
-          </a:ln>
-        </p:spPr>
-        <p:style>
-          <a:lnRef idx="1">
-            <a:schemeClr val="accent1"/>
-          </a:lnRef>
-          <a:fillRef idx="3">
-            <a:schemeClr val="accent1"/>
-          </a:fillRef>
-          <a:effectRef idx="2">
-            <a:schemeClr val="accent1"/>
-          </a:effectRef>
-          <a:fontRef idx="minor">
-            <a:schemeClr val="lt1"/>
-          </a:fontRef>
-        </p:style>
-        <p:txBody>
-          <a:bodyPr rtlCol="0" anchor="ctr"/>
-          <a:lstStyle/>
-          <a:p>
-            <a:pPr algn="ctr"/>
-          </a:p>
-        </p:txBody>
-      </p:sp>
-      <p:sp>
-        <p:nvSpPr>
-          <p:cNvPr id="4" name="TextBox 3"/>
-          <p:cNvSpPr txBox="1"/>
-          <p:nvPr/>
-        </p:nvSpPr>
-        <p:spPr>
-          <a:xfrm>
-            <a:off x="457200" y="164592"/>
-            <a:ext cx="11277295" cy="502920"/>
-          </a:xfrm>
-          <a:prstGeom prst="rect">
-            <a:avLst/>
-          </a:prstGeom>
-          <a:noFill/>
-        </p:spPr>
-        <p:txBody>
-          <a:bodyPr wrap="square">
-            <a:spAutoFit/>
-          </a:bodyPr>
-          <a:lstStyle/>
-          <a:p>
-            <a:r>
-              <a:rPr sz="2600" b="1" i="0">
-                <a:solidFill>
-                  <a:srgbClr val="FFFFFF"/>
-                </a:solidFill>
-                <a:latin typeface="Calibri"/>
-              </a:rPr>
-              <a:t>Taller PI VetCare — pasos guiados</a:t>
-            </a:r>
-          </a:p>
-        </p:txBody>
-      </p:sp>
-      <p:sp>
-        <p:nvSpPr>
-          <p:cNvPr id="5" name="Rounded Rectangle 4"/>
-          <p:cNvSpPr/>
-          <p:nvPr/>
-        </p:nvSpPr>
-        <p:spPr>
-          <a:xfrm>
-            <a:off x="457200" y="1234440"/>
-            <a:ext cx="11277295" cy="950976"/>
-          </a:xfrm>
-          <a:prstGeom prst="roundRect">
-            <a:avLst>
-              <a:gd name="adj" fmla="val 12000"/>
-            </a:avLst>
-          </a:prstGeom>
-          <a:solidFill>
-            <a:srgbClr val="F2F2F2"/>
-          </a:solidFill>
-          <a:ln>
-            <a:noFill/>
-          </a:ln>
-        </p:spPr>
-        <p:style>
-          <a:lnRef idx="1">
-            <a:schemeClr val="accent1"/>
-          </a:lnRef>
-          <a:fillRef idx="3">
-            <a:schemeClr val="accent1"/>
-          </a:fillRef>
-          <a:effectRef idx="2">
-            <a:schemeClr val="accent1"/>
-          </a:effectRef>
-          <a:fontRef idx="minor">
-            <a:schemeClr val="lt1"/>
-          </a:fontRef>
-        </p:style>
-        <p:txBody>
-          <a:bodyPr rtlCol="0" anchor="ctr"/>
-          <a:lstStyle/>
-          <a:p>
-            <a:pPr algn="ctr"/>
-          </a:p>
-        </p:txBody>
-      </p:sp>
-      <p:sp>
-        <p:nvSpPr>
-          <p:cNvPr id="6" name="Rounded Rectangle 5"/>
-          <p:cNvSpPr/>
-          <p:nvPr/>
-        </p:nvSpPr>
-        <p:spPr>
-          <a:xfrm>
-            <a:off x="594360" y="1490472"/>
-            <a:ext cx="438912" cy="438912"/>
-          </a:xfrm>
-          <a:prstGeom prst="roundRect">
-            <a:avLst>
-              <a:gd name="adj" fmla="val 12000"/>
-            </a:avLst>
-          </a:prstGeom>
-          <a:solidFill>
-            <a:srgbClr val="095292"/>
-          </a:solidFill>
-          <a:ln>
-            <a:noFill/>
-          </a:ln>
-        </p:spPr>
-        <p:style>
-          <a:lnRef idx="1">
-            <a:schemeClr val="accent1"/>
-          </a:lnRef>
-          <a:fillRef idx="3">
-            <a:schemeClr val="accent1"/>
-          </a:fillRef>
-          <a:effectRef idx="2">
-            <a:schemeClr val="accent1"/>
-          </a:effectRef>
-          <a:fontRef idx="minor">
-            <a:schemeClr val="lt1"/>
-          </a:fontRef>
-        </p:style>
-        <p:txBody>
-          <a:bodyPr rtlCol="0" anchor="ctr"/>
-          <a:lstStyle/>
-          <a:p>
-            <a:pPr algn="ctr"/>
-          </a:p>
-        </p:txBody>
-      </p:sp>
-      <p:sp>
-        <p:nvSpPr>
-          <p:cNvPr id="7" name="TextBox 6"/>
-          <p:cNvSpPr txBox="1"/>
-          <p:nvPr/>
-        </p:nvSpPr>
-        <p:spPr>
-          <a:xfrm>
-            <a:off x="594360" y="1490472"/>
-            <a:ext cx="438912" cy="438912"/>
-          </a:xfrm>
-          <a:prstGeom prst="rect">
-            <a:avLst/>
-          </a:prstGeom>
-          <a:noFill/>
-        </p:spPr>
-        <p:txBody>
-          <a:bodyPr wrap="square" anchor="ctr"/>
-          <a:lstStyle/>
-          <a:p>
-            <a:pPr algn="ctr"/>
-            <a:r>
-              <a:rPr sz="1600" b="1" i="0">
-                <a:solidFill>
-                  <a:srgbClr val="FFFFFF"/>
-                </a:solidFill>
-                <a:latin typeface="Calibri"/>
-              </a:rPr>
-              <a:t>1</a:t>
-            </a:r>
-          </a:p>
-        </p:txBody>
-      </p:sp>
-      <p:sp>
-        <p:nvSpPr>
-          <p:cNvPr id="8" name="TextBox 7"/>
-          <p:cNvSpPr txBox="1"/>
-          <p:nvPr/>
-        </p:nvSpPr>
-        <p:spPr>
-          <a:xfrm>
-            <a:off x="1188720" y="1325880"/>
-            <a:ext cx="10271455" cy="786384"/>
-          </a:xfrm>
-          <a:prstGeom prst="rect">
-            <a:avLst/>
-          </a:prstGeom>
-          <a:noFill/>
-        </p:spPr>
-        <p:txBody>
-          <a:bodyPr wrap="square" anchor="ctr"/>
-          <a:lstStyle/>
-          <a:p>
-            <a:r>
-              <a:rPr sz="1500" b="1" i="0">
-                <a:solidFill>
-                  <a:srgbClr val="095292"/>
-                </a:solidFill>
-                <a:latin typeface="Calibri"/>
-              </a:rPr>
-              <a:t>Escribir sp_agendar_cita en PL/pgSQL y ejecutarlo en la plataforma del curso (LANGUAGE plpgsql, dollar-quoting, sin sintaxis de Oracle).</a:t>
-            </a:r>
-          </a:p>
-        </p:txBody>
-      </p:sp>
-      <p:sp>
-        <p:nvSpPr>
-          <p:cNvPr id="9" name="Rounded Rectangle 8"/>
-          <p:cNvSpPr/>
-          <p:nvPr/>
-        </p:nvSpPr>
-        <p:spPr>
-          <a:xfrm>
-            <a:off x="457200" y="2276856"/>
-            <a:ext cx="11277295" cy="950976"/>
-          </a:xfrm>
-          <a:prstGeom prst="roundRect">
-            <a:avLst>
-              <a:gd name="adj" fmla="val 12000"/>
-            </a:avLst>
-          </a:prstGeom>
-          <a:solidFill>
-            <a:srgbClr val="E8F4FA"/>
-          </a:solidFill>
-          <a:ln>
-            <a:noFill/>
-          </a:ln>
-        </p:spPr>
-        <p:style>
-          <a:lnRef idx="1">
-            <a:schemeClr val="accent1"/>
-          </a:lnRef>
-          <a:fillRef idx="3">
-            <a:schemeClr val="accent1"/>
-          </a:fillRef>
-          <a:effectRef idx="2">
-            <a:schemeClr val="accent1"/>
-          </a:effectRef>
-          <a:fontRef idx="minor">
-            <a:schemeClr val="lt1"/>
-          </a:fontRef>
-        </p:style>
-        <p:txBody>
-          <a:bodyPr rtlCol="0" anchor="ctr"/>
-          <a:lstStyle/>
-          <a:p>
-            <a:pPr algn="ctr"/>
-          </a:p>
-        </p:txBody>
-      </p:sp>
-      <p:sp>
-        <p:nvSpPr>
-          <p:cNvPr id="10" name="Rounded Rectangle 9"/>
-          <p:cNvSpPr/>
-          <p:nvPr/>
-        </p:nvSpPr>
-        <p:spPr>
-          <a:xfrm>
-            <a:off x="594360" y="2532888"/>
-            <a:ext cx="438912" cy="438912"/>
-          </a:xfrm>
-          <a:prstGeom prst="roundRect">
-            <a:avLst>
-              <a:gd name="adj" fmla="val 12000"/>
-            </a:avLst>
-          </a:prstGeom>
-          <a:solidFill>
-            <a:srgbClr val="095292"/>
-          </a:solidFill>
-          <a:ln>
-            <a:noFill/>
-          </a:ln>
-        </p:spPr>
-        <p:style>
-          <a:lnRef idx="1">
-            <a:schemeClr val="accent1"/>
-          </a:lnRef>
-          <a:fillRef idx="3">
-            <a:schemeClr val="accent1"/>
-          </a:fillRef>
-          <a:effectRef idx="2">
-            <a:schemeClr val="accent1"/>
-          </a:effectRef>
-          <a:fontRef idx="minor">
-            <a:schemeClr val="lt1"/>
-          </a:fontRef>
-        </p:style>
-        <p:txBody>
-          <a:bodyPr rtlCol="0" anchor="ctr"/>
-          <a:lstStyle/>
-          <a:p>
-            <a:pPr algn="ctr"/>
-          </a:p>
-        </p:txBody>
-      </p:sp>
-      <p:sp>
-        <p:nvSpPr>
-          <p:cNvPr id="11" name="TextBox 10"/>
-          <p:cNvSpPr txBox="1"/>
-          <p:nvPr/>
-        </p:nvSpPr>
-        <p:spPr>
-          <a:xfrm>
-            <a:off x="594360" y="2532888"/>
-            <a:ext cx="438912" cy="438912"/>
-          </a:xfrm>
-          <a:prstGeom prst="rect">
-            <a:avLst/>
-          </a:prstGeom>
-          <a:noFill/>
-        </p:spPr>
-        <p:txBody>
-          <a:bodyPr wrap="square" anchor="ctr"/>
-          <a:lstStyle/>
-          <a:p>
-            <a:pPr algn="ctr"/>
-            <a:r>
-              <a:rPr sz="1600" b="1" i="0">
-                <a:solidFill>
-                  <a:srgbClr val="FFFFFF"/>
-                </a:solidFill>
-                <a:latin typeface="Calibri"/>
-              </a:rPr>
-              <a:t>2</a:t>
-            </a:r>
-          </a:p>
-        </p:txBody>
-      </p:sp>
-      <p:sp>
-        <p:nvSpPr>
-          <p:cNvPr id="12" name="TextBox 11"/>
-          <p:cNvSpPr txBox="1"/>
-          <p:nvPr/>
-        </p:nvSpPr>
-        <p:spPr>
-          <a:xfrm>
-            <a:off x="1188720" y="2368296"/>
-            <a:ext cx="10271455" cy="786384"/>
-          </a:xfrm>
-          <a:prstGeom prst="rect">
-            <a:avLst/>
-          </a:prstGeom>
-          <a:noFill/>
-        </p:spPr>
-        <p:txBody>
-          <a:bodyPr wrap="square" anchor="ctr"/>
-          <a:lstStyle/>
-          <a:p>
-            <a:r>
-              <a:rPr sz="1500" b="1" i="0">
-                <a:solidFill>
-                  <a:srgbClr val="095292"/>
-                </a:solidFill>
-                <a:latin typeface="Calibri"/>
-              </a:rPr>
-              <a:t>Incluir las 3 validaciones de negocio del PI, cada una con su RAISE EXCEPTION y su mensaje literal.</a:t>
-            </a:r>
-          </a:p>
-        </p:txBody>
-      </p:sp>
-      <p:sp>
-        <p:nvSpPr>
-          <p:cNvPr id="13" name="Rounded Rectangle 12"/>
-          <p:cNvSpPr/>
-          <p:nvPr/>
-        </p:nvSpPr>
-        <p:spPr>
-          <a:xfrm>
-            <a:off x="457200" y="3319272"/>
-            <a:ext cx="11277295" cy="950976"/>
-          </a:xfrm>
-          <a:prstGeom prst="roundRect">
-            <a:avLst>
-              <a:gd name="adj" fmla="val 12000"/>
-            </a:avLst>
-          </a:prstGeom>
-          <a:solidFill>
-            <a:srgbClr val="F2F2F2"/>
-          </a:solidFill>
-          <a:ln>
-            <a:noFill/>
-          </a:ln>
-        </p:spPr>
-        <p:style>
-          <a:lnRef idx="1">
-            <a:schemeClr val="accent1"/>
-          </a:lnRef>
-          <a:fillRef idx="3">
-            <a:schemeClr val="accent1"/>
-          </a:fillRef>
-          <a:effectRef idx="2">
-            <a:schemeClr val="accent1"/>
-          </a:effectRef>
-          <a:fontRef idx="minor">
-            <a:schemeClr val="lt1"/>
-          </a:fontRef>
-        </p:style>
-        <p:txBody>
-          <a:bodyPr rtlCol="0" anchor="ctr"/>
-          <a:lstStyle/>
-          <a:p>
-            <a:pPr algn="ctr"/>
-          </a:p>
-        </p:txBody>
-      </p:sp>
-      <p:sp>
-        <p:nvSpPr>
-          <p:cNvPr id="14" name="Rounded Rectangle 13"/>
-          <p:cNvSpPr/>
-          <p:nvPr/>
-        </p:nvSpPr>
-        <p:spPr>
-          <a:xfrm>
-            <a:off x="594360" y="3575304"/>
-            <a:ext cx="438912" cy="438912"/>
-          </a:xfrm>
-          <a:prstGeom prst="roundRect">
-            <a:avLst>
-              <a:gd name="adj" fmla="val 12000"/>
-            </a:avLst>
-          </a:prstGeom>
-          <a:solidFill>
-            <a:srgbClr val="095292"/>
-          </a:solidFill>
-          <a:ln>
-            <a:noFill/>
-          </a:ln>
-        </p:spPr>
-        <p:style>
-          <a:lnRef idx="1">
-            <a:schemeClr val="accent1"/>
-          </a:lnRef>
-          <a:fillRef idx="3">
-            <a:schemeClr val="accent1"/>
-          </a:fillRef>
-          <a:effectRef idx="2">
-            <a:schemeClr val="accent1"/>
-          </a:effectRef>
-          <a:fontRef idx="minor">
-            <a:schemeClr val="lt1"/>
-          </a:fontRef>
-        </p:style>
-        <p:txBody>
-          <a:bodyPr rtlCol="0" anchor="ctr"/>
-          <a:lstStyle/>
-          <a:p>
-            <a:pPr algn="ctr"/>
-          </a:p>
-        </p:txBody>
-      </p:sp>
-      <p:sp>
-        <p:nvSpPr>
-          <p:cNvPr id="15" name="TextBox 14"/>
-          <p:cNvSpPr txBox="1"/>
-          <p:nvPr/>
-        </p:nvSpPr>
-        <p:spPr>
-          <a:xfrm>
-            <a:off x="594360" y="3575304"/>
-            <a:ext cx="438912" cy="438912"/>
-          </a:xfrm>
-          <a:prstGeom prst="rect">
-            <a:avLst/>
-          </a:prstGeom>
-          <a:noFill/>
-        </p:spPr>
-        <p:txBody>
-          <a:bodyPr wrap="square" anchor="ctr"/>
-          <a:lstStyle/>
-          <a:p>
-            <a:pPr algn="ctr"/>
-            <a:r>
-              <a:rPr sz="1600" b="1" i="0">
-                <a:solidFill>
-                  <a:srgbClr val="FFFFFF"/>
-                </a:solidFill>
-                <a:latin typeface="Calibri"/>
-              </a:rPr>
-              <a:t>3</a:t>
-            </a:r>
-          </a:p>
-        </p:txBody>
-      </p:sp>
-      <p:sp>
-        <p:nvSpPr>
-          <p:cNvPr id="16" name="TextBox 15"/>
-          <p:cNvSpPr txBox="1"/>
-          <p:nvPr/>
-        </p:nvSpPr>
-        <p:spPr>
-          <a:xfrm>
-            <a:off x="1188720" y="3410712"/>
-            <a:ext cx="10271455" cy="786384"/>
-          </a:xfrm>
-          <a:prstGeom prst="rect">
-            <a:avLst/>
-          </a:prstGeom>
-          <a:noFill/>
-        </p:spPr>
-        <p:txBody>
-          <a:bodyPr wrap="square" anchor="ctr"/>
-          <a:lstStyle/>
-          <a:p>
-            <a:r>
-              <a:rPr sz="1500" b="1" i="0">
-                <a:solidFill>
-                  <a:srgbClr val="095292"/>
-                </a:solidFill>
-                <a:latin typeface="Calibri"/>
-              </a:rPr>
-              <a:t>Correr la bateria de pruebas con bloques DO: 1 caso OK + 3 casos error, escritos en resultado_prueba, mas el COUNT(*) de cita antes y despues.</a:t>
-            </a:r>
-          </a:p>
-        </p:txBody>
-      </p:sp>
-      <p:sp>
-        <p:nvSpPr>
-          <p:cNvPr id="17" name="Rounded Rectangle 16"/>
-          <p:cNvSpPr/>
-          <p:nvPr/>
-        </p:nvSpPr>
-        <p:spPr>
-          <a:xfrm>
-            <a:off x="457200" y="4361688"/>
-            <a:ext cx="11277295" cy="950976"/>
-          </a:xfrm>
-          <a:prstGeom prst="roundRect">
-            <a:avLst>
-              <a:gd name="adj" fmla="val 12000"/>
-            </a:avLst>
-          </a:prstGeom>
-          <a:solidFill>
-            <a:srgbClr val="E8F4FA"/>
-          </a:solidFill>
-          <a:ln>
-            <a:noFill/>
-          </a:ln>
-        </p:spPr>
-        <p:style>
-          <a:lnRef idx="1">
-            <a:schemeClr val="accent1"/>
-          </a:lnRef>
-          <a:fillRef idx="3">
-            <a:schemeClr val="accent1"/>
-          </a:fillRef>
-          <a:effectRef idx="2">
-            <a:schemeClr val="accent1"/>
-          </a:effectRef>
-          <a:fontRef idx="minor">
-            <a:schemeClr val="lt1"/>
-          </a:fontRef>
-        </p:style>
-        <p:txBody>
-          <a:bodyPr rtlCol="0" anchor="ctr"/>
-          <a:lstStyle/>
-          <a:p>
-            <a:pPr algn="ctr"/>
-          </a:p>
-        </p:txBody>
-      </p:sp>
-      <p:sp>
-        <p:nvSpPr>
-          <p:cNvPr id="18" name="Rounded Rectangle 17"/>
-          <p:cNvSpPr/>
-          <p:nvPr/>
-        </p:nvSpPr>
-        <p:spPr>
-          <a:xfrm>
-            <a:off x="594360" y="4617720"/>
-            <a:ext cx="438912" cy="438912"/>
-          </a:xfrm>
-          <a:prstGeom prst="roundRect">
-            <a:avLst>
-              <a:gd name="adj" fmla="val 12000"/>
-            </a:avLst>
-          </a:prstGeom>
-          <a:solidFill>
-            <a:srgbClr val="095292"/>
-          </a:solidFill>
-          <a:ln>
-            <a:noFill/>
-          </a:ln>
-        </p:spPr>
-        <p:style>
-          <a:lnRef idx="1">
-            <a:schemeClr val="accent1"/>
-          </a:lnRef>
-          <a:fillRef idx="3">
-            <a:schemeClr val="accent1"/>
-          </a:fillRef>
-          <a:effectRef idx="2">
-            <a:schemeClr val="accent1"/>
-          </a:effectRef>
-          <a:fontRef idx="minor">
-            <a:schemeClr val="lt1"/>
-          </a:fontRef>
-        </p:style>
-        <p:txBody>
-          <a:bodyPr rtlCol="0" anchor="ctr"/>
-          <a:lstStyle/>
-          <a:p>
-            <a:pPr algn="ctr"/>
-          </a:p>
-        </p:txBody>
-      </p:sp>
-      <p:sp>
-        <p:nvSpPr>
-          <p:cNvPr id="19" name="TextBox 18"/>
-          <p:cNvSpPr txBox="1"/>
-          <p:nvPr/>
-        </p:nvSpPr>
-        <p:spPr>
-          <a:xfrm>
-            <a:off x="594360" y="4617720"/>
-            <a:ext cx="438912" cy="438912"/>
-          </a:xfrm>
-          <a:prstGeom prst="rect">
-            <a:avLst/>
-          </a:prstGeom>
-          <a:noFill/>
-        </p:spPr>
-        <p:txBody>
-          <a:bodyPr wrap="square" anchor="ctr"/>
-          <a:lstStyle/>
-          <a:p>
-            <a:pPr algn="ctr"/>
-            <a:r>
-              <a:rPr sz="1600" b="1" i="0">
-                <a:solidFill>
-                  <a:srgbClr val="FFFFFF"/>
-                </a:solidFill>
-                <a:latin typeface="Calibri"/>
-              </a:rPr>
-              <a:t>4</a:t>
-            </a:r>
-          </a:p>
-        </p:txBody>
-      </p:sp>
-      <p:sp>
-        <p:nvSpPr>
-          <p:cNvPr id="20" name="TextBox 19"/>
-          <p:cNvSpPr txBox="1"/>
-          <p:nvPr/>
-        </p:nvSpPr>
-        <p:spPr>
-          <a:xfrm>
-            <a:off x="1188720" y="4453128"/>
-            <a:ext cx="10271455" cy="786384"/>
-          </a:xfrm>
-          <a:prstGeom prst="rect">
-            <a:avLst/>
-          </a:prstGeom>
-          <a:noFill/>
-        </p:spPr>
-        <p:txBody>
-          <a:bodyPr wrap="square" anchor="ctr"/>
-          <a:lstStyle/>
-          <a:p>
-            <a:r>
-              <a:rPr sz="1500" b="1" i="0">
-                <a:solidFill>
-                  <a:srgbClr val="095292"/>
-                </a:solidFill>
-                <a:latin typeface="Calibri"/>
-              </a:rPr>
-              <a:t>Escribir sp_registrar_consulta, comprobando con EXISTS antes de chocar contra la restriccion UNIQUE.</a:t>
-            </a:r>
-          </a:p>
-        </p:txBody>
-      </p:sp>
-      <p:sp>
-        <p:nvSpPr>
-          <p:cNvPr id="21" name="Rounded Rectangle 20"/>
-          <p:cNvSpPr/>
-          <p:nvPr/>
-        </p:nvSpPr>
-        <p:spPr>
-          <a:xfrm>
-            <a:off x="457200" y="5404104"/>
-            <a:ext cx="11277295" cy="950976"/>
-          </a:xfrm>
-          <a:prstGeom prst="roundRect">
-            <a:avLst>
-              <a:gd name="adj" fmla="val 12000"/>
-            </a:avLst>
-          </a:prstGeom>
-          <a:solidFill>
-            <a:srgbClr val="F2F2F2"/>
-          </a:solidFill>
-          <a:ln>
-            <a:noFill/>
-          </a:ln>
-        </p:spPr>
-        <p:style>
-          <a:lnRef idx="1">
-            <a:schemeClr val="accent1"/>
-          </a:lnRef>
-          <a:fillRef idx="3">
-            <a:schemeClr val="accent1"/>
-          </a:fillRef>
-          <a:effectRef idx="2">
-            <a:schemeClr val="accent1"/>
-          </a:effectRef>
-          <a:fontRef idx="minor">
-            <a:schemeClr val="lt1"/>
-          </a:fontRef>
-        </p:style>
-        <p:txBody>
-          <a:bodyPr rtlCol="0" anchor="ctr"/>
-          <a:lstStyle/>
-          <a:p>
-            <a:pPr algn="ctr"/>
-          </a:p>
-        </p:txBody>
-      </p:sp>
-      <p:sp>
-        <p:nvSpPr>
-          <p:cNvPr id="22" name="Rounded Rectangle 21"/>
-          <p:cNvSpPr/>
-          <p:nvPr/>
-        </p:nvSpPr>
-        <p:spPr>
-          <a:xfrm>
-            <a:off x="594360" y="5660136"/>
-            <a:ext cx="438912" cy="438912"/>
-          </a:xfrm>
-          <a:prstGeom prst="roundRect">
-            <a:avLst>
-              <a:gd name="adj" fmla="val 12000"/>
-            </a:avLst>
-          </a:prstGeom>
-          <a:solidFill>
-            <a:srgbClr val="095292"/>
-          </a:solidFill>
-          <a:ln>
-            <a:noFill/>
-          </a:ln>
-        </p:spPr>
-        <p:style>
-          <a:lnRef idx="1">
-            <a:schemeClr val="accent1"/>
-          </a:lnRef>
-          <a:fillRef idx="3">
-            <a:schemeClr val="accent1"/>
-          </a:fillRef>
-          <a:effectRef idx="2">
-            <a:schemeClr val="accent1"/>
-          </a:effectRef>
-          <a:fontRef idx="minor">
-            <a:schemeClr val="lt1"/>
-          </a:fontRef>
-        </p:style>
-        <p:txBody>
-          <a:bodyPr rtlCol="0" anchor="ctr"/>
-          <a:lstStyle/>
-          <a:p>
-            <a:pPr algn="ctr"/>
-          </a:p>
-        </p:txBody>
-      </p:sp>
-      <p:sp>
-        <p:nvSpPr>
-          <p:cNvPr id="23" name="TextBox 22"/>
-          <p:cNvSpPr txBox="1"/>
-          <p:nvPr/>
-        </p:nvSpPr>
-        <p:spPr>
-          <a:xfrm>
-            <a:off x="594360" y="5660136"/>
-            <a:ext cx="438912" cy="438912"/>
-          </a:xfrm>
-          <a:prstGeom prst="rect">
-            <a:avLst/>
-          </a:prstGeom>
-          <a:noFill/>
-        </p:spPr>
-        <p:txBody>
-          <a:bodyPr wrap="square" anchor="ctr"/>
-          <a:lstStyle/>
-          <a:p>
-            <a:pPr algn="ctr"/>
-            <a:r>
-              <a:rPr sz="1600" b="1" i="0">
-                <a:solidFill>
-                  <a:srgbClr val="FFFFFF"/>
-                </a:solidFill>
-                <a:latin typeface="Calibri"/>
-              </a:rPr>
-              <a:t>5</a:t>
-            </a:r>
-          </a:p>
-        </p:txBody>
-      </p:sp>
-      <p:sp>
-        <p:nvSpPr>
-          <p:cNvPr id="24" name="TextBox 23"/>
-          <p:cNvSpPr txBox="1"/>
-          <p:nvPr/>
-        </p:nvSpPr>
-        <p:spPr>
-          <a:xfrm>
-            <a:off x="1188720" y="5495544"/>
-            <a:ext cx="10271455" cy="786384"/>
-          </a:xfrm>
-          <a:prstGeom prst="rect">
-            <a:avLst/>
-          </a:prstGeom>
-          <a:noFill/>
-        </p:spPr>
-        <p:txBody>
-          <a:bodyPr wrap="square" anchor="ctr"/>
-          <a:lstStyle/>
-          <a:p>
-            <a:r>
-              <a:rPr sz="1500" b="1" i="0">
-                <a:solidFill>
-                  <a:srgbClr val="095292"/>
-                </a:solidFill>
-                <a:latin typeface="Calibri"/>
-              </a:rPr>
-              <a:t>Redactar el contrato del proc en sus 6 bloques (plantilla en este documento) y pegarlo en la pregunta 5.</a:t>
-            </a:r>
-          </a:p>
-        </p:txBody>
-      </p:sp>
-      <p:sp>
-        <p:nvSpPr>
-          <p:cNvPr id="25" name="TextBox 24"/>
-          <p:cNvSpPr txBox="1"/>
-          <p:nvPr/>
-        </p:nvSpPr>
-        <p:spPr>
-          <a:xfrm>
-            <a:off x="11185855" y="6473952"/>
-            <a:ext cx="640080" cy="274320"/>
-          </a:xfrm>
-          <a:prstGeom prst="rect">
-            <a:avLst/>
-          </a:prstGeom>
-          <a:noFill/>
-        </p:spPr>
-        <p:txBody>
-          <a:bodyPr wrap="square">
-            <a:spAutoFit/>
-          </a:bodyPr>
-          <a:lstStyle/>
-          <a:p>
-            <a:pPr algn="r"/>
-            <a:r>
-              <a:rPr sz="1100" b="0" i="0">
-                <a:solidFill>
-                  <a:srgbClr val="666666"/>
-                </a:solidFill>
-                <a:latin typeface="Calibri"/>
-              </a:rPr>
-              <a:t>57</a:t>
-            </a:r>
-          </a:p>
-        </p:txBody>
-      </p:sp>
-    </p:spTree>
-  </p:cSld>
-  <p:clrMapOvr>
-    <a:masterClrMapping/>
-  </p:clrMapOvr>
-</p:sld>
-</file>
-
-<file path=ppt/slides/slide58.xml><?xml version="1.0" encoding="utf-8"?>
-<p:sld xmlns:a="http://schemas.openxmlformats.org/drawingml/2006/main" xmlns:p="http://schemas.openxmlformats.org/presentationml/2006/main" xmlns:r="http://schemas.openxmlformats.org/officeDocument/2006/relationships">
-  <p:cSld>
-    <p:bg>
-      <p:bgPr>
-        <a:solidFill>
-          <a:srgbClr val="FFFFFF"/>
-        </a:solidFill>
-        <a:effectLst/>
-      </p:bgPr>
-    </p:bg>
-    <p:spTree>
-      <p:nvGrpSpPr>
-        <p:cNvPr id="1" name=""/>
-        <p:cNvGrpSpPr/>
-        <p:nvPr/>
-      </p:nvGrpSpPr>
-      <p:grpSpPr/>
-      <p:sp>
-        <p:nvSpPr>
-          <p:cNvPr id="2" name="Rectangle 1"/>
-          <p:cNvSpPr/>
-          <p:nvPr/>
-        </p:nvSpPr>
-        <p:spPr>
-          <a:xfrm>
-            <a:off x="0" y="0"/>
-            <a:ext cx="12191695" cy="960120"/>
-          </a:xfrm>
-          <a:prstGeom prst="rect">
-            <a:avLst/>
-          </a:prstGeom>
-          <a:solidFill>
-            <a:srgbClr val="095292"/>
-          </a:solidFill>
-          <a:ln>
-            <a:noFill/>
-          </a:ln>
-        </p:spPr>
-        <p:style>
-          <a:lnRef idx="1">
-            <a:schemeClr val="accent1"/>
-          </a:lnRef>
-          <a:fillRef idx="3">
-            <a:schemeClr val="accent1"/>
-          </a:fillRef>
-          <a:effectRef idx="2">
-            <a:schemeClr val="accent1"/>
-          </a:effectRef>
-          <a:fontRef idx="minor">
-            <a:schemeClr val="lt1"/>
-          </a:fontRef>
-        </p:style>
-        <p:txBody>
-          <a:bodyPr rtlCol="0" anchor="ctr"/>
-          <a:lstStyle/>
-          <a:p>
-            <a:pPr algn="ctr"/>
-          </a:p>
-        </p:txBody>
-      </p:sp>
-      <p:sp>
-        <p:nvSpPr>
-          <p:cNvPr id="3" name="Rectangle 2"/>
-          <p:cNvSpPr/>
-          <p:nvPr/>
-        </p:nvSpPr>
-        <p:spPr>
-          <a:xfrm>
-            <a:off x="0" y="960120"/>
-            <a:ext cx="12191695" cy="41148"/>
-          </a:xfrm>
-          <a:prstGeom prst="rect">
-            <a:avLst/>
-          </a:prstGeom>
-          <a:solidFill>
-            <a:srgbClr val="FFD000"/>
-          </a:solidFill>
-          <a:ln>
-            <a:noFill/>
-          </a:ln>
-        </p:spPr>
-        <p:style>
-          <a:lnRef idx="1">
-            <a:schemeClr val="accent1"/>
-          </a:lnRef>
-          <a:fillRef idx="3">
-            <a:schemeClr val="accent1"/>
-          </a:fillRef>
-          <a:effectRef idx="2">
-            <a:schemeClr val="accent1"/>
-          </a:effectRef>
-          <a:fontRef idx="minor">
-            <a:schemeClr val="lt1"/>
-          </a:fontRef>
-        </p:style>
-        <p:txBody>
-          <a:bodyPr rtlCol="0" anchor="ctr"/>
-          <a:lstStyle/>
-          <a:p>
-            <a:pPr algn="ctr"/>
-          </a:p>
-        </p:txBody>
-      </p:sp>
-      <p:sp>
-        <p:nvSpPr>
-          <p:cNvPr id="4" name="TextBox 3"/>
-          <p:cNvSpPr txBox="1"/>
-          <p:nvPr/>
-        </p:nvSpPr>
-        <p:spPr>
-          <a:xfrm>
-            <a:off x="457200" y="164592"/>
-            <a:ext cx="11277295" cy="502920"/>
-          </a:xfrm>
-          <a:prstGeom prst="rect">
-            <a:avLst/>
-          </a:prstGeom>
-          <a:noFill/>
-        </p:spPr>
-        <p:txBody>
-          <a:bodyPr wrap="square">
-            <a:spAutoFit/>
-          </a:bodyPr>
-          <a:lstStyle/>
-          <a:p>
-            <a:r>
-              <a:rPr sz="2600" b="1" i="0">
-                <a:solidFill>
-                  <a:srgbClr val="FFFFFF"/>
-                </a:solidFill>
-                <a:latin typeface="Calibri"/>
-              </a:rPr>
-              <a:t>Taller PI VetCare — pistas (checklist vacio)</a:t>
-            </a:r>
-          </a:p>
-        </p:txBody>
-      </p:sp>
-      <p:sp>
-        <p:nvSpPr>
-          <p:cNvPr id="5" name="Rounded Rectangle 4"/>
-          <p:cNvSpPr/>
-          <p:nvPr/>
-        </p:nvSpPr>
-        <p:spPr>
-          <a:xfrm>
-            <a:off x="457200" y="1261872"/>
-            <a:ext cx="11277295" cy="566928"/>
-          </a:xfrm>
-          <a:prstGeom prst="roundRect">
-            <a:avLst>
-              <a:gd name="adj" fmla="val 12000"/>
-            </a:avLst>
-          </a:prstGeom>
-          <a:solidFill>
-            <a:srgbClr val="F2F2F2"/>
-          </a:solidFill>
-          <a:ln>
-            <a:noFill/>
-          </a:ln>
-        </p:spPr>
-        <p:style>
-          <a:lnRef idx="1">
-            <a:schemeClr val="accent1"/>
-          </a:lnRef>
-          <a:fillRef idx="3">
-            <a:schemeClr val="accent1"/>
-          </a:fillRef>
-          <a:effectRef idx="2">
-            <a:schemeClr val="accent1"/>
-          </a:effectRef>
-          <a:fontRef idx="minor">
-            <a:schemeClr val="lt1"/>
-          </a:fontRef>
-        </p:style>
-        <p:txBody>
-          <a:bodyPr rtlCol="0" anchor="ctr"/>
-          <a:lstStyle/>
-          <a:p>
-            <a:pPr algn="ctr"/>
-          </a:p>
-        </p:txBody>
-      </p:sp>
-      <p:sp>
-        <p:nvSpPr>
-          <p:cNvPr id="6" name="Rectangle 5"/>
-          <p:cNvSpPr/>
-          <p:nvPr/>
-        </p:nvSpPr>
-        <p:spPr>
-          <a:xfrm>
-            <a:off x="640080" y="1408175"/>
-            <a:ext cx="274320" cy="274320"/>
-          </a:xfrm>
-          <a:prstGeom prst="rect">
-            <a:avLst/>
-          </a:prstGeom>
-          <a:solidFill>
-            <a:srgbClr val="FFFFFF"/>
-          </a:solidFill>
-          <a:ln>
-            <a:solidFill>
-              <a:srgbClr val="333333"/>
-            </a:solidFill>
-          </a:ln>
-        </p:spPr>
-        <p:style>
-          <a:lnRef idx="1">
-            <a:schemeClr val="accent1"/>
-          </a:lnRef>
-          <a:fillRef idx="3">
-            <a:schemeClr val="accent1"/>
-          </a:fillRef>
-          <a:effectRef idx="2">
-            <a:schemeClr val="accent1"/>
-          </a:effectRef>
-          <a:fontRef idx="minor">
-            <a:schemeClr val="lt1"/>
-          </a:fontRef>
-        </p:style>
-        <p:txBody>
-          <a:bodyPr rtlCol="0" anchor="ctr"/>
-          <a:lstStyle/>
-          <a:p>
-            <a:pPr algn="ctr"/>
-          </a:p>
-        </p:txBody>
-      </p:sp>
-      <p:sp>
-        <p:nvSpPr>
-          <p:cNvPr id="7" name="Rectangle 6"/>
-          <p:cNvSpPr/>
-          <p:nvPr/>
-        </p:nvSpPr>
-        <p:spPr>
-          <a:xfrm>
-            <a:off x="640080" y="1408175"/>
-            <a:ext cx="73152" cy="274320"/>
-          </a:xfrm>
-          <a:prstGeom prst="rect">
-            <a:avLst/>
-          </a:prstGeom>
-          <a:solidFill>
-            <a:srgbClr val="269CCB"/>
-          </a:solidFill>
-          <a:ln>
-            <a:noFill/>
-          </a:ln>
-        </p:spPr>
-        <p:style>
-          <a:lnRef idx="1">
-            <a:schemeClr val="accent1"/>
-          </a:lnRef>
-          <a:fillRef idx="3">
-            <a:schemeClr val="accent1"/>
-          </a:fillRef>
-          <a:effectRef idx="2">
-            <a:schemeClr val="accent1"/>
-          </a:effectRef>
-          <a:fontRef idx="minor">
-            <a:schemeClr val="lt1"/>
-          </a:fontRef>
-        </p:style>
-        <p:txBody>
-          <a:bodyPr rtlCol="0" anchor="ctr"/>
-          <a:lstStyle/>
-          <a:p>
-            <a:pPr algn="ctr"/>
-          </a:p>
-        </p:txBody>
-      </p:sp>
-      <p:sp>
-        <p:nvSpPr>
-          <p:cNvPr id="8" name="TextBox 7"/>
-          <p:cNvSpPr txBox="1"/>
-          <p:nvPr/>
-        </p:nvSpPr>
-        <p:spPr>
-          <a:xfrm>
-            <a:off x="1097280" y="1353312"/>
-            <a:ext cx="10362895" cy="402336"/>
-          </a:xfrm>
-          <a:prstGeom prst="rect">
-            <a:avLst/>
-          </a:prstGeom>
-          <a:noFill/>
-        </p:spPr>
-        <p:txBody>
-          <a:bodyPr wrap="square" anchor="ctr"/>
-          <a:lstStyle/>
-          <a:p>
-            <a:r>
-              <a:rPr sz="1500" b="0" i="0">
-                <a:solidFill>
-                  <a:srgbClr val="333333"/>
-                </a:solidFill>
-                <a:latin typeface="Calibri"/>
-              </a:rPr>
-              <a:t>□ ¿El procedimiento se creó </a:t>
-            </a:r>
-            <a:r>
-              <a:rPr sz="1500" b="1" i="0">
-                <a:solidFill>
-                  <a:srgbClr val="333333"/>
-                </a:solidFill>
-                <a:latin typeface="Calibri"/>
-              </a:rPr>
-              <a:t>y</a:t>
-            </a:r>
-            <a:r>
-              <a:rPr sz="1500" b="0" i="0">
-                <a:solidFill>
-                  <a:srgbClr val="333333"/>
-                </a:solidFill>
-                <a:latin typeface="Calibri"/>
-              </a:rPr>
-              <a:t> el «CALL» corrió? Crear no es evidencia.</a:t>
-            </a:r>
-          </a:p>
-        </p:txBody>
-      </p:sp>
-      <p:sp>
-        <p:nvSpPr>
-          <p:cNvPr id="9" name="Rounded Rectangle 8"/>
-          <p:cNvSpPr/>
-          <p:nvPr/>
-        </p:nvSpPr>
-        <p:spPr>
-          <a:xfrm>
-            <a:off x="457200" y="1938528"/>
-            <a:ext cx="11277295" cy="566928"/>
-          </a:xfrm>
-          <a:prstGeom prst="roundRect">
-            <a:avLst>
-              <a:gd name="adj" fmla="val 12000"/>
-            </a:avLst>
-          </a:prstGeom>
-          <a:solidFill>
-            <a:srgbClr val="F2F2F2"/>
-          </a:solidFill>
-          <a:ln>
-            <a:noFill/>
-          </a:ln>
-        </p:spPr>
-        <p:style>
-          <a:lnRef idx="1">
-            <a:schemeClr val="accent1"/>
-          </a:lnRef>
-          <a:fillRef idx="3">
-            <a:schemeClr val="accent1"/>
-          </a:fillRef>
-          <a:effectRef idx="2">
-            <a:schemeClr val="accent1"/>
-          </a:effectRef>
-          <a:fontRef idx="minor">
-            <a:schemeClr val="lt1"/>
-          </a:fontRef>
-        </p:style>
-        <p:txBody>
-          <a:bodyPr rtlCol="0" anchor="ctr"/>
-          <a:lstStyle/>
-          <a:p>
-            <a:pPr algn="ctr"/>
-          </a:p>
-        </p:txBody>
-      </p:sp>
-      <p:sp>
-        <p:nvSpPr>
-          <p:cNvPr id="10" name="Rectangle 9"/>
-          <p:cNvSpPr/>
-          <p:nvPr/>
-        </p:nvSpPr>
-        <p:spPr>
-          <a:xfrm>
-            <a:off x="640080" y="2084832"/>
-            <a:ext cx="274320" cy="274320"/>
-          </a:xfrm>
-          <a:prstGeom prst="rect">
-            <a:avLst/>
-          </a:prstGeom>
-          <a:solidFill>
-            <a:srgbClr val="FFFFFF"/>
-          </a:solidFill>
-          <a:ln>
-            <a:solidFill>
-              <a:srgbClr val="333333"/>
-            </a:solidFill>
-          </a:ln>
-        </p:spPr>
-        <p:style>
-          <a:lnRef idx="1">
-            <a:schemeClr val="accent1"/>
-          </a:lnRef>
-          <a:fillRef idx="3">
-            <a:schemeClr val="accent1"/>
-          </a:fillRef>
-          <a:effectRef idx="2">
-            <a:schemeClr val="accent1"/>
-          </a:effectRef>
-          <a:fontRef idx="minor">
-            <a:schemeClr val="lt1"/>
-          </a:fontRef>
-        </p:style>
-        <p:txBody>
-          <a:bodyPr rtlCol="0" anchor="ctr"/>
-          <a:lstStyle/>
-          <a:p>
-            <a:pPr algn="ctr"/>
-          </a:p>
-        </p:txBody>
-      </p:sp>
-      <p:sp>
-        <p:nvSpPr>
-          <p:cNvPr id="11" name="Rectangle 10"/>
-          <p:cNvSpPr/>
-          <p:nvPr/>
-        </p:nvSpPr>
-        <p:spPr>
-          <a:xfrm>
-            <a:off x="640080" y="2084832"/>
-            <a:ext cx="73152" cy="274320"/>
-          </a:xfrm>
-          <a:prstGeom prst="rect">
-            <a:avLst/>
-          </a:prstGeom>
-          <a:solidFill>
-            <a:srgbClr val="269CCB"/>
-          </a:solidFill>
-          <a:ln>
-            <a:noFill/>
-          </a:ln>
-        </p:spPr>
-        <p:style>
-          <a:lnRef idx="1">
-            <a:schemeClr val="accent1"/>
-          </a:lnRef>
-          <a:fillRef idx="3">
-            <a:schemeClr val="accent1"/>
-          </a:fillRef>
-          <a:effectRef idx="2">
-            <a:schemeClr val="accent1"/>
-          </a:effectRef>
-          <a:fontRef idx="minor">
-            <a:schemeClr val="lt1"/>
-          </a:fontRef>
-        </p:style>
-        <p:txBody>
-          <a:bodyPr rtlCol="0" anchor="ctr"/>
-          <a:lstStyle/>
-          <a:p>
-            <a:pPr algn="ctr"/>
-          </a:p>
-        </p:txBody>
-      </p:sp>
-      <p:sp>
-        <p:nvSpPr>
-          <p:cNvPr id="12" name="TextBox 11"/>
-          <p:cNvSpPr txBox="1"/>
-          <p:nvPr/>
-        </p:nvSpPr>
-        <p:spPr>
-          <a:xfrm>
-            <a:off x="1097280" y="2029968"/>
-            <a:ext cx="10362895" cy="402336"/>
-          </a:xfrm>
-          <a:prstGeom prst="rect">
-            <a:avLst/>
-          </a:prstGeom>
-          <a:noFill/>
-        </p:spPr>
-        <p:txBody>
-          <a:bodyPr wrap="square" anchor="ctr"/>
-          <a:lstStyle/>
-          <a:p>
-            <a:r>
-              <a:rPr sz="1500" b="0" i="0">
-                <a:solidFill>
-                  <a:srgbClr val="333333"/>
-                </a:solidFill>
-                <a:latin typeface="Calibri"/>
-              </a:rPr>
-              <a:t>□ ¿La validación de «no existe» usa «IF NOT FOUND» tras el «SELECT ... INTO»?</a:t>
-            </a:r>
-          </a:p>
-        </p:txBody>
-      </p:sp>
-      <p:sp>
-        <p:nvSpPr>
-          <p:cNvPr id="13" name="Rounded Rectangle 12"/>
-          <p:cNvSpPr/>
-          <p:nvPr/>
-        </p:nvSpPr>
-        <p:spPr>
-          <a:xfrm>
-            <a:off x="457200" y="2615184"/>
-            <a:ext cx="11277295" cy="566928"/>
-          </a:xfrm>
-          <a:prstGeom prst="roundRect">
-            <a:avLst>
-              <a:gd name="adj" fmla="val 12000"/>
-            </a:avLst>
-          </a:prstGeom>
-          <a:solidFill>
-            <a:srgbClr val="F2F2F2"/>
-          </a:solidFill>
-          <a:ln>
-            <a:noFill/>
-          </a:ln>
-        </p:spPr>
-        <p:style>
-          <a:lnRef idx="1">
-            <a:schemeClr val="accent1"/>
-          </a:lnRef>
-          <a:fillRef idx="3">
-            <a:schemeClr val="accent1"/>
-          </a:fillRef>
-          <a:effectRef idx="2">
-            <a:schemeClr val="accent1"/>
-          </a:effectRef>
-          <a:fontRef idx="minor">
-            <a:schemeClr val="lt1"/>
-          </a:fontRef>
-        </p:style>
-        <p:txBody>
-          <a:bodyPr rtlCol="0" anchor="ctr"/>
-          <a:lstStyle/>
-          <a:p>
-            <a:pPr algn="ctr"/>
-          </a:p>
-        </p:txBody>
-      </p:sp>
-      <p:sp>
-        <p:nvSpPr>
-          <p:cNvPr id="14" name="Rectangle 13"/>
-          <p:cNvSpPr/>
-          <p:nvPr/>
-        </p:nvSpPr>
-        <p:spPr>
-          <a:xfrm>
-            <a:off x="640080" y="2761488"/>
-            <a:ext cx="274320" cy="274320"/>
-          </a:xfrm>
-          <a:prstGeom prst="rect">
-            <a:avLst/>
-          </a:prstGeom>
-          <a:solidFill>
-            <a:srgbClr val="FFFFFF"/>
-          </a:solidFill>
-          <a:ln>
-            <a:solidFill>
-              <a:srgbClr val="333333"/>
-            </a:solidFill>
-          </a:ln>
-        </p:spPr>
-        <p:style>
-          <a:lnRef idx="1">
-            <a:schemeClr val="accent1"/>
-          </a:lnRef>
-          <a:fillRef idx="3">
-            <a:schemeClr val="accent1"/>
-          </a:fillRef>
-          <a:effectRef idx="2">
-            <a:schemeClr val="accent1"/>
-          </a:effectRef>
-          <a:fontRef idx="minor">
-            <a:schemeClr val="lt1"/>
-          </a:fontRef>
-        </p:style>
-        <p:txBody>
-          <a:bodyPr rtlCol="0" anchor="ctr"/>
-          <a:lstStyle/>
-          <a:p>
-            <a:pPr algn="ctr"/>
-          </a:p>
-        </p:txBody>
-      </p:sp>
-      <p:sp>
-        <p:nvSpPr>
-          <p:cNvPr id="15" name="Rectangle 14"/>
-          <p:cNvSpPr/>
-          <p:nvPr/>
-        </p:nvSpPr>
-        <p:spPr>
-          <a:xfrm>
-            <a:off x="640080" y="2761488"/>
-            <a:ext cx="73152" cy="274320"/>
-          </a:xfrm>
-          <a:prstGeom prst="rect">
-            <a:avLst/>
-          </a:prstGeom>
-          <a:solidFill>
-            <a:srgbClr val="269CCB"/>
-          </a:solidFill>
-          <a:ln>
-            <a:noFill/>
-          </a:ln>
-        </p:spPr>
-        <p:style>
-          <a:lnRef idx="1">
-            <a:schemeClr val="accent1"/>
-          </a:lnRef>
-          <a:fillRef idx="3">
-            <a:schemeClr val="accent1"/>
-          </a:fillRef>
-          <a:effectRef idx="2">
-            <a:schemeClr val="accent1"/>
-          </a:effectRef>
-          <a:fontRef idx="minor">
-            <a:schemeClr val="lt1"/>
-          </a:fontRef>
-        </p:style>
-        <p:txBody>
-          <a:bodyPr rtlCol="0" anchor="ctr"/>
-          <a:lstStyle/>
-          <a:p>
-            <a:pPr algn="ctr"/>
-          </a:p>
-        </p:txBody>
-      </p:sp>
-      <p:sp>
-        <p:nvSpPr>
-          <p:cNvPr id="16" name="TextBox 15"/>
-          <p:cNvSpPr txBox="1"/>
-          <p:nvPr/>
-        </p:nvSpPr>
-        <p:spPr>
-          <a:xfrm>
-            <a:off x="1097280" y="2706624"/>
-            <a:ext cx="10362895" cy="402336"/>
-          </a:xfrm>
-          <a:prstGeom prst="rect">
-            <a:avLst/>
-          </a:prstGeom>
-          <a:noFill/>
-        </p:spPr>
-        <p:txBody>
-          <a:bodyPr wrap="square" anchor="ctr"/>
-          <a:lstStyle/>
-          <a:p>
-            <a:r>
-              <a:rPr sz="1500" b="0" i="0">
-                <a:solidFill>
-                  <a:srgbClr val="333333"/>
-                </a:solidFill>
-                <a:latin typeface="Calibri"/>
-              </a:rPr>
-              <a:t>□ ¿Los 4 bloques «DO» capturan la excepción y el script llega hasta el final?</a:t>
-            </a:r>
-          </a:p>
-        </p:txBody>
-      </p:sp>
-      <p:sp>
-        <p:nvSpPr>
-          <p:cNvPr id="17" name="Rounded Rectangle 16"/>
-          <p:cNvSpPr/>
-          <p:nvPr/>
-        </p:nvSpPr>
-        <p:spPr>
-          <a:xfrm>
-            <a:off x="457200" y="3291840"/>
-            <a:ext cx="11277295" cy="566928"/>
-          </a:xfrm>
-          <a:prstGeom prst="roundRect">
-            <a:avLst>
-              <a:gd name="adj" fmla="val 12000"/>
-            </a:avLst>
-          </a:prstGeom>
-          <a:solidFill>
-            <a:srgbClr val="F2F2F2"/>
-          </a:solidFill>
-          <a:ln>
-            <a:noFill/>
-          </a:ln>
-        </p:spPr>
-        <p:style>
-          <a:lnRef idx="1">
-            <a:schemeClr val="accent1"/>
-          </a:lnRef>
-          <a:fillRef idx="3">
-            <a:schemeClr val="accent1"/>
-          </a:fillRef>
-          <a:effectRef idx="2">
-            <a:schemeClr val="accent1"/>
-          </a:effectRef>
-          <a:fontRef idx="minor">
-            <a:schemeClr val="lt1"/>
-          </a:fontRef>
-        </p:style>
-        <p:txBody>
-          <a:bodyPr rtlCol="0" anchor="ctr"/>
-          <a:lstStyle/>
-          <a:p>
-            <a:pPr algn="ctr"/>
-          </a:p>
-        </p:txBody>
-      </p:sp>
-      <p:sp>
-        <p:nvSpPr>
-          <p:cNvPr id="18" name="Rectangle 17"/>
-          <p:cNvSpPr/>
-          <p:nvPr/>
-        </p:nvSpPr>
-        <p:spPr>
-          <a:xfrm>
-            <a:off x="640080" y="3438144"/>
-            <a:ext cx="274320" cy="274320"/>
-          </a:xfrm>
-          <a:prstGeom prst="rect">
-            <a:avLst/>
-          </a:prstGeom>
-          <a:solidFill>
-            <a:srgbClr val="FFFFFF"/>
-          </a:solidFill>
-          <a:ln>
-            <a:solidFill>
-              <a:srgbClr val="333333"/>
-            </a:solidFill>
-          </a:ln>
-        </p:spPr>
-        <p:style>
-          <a:lnRef idx="1">
-            <a:schemeClr val="accent1"/>
-          </a:lnRef>
-          <a:fillRef idx="3">
-            <a:schemeClr val="accent1"/>
-          </a:fillRef>
-          <a:effectRef idx="2">
-            <a:schemeClr val="accent1"/>
-          </a:effectRef>
-          <a:fontRef idx="minor">
-            <a:schemeClr val="lt1"/>
-          </a:fontRef>
-        </p:style>
-        <p:txBody>
-          <a:bodyPr rtlCol="0" anchor="ctr"/>
-          <a:lstStyle/>
-          <a:p>
-            <a:pPr algn="ctr"/>
-          </a:p>
-        </p:txBody>
-      </p:sp>
-      <p:sp>
-        <p:nvSpPr>
-          <p:cNvPr id="19" name="Rectangle 18"/>
-          <p:cNvSpPr/>
-          <p:nvPr/>
-        </p:nvSpPr>
-        <p:spPr>
-          <a:xfrm>
-            <a:off x="640080" y="3438144"/>
-            <a:ext cx="73152" cy="274320"/>
-          </a:xfrm>
-          <a:prstGeom prst="rect">
-            <a:avLst/>
-          </a:prstGeom>
-          <a:solidFill>
-            <a:srgbClr val="269CCB"/>
-          </a:solidFill>
-          <a:ln>
-            <a:noFill/>
-          </a:ln>
-        </p:spPr>
-        <p:style>
-          <a:lnRef idx="1">
-            <a:schemeClr val="accent1"/>
-          </a:lnRef>
-          <a:fillRef idx="3">
-            <a:schemeClr val="accent1"/>
-          </a:fillRef>
-          <a:effectRef idx="2">
-            <a:schemeClr val="accent1"/>
-          </a:effectRef>
-          <a:fontRef idx="minor">
-            <a:schemeClr val="lt1"/>
-          </a:fontRef>
-        </p:style>
-        <p:txBody>
-          <a:bodyPr rtlCol="0" anchor="ctr"/>
-          <a:lstStyle/>
-          <a:p>
-            <a:pPr algn="ctr"/>
-          </a:p>
-        </p:txBody>
-      </p:sp>
-      <p:sp>
-        <p:nvSpPr>
-          <p:cNvPr id="20" name="TextBox 19"/>
-          <p:cNvSpPr txBox="1"/>
-          <p:nvPr/>
-        </p:nvSpPr>
-        <p:spPr>
-          <a:xfrm>
-            <a:off x="1097280" y="3383280"/>
-            <a:ext cx="10362895" cy="402336"/>
-          </a:xfrm>
-          <a:prstGeom prst="rect">
-            <a:avLst/>
-          </a:prstGeom>
-          <a:noFill/>
-        </p:spPr>
-        <p:txBody>
-          <a:bodyPr wrap="square" anchor="ctr"/>
-          <a:lstStyle/>
-          <a:p>
-            <a:r>
-              <a:rPr sz="1500" b="0" i="0">
-                <a:solidFill>
-                  <a:srgbClr val="333333"/>
-                </a:solidFill>
-                <a:latin typeface="Calibri"/>
-              </a:rPr>
-              <a:t>□ ¿El conteo final de «cita» es </a:t>
-            </a:r>
-            <a:r>
-              <a:rPr sz="1500" b="1" i="0">
-                <a:solidFill>
-                  <a:srgbClr val="333333"/>
-                </a:solidFill>
-                <a:latin typeface="Calibri"/>
-              </a:rPr>
-              <a:t>11</a:t>
-            </a:r>
-            <a:r>
-              <a:rPr sz="1500" b="0" i="0">
-                <a:solidFill>
-                  <a:srgbClr val="333333"/>
-                </a:solidFill>
-                <a:latin typeface="Calibri"/>
-              </a:rPr>
-              <a:t>, y está en la evidencia?</a:t>
-            </a:r>
-          </a:p>
-        </p:txBody>
-      </p:sp>
-      <p:sp>
-        <p:nvSpPr>
-          <p:cNvPr id="21" name="Rounded Rectangle 20"/>
-          <p:cNvSpPr/>
-          <p:nvPr/>
-        </p:nvSpPr>
-        <p:spPr>
-          <a:xfrm>
-            <a:off x="457200" y="3968496"/>
-            <a:ext cx="11277295" cy="566928"/>
-          </a:xfrm>
-          <a:prstGeom prst="roundRect">
-            <a:avLst>
-              <a:gd name="adj" fmla="val 12000"/>
-            </a:avLst>
-          </a:prstGeom>
-          <a:solidFill>
-            <a:srgbClr val="F2F2F2"/>
-          </a:solidFill>
-          <a:ln>
-            <a:noFill/>
-          </a:ln>
-        </p:spPr>
-        <p:style>
-          <a:lnRef idx="1">
-            <a:schemeClr val="accent1"/>
-          </a:lnRef>
-          <a:fillRef idx="3">
-            <a:schemeClr val="accent1"/>
-          </a:fillRef>
-          <a:effectRef idx="2">
-            <a:schemeClr val="accent1"/>
-          </a:effectRef>
-          <a:fontRef idx="minor">
-            <a:schemeClr val="lt1"/>
-          </a:fontRef>
-        </p:style>
-        <p:txBody>
-          <a:bodyPr rtlCol="0" anchor="ctr"/>
-          <a:lstStyle/>
-          <a:p>
-            <a:pPr algn="ctr"/>
-          </a:p>
-        </p:txBody>
-      </p:sp>
-      <p:sp>
-        <p:nvSpPr>
-          <p:cNvPr id="22" name="Rectangle 21"/>
-          <p:cNvSpPr/>
-          <p:nvPr/>
-        </p:nvSpPr>
-        <p:spPr>
-          <a:xfrm>
-            <a:off x="640080" y="4114800"/>
-            <a:ext cx="274320" cy="274320"/>
-          </a:xfrm>
-          <a:prstGeom prst="rect">
-            <a:avLst/>
-          </a:prstGeom>
-          <a:solidFill>
-            <a:srgbClr val="FFFFFF"/>
-          </a:solidFill>
-          <a:ln>
-            <a:solidFill>
-              <a:srgbClr val="333333"/>
-            </a:solidFill>
-          </a:ln>
-        </p:spPr>
-        <p:style>
-          <a:lnRef idx="1">
-            <a:schemeClr val="accent1"/>
-          </a:lnRef>
-          <a:fillRef idx="3">
-            <a:schemeClr val="accent1"/>
-          </a:fillRef>
-          <a:effectRef idx="2">
-            <a:schemeClr val="accent1"/>
-          </a:effectRef>
-          <a:fontRef idx="minor">
-            <a:schemeClr val="lt1"/>
-          </a:fontRef>
-        </p:style>
-        <p:txBody>
-          <a:bodyPr rtlCol="0" anchor="ctr"/>
-          <a:lstStyle/>
-          <a:p>
-            <a:pPr algn="ctr"/>
-          </a:p>
-        </p:txBody>
-      </p:sp>
-      <p:sp>
-        <p:nvSpPr>
-          <p:cNvPr id="23" name="Rectangle 22"/>
-          <p:cNvSpPr/>
-          <p:nvPr/>
-        </p:nvSpPr>
-        <p:spPr>
-          <a:xfrm>
-            <a:off x="640080" y="4114800"/>
-            <a:ext cx="73152" cy="274320"/>
-          </a:xfrm>
-          <a:prstGeom prst="rect">
-            <a:avLst/>
-          </a:prstGeom>
-          <a:solidFill>
-            <a:srgbClr val="269CCB"/>
-          </a:solidFill>
-          <a:ln>
-            <a:noFill/>
-          </a:ln>
-        </p:spPr>
-        <p:style>
-          <a:lnRef idx="1">
-            <a:schemeClr val="accent1"/>
-          </a:lnRef>
-          <a:fillRef idx="3">
-            <a:schemeClr val="accent1"/>
-          </a:fillRef>
-          <a:effectRef idx="2">
-            <a:schemeClr val="accent1"/>
-          </a:effectRef>
-          <a:fontRef idx="minor">
-            <a:schemeClr val="lt1"/>
-          </a:fontRef>
-        </p:style>
-        <p:txBody>
-          <a:bodyPr rtlCol="0" anchor="ctr"/>
-          <a:lstStyle/>
-          <a:p>
-            <a:pPr algn="ctr"/>
-          </a:p>
-        </p:txBody>
-      </p:sp>
-      <p:sp>
-        <p:nvSpPr>
-          <p:cNvPr id="24" name="TextBox 23"/>
-          <p:cNvSpPr txBox="1"/>
-          <p:nvPr/>
-        </p:nvSpPr>
-        <p:spPr>
-          <a:xfrm>
-            <a:off x="1097280" y="4059936"/>
-            <a:ext cx="10362895" cy="402336"/>
-          </a:xfrm>
-          <a:prstGeom prst="rect">
-            <a:avLst/>
-          </a:prstGeom>
-          <a:noFill/>
-        </p:spPr>
-        <p:txBody>
-          <a:bodyPr wrap="square" anchor="ctr"/>
-          <a:lstStyle/>
-          <a:p>
-            <a:r>
-              <a:rPr sz="1500" b="0" i="0">
-                <a:solidFill>
-                  <a:srgbClr val="333333"/>
-                </a:solidFill>
-                <a:latin typeface="Calibri"/>
-              </a:rPr>
-              <a:t>□ ¿«sp_registrar_consulta» inserta la consulta </a:t>
-            </a:r>
-            <a:r>
-              <a:rPr sz="1500" b="1" i="0">
-                <a:solidFill>
-                  <a:srgbClr val="333333"/>
-                </a:solidFill>
-                <a:latin typeface="Calibri"/>
-              </a:rPr>
-              <a:t>y</a:t>
-            </a:r>
-            <a:r>
-              <a:rPr sz="1500" b="0" i="0">
-                <a:solidFill>
-                  <a:srgbClr val="333333"/>
-                </a:solidFill>
-                <a:latin typeface="Calibri"/>
-              </a:rPr>
-              <a:t> deja la cita en «ATENDIDA»?</a:t>
-            </a:r>
-          </a:p>
-        </p:txBody>
-      </p:sp>
-      <p:sp>
-        <p:nvSpPr>
-          <p:cNvPr id="25" name="Rounded Rectangle 24"/>
-          <p:cNvSpPr/>
-          <p:nvPr/>
-        </p:nvSpPr>
-        <p:spPr>
-          <a:xfrm>
-            <a:off x="457200" y="4645152"/>
-            <a:ext cx="11277295" cy="566928"/>
-          </a:xfrm>
-          <a:prstGeom prst="roundRect">
-            <a:avLst>
-              <a:gd name="adj" fmla="val 12000"/>
-            </a:avLst>
-          </a:prstGeom>
-          <a:solidFill>
-            <a:srgbClr val="F2F2F2"/>
-          </a:solidFill>
-          <a:ln>
-            <a:noFill/>
-          </a:ln>
-        </p:spPr>
-        <p:style>
-          <a:lnRef idx="1">
-            <a:schemeClr val="accent1"/>
-          </a:lnRef>
-          <a:fillRef idx="3">
-            <a:schemeClr val="accent1"/>
-          </a:fillRef>
-          <a:effectRef idx="2">
-            <a:schemeClr val="accent1"/>
-          </a:effectRef>
-          <a:fontRef idx="minor">
-            <a:schemeClr val="lt1"/>
-          </a:fontRef>
-        </p:style>
-        <p:txBody>
-          <a:bodyPr rtlCol="0" anchor="ctr"/>
-          <a:lstStyle/>
-          <a:p>
-            <a:pPr algn="ctr"/>
-          </a:p>
-        </p:txBody>
-      </p:sp>
-      <p:sp>
-        <p:nvSpPr>
-          <p:cNvPr id="26" name="Rectangle 25"/>
-          <p:cNvSpPr/>
-          <p:nvPr/>
-        </p:nvSpPr>
-        <p:spPr>
-          <a:xfrm>
-            <a:off x="640080" y="4791456"/>
-            <a:ext cx="274320" cy="274320"/>
-          </a:xfrm>
-          <a:prstGeom prst="rect">
-            <a:avLst/>
-          </a:prstGeom>
-          <a:solidFill>
-            <a:srgbClr val="FFFFFF"/>
-          </a:solidFill>
-          <a:ln>
-            <a:solidFill>
-              <a:srgbClr val="333333"/>
-            </a:solidFill>
-          </a:ln>
-        </p:spPr>
-        <p:style>
-          <a:lnRef idx="1">
-            <a:schemeClr val="accent1"/>
-          </a:lnRef>
-          <a:fillRef idx="3">
-            <a:schemeClr val="accent1"/>
-          </a:fillRef>
-          <a:effectRef idx="2">
-            <a:schemeClr val="accent1"/>
-          </a:effectRef>
-          <a:fontRef idx="minor">
-            <a:schemeClr val="lt1"/>
-          </a:fontRef>
-        </p:style>
-        <p:txBody>
-          <a:bodyPr rtlCol="0" anchor="ctr"/>
-          <a:lstStyle/>
-          <a:p>
-            <a:pPr algn="ctr"/>
-          </a:p>
-        </p:txBody>
-      </p:sp>
-      <p:sp>
-        <p:nvSpPr>
-          <p:cNvPr id="27" name="Rectangle 26"/>
-          <p:cNvSpPr/>
-          <p:nvPr/>
-        </p:nvSpPr>
-        <p:spPr>
-          <a:xfrm>
-            <a:off x="640080" y="4791456"/>
-            <a:ext cx="73152" cy="274320"/>
-          </a:xfrm>
-          <a:prstGeom prst="rect">
-            <a:avLst/>
-          </a:prstGeom>
-          <a:solidFill>
-            <a:srgbClr val="269CCB"/>
-          </a:solidFill>
-          <a:ln>
-            <a:noFill/>
-          </a:ln>
-        </p:spPr>
-        <p:style>
-          <a:lnRef idx="1">
-            <a:schemeClr val="accent1"/>
-          </a:lnRef>
-          <a:fillRef idx="3">
-            <a:schemeClr val="accent1"/>
-          </a:fillRef>
-          <a:effectRef idx="2">
-            <a:schemeClr val="accent1"/>
-          </a:effectRef>
-          <a:fontRef idx="minor">
-            <a:schemeClr val="lt1"/>
-          </a:fontRef>
-        </p:style>
-        <p:txBody>
-          <a:bodyPr rtlCol="0" anchor="ctr"/>
-          <a:lstStyle/>
-          <a:p>
-            <a:pPr algn="ctr"/>
-          </a:p>
-        </p:txBody>
-      </p:sp>
-      <p:sp>
-        <p:nvSpPr>
-          <p:cNvPr id="28" name="TextBox 27"/>
-          <p:cNvSpPr txBox="1"/>
-          <p:nvPr/>
-        </p:nvSpPr>
-        <p:spPr>
-          <a:xfrm>
-            <a:off x="1097280" y="4736592"/>
-            <a:ext cx="10362895" cy="402336"/>
-          </a:xfrm>
-          <a:prstGeom prst="rect">
-            <a:avLst/>
-          </a:prstGeom>
-          <a:noFill/>
-        </p:spPr>
-        <p:txBody>
-          <a:bodyPr wrap="square" anchor="ctr"/>
-          <a:lstStyle/>
-          <a:p>
-            <a:r>
-              <a:rPr sz="1500" b="0" i="0">
-                <a:solidFill>
-                  <a:srgbClr val="333333"/>
-                </a:solidFill>
-                <a:latin typeface="Calibri"/>
-              </a:rPr>
-              <a:t>□ ¿La cerrada la decidiste por </a:t>
-            </a:r>
-            <a:r>
-              <a:rPr sz="1500" b="1" i="0">
-                <a:solidFill>
-                  <a:srgbClr val="333333"/>
-                </a:solidFill>
-                <a:latin typeface="Calibri"/>
-              </a:rPr>
-              <a:t>dónde se invoca</a:t>
-            </a:r>
-            <a:r>
-              <a:rPr sz="1500" b="0" i="0">
-                <a:solidFill>
-                  <a:srgbClr val="333333"/>
-                </a:solidFill>
-                <a:latin typeface="Calibri"/>
-              </a:rPr>
-              <a:t> cada rutina —dentro de un «SELECT» o como sentencia suelta— y no por el «LANGUAGE» que declara?</a:t>
-            </a:r>
-          </a:p>
-        </p:txBody>
-      </p:sp>
-      <p:sp>
-        <p:nvSpPr>
-          <p:cNvPr id="29" name="Rounded Rectangle 28"/>
-          <p:cNvSpPr/>
-          <p:nvPr/>
-        </p:nvSpPr>
-        <p:spPr>
-          <a:xfrm>
-            <a:off x="457200" y="5321808"/>
-            <a:ext cx="11277295" cy="566928"/>
-          </a:xfrm>
-          <a:prstGeom prst="roundRect">
-            <a:avLst>
-              <a:gd name="adj" fmla="val 12000"/>
-            </a:avLst>
-          </a:prstGeom>
-          <a:solidFill>
-            <a:srgbClr val="F2F2F2"/>
-          </a:solidFill>
-          <a:ln>
-            <a:noFill/>
-          </a:ln>
-        </p:spPr>
-        <p:style>
-          <a:lnRef idx="1">
-            <a:schemeClr val="accent1"/>
-          </a:lnRef>
-          <a:fillRef idx="3">
-            <a:schemeClr val="accent1"/>
-          </a:fillRef>
-          <a:effectRef idx="2">
-            <a:schemeClr val="accent1"/>
-          </a:effectRef>
-          <a:fontRef idx="minor">
-            <a:schemeClr val="lt1"/>
-          </a:fontRef>
-        </p:style>
-        <p:txBody>
-          <a:bodyPr rtlCol="0" anchor="ctr"/>
-          <a:lstStyle/>
-          <a:p>
-            <a:pPr algn="ctr"/>
-          </a:p>
-        </p:txBody>
-      </p:sp>
-      <p:sp>
-        <p:nvSpPr>
-          <p:cNvPr id="30" name="Rectangle 29"/>
-          <p:cNvSpPr/>
-          <p:nvPr/>
-        </p:nvSpPr>
-        <p:spPr>
-          <a:xfrm>
-            <a:off x="640080" y="5468112"/>
-            <a:ext cx="274320" cy="274320"/>
-          </a:xfrm>
-          <a:prstGeom prst="rect">
-            <a:avLst/>
-          </a:prstGeom>
-          <a:solidFill>
-            <a:srgbClr val="FFFFFF"/>
-          </a:solidFill>
-          <a:ln>
-            <a:solidFill>
-              <a:srgbClr val="333333"/>
-            </a:solidFill>
-          </a:ln>
-        </p:spPr>
-        <p:style>
-          <a:lnRef idx="1">
-            <a:schemeClr val="accent1"/>
-          </a:lnRef>
-          <a:fillRef idx="3">
-            <a:schemeClr val="accent1"/>
-          </a:fillRef>
-          <a:effectRef idx="2">
-            <a:schemeClr val="accent1"/>
-          </a:effectRef>
-          <a:fontRef idx="minor">
-            <a:schemeClr val="lt1"/>
-          </a:fontRef>
-        </p:style>
-        <p:txBody>
-          <a:bodyPr rtlCol="0" anchor="ctr"/>
-          <a:lstStyle/>
-          <a:p>
-            <a:pPr algn="ctr"/>
-          </a:p>
-        </p:txBody>
-      </p:sp>
-      <p:sp>
-        <p:nvSpPr>
-          <p:cNvPr id="31" name="Rectangle 30"/>
-          <p:cNvSpPr/>
-          <p:nvPr/>
-        </p:nvSpPr>
-        <p:spPr>
-          <a:xfrm>
-            <a:off x="640080" y="5468112"/>
-            <a:ext cx="73152" cy="274320"/>
-          </a:xfrm>
-          <a:prstGeom prst="rect">
-            <a:avLst/>
-          </a:prstGeom>
-          <a:solidFill>
-            <a:srgbClr val="269CCB"/>
-          </a:solidFill>
-          <a:ln>
-            <a:noFill/>
-          </a:ln>
-        </p:spPr>
-        <p:style>
-          <a:lnRef idx="1">
-            <a:schemeClr val="accent1"/>
-          </a:lnRef>
-          <a:fillRef idx="3">
-            <a:schemeClr val="accent1"/>
-          </a:fillRef>
-          <a:effectRef idx="2">
-            <a:schemeClr val="accent1"/>
-          </a:effectRef>
-          <a:fontRef idx="minor">
-            <a:schemeClr val="lt1"/>
-          </a:fontRef>
-        </p:style>
-        <p:txBody>
-          <a:bodyPr rtlCol="0" anchor="ctr"/>
-          <a:lstStyle/>
-          <a:p>
-            <a:pPr algn="ctr"/>
-          </a:p>
-        </p:txBody>
-      </p:sp>
-      <p:sp>
-        <p:nvSpPr>
-          <p:cNvPr id="32" name="TextBox 31"/>
-          <p:cNvSpPr txBox="1"/>
-          <p:nvPr/>
-        </p:nvSpPr>
-        <p:spPr>
-          <a:xfrm>
-            <a:off x="1097280" y="5413248"/>
-            <a:ext cx="10362895" cy="402336"/>
-          </a:xfrm>
-          <a:prstGeom prst="rect">
-            <a:avLst/>
-          </a:prstGeom>
-          <a:noFill/>
-        </p:spPr>
-        <p:txBody>
-          <a:bodyPr wrap="square" anchor="ctr"/>
-          <a:lstStyle/>
-          <a:p>
-            <a:r>
-              <a:rPr sz="1500" b="0" i="0">
-                <a:solidFill>
-                  <a:srgbClr val="333333"/>
-                </a:solidFill>
-                <a:latin typeface="Calibri"/>
-              </a:rPr>
-              <a:t>□ ¿El contrato trae los 6 bloques de </a:t>
-            </a:r>
-            <a:r>
-              <a:rPr sz="1500" b="1" i="0">
-                <a:solidFill>
-                  <a:srgbClr val="333333"/>
-                </a:solidFill>
-                <a:latin typeface="Calibri"/>
-              </a:rPr>
-              <a:t>cada</a:t>
-            </a:r>
-            <a:r>
-              <a:rPr sz="1500" b="0" i="0">
-                <a:solidFill>
-                  <a:srgbClr val="333333"/>
-                </a:solidFill>
-                <a:latin typeface="Calibri"/>
-              </a:rPr>
-              <a:t> procedimiento y las 7 filas de errores?</a:t>
-            </a:r>
-          </a:p>
-        </p:txBody>
-      </p:sp>
-      <p:sp>
-        <p:nvSpPr>
-          <p:cNvPr id="33" name="TextBox 32"/>
-          <p:cNvSpPr txBox="1"/>
-          <p:nvPr/>
-        </p:nvSpPr>
-        <p:spPr>
-          <a:xfrm>
-            <a:off x="11185855" y="6473952"/>
-            <a:ext cx="640080" cy="274320"/>
-          </a:xfrm>
-          <a:prstGeom prst="rect">
-            <a:avLst/>
-          </a:prstGeom>
-          <a:noFill/>
-        </p:spPr>
-        <p:txBody>
-          <a:bodyPr wrap="square">
-            <a:spAutoFit/>
-          </a:bodyPr>
-          <a:lstStyle/>
-          <a:p>
-            <a:pPr algn="r"/>
-            <a:r>
-              <a:rPr sz="1100" b="0" i="0">
-                <a:solidFill>
-                  <a:srgbClr val="666666"/>
-                </a:solidFill>
-                <a:latin typeface="Calibri"/>
-              </a:rPr>
-              <a:t>58</a:t>
-            </a:r>
-          </a:p>
-        </p:txBody>
-      </p:sp>
-    </p:spTree>
-  </p:cSld>
-  <p:clrMapOvr>
-    <a:masterClrMapping/>
-  </p:clrMapOvr>
-</p:sld>
-</file>
-
-<file path=ppt/slides/slide59.xml><?xml version="1.0" encoding="utf-8"?>
-<p:sld xmlns:a="http://schemas.openxmlformats.org/drawingml/2006/main" xmlns:p="http://schemas.openxmlformats.org/presentationml/2006/main" xmlns:r="http://schemas.openxmlformats.org/officeDocument/2006/relationships">
-  <p:cSld>
-    <p:bg>
-      <p:bgPr>
-        <a:solidFill>
-          <a:srgbClr val="FFFFFF"/>
-        </a:solidFill>
-        <a:effectLst/>
-      </p:bgPr>
-    </p:bg>
-    <p:spTree>
-      <p:nvGrpSpPr>
-        <p:cNvPr id="1" name=""/>
-        <p:cNvGrpSpPr/>
-        <p:nvPr/>
-      </p:nvGrpSpPr>
-      <p:grpSpPr/>
-      <p:sp>
-        <p:nvSpPr>
-          <p:cNvPr id="2" name="Rectangle 1"/>
-          <p:cNvSpPr/>
-          <p:nvPr/>
-        </p:nvSpPr>
-        <p:spPr>
-          <a:xfrm>
-            <a:off x="0" y="0"/>
-            <a:ext cx="12191695" cy="960120"/>
-          </a:xfrm>
-          <a:prstGeom prst="rect">
-            <a:avLst/>
-          </a:prstGeom>
-          <a:solidFill>
-            <a:srgbClr val="095292"/>
-          </a:solidFill>
-          <a:ln>
-            <a:noFill/>
-          </a:ln>
-        </p:spPr>
-        <p:style>
-          <a:lnRef idx="1">
-            <a:schemeClr val="accent1"/>
-          </a:lnRef>
-          <a:fillRef idx="3">
-            <a:schemeClr val="accent1"/>
-          </a:fillRef>
-          <a:effectRef idx="2">
-            <a:schemeClr val="accent1"/>
-          </a:effectRef>
-          <a:fontRef idx="minor">
-            <a:schemeClr val="lt1"/>
-          </a:fontRef>
-        </p:style>
-        <p:txBody>
-          <a:bodyPr rtlCol="0" anchor="ctr"/>
-          <a:lstStyle/>
-          <a:p>
-            <a:pPr algn="ctr"/>
-          </a:p>
-        </p:txBody>
-      </p:sp>
-      <p:sp>
-        <p:nvSpPr>
-          <p:cNvPr id="3" name="Rectangle 2"/>
-          <p:cNvSpPr/>
-          <p:nvPr/>
-        </p:nvSpPr>
-        <p:spPr>
-          <a:xfrm>
-            <a:off x="0" y="960120"/>
-            <a:ext cx="12191695" cy="41148"/>
-          </a:xfrm>
-          <a:prstGeom prst="rect">
-            <a:avLst/>
-          </a:prstGeom>
-          <a:solidFill>
-            <a:srgbClr val="FFD000"/>
-          </a:solidFill>
-          <a:ln>
-            <a:noFill/>
-          </a:ln>
-        </p:spPr>
-        <p:style>
-          <a:lnRef idx="1">
-            <a:schemeClr val="accent1"/>
-          </a:lnRef>
-          <a:fillRef idx="3">
-            <a:schemeClr val="accent1"/>
-          </a:fillRef>
-          <a:effectRef idx="2">
-            <a:schemeClr val="accent1"/>
-          </a:effectRef>
-          <a:fontRef idx="minor">
-            <a:schemeClr val="lt1"/>
-          </a:fontRef>
-        </p:style>
-        <p:txBody>
-          <a:bodyPr rtlCol="0" anchor="ctr"/>
-          <a:lstStyle/>
-          <a:p>
-            <a:pPr algn="ctr"/>
-          </a:p>
-        </p:txBody>
-      </p:sp>
-      <p:sp>
-        <p:nvSpPr>
-          <p:cNvPr id="4" name="TextBox 3"/>
-          <p:cNvSpPr txBox="1"/>
-          <p:nvPr/>
-        </p:nvSpPr>
-        <p:spPr>
-          <a:xfrm>
-            <a:off x="457200" y="164592"/>
-            <a:ext cx="11277295" cy="502920"/>
-          </a:xfrm>
-          <a:prstGeom prst="rect">
-            <a:avLst/>
-          </a:prstGeom>
-          <a:noFill/>
-        </p:spPr>
-        <p:txBody>
-          <a:bodyPr wrap="square">
-            <a:spAutoFit/>
-          </a:bodyPr>
-          <a:lstStyle/>
-          <a:p>
-            <a:r>
-              <a:rPr sz="2600" b="1" i="0">
-                <a:solidFill>
-                  <a:srgbClr val="FFFFFF"/>
-                </a:solidFill>
-                <a:latin typeface="Calibri"/>
-              </a:rPr>
-              <a:t>Criterios de exito / entregable</a:t>
-            </a:r>
-          </a:p>
-        </p:txBody>
-      </p:sp>
-      <p:sp>
-        <p:nvSpPr>
-          <p:cNvPr id="5" name="TextBox 4"/>
-          <p:cNvSpPr txBox="1"/>
-          <p:nvPr/>
-        </p:nvSpPr>
-        <p:spPr>
-          <a:xfrm>
-            <a:off x="457200" y="1170432"/>
-            <a:ext cx="11277295" cy="5230368"/>
-          </a:xfrm>
-          <a:prstGeom prst="rect">
-            <a:avLst/>
-          </a:prstGeom>
-          <a:noFill/>
-        </p:spPr>
-        <p:txBody>
-          <a:bodyPr wrap="square">
-            <a:spAutoFit/>
-          </a:bodyPr>
-          <a:lstStyle/>
-          <a:p>
-            <a:pPr>
-              <a:spcAft>
-                <a:spcPts val="800"/>
-              </a:spcAft>
-            </a:pPr>
-            <a:r>
-              <a:rPr sz="2000" b="0" i="0">
-                <a:solidFill>
-                  <a:srgbClr val="333333"/>
-                </a:solidFill>
-                <a:latin typeface="Calibri"/>
-              </a:rPr>
-              <a:t>–   </a:t>
-            </a:r>
-            <a:r>
-              <a:rPr sz="2000" b="1" i="0">
-                <a:solidFill>
-                  <a:srgbClr val="333333"/>
-                </a:solidFill>
-                <a:latin typeface="Calibri"/>
-              </a:rPr>
-              <a:t>Entregable:</a:t>
-            </a:r>
-            <a:r>
-              <a:rPr sz="2000" b="0" i="0">
-                <a:solidFill>
-                  <a:srgbClr val="333333"/>
-                </a:solidFill>
-                <a:latin typeface="Calibri"/>
-              </a:rPr>
-              <a:t> 2 procedimientos en PL/pgSQL corriendo en la plataforma del curso + bateria de pruebas con su tabla resultado_prueba + contrato del proc (6 bloques)</a:t>
-            </a:r>
-          </a:p>
-          <a:p>
-            <a:pPr>
-              <a:spcAft>
-                <a:spcPts val="800"/>
-              </a:spcAft>
-            </a:pPr>
-            <a:r>
-              <a:rPr sz="2000" b="0" i="0">
-                <a:solidFill>
-                  <a:srgbClr val="333333"/>
-                </a:solidFill>
-                <a:latin typeface="Calibri"/>
-              </a:rPr>
-              <a:t>–   Evidencia: el SQL y su salida quedan guardados en cada pregunta de la plataforma del curso.</a:t>
-            </a:r>
-          </a:p>
-          <a:p>
-            <a:pPr>
-              <a:spcAft>
-                <a:spcPts val="800"/>
-              </a:spcAft>
-            </a:pPr>
-            <a:r>
-              <a:rPr sz="2000" b="0" i="0">
-                <a:solidFill>
-                  <a:srgbClr val="333333"/>
-                </a:solidFill>
-                <a:latin typeface="Calibri"/>
-              </a:rPr>
-              <a:t>–   Conserva copia en tu carpeta del PI (los .sql que pide el entregable).</a:t>
-            </a:r>
-          </a:p>
-          <a:p>
-            <a:pPr>
-              <a:spcAft>
-                <a:spcPts val="800"/>
-              </a:spcAft>
-            </a:pPr>
-            <a:r>
-              <a:rPr sz="2000" b="0" i="0">
-                <a:solidFill>
-                  <a:srgbClr val="333333"/>
-                </a:solidFill>
-                <a:latin typeface="Calibri"/>
-              </a:rPr>
-              <a:t>–   Actualizar checklist PI (que criterio de rubrica avanzo).</a:t>
-            </a:r>
-          </a:p>
-          <a:p>
-            <a:pPr>
-              <a:spcAft>
-                <a:spcPts val="800"/>
-              </a:spcAft>
-            </a:pPr>
-            <a:r>
-              <a:rPr sz="2000" b="0" i="0">
-                <a:solidFill>
-                  <a:srgbClr val="333333"/>
-                </a:solidFill>
-                <a:latin typeface="Calibri"/>
-              </a:rPr>
-              <a:t>–   </a:t>
-            </a:r>
-            <a:r>
-              <a:rPr sz="2000" b="1" i="0">
-                <a:solidFill>
-                  <a:srgbClr val="333333"/>
-                </a:solidFill>
-                <a:latin typeface="Calibri"/>
-              </a:rPr>
-              <a:t>Entrega en la plataforma del curso</a:t>
-            </a:r>
-            <a:r>
-              <a:rPr sz="2000" b="0" i="0">
-                <a:solidFill>
-                  <a:srgbClr val="333333"/>
-                </a:solidFill>
-                <a:latin typeface="Calibri"/>
-              </a:rPr>
-              <a:t> — en la fecha que indique el docente.</a:t>
-            </a:r>
-          </a:p>
-        </p:txBody>
-      </p:sp>
-      <p:sp>
-        <p:nvSpPr>
-          <p:cNvPr id="6" name="TextBox 5"/>
-          <p:cNvSpPr txBox="1"/>
-          <p:nvPr/>
-        </p:nvSpPr>
-        <p:spPr>
-          <a:xfrm>
-            <a:off x="11185855" y="6473952"/>
-            <a:ext cx="640080" cy="274320"/>
-          </a:xfrm>
-          <a:prstGeom prst="rect">
-            <a:avLst/>
-          </a:prstGeom>
-          <a:noFill/>
-        </p:spPr>
-        <p:txBody>
-          <a:bodyPr wrap="square">
-            <a:spAutoFit/>
-          </a:bodyPr>
-          <a:lstStyle/>
-          <a:p>
-            <a:pPr algn="r"/>
-            <a:r>
-              <a:rPr sz="1100" b="0" i="0">
-                <a:solidFill>
-                  <a:srgbClr val="666666"/>
-                </a:solidFill>
-                <a:latin typeface="Calibri"/>
-              </a:rPr>
-              <a:t>59</a:t>
+                  <a:srgbClr val="269CCB"/>
+                </a:solidFill>
+                <a:latin typeface="Calibri"/>
+              </a:rPr>
+              <a:t>Todo lo visto queda proyectado para repasar</a:t>
             </a:r>
           </a:p>
         </p:txBody>
@@ -24826,833 +21599,6 @@
                 <a:latin typeface="Calibri"/>
               </a:rPr>
               <a:t>6</a:t>
-            </a:r>
-          </a:p>
-        </p:txBody>
-      </p:sp>
-    </p:spTree>
-  </p:cSld>
-  <p:clrMapOvr>
-    <a:masterClrMapping/>
-  </p:clrMapOvr>
-</p:sld>
-</file>
-
-<file path=ppt/slides/slide60.xml><?xml version="1.0" encoding="utf-8"?>
-<p:sld xmlns:a="http://schemas.openxmlformats.org/drawingml/2006/main" xmlns:p="http://schemas.openxmlformats.org/presentationml/2006/main" xmlns:r="http://schemas.openxmlformats.org/officeDocument/2006/relationships">
-  <p:cSld>
-    <p:bg>
-      <p:bgPr>
-        <a:solidFill>
-          <a:srgbClr val="FFFFFF"/>
-        </a:solidFill>
-        <a:effectLst/>
-      </p:bgPr>
-    </p:bg>
-    <p:spTree>
-      <p:nvGrpSpPr>
-        <p:cNvPr id="1" name=""/>
-        <p:cNvGrpSpPr/>
-        <p:nvPr/>
-      </p:nvGrpSpPr>
-      <p:grpSpPr/>
-      <p:sp>
-        <p:nvSpPr>
-          <p:cNvPr id="2" name="Rectangle 1"/>
-          <p:cNvSpPr/>
-          <p:nvPr/>
-        </p:nvSpPr>
-        <p:spPr>
-          <a:xfrm>
-            <a:off x="0" y="0"/>
-            <a:ext cx="12191695" cy="960120"/>
-          </a:xfrm>
-          <a:prstGeom prst="rect">
-            <a:avLst/>
-          </a:prstGeom>
-          <a:solidFill>
-            <a:srgbClr val="095292"/>
-          </a:solidFill>
-          <a:ln>
-            <a:noFill/>
-          </a:ln>
-        </p:spPr>
-        <p:style>
-          <a:lnRef idx="1">
-            <a:schemeClr val="accent1"/>
-          </a:lnRef>
-          <a:fillRef idx="3">
-            <a:schemeClr val="accent1"/>
-          </a:fillRef>
-          <a:effectRef idx="2">
-            <a:schemeClr val="accent1"/>
-          </a:effectRef>
-          <a:fontRef idx="minor">
-            <a:schemeClr val="lt1"/>
-          </a:fontRef>
-        </p:style>
-        <p:txBody>
-          <a:bodyPr rtlCol="0" anchor="ctr"/>
-          <a:lstStyle/>
-          <a:p>
-            <a:pPr algn="ctr"/>
-          </a:p>
-        </p:txBody>
-      </p:sp>
-      <p:sp>
-        <p:nvSpPr>
-          <p:cNvPr id="3" name="Rectangle 2"/>
-          <p:cNvSpPr/>
-          <p:nvPr/>
-        </p:nvSpPr>
-        <p:spPr>
-          <a:xfrm>
-            <a:off x="0" y="960120"/>
-            <a:ext cx="12191695" cy="41148"/>
-          </a:xfrm>
-          <a:prstGeom prst="rect">
-            <a:avLst/>
-          </a:prstGeom>
-          <a:solidFill>
-            <a:srgbClr val="FFD000"/>
-          </a:solidFill>
-          <a:ln>
-            <a:noFill/>
-          </a:ln>
-        </p:spPr>
-        <p:style>
-          <a:lnRef idx="1">
-            <a:schemeClr val="accent1"/>
-          </a:lnRef>
-          <a:fillRef idx="3">
-            <a:schemeClr val="accent1"/>
-          </a:fillRef>
-          <a:effectRef idx="2">
-            <a:schemeClr val="accent1"/>
-          </a:effectRef>
-          <a:fontRef idx="minor">
-            <a:schemeClr val="lt1"/>
-          </a:fontRef>
-        </p:style>
-        <p:txBody>
-          <a:bodyPr rtlCol="0" anchor="ctr"/>
-          <a:lstStyle/>
-          <a:p>
-            <a:pPr algn="ctr"/>
-          </a:p>
-        </p:txBody>
-      </p:sp>
-      <p:sp>
-        <p:nvSpPr>
-          <p:cNvPr id="4" name="TextBox 3"/>
-          <p:cNvSpPr txBox="1"/>
-          <p:nvPr/>
-        </p:nvSpPr>
-        <p:spPr>
-          <a:xfrm>
-            <a:off x="457200" y="164592"/>
-            <a:ext cx="11277295" cy="502920"/>
-          </a:xfrm>
-          <a:prstGeom prst="rect">
-            <a:avLst/>
-          </a:prstGeom>
-          <a:noFill/>
-        </p:spPr>
-        <p:txBody>
-          <a:bodyPr wrap="square">
-            <a:spAutoFit/>
-          </a:bodyPr>
-          <a:lstStyle/>
-          <a:p>
-            <a:r>
-              <a:rPr sz="2600" b="1" i="0">
-                <a:solidFill>
-                  <a:srgbClr val="FFFFFF"/>
-                </a:solidFill>
-                <a:latin typeface="Calibri"/>
-              </a:rPr>
-              <a:t>Para el PI esta semana</a:t>
-            </a:r>
-          </a:p>
-        </p:txBody>
-      </p:sp>
-      <p:sp>
-        <p:nvSpPr>
-          <p:cNvPr id="5" name="Rounded Rectangle 4"/>
-          <p:cNvSpPr/>
-          <p:nvPr/>
-        </p:nvSpPr>
-        <p:spPr>
-          <a:xfrm>
-            <a:off x="457200" y="1261872"/>
-            <a:ext cx="11277295" cy="1051560"/>
-          </a:xfrm>
-          <a:prstGeom prst="roundRect">
-            <a:avLst>
-              <a:gd name="adj" fmla="val 12000"/>
-            </a:avLst>
-          </a:prstGeom>
-          <a:solidFill>
-            <a:srgbClr val="E8F4FA"/>
-          </a:solidFill>
-          <a:ln>
-            <a:noFill/>
-          </a:ln>
-        </p:spPr>
-        <p:style>
-          <a:lnRef idx="1">
-            <a:schemeClr val="accent1"/>
-          </a:lnRef>
-          <a:fillRef idx="3">
-            <a:schemeClr val="accent1"/>
-          </a:fillRef>
-          <a:effectRef idx="2">
-            <a:schemeClr val="accent1"/>
-          </a:effectRef>
-          <a:fontRef idx="minor">
-            <a:schemeClr val="lt1"/>
-          </a:fontRef>
-        </p:style>
-        <p:txBody>
-          <a:bodyPr rtlCol="0" anchor="ctr"/>
-          <a:lstStyle/>
-          <a:p>
-            <a:pPr algn="ctr"/>
-          </a:p>
-        </p:txBody>
-      </p:sp>
-      <p:sp>
-        <p:nvSpPr>
-          <p:cNvPr id="6" name="Rectangle 5"/>
-          <p:cNvSpPr/>
-          <p:nvPr/>
-        </p:nvSpPr>
-        <p:spPr>
-          <a:xfrm>
-            <a:off x="457200" y="1261872"/>
-            <a:ext cx="128016" cy="1051560"/>
-          </a:xfrm>
-          <a:prstGeom prst="rect">
-            <a:avLst/>
-          </a:prstGeom>
-          <a:solidFill>
-            <a:srgbClr val="269CCB"/>
-          </a:solidFill>
-          <a:ln>
-            <a:noFill/>
-          </a:ln>
-        </p:spPr>
-        <p:style>
-          <a:lnRef idx="1">
-            <a:schemeClr val="accent1"/>
-          </a:lnRef>
-          <a:fillRef idx="3">
-            <a:schemeClr val="accent1"/>
-          </a:fillRef>
-          <a:effectRef idx="2">
-            <a:schemeClr val="accent1"/>
-          </a:effectRef>
-          <a:fontRef idx="minor">
-            <a:schemeClr val="lt1"/>
-          </a:fontRef>
-        </p:style>
-        <p:txBody>
-          <a:bodyPr rtlCol="0" anchor="ctr"/>
-          <a:lstStyle/>
-          <a:p>
-            <a:pPr algn="ctr"/>
-          </a:p>
-        </p:txBody>
-      </p:sp>
-      <p:sp>
-        <p:nvSpPr>
-          <p:cNvPr id="7" name="TextBox 6"/>
-          <p:cNvSpPr txBox="1"/>
-          <p:nvPr/>
-        </p:nvSpPr>
-        <p:spPr>
-          <a:xfrm>
-            <a:off x="777240" y="1399031"/>
-            <a:ext cx="10774375" cy="822959"/>
-          </a:xfrm>
-          <a:prstGeom prst="rect">
-            <a:avLst/>
-          </a:prstGeom>
-          <a:noFill/>
-        </p:spPr>
-        <p:txBody>
-          <a:bodyPr wrap="square">
-            <a:spAutoFit/>
-          </a:bodyPr>
-          <a:lstStyle/>
-          <a:p>
-            <a:r>
-              <a:rPr sz="1200" b="1" i="0">
-                <a:solidFill>
-                  <a:srgbClr val="269CCB"/>
-                </a:solidFill>
-                <a:latin typeface="Calibri"/>
-              </a:rPr>
-              <a:t>Info</a:t>
-            </a:r>
-          </a:p>
-          <a:p>
-            <a:pPr>
-              <a:spcBef>
-                <a:spcPts val="400"/>
-              </a:spcBef>
-            </a:pPr>
-            <a:r>
-              <a:rPr sz="1400" b="0" i="0">
-                <a:solidFill>
-                  <a:srgbClr val="333333"/>
-                </a:solidFill>
-                <a:latin typeface="Calibri"/>
-              </a:rPr>
-              <a:t>Hito: &gt;=1 procedimiento de negocio (agendar cita / registrar consulta)</a:t>
-            </a:r>
-          </a:p>
-        </p:txBody>
-      </p:sp>
-      <p:sp>
-        <p:nvSpPr>
-          <p:cNvPr id="8" name="Rounded Rectangle 7"/>
-          <p:cNvSpPr/>
-          <p:nvPr/>
-        </p:nvSpPr>
-        <p:spPr>
-          <a:xfrm>
-            <a:off x="457200" y="2478024"/>
-            <a:ext cx="11277295" cy="1051560"/>
-          </a:xfrm>
-          <a:prstGeom prst="roundRect">
-            <a:avLst>
-              <a:gd name="adj" fmla="val 12000"/>
-            </a:avLst>
-          </a:prstGeom>
-          <a:solidFill>
-            <a:srgbClr val="FFF8E1"/>
-          </a:solidFill>
-          <a:ln>
-            <a:noFill/>
-          </a:ln>
-        </p:spPr>
-        <p:style>
-          <a:lnRef idx="1">
-            <a:schemeClr val="accent1"/>
-          </a:lnRef>
-          <a:fillRef idx="3">
-            <a:schemeClr val="accent1"/>
-          </a:fillRef>
-          <a:effectRef idx="2">
-            <a:schemeClr val="accent1"/>
-          </a:effectRef>
-          <a:fontRef idx="minor">
-            <a:schemeClr val="lt1"/>
-          </a:fontRef>
-        </p:style>
-        <p:txBody>
-          <a:bodyPr rtlCol="0" anchor="ctr"/>
-          <a:lstStyle/>
-          <a:p>
-            <a:pPr algn="ctr"/>
-          </a:p>
-        </p:txBody>
-      </p:sp>
-      <p:sp>
-        <p:nvSpPr>
-          <p:cNvPr id="9" name="Rectangle 8"/>
-          <p:cNvSpPr/>
-          <p:nvPr/>
-        </p:nvSpPr>
-        <p:spPr>
-          <a:xfrm>
-            <a:off x="457200" y="2478024"/>
-            <a:ext cx="128016" cy="1051560"/>
-          </a:xfrm>
-          <a:prstGeom prst="rect">
-            <a:avLst/>
-          </a:prstGeom>
-          <a:solidFill>
-            <a:srgbClr val="FFD000"/>
-          </a:solidFill>
-          <a:ln>
-            <a:noFill/>
-          </a:ln>
-        </p:spPr>
-        <p:style>
-          <a:lnRef idx="1">
-            <a:schemeClr val="accent1"/>
-          </a:lnRef>
-          <a:fillRef idx="3">
-            <a:schemeClr val="accent1"/>
-          </a:fillRef>
-          <a:effectRef idx="2">
-            <a:schemeClr val="accent1"/>
-          </a:effectRef>
-          <a:fontRef idx="minor">
-            <a:schemeClr val="lt1"/>
-          </a:fontRef>
-        </p:style>
-        <p:txBody>
-          <a:bodyPr rtlCol="0" anchor="ctr"/>
-          <a:lstStyle/>
-          <a:p>
-            <a:pPr algn="ctr"/>
-          </a:p>
-        </p:txBody>
-      </p:sp>
-      <p:sp>
-        <p:nvSpPr>
-          <p:cNvPr id="10" name="TextBox 9"/>
-          <p:cNvSpPr txBox="1"/>
-          <p:nvPr/>
-        </p:nvSpPr>
-        <p:spPr>
-          <a:xfrm>
-            <a:off x="777240" y="2615184"/>
-            <a:ext cx="10774375" cy="822959"/>
-          </a:xfrm>
-          <a:prstGeom prst="rect">
-            <a:avLst/>
-          </a:prstGeom>
-          <a:noFill/>
-        </p:spPr>
-        <p:txBody>
-          <a:bodyPr wrap="square">
-            <a:spAutoFit/>
-          </a:bodyPr>
-          <a:lstStyle/>
-          <a:p>
-            <a:r>
-              <a:rPr sz="1200" b="1" i="0">
-                <a:solidFill>
-                  <a:srgbClr val="FFD000"/>
-                </a:solidFill>
-                <a:latin typeface="Calibri"/>
-              </a:rPr>
-              <a:t>Aclaración</a:t>
-            </a:r>
-          </a:p>
-          <a:p>
-            <a:pPr>
-              <a:spcBef>
-                <a:spcPts val="400"/>
-              </a:spcBef>
-            </a:pPr>
-            <a:r>
-              <a:rPr sz="1400" b="0" i="0">
-                <a:solidFill>
-                  <a:srgbClr val="333333"/>
-                </a:solidFill>
-                <a:latin typeface="Calibri"/>
-              </a:rPr>
-              <a:t>Enunciado completo: Clases/Proyecto Integrador/ (VetCare DB).</a:t>
-            </a:r>
-          </a:p>
-        </p:txBody>
-      </p:sp>
-      <p:sp>
-        <p:nvSpPr>
-          <p:cNvPr id="11" name="Rounded Rectangle 10"/>
-          <p:cNvSpPr/>
-          <p:nvPr/>
-        </p:nvSpPr>
-        <p:spPr>
-          <a:xfrm>
-            <a:off x="457200" y="3694176"/>
-            <a:ext cx="11277295" cy="1051560"/>
-          </a:xfrm>
-          <a:prstGeom prst="roundRect">
-            <a:avLst>
-              <a:gd name="adj" fmla="val 12000"/>
-            </a:avLst>
-          </a:prstGeom>
-          <a:solidFill>
-            <a:srgbClr val="FBE4E4"/>
-          </a:solidFill>
-          <a:ln>
-            <a:noFill/>
-          </a:ln>
-        </p:spPr>
-        <p:style>
-          <a:lnRef idx="1">
-            <a:schemeClr val="accent1"/>
-          </a:lnRef>
-          <a:fillRef idx="3">
-            <a:schemeClr val="accent1"/>
-          </a:fillRef>
-          <a:effectRef idx="2">
-            <a:schemeClr val="accent1"/>
-          </a:effectRef>
-          <a:fontRef idx="minor">
-            <a:schemeClr val="lt1"/>
-          </a:fontRef>
-        </p:style>
-        <p:txBody>
-          <a:bodyPr rtlCol="0" anchor="ctr"/>
-          <a:lstStyle/>
-          <a:p>
-            <a:pPr algn="ctr"/>
-          </a:p>
-        </p:txBody>
-      </p:sp>
-      <p:sp>
-        <p:nvSpPr>
-          <p:cNvPr id="12" name="Rectangle 11"/>
-          <p:cNvSpPr/>
-          <p:nvPr/>
-        </p:nvSpPr>
-        <p:spPr>
-          <a:xfrm>
-            <a:off x="457200" y="3694176"/>
-            <a:ext cx="128016" cy="1051560"/>
-          </a:xfrm>
-          <a:prstGeom prst="rect">
-            <a:avLst/>
-          </a:prstGeom>
-          <a:solidFill>
-            <a:srgbClr val="A02030"/>
-          </a:solidFill>
-          <a:ln>
-            <a:noFill/>
-          </a:ln>
-        </p:spPr>
-        <p:style>
-          <a:lnRef idx="1">
-            <a:schemeClr val="accent1"/>
-          </a:lnRef>
-          <a:fillRef idx="3">
-            <a:schemeClr val="accent1"/>
-          </a:fillRef>
-          <a:effectRef idx="2">
-            <a:schemeClr val="accent1"/>
-          </a:effectRef>
-          <a:fontRef idx="minor">
-            <a:schemeClr val="lt1"/>
-          </a:fontRef>
-        </p:style>
-        <p:txBody>
-          <a:bodyPr rtlCol="0" anchor="ctr"/>
-          <a:lstStyle/>
-          <a:p>
-            <a:pPr algn="ctr"/>
-          </a:p>
-        </p:txBody>
-      </p:sp>
-      <p:sp>
-        <p:nvSpPr>
-          <p:cNvPr id="13" name="TextBox 12"/>
-          <p:cNvSpPr txBox="1"/>
-          <p:nvPr/>
-        </p:nvSpPr>
-        <p:spPr>
-          <a:xfrm>
-            <a:off x="777240" y="3831336"/>
-            <a:ext cx="10774375" cy="822959"/>
-          </a:xfrm>
-          <a:prstGeom prst="rect">
-            <a:avLst/>
-          </a:prstGeom>
-          <a:noFill/>
-        </p:spPr>
-        <p:txBody>
-          <a:bodyPr wrap="square">
-            <a:spAutoFit/>
-          </a:bodyPr>
-          <a:lstStyle/>
-          <a:p>
-            <a:r>
-              <a:rPr sz="1200" b="1" i="0">
-                <a:solidFill>
-                  <a:srgbClr val="A02030"/>
-                </a:solidFill>
-                <a:latin typeface="Calibri"/>
-              </a:rPr>
-              <a:t>Atención</a:t>
-            </a:r>
-          </a:p>
-          <a:p>
-            <a:pPr>
-              <a:spcBef>
-                <a:spcPts val="400"/>
-              </a:spcBef>
-            </a:pPr>
-            <a:r>
-              <a:rPr sz="1400" b="0" i="0">
-                <a:solidFill>
-                  <a:srgbClr val="333333"/>
-                </a:solidFill>
-                <a:latin typeface="Calibri"/>
-              </a:rPr>
-              <a:t>Si el docente asigna taller esta semana, él indica el canal y la fecha.</a:t>
-            </a:r>
-          </a:p>
-        </p:txBody>
-      </p:sp>
-      <p:sp>
-        <p:nvSpPr>
-          <p:cNvPr id="14" name="TextBox 13"/>
-          <p:cNvSpPr txBox="1"/>
-          <p:nvPr/>
-        </p:nvSpPr>
-        <p:spPr>
-          <a:xfrm>
-            <a:off x="11185855" y="6473952"/>
-            <a:ext cx="640080" cy="274320"/>
-          </a:xfrm>
-          <a:prstGeom prst="rect">
-            <a:avLst/>
-          </a:prstGeom>
-          <a:noFill/>
-        </p:spPr>
-        <p:txBody>
-          <a:bodyPr wrap="square">
-            <a:spAutoFit/>
-          </a:bodyPr>
-          <a:lstStyle/>
-          <a:p>
-            <a:pPr algn="r"/>
-            <a:r>
-              <a:rPr sz="1100" b="0" i="0">
-                <a:solidFill>
-                  <a:srgbClr val="666666"/>
-                </a:solidFill>
-                <a:latin typeface="Calibri"/>
-              </a:rPr>
-              <a:t>60</a:t>
-            </a:r>
-          </a:p>
-        </p:txBody>
-      </p:sp>
-    </p:spTree>
-  </p:cSld>
-  <p:clrMapOvr>
-    <a:masterClrMapping/>
-  </p:clrMapOvr>
-</p:sld>
-</file>
-
-<file path=ppt/slides/slide61.xml><?xml version="1.0" encoding="utf-8"?>
-<p:sld xmlns:a="http://schemas.openxmlformats.org/drawingml/2006/main" xmlns:p="http://schemas.openxmlformats.org/presentationml/2006/main" xmlns:r="http://schemas.openxmlformats.org/officeDocument/2006/relationships">
-  <p:cSld>
-    <p:bg>
-      <p:bgPr>
-        <a:solidFill>
-          <a:srgbClr val="FFFFFF"/>
-        </a:solidFill>
-        <a:effectLst/>
-      </p:bgPr>
-    </p:bg>
-    <p:spTree>
-      <p:nvGrpSpPr>
-        <p:cNvPr id="1" name=""/>
-        <p:cNvGrpSpPr/>
-        <p:nvPr/>
-      </p:nvGrpSpPr>
-      <p:grpSpPr/>
-      <p:sp>
-        <p:nvSpPr>
-          <p:cNvPr id="2" name="Rectangle 1"/>
-          <p:cNvSpPr/>
-          <p:nvPr/>
-        </p:nvSpPr>
-        <p:spPr>
-          <a:xfrm>
-            <a:off x="0" y="0"/>
-            <a:ext cx="12191695" cy="164592"/>
-          </a:xfrm>
-          <a:prstGeom prst="rect">
-            <a:avLst/>
-          </a:prstGeom>
-          <a:solidFill>
-            <a:srgbClr val="269CCB"/>
-          </a:solidFill>
-          <a:ln>
-            <a:noFill/>
-          </a:ln>
-        </p:spPr>
-        <p:style>
-          <a:lnRef idx="1">
-            <a:schemeClr val="accent1"/>
-          </a:lnRef>
-          <a:fillRef idx="3">
-            <a:schemeClr val="accent1"/>
-          </a:fillRef>
-          <a:effectRef idx="2">
-            <a:schemeClr val="accent1"/>
-          </a:effectRef>
-          <a:fontRef idx="minor">
-            <a:schemeClr val="lt1"/>
-          </a:fontRef>
-        </p:style>
-        <p:txBody>
-          <a:bodyPr rtlCol="0" anchor="ctr"/>
-          <a:lstStyle/>
-          <a:p>
-            <a:pPr algn="ctr"/>
-          </a:p>
-        </p:txBody>
-      </p:sp>
-      <p:pic>
-        <p:nvPicPr>
-          <p:cNvPr id="3" name="Picture 2" descr="logo_uniajc_color.png"/>
-          <p:cNvPicPr>
-            <a:picLocks noChangeAspect="1"/>
-          </p:cNvPicPr>
-          <p:nvPr/>
-        </p:nvPicPr>
-        <p:blipFill>
-          <a:blip r:embed="rId2"/>
-          <a:stretch>
-            <a:fillRect/>
-          </a:stretch>
-        </p:blipFill>
-        <p:spPr>
-          <a:xfrm>
-            <a:off x="10271455" y="5998464"/>
-            <a:ext cx="1463040" cy="643233"/>
-          </a:xfrm>
-          <a:prstGeom prst="rect">
-            <a:avLst/>
-          </a:prstGeom>
-        </p:spPr>
-      </p:pic>
-      <p:sp>
-        <p:nvSpPr>
-          <p:cNvPr id="4" name="TextBox 3"/>
-          <p:cNvSpPr txBox="1"/>
-          <p:nvPr/>
-        </p:nvSpPr>
-        <p:spPr>
-          <a:xfrm>
-            <a:off x="457200" y="1737360"/>
-            <a:ext cx="11277295" cy="1097280"/>
-          </a:xfrm>
-          <a:prstGeom prst="rect">
-            <a:avLst/>
-          </a:prstGeom>
-          <a:noFill/>
-        </p:spPr>
-        <p:txBody>
-          <a:bodyPr wrap="square" anchor="ctr"/>
-          <a:lstStyle/>
-          <a:p>
-            <a:pPr algn="ctr"/>
-            <a:r>
-              <a:rPr sz="3400" b="1" i="0">
-                <a:solidFill>
-                  <a:srgbClr val="095292"/>
-                </a:solidFill>
-                <a:latin typeface="Calibri"/>
-              </a:rPr>
-              <a:t>Clase 3 · VetCare avanza</a:t>
-            </a:r>
-          </a:p>
-        </p:txBody>
-      </p:sp>
-      <p:sp>
-        <p:nvSpPr>
-          <p:cNvPr id="5" name="TextBox 4"/>
-          <p:cNvSpPr txBox="1"/>
-          <p:nvPr/>
-        </p:nvSpPr>
-        <p:spPr>
-          <a:xfrm>
-            <a:off x="457200" y="3017520"/>
-            <a:ext cx="11277295" cy="1645920"/>
-          </a:xfrm>
-          <a:prstGeom prst="rect">
-            <a:avLst/>
-          </a:prstGeom>
-          <a:noFill/>
-        </p:spPr>
-        <p:txBody>
-          <a:bodyPr wrap="square">
-            <a:spAutoFit/>
-          </a:bodyPr>
-          <a:lstStyle/>
-          <a:p>
-            <a:pPr algn="ctr">
-              <a:spcAft>
-                <a:spcPts val="600"/>
-              </a:spcAft>
-            </a:pPr>
-            <a:r>
-              <a:rPr sz="1600" b="0" i="0">
-                <a:solidFill>
-                  <a:srgbClr val="333333"/>
-                </a:solidFill>
-                <a:latin typeface="Calibri"/>
-              </a:rPr>
-              <a:t>&gt;=1 procedimiento de negocio (agendar cita / registrar consulta)</a:t>
-            </a:r>
-          </a:p>
-          <a:p>
-            <a:pPr algn="ctr">
-              <a:spcAft>
-                <a:spcPts val="600"/>
-              </a:spcAft>
-            </a:pPr>
-            <a:r>
-              <a:rPr sz="1600" b="0" i="0">
-                <a:solidFill>
-                  <a:srgbClr val="333333"/>
-                </a:solidFill>
-                <a:latin typeface="Calibri"/>
-              </a:rPr>
-              <a:t>Entregable: 2 procedimientos en PL/pgSQL corriendo en la plataforma del curso + bateria de pruebas con su tabla resultado_prueba + contrato del proc (6 bloques)</a:t>
-            </a:r>
-          </a:p>
-          <a:p>
-            <a:pPr algn="ctr">
-              <a:spcAft>
-                <a:spcPts val="600"/>
-              </a:spcAft>
-            </a:pPr>
-            <a:r>
-              <a:rPr sz="1600" b="0" i="0">
-                <a:solidFill>
-                  <a:srgbClr val="333333"/>
-                </a:solidFill>
-                <a:latin typeface="Calibri"/>
-              </a:rPr>
-              <a:t>Siguiente clase: continuar el hilo del PI segun plan</a:t>
-            </a:r>
-          </a:p>
-        </p:txBody>
-      </p:sp>
-      <p:sp>
-        <p:nvSpPr>
-          <p:cNvPr id="6" name="TextBox 5"/>
-          <p:cNvSpPr txBox="1"/>
-          <p:nvPr/>
-        </p:nvSpPr>
-        <p:spPr>
-          <a:xfrm>
-            <a:off x="457200" y="4754880"/>
-            <a:ext cx="11277295" cy="640080"/>
-          </a:xfrm>
-          <a:prstGeom prst="rect">
-            <a:avLst/>
-          </a:prstGeom>
-          <a:noFill/>
-        </p:spPr>
-        <p:txBody>
-          <a:bodyPr wrap="square">
-            <a:spAutoFit/>
-          </a:bodyPr>
-          <a:lstStyle/>
-          <a:p>
-            <a:pPr algn="ctr"/>
-            <a:r>
-              <a:rPr sz="2000" b="1" i="0">
-                <a:solidFill>
-                  <a:srgbClr val="269CCB"/>
-                </a:solidFill>
-                <a:latin typeface="Calibri"/>
-              </a:rPr>
-              <a:t>Teoria breve · practica = PI</a:t>
             </a:r>
           </a:p>
         </p:txBody>
@@ -26939,4 +22885,324 @@
   </a:objectDefaults>
   <a:extraClrSchemeLst/>
 </a:theme>
+</file>
+
+<file path=ppt/theme/theme2.xml><?xml version="1.0" encoding="utf-8"?>
+<a:theme xmlns:a="http://schemas.openxmlformats.org/drawingml/2006/main" name="Office Theme">
+  <a:themeElements>
+    <a:clrScheme name="Office">
+      <a:dk1>
+        <a:sysClr val="windowText" lastClr="000000"/>
+      </a:dk1>
+      <a:lt1>
+        <a:sysClr val="window" lastClr="FFFFFF"/>
+      </a:lt1>
+      <a:dk2>
+        <a:srgbClr val="1F497D"/>
+      </a:dk2>
+      <a:lt2>
+        <a:srgbClr val="EEECE1"/>
+      </a:lt2>
+      <a:accent1>
+        <a:srgbClr val="4F81BD"/>
+      </a:accent1>
+      <a:accent2>
+        <a:srgbClr val="C0504D"/>
+      </a:accent2>
+      <a:accent3>
+        <a:srgbClr val="9BBB59"/>
+      </a:accent3>
+      <a:accent4>
+        <a:srgbClr val="8064A2"/>
+      </a:accent4>
+      <a:accent5>
+        <a:srgbClr val="4BACC6"/>
+      </a:accent5>
+      <a:accent6>
+        <a:srgbClr val="F79646"/>
+      </a:accent6>
+      <a:hlink>
+        <a:srgbClr val="0000FF"/>
+      </a:hlink>
+      <a:folHlink>
+        <a:srgbClr val="800080"/>
+      </a:folHlink>
+    </a:clrScheme>
+    <a:fontScheme name="Office">
+      <a:majorFont>
+        <a:latin typeface="Calibri"/>
+        <a:ea typeface=""/>
+        <a:cs typeface=""/>
+        <a:font script="Jpan" typeface="ＭＳ Ｐゴシック"/>
+        <a:font script="Hang" typeface="맑은 고딕"/>
+        <a:font script="Hans" typeface="宋体"/>
+        <a:font script="Hant" typeface="新細明體"/>
+        <a:font script="Arab" typeface="Times New Roman"/>
+        <a:font script="Hebr" typeface="Times New Roman"/>
+        <a:font script="Thai" typeface="Angsana New"/>
+        <a:font script="Ethi" typeface="Nyala"/>
+        <a:font script="Beng" typeface="Vrinda"/>
+        <a:font script="Gujr" typeface="Shruti"/>
+        <a:font script="Khmr" typeface="MoolBoran"/>
+        <a:font script="Knda" typeface="Tunga"/>
+        <a:font script="Guru" typeface="Raavi"/>
+        <a:font script="Cans" typeface="Euphemia"/>
+        <a:font script="Cher" typeface="Plantagenet Cherokee"/>
+        <a:font script="Yiii" typeface="Microsoft Yi Baiti"/>
+        <a:font script="Tibt" typeface="Microsoft Himalaya"/>
+        <a:font script="Thaa" typeface="MV Boli"/>
+        <a:font script="Deva" typeface="Mangal"/>
+        <a:font script="Telu" typeface="Gautami"/>
+        <a:font script="Taml" typeface="Latha"/>
+        <a:font script="Syrc" typeface="Estrangelo Edessa"/>
+        <a:font script="Orya" typeface="Kalinga"/>
+        <a:font script="Mlym" typeface="Kartika"/>
+        <a:font script="Laoo" typeface="DokChampa"/>
+        <a:font script="Sinh" typeface="Iskoola Pota"/>
+        <a:font script="Mong" typeface="Mongolian Baiti"/>
+        <a:font script="Viet" typeface="Times New Roman"/>
+        <a:font script="Uigh" typeface="Microsoft Uighur"/>
+        <a:font script="Geor" typeface="Sylfaen"/>
+      </a:majorFont>
+      <a:minorFont>
+        <a:latin typeface="Calibri"/>
+        <a:ea typeface=""/>
+        <a:cs typeface=""/>
+        <a:font script="Jpan" typeface="ＭＳ Ｐゴシック"/>
+        <a:font script="Hang" typeface="맑은 고딕"/>
+        <a:font script="Hans" typeface="宋体"/>
+        <a:font script="Hant" typeface="新細明體"/>
+        <a:font script="Arab" typeface="Arial"/>
+        <a:font script="Hebr" typeface="Arial"/>
+        <a:font script="Thai" typeface="Cordia New"/>
+        <a:font script="Ethi" typeface="Nyala"/>
+        <a:font script="Beng" typeface="Vrinda"/>
+        <a:font script="Gujr" typeface="Shruti"/>
+        <a:font script="Khmr" typeface="DaunPenh"/>
+        <a:font script="Knda" typeface="Tunga"/>
+        <a:font script="Guru" typeface="Raavi"/>
+        <a:font script="Cans" typeface="Euphemia"/>
+        <a:font script="Cher" typeface="Plantagenet Cherokee"/>
+        <a:font script="Yiii" typeface="Microsoft Yi Baiti"/>
+        <a:font script="Tibt" typeface="Microsoft Himalaya"/>
+        <a:font script="Thaa" typeface="MV Boli"/>
+        <a:font script="Deva" typeface="Mangal"/>
+        <a:font script="Telu" typeface="Gautami"/>
+        <a:font script="Taml" typeface="Latha"/>
+        <a:font script="Syrc" typeface="Estrangelo Edessa"/>
+        <a:font script="Orya" typeface="Kalinga"/>
+        <a:font script="Mlym" typeface="Kartika"/>
+        <a:font script="Laoo" typeface="DokChampa"/>
+        <a:font script="Sinh" typeface="Iskoola Pota"/>
+        <a:font script="Mong" typeface="Mongolian Baiti"/>
+        <a:font script="Viet" typeface="Arial"/>
+        <a:font script="Uigh" typeface="Microsoft Uighur"/>
+        <a:font script="Geor" typeface="Sylfaen"/>
+      </a:minorFont>
+    </a:fontScheme>
+    <a:fmtScheme name="Office">
+      <a:fillStyleLst>
+        <a:solidFill>
+          <a:schemeClr val="phClr"/>
+        </a:solidFill>
+        <a:gradFill rotWithShape="1">
+          <a:gsLst>
+            <a:gs pos="0">
+              <a:schemeClr val="phClr">
+                <a:tint val="50000"/>
+                <a:satMod val="300000"/>
+              </a:schemeClr>
+            </a:gs>
+            <a:gs pos="35000">
+              <a:schemeClr val="phClr">
+                <a:tint val="37000"/>
+                <a:satMod val="300000"/>
+              </a:schemeClr>
+            </a:gs>
+            <a:gs pos="100000">
+              <a:schemeClr val="phClr">
+                <a:tint val="15000"/>
+                <a:satMod val="350000"/>
+              </a:schemeClr>
+            </a:gs>
+          </a:gsLst>
+          <a:lin ang="16200000" scaled="1"/>
+        </a:gradFill>
+        <a:gradFill rotWithShape="1">
+          <a:gsLst>
+            <a:gs pos="0">
+              <a:schemeClr val="phClr">
+                <a:tint val="100000"/>
+                <a:shade val="100000"/>
+                <a:satMod val="130000"/>
+              </a:schemeClr>
+            </a:gs>
+            <a:gs pos="100000">
+              <a:schemeClr val="phClr">
+                <a:tint val="50000"/>
+                <a:shade val="100000"/>
+                <a:satMod val="350000"/>
+              </a:schemeClr>
+            </a:gs>
+          </a:gsLst>
+          <a:lin ang="16200000" scaled="0"/>
+        </a:gradFill>
+      </a:fillStyleLst>
+      <a:lnStyleLst>
+        <a:ln w="9525" cap="flat" cmpd="sng" algn="ctr">
+          <a:solidFill>
+            <a:schemeClr val="phClr">
+              <a:shade val="95000"/>
+              <a:satMod val="105000"/>
+            </a:schemeClr>
+          </a:solidFill>
+          <a:prstDash val="solid"/>
+        </a:ln>
+        <a:ln w="25400" cap="flat" cmpd="sng" algn="ctr">
+          <a:solidFill>
+            <a:schemeClr val="phClr"/>
+          </a:solidFill>
+          <a:prstDash val="solid"/>
+        </a:ln>
+        <a:ln w="38100" cap="flat" cmpd="sng" algn="ctr">
+          <a:solidFill>
+            <a:schemeClr val="phClr"/>
+          </a:solidFill>
+          <a:prstDash val="solid"/>
+        </a:ln>
+      </a:lnStyleLst>
+      <a:effectStyleLst>
+        <a:effectStyle>
+          <a:effectLst>
+            <a:outerShdw blurRad="40000" dist="20000" dir="5400000" rotWithShape="0">
+              <a:srgbClr val="000000">
+                <a:alpha val="38000"/>
+              </a:srgbClr>
+            </a:outerShdw>
+          </a:effectLst>
+        </a:effectStyle>
+        <a:effectStyle>
+          <a:effectLst>
+            <a:outerShdw blurRad="40000" dist="23000" dir="5400000" rotWithShape="0">
+              <a:srgbClr val="000000">
+                <a:alpha val="35000"/>
+              </a:srgbClr>
+            </a:outerShdw>
+          </a:effectLst>
+        </a:effectStyle>
+        <a:effectStyle>
+          <a:effectLst>
+            <a:outerShdw blurRad="40000" dist="23000" dir="5400000" rotWithShape="0">
+              <a:srgbClr val="000000">
+                <a:alpha val="35000"/>
+              </a:srgbClr>
+            </a:outerShdw>
+          </a:effectLst>
+          <a:scene3d>
+            <a:camera prst="orthographicFront">
+              <a:rot lat="0" lon="0" rev="0"/>
+            </a:camera>
+            <a:lightRig rig="threePt" dir="t">
+              <a:rot lat="0" lon="0" rev="1200000"/>
+            </a:lightRig>
+          </a:scene3d>
+          <a:sp3d>
+            <a:bevelT w="63500" h="25400"/>
+          </a:sp3d>
+        </a:effectStyle>
+      </a:effectStyleLst>
+      <a:bgFillStyleLst>
+        <a:solidFill>
+          <a:schemeClr val="phClr"/>
+        </a:solidFill>
+        <a:gradFill rotWithShape="1">
+          <a:gsLst>
+            <a:gs pos="0">
+              <a:schemeClr val="phClr">
+                <a:tint val="40000"/>
+                <a:satMod val="350000"/>
+              </a:schemeClr>
+            </a:gs>
+            <a:gs pos="40000">
+              <a:schemeClr val="phClr">
+                <a:tint val="45000"/>
+                <a:shade val="99000"/>
+                <a:satMod val="350000"/>
+              </a:schemeClr>
+            </a:gs>
+            <a:gs pos="100000">
+              <a:schemeClr val="phClr">
+                <a:shade val="20000"/>
+                <a:satMod val="255000"/>
+              </a:schemeClr>
+            </a:gs>
+          </a:gsLst>
+          <a:path path="circle">
+            <a:fillToRect l="50000" t="-80000" r="50000" b="180000"/>
+          </a:path>
+        </a:gradFill>
+        <a:gradFill rotWithShape="1">
+          <a:gsLst>
+            <a:gs pos="0">
+              <a:schemeClr val="phClr">
+                <a:tint val="80000"/>
+                <a:satMod val="300000"/>
+              </a:schemeClr>
+            </a:gs>
+            <a:gs pos="100000">
+              <a:schemeClr val="phClr">
+                <a:shade val="30000"/>
+                <a:satMod val="200000"/>
+              </a:schemeClr>
+            </a:gs>
+          </a:gsLst>
+          <a:path path="circle">
+            <a:fillToRect l="50000" t="50000" r="50000" b="50000"/>
+          </a:path>
+        </a:gradFill>
+      </a:bgFillStyleLst>
+    </a:fmtScheme>
+  </a:themeElements>
+  <a:objectDefaults>
+    <a:spDef>
+      <a:spPr/>
+      <a:bodyPr/>
+      <a:lstStyle/>
+      <a:style>
+        <a:lnRef idx="1">
+          <a:schemeClr val="accent1"/>
+        </a:lnRef>
+        <a:fillRef idx="3">
+          <a:schemeClr val="accent1"/>
+        </a:fillRef>
+        <a:effectRef idx="2">
+          <a:schemeClr val="accent1"/>
+        </a:effectRef>
+        <a:fontRef idx="minor">
+          <a:schemeClr val="lt1"/>
+        </a:fontRef>
+      </a:style>
+    </a:spDef>
+    <a:lnDef>
+      <a:spPr/>
+      <a:bodyPr/>
+      <a:lstStyle/>
+      <a:style>
+        <a:lnRef idx="2">
+          <a:schemeClr val="accent1"/>
+        </a:lnRef>
+        <a:fillRef idx="0">
+          <a:schemeClr val="accent1"/>
+        </a:fillRef>
+        <a:effectRef idx="1">
+          <a:schemeClr val="accent1"/>
+        </a:effectRef>
+        <a:fontRef idx="minor">
+          <a:schemeClr val="tx1"/>
+        </a:fontRef>
+      </a:style>
+    </a:lnDef>
+  </a:objectDefaults>
+  <a:extraClrSchemeLst/>
+</a:theme>
 </file>
--- a/Bases de Datos II/Clases/Clase 3 - Procedimientos almacenados/Presentacion.pptx
+++ b/Bases de Datos II/Clases/Clase 3 - Procedimientos almacenados/Presentacion.pptx
@@ -639,7 +639,12 @@
           <a:lstStyle/>
           <a:p>
             <a:r>
-              <a:t>Conviene cerrar la teoria con esta distincion, y decirla HOY, porque el estudiante la va a necesitar en el taller de hoy y no la semana entrante.</a:t>
+              <a:t>Un contrato sirve si permite escribir la llamada y manejar los errores sin leer el cuerpo.</a:t>
+            </a:r>
+          </a:p>
+          <a:p>
+            <a:r>
+              <a:t>Sin ella, quien llama no sabe si tiene que limpiar algo.</a:t>
             </a:r>
           </a:p>
         </p:txBody>
@@ -709,7 +714,12 @@
           <a:lstStyle/>
           <a:p>
             <a:r>
-              <a:t>Conviene mencionar que RAISE tiene niveles —NOTICE, WARNING, EXCEPTION— y que solo el ultimo aborta.</a:t>
+              <a:t>Fuera de la lamina (habla de la practica, no del tema):</a:t>
+            </a:r>
+          </a:p>
+          <a:p>
+            <a:r>
+              <a:t>- La tabla de errores lleva el mensaje LITERAL, no una parafrasis, porque quien llama va a comparar contra ese texto —y porque es el mismo texto que la bateria de pruebas verifica, de modo que los dos entregables tienen que coincidir palabra por palabra.</a:t>
             </a:r>
           </a:p>
         </p:txBody>
@@ -779,7 +789,7 @@
           <a:lstStyle/>
           <a:p>
             <a:r>
-              <a:t>Ahi funcionan CREATE PROCEDURE, el dollar-quoting, RAISE EXCEPTION, los bloques DO, SQLERRM y SQLSTATE, y la tabla resultado_prueba: la evidencia del taller es la salida del motor y no una promesa.</a:t>
+              <a:t>Conviene cerrar la teoria con esta distincion, y decirla HOY, porque el estudiante la va a necesitar en el taller de hoy y no la semana entrante.</a:t>
             </a:r>
           </a:p>
         </p:txBody>
@@ -849,22 +859,7 @@
           <a:lstStyle/>
           <a:p>
             <a:r>
-              <a:t>Eso significa que registrar dos veces la consulta de la misma cita ya esta impedido por el motor: el segundo INSERT choca contra la restriccion de unicidad y falla.</a:t>
-            </a:r>
-          </a:p>
-          <a:p>
-            <a:r>
-              <a:t>La respuesta tiene dos partes y las dos valen.</a:t>
-            </a:r>
-          </a:p>
-          <a:p>
-            <a:r>
-              <a:t>Conviene decir tambien lo que NO hay que hacer: quitar la restriccion porque ya esta el procedimiento.</a:t>
-            </a:r>
-          </a:p>
-          <a:p>
-            <a:r>
-              <a:t>Esa jerarquia —declarativo primero, procedimiento encima— es exactamente lo que la Clase 4 va a formalizar.</a:t>
+              <a:t>Conviene mencionar que RAISE tiene niveles —NOTICE, WARNING, EXCEPTION— y que solo el ultimo aborta.</a:t>
             </a:r>
           </a:p>
         </p:txBody>
@@ -934,7 +929,403 @@
           <a:lstStyle/>
           <a:p>
             <a:r>
+              <a:t>Fuera de la lamina (habla de la practica, no del tema):</a:t>
+            </a:r>
+          </a:p>
+          <a:p>
+            <a:r>
+              <a:t>- Este punto hay que decirlo con precision porque una version anterior de esta guia decia lo contrario y costaria puntos repetirla.</a:t>
+            </a:r>
+          </a:p>
+          <a:p>
+            <a:r>
+              <a:t>- Oracle Live SQL sigue en el kit, pero cambia de papel y hay que decirlo sin ambiguedad: sirve como CONTRASTE de sintaxis para quien se vaya a encontrar Oracle en el trabajo, no como sitio donde se hace el taller.</a:t>
+            </a:r>
+          </a:p>
+          <a:p/>
+          <a:p>
+            <a:r>
+              <a:t>Ahi funcionan CREATE PROCEDURE, el dollar-quoting, RAISE EXCEPTION, los bloques DO, SQLERRM y SQLSTATE, y la tabla resultado_prueba: la evidencia del taller es la salida del motor y no una promesa.</a:t>
+            </a:r>
+          </a:p>
+        </p:txBody>
+      </p:sp>
+      <p:sp>
+        <p:nvSpPr>
+          <p:cNvPr id="4" name="Slide Number Placeholder 3"/>
+          <p:cNvSpPr>
+            <a:spLocks noGrp="1"/>
+          </p:cNvSpPr>
+          <p:nvPr>
+            <p:ph type="sldNum" idx="5" sz="quarter"/>
+          </p:nvPr>
+        </p:nvSpPr>
+        <p:spPr/>
+      </p:sp>
+    </p:spTree>
+  </p:cSld>
+  <p:clrMapOvr>
+    <a:masterClrMapping/>
+  </p:clrMapOvr>
+</p:notes>
+</file>
+
+<file path=ppt/notesSlides/notesSlide15.xml><?xml version="1.0" encoding="utf-8"?>
+<p:notes xmlns:a="http://schemas.openxmlformats.org/drawingml/2006/main" xmlns:p="http://schemas.openxmlformats.org/presentationml/2006/main" xmlns:r="http://schemas.openxmlformats.org/officeDocument/2006/relationships">
+  <p:cSld>
+    <p:spTree>
+      <p:nvGrpSpPr>
+        <p:cNvPr id="1" name=""/>
+        <p:cNvGrpSpPr/>
+        <p:nvPr/>
+      </p:nvGrpSpPr>
+      <p:grpSpPr>
+        <a:xfrm>
+          <a:off x="0" y="0"/>
+          <a:ext cx="0" cy="0"/>
+          <a:chOff x="0" y="0"/>
+          <a:chExt cx="0" cy="0"/>
+        </a:xfrm>
+      </p:grpSpPr>
+      <p:sp>
+        <p:nvSpPr>
+          <p:cNvPr id="2" name="Slide Image Placeholder 1"/>
+          <p:cNvSpPr>
+            <a:spLocks noGrp="1"/>
+          </p:cNvSpPr>
+          <p:nvPr>
+            <p:ph type="sldImg" idx="2"/>
+          </p:nvPr>
+        </p:nvSpPr>
+        <p:spPr/>
+      </p:sp>
+      <p:sp>
+        <p:nvSpPr>
+          <p:cNvPr id="3" name="Notes Placeholder 2"/>
+          <p:cNvSpPr>
+            <a:spLocks noGrp="1"/>
+          </p:cNvSpPr>
+          <p:nvPr>
+            <p:ph type="body" idx="3" sz="quarter"/>
+          </p:nvPr>
+        </p:nvSpPr>
+        <p:spPr/>
+        <p:txBody>
+          <a:bodyPr/>
+          <a:lstStyle/>
+          <a:p>
+            <a:r>
+              <a:t>Eso significa que registrar dos veces la consulta de la misma cita ya esta impedido por el motor: el segundo INSERT choca contra la restriccion de unicidad y falla.</a:t>
+            </a:r>
+          </a:p>
+          <a:p>
+            <a:r>
+              <a:t>La respuesta tiene dos partes y las dos valen.</a:t>
+            </a:r>
+          </a:p>
+          <a:p>
+            <a:r>
+              <a:t>Conviene decir tambien lo que NO hay que hacer: quitar la restriccion porque ya esta el procedimiento.</a:t>
+            </a:r>
+          </a:p>
+          <a:p>
+            <a:r>
+              <a:t>Esa jerarquia —declarativo primero, procedimiento encima— es exactamente lo que la Clase 4 va a formalizar.</a:t>
+            </a:r>
+          </a:p>
+        </p:txBody>
+      </p:sp>
+      <p:sp>
+        <p:nvSpPr>
+          <p:cNvPr id="4" name="Slide Number Placeholder 3"/>
+          <p:cNvSpPr>
+            <a:spLocks noGrp="1"/>
+          </p:cNvSpPr>
+          <p:nvPr>
+            <p:ph type="sldNum" idx="5" sz="quarter"/>
+          </p:nvPr>
+        </p:nvSpPr>
+        <p:spPr/>
+      </p:sp>
+    </p:spTree>
+  </p:cSld>
+  <p:clrMapOvr>
+    <a:masterClrMapping/>
+  </p:clrMapOvr>
+</p:notes>
+</file>
+
+<file path=ppt/notesSlides/notesSlide16.xml><?xml version="1.0" encoding="utf-8"?>
+<p:notes xmlns:a="http://schemas.openxmlformats.org/drawingml/2006/main" xmlns:p="http://schemas.openxmlformats.org/presentationml/2006/main" xmlns:r="http://schemas.openxmlformats.org/officeDocument/2006/relationships">
+  <p:cSld>
+    <p:spTree>
+      <p:nvGrpSpPr>
+        <p:cNvPr id="1" name=""/>
+        <p:cNvGrpSpPr/>
+        <p:nvPr/>
+      </p:nvGrpSpPr>
+      <p:grpSpPr>
+        <a:xfrm>
+          <a:off x="0" y="0"/>
+          <a:ext cx="0" cy="0"/>
+          <a:chOff x="0" y="0"/>
+          <a:chExt cx="0" cy="0"/>
+        </a:xfrm>
+      </p:grpSpPr>
+      <p:sp>
+        <p:nvSpPr>
+          <p:cNvPr id="2" name="Slide Image Placeholder 1"/>
+          <p:cNvSpPr>
+            <a:spLocks noGrp="1"/>
+          </p:cNvSpPr>
+          <p:nvPr>
+            <p:ph type="sldImg" idx="2"/>
+          </p:nvPr>
+        </p:nvSpPr>
+        <p:spPr/>
+      </p:sp>
+      <p:sp>
+        <p:nvSpPr>
+          <p:cNvPr id="3" name="Notes Placeholder 2"/>
+          <p:cNvSpPr>
+            <a:spLocks noGrp="1"/>
+          </p:cNvSpPr>
+          <p:nvPr>
+            <p:ph type="body" idx="3" sz="quarter"/>
+          </p:nvPr>
+        </p:nvSpPr>
+        <p:spPr/>
+        <p:txBody>
+          <a:bodyPr/>
+          <a:lstStyle/>
+          <a:p>
+            <a:r>
+              <a:t>Fuera de la lamina (habla de la practica, no del tema):</a:t>
+            </a:r>
+          </a:p>
+          <a:p>
+            <a:r>
+              <a:t>- Lo de hoy no es una isla, y decirlo en voz alta le da sentido al entregable.</a:t>
+            </a:r>
+          </a:p>
+        </p:txBody>
+      </p:sp>
+      <p:sp>
+        <p:nvSpPr>
+          <p:cNvPr id="4" name="Slide Number Placeholder 3"/>
+          <p:cNvSpPr>
+            <a:spLocks noGrp="1"/>
+          </p:cNvSpPr>
+          <p:nvPr>
+            <p:ph type="sldNum" idx="5" sz="quarter"/>
+          </p:nvPr>
+        </p:nvSpPr>
+        <p:spPr/>
+      </p:sp>
+    </p:spTree>
+  </p:cSld>
+  <p:clrMapOvr>
+    <a:masterClrMapping/>
+  </p:clrMapOvr>
+</p:notes>
+</file>
+
+<file path=ppt/notesSlides/notesSlide17.xml><?xml version="1.0" encoding="utf-8"?>
+<p:notes xmlns:a="http://schemas.openxmlformats.org/drawingml/2006/main" xmlns:p="http://schemas.openxmlformats.org/presentationml/2006/main" xmlns:r="http://schemas.openxmlformats.org/officeDocument/2006/relationships">
+  <p:cSld>
+    <p:spTree>
+      <p:nvGrpSpPr>
+        <p:cNvPr id="1" name=""/>
+        <p:cNvGrpSpPr/>
+        <p:nvPr/>
+      </p:nvGrpSpPr>
+      <p:grpSpPr>
+        <a:xfrm>
+          <a:off x="0" y="0"/>
+          <a:ext cx="0" cy="0"/>
+          <a:chOff x="0" y="0"/>
+          <a:chExt cx="0" cy="0"/>
+        </a:xfrm>
+      </p:grpSpPr>
+      <p:sp>
+        <p:nvSpPr>
+          <p:cNvPr id="2" name="Slide Image Placeholder 1"/>
+          <p:cNvSpPr>
+            <a:spLocks noGrp="1"/>
+          </p:cNvSpPr>
+          <p:nvPr>
+            <p:ph type="sldImg" idx="2"/>
+          </p:nvPr>
+        </p:nvSpPr>
+        <p:spPr/>
+      </p:sp>
+      <p:sp>
+        <p:nvSpPr>
+          <p:cNvPr id="3" name="Notes Placeholder 2"/>
+          <p:cNvSpPr>
+            <a:spLocks noGrp="1"/>
+          </p:cNvSpPr>
+          <p:nvPr>
+            <p:ph type="body" idx="3" sz="quarter"/>
+          </p:nvPr>
+        </p:nvSpPr>
+        <p:spPr/>
+        <p:txBody>
+          <a:bodyPr/>
+          <a:lstStyle/>
+          <a:p>
+            <a:r>
+              <a:t>Fuera de la lamina (habla de la practica, no del tema):</a:t>
+            </a:r>
+          </a:p>
+          <a:p>
+            <a:r>
+              <a:t>- Y la Clase 12 consume estos procedimientos desde la aplicacion, que es cuando el contrato de la pregunta 5 deja de ser un documento y se vuelve la especificacion que alguien lee.</a:t>
+            </a:r>
+          </a:p>
+        </p:txBody>
+      </p:sp>
+      <p:sp>
+        <p:nvSpPr>
+          <p:cNvPr id="4" name="Slide Number Placeholder 3"/>
+          <p:cNvSpPr>
+            <a:spLocks noGrp="1"/>
+          </p:cNvSpPr>
+          <p:nvPr>
+            <p:ph type="sldNum" idx="5" sz="quarter"/>
+          </p:nvPr>
+        </p:nvSpPr>
+        <p:spPr/>
+      </p:sp>
+    </p:spTree>
+  </p:cSld>
+  <p:clrMapOvr>
+    <a:masterClrMapping/>
+  </p:clrMapOvr>
+</p:notes>
+</file>
+
+<file path=ppt/notesSlides/notesSlide18.xml><?xml version="1.0" encoding="utf-8"?>
+<p:notes xmlns:a="http://schemas.openxmlformats.org/drawingml/2006/main" xmlns:p="http://schemas.openxmlformats.org/presentationml/2006/main" xmlns:r="http://schemas.openxmlformats.org/officeDocument/2006/relationships">
+  <p:cSld>
+    <p:spTree>
+      <p:nvGrpSpPr>
+        <p:cNvPr id="1" name=""/>
+        <p:cNvGrpSpPr/>
+        <p:nvPr/>
+      </p:nvGrpSpPr>
+      <p:grpSpPr>
+        <a:xfrm>
+          <a:off x="0" y="0"/>
+          <a:ext cx="0" cy="0"/>
+          <a:chOff x="0" y="0"/>
+          <a:chExt cx="0" cy="0"/>
+        </a:xfrm>
+      </p:grpSpPr>
+      <p:sp>
+        <p:nvSpPr>
+          <p:cNvPr id="2" name="Slide Image Placeholder 1"/>
+          <p:cNvSpPr>
+            <a:spLocks noGrp="1"/>
+          </p:cNvSpPr>
+          <p:nvPr>
+            <p:ph type="sldImg" idx="2"/>
+          </p:nvPr>
+        </p:nvSpPr>
+        <p:spPr/>
+      </p:sp>
+      <p:sp>
+        <p:nvSpPr>
+          <p:cNvPr id="3" name="Notes Placeholder 2"/>
+          <p:cNvSpPr>
+            <a:spLocks noGrp="1"/>
+          </p:cNvSpPr>
+          <p:nvPr>
+            <p:ph type="body" idx="3" sz="quarter"/>
+          </p:nvPr>
+        </p:nvSpPr>
+        <p:spPr/>
+        <p:txBody>
+          <a:bodyPr/>
+          <a:lstStyle/>
+          <a:p>
+            <a:r>
               <a:t>Se limpia con DROP PROCEDURE nombrando los tipos.</a:t>
+            </a:r>
+          </a:p>
+        </p:txBody>
+      </p:sp>
+      <p:sp>
+        <p:nvSpPr>
+          <p:cNvPr id="4" name="Slide Number Placeholder 3"/>
+          <p:cNvSpPr>
+            <a:spLocks noGrp="1"/>
+          </p:cNvSpPr>
+          <p:nvPr>
+            <p:ph type="sldNum" idx="5" sz="quarter"/>
+          </p:nvPr>
+        </p:nvSpPr>
+        <p:spPr/>
+      </p:sp>
+    </p:spTree>
+  </p:cSld>
+  <p:clrMapOvr>
+    <a:masterClrMapping/>
+  </p:clrMapOvr>
+</p:notes>
+</file>
+
+<file path=ppt/notesSlides/notesSlide19.xml><?xml version="1.0" encoding="utf-8"?>
+<p:notes xmlns:a="http://schemas.openxmlformats.org/drawingml/2006/main" xmlns:p="http://schemas.openxmlformats.org/presentationml/2006/main" xmlns:r="http://schemas.openxmlformats.org/officeDocument/2006/relationships">
+  <p:cSld>
+    <p:spTree>
+      <p:nvGrpSpPr>
+        <p:cNvPr id="1" name=""/>
+        <p:cNvGrpSpPr/>
+        <p:nvPr/>
+      </p:nvGrpSpPr>
+      <p:grpSpPr>
+        <a:xfrm>
+          <a:off x="0" y="0"/>
+          <a:ext cx="0" cy="0"/>
+          <a:chOff x="0" y="0"/>
+          <a:chExt cx="0" cy="0"/>
+        </a:xfrm>
+      </p:grpSpPr>
+      <p:sp>
+        <p:nvSpPr>
+          <p:cNvPr id="2" name="Slide Image Placeholder 1"/>
+          <p:cNvSpPr>
+            <a:spLocks noGrp="1"/>
+          </p:cNvSpPr>
+          <p:nvPr>
+            <p:ph type="sldImg" idx="2"/>
+          </p:nvPr>
+        </p:nvSpPr>
+        <p:spPr/>
+      </p:sp>
+      <p:sp>
+        <p:nvSpPr>
+          <p:cNvPr id="3" name="Notes Placeholder 2"/>
+          <p:cNvSpPr>
+            <a:spLocks noGrp="1"/>
+          </p:cNvSpPr>
+          <p:nvPr>
+            <p:ph type="body" idx="3" sz="quarter"/>
+          </p:nvPr>
+        </p:nvSpPr>
+        <p:spPr/>
+        <p:txBody>
+          <a:bodyPr/>
+          <a:lstStyle/>
+          <a:p>
+            <a:r>
+              <a:t>Fuera de la lamina (habla de la practica, no del tema):</a:t>
+            </a:r>
+          </a:p>
+          <a:p>
+            <a:r>
+              <a:t>- Un procedimiento sin bateria no esta terminado: son 25 de los 100 puntos</a:t>
             </a:r>
           </a:p>
         </p:txBody>
@@ -1004,6 +1395,17 @@
           <a:lstStyle/>
           <a:p>
             <a:r>
+              <a:t>Fuera de la lamina (habla de la practica, no del tema):</a:t>
+            </a:r>
+          </a:p>
+          <a:p>
+            <a:r>
+              <a:t>- El molde es fijo y conviene dictarlo entero antes de escribir una sola validacion, porque es donde se pierden los puntos sin haber entendido nada mal.</a:t>
+            </a:r>
+          </a:p>
+          <a:p/>
+          <a:p>
+            <a:r>
               <a:t>END; $proc$; y cada pieza tiene su razon.</a:t>
             </a:r>
           </a:p>
@@ -1015,6 +1417,231 @@
           <a:p>
             <a:r>
               <a:t>Un estudiante que agregue p_id_cita no comete un error de sintaxis, comete un error de diseno, y la rubrica lo mira.</a:t>
+            </a:r>
+          </a:p>
+        </p:txBody>
+      </p:sp>
+      <p:sp>
+        <p:nvSpPr>
+          <p:cNvPr id="4" name="Slide Number Placeholder 3"/>
+          <p:cNvSpPr>
+            <a:spLocks noGrp="1"/>
+          </p:cNvSpPr>
+          <p:nvPr>
+            <p:ph type="sldNum" idx="5" sz="quarter"/>
+          </p:nvPr>
+        </p:nvSpPr>
+        <p:spPr/>
+      </p:sp>
+    </p:spTree>
+  </p:cSld>
+  <p:clrMapOvr>
+    <a:masterClrMapping/>
+  </p:clrMapOvr>
+</p:notes>
+</file>
+
+<file path=ppt/notesSlides/notesSlide20.xml><?xml version="1.0" encoding="utf-8"?>
+<p:notes xmlns:a="http://schemas.openxmlformats.org/drawingml/2006/main" xmlns:p="http://schemas.openxmlformats.org/presentationml/2006/main" xmlns:r="http://schemas.openxmlformats.org/officeDocument/2006/relationships">
+  <p:cSld>
+    <p:spTree>
+      <p:nvGrpSpPr>
+        <p:cNvPr id="1" name=""/>
+        <p:cNvGrpSpPr/>
+        <p:nvPr/>
+      </p:nvGrpSpPr>
+      <p:grpSpPr>
+        <a:xfrm>
+          <a:off x="0" y="0"/>
+          <a:ext cx="0" cy="0"/>
+          <a:chOff x="0" y="0"/>
+          <a:chExt cx="0" cy="0"/>
+        </a:xfrm>
+      </p:grpSpPr>
+      <p:sp>
+        <p:nvSpPr>
+          <p:cNvPr id="2" name="Slide Image Placeholder 1"/>
+          <p:cNvSpPr>
+            <a:spLocks noGrp="1"/>
+          </p:cNvSpPr>
+          <p:nvPr>
+            <p:ph type="sldImg" idx="2"/>
+          </p:nvPr>
+        </p:nvSpPr>
+        <p:spPr/>
+      </p:sp>
+      <p:sp>
+        <p:nvSpPr>
+          <p:cNvPr id="3" name="Notes Placeholder 2"/>
+          <p:cNvSpPr>
+            <a:spLocks noGrp="1"/>
+          </p:cNvSpPr>
+          <p:nvPr>
+            <p:ph type="body" idx="3" sz="quarter"/>
+          </p:nvPr>
+        </p:nvSpPr>
+        <p:spPr/>
+        <p:txBody>
+          <a:bodyPr/>
+          <a:lstStyle/>
+          <a:p>
+            <a:r>
+              <a:t>Fuera de la lamina (habla de la practica, no del tema):</a:t>
+            </a:r>
+          </a:p>
+          <a:p>
+            <a:r>
+              <a:t>- Los 25 puntos se califican por esta tabla, no por el CALL suelto</a:t>
+            </a:r>
+          </a:p>
+        </p:txBody>
+      </p:sp>
+      <p:sp>
+        <p:nvSpPr>
+          <p:cNvPr id="4" name="Slide Number Placeholder 3"/>
+          <p:cNvSpPr>
+            <a:spLocks noGrp="1"/>
+          </p:cNvSpPr>
+          <p:nvPr>
+            <p:ph type="sldNum" idx="5" sz="quarter"/>
+          </p:nvPr>
+        </p:nvSpPr>
+        <p:spPr/>
+      </p:sp>
+    </p:spTree>
+  </p:cSld>
+  <p:clrMapOvr>
+    <a:masterClrMapping/>
+  </p:clrMapOvr>
+</p:notes>
+</file>
+
+<file path=ppt/notesSlides/notesSlide21.xml><?xml version="1.0" encoding="utf-8"?>
+<p:notes xmlns:a="http://schemas.openxmlformats.org/drawingml/2006/main" xmlns:p="http://schemas.openxmlformats.org/presentationml/2006/main" xmlns:r="http://schemas.openxmlformats.org/officeDocument/2006/relationships">
+  <p:cSld>
+    <p:spTree>
+      <p:nvGrpSpPr>
+        <p:cNvPr id="1" name=""/>
+        <p:cNvGrpSpPr/>
+        <p:nvPr/>
+      </p:nvGrpSpPr>
+      <p:grpSpPr>
+        <a:xfrm>
+          <a:off x="0" y="0"/>
+          <a:ext cx="0" cy="0"/>
+          <a:chOff x="0" y="0"/>
+          <a:chExt cx="0" cy="0"/>
+        </a:xfrm>
+      </p:grpSpPr>
+      <p:sp>
+        <p:nvSpPr>
+          <p:cNvPr id="2" name="Slide Image Placeholder 1"/>
+          <p:cNvSpPr>
+            <a:spLocks noGrp="1"/>
+          </p:cNvSpPr>
+          <p:nvPr>
+            <p:ph type="sldImg" idx="2"/>
+          </p:nvPr>
+        </p:nvSpPr>
+        <p:spPr/>
+      </p:sp>
+      <p:sp>
+        <p:nvSpPr>
+          <p:cNvPr id="3" name="Notes Placeholder 2"/>
+          <p:cNvSpPr>
+            <a:spLocks noGrp="1"/>
+          </p:cNvSpPr>
+          <p:nvPr>
+            <p:ph type="body" idx="3" sz="quarter"/>
+          </p:nvPr>
+        </p:nvSpPr>
+        <p:spPr/>
+        <p:txBody>
+          <a:bodyPr/>
+          <a:lstStyle/>
+          <a:p>
+            <a:r>
+              <a:t>Fuera de la lamina (habla de la practica, no del tema):</a:t>
+            </a:r>
+          </a:p>
+          <a:p>
+            <a:r>
+              <a:t>- Es el entregable de la pregunta 5, vale 15 puntos, y la plantilla en blanco de los 6 bloques esta en el Taller del PI</a:t>
+            </a:r>
+          </a:p>
+        </p:txBody>
+      </p:sp>
+      <p:sp>
+        <p:nvSpPr>
+          <p:cNvPr id="4" name="Slide Number Placeholder 3"/>
+          <p:cNvSpPr>
+            <a:spLocks noGrp="1"/>
+          </p:cNvSpPr>
+          <p:nvPr>
+            <p:ph type="sldNum" idx="5" sz="quarter"/>
+          </p:nvPr>
+        </p:nvSpPr>
+        <p:spPr/>
+      </p:sp>
+    </p:spTree>
+  </p:cSld>
+  <p:clrMapOvr>
+    <a:masterClrMapping/>
+  </p:clrMapOvr>
+</p:notes>
+</file>
+
+<file path=ppt/notesSlides/notesSlide22.xml><?xml version="1.0" encoding="utf-8"?>
+<p:notes xmlns:a="http://schemas.openxmlformats.org/drawingml/2006/main" xmlns:p="http://schemas.openxmlformats.org/presentationml/2006/main" xmlns:r="http://schemas.openxmlformats.org/officeDocument/2006/relationships">
+  <p:cSld>
+    <p:spTree>
+      <p:nvGrpSpPr>
+        <p:cNvPr id="1" name=""/>
+        <p:cNvGrpSpPr/>
+        <p:nvPr/>
+      </p:nvGrpSpPr>
+      <p:grpSpPr>
+        <a:xfrm>
+          <a:off x="0" y="0"/>
+          <a:ext cx="0" cy="0"/>
+          <a:chOff x="0" y="0"/>
+          <a:chExt cx="0" cy="0"/>
+        </a:xfrm>
+      </p:grpSpPr>
+      <p:sp>
+        <p:nvSpPr>
+          <p:cNvPr id="2" name="Slide Image Placeholder 1"/>
+          <p:cNvSpPr>
+            <a:spLocks noGrp="1"/>
+          </p:cNvSpPr>
+          <p:nvPr>
+            <p:ph type="sldImg" idx="2"/>
+          </p:nvPr>
+        </p:nvSpPr>
+        <p:spPr/>
+      </p:sp>
+      <p:sp>
+        <p:nvSpPr>
+          <p:cNvPr id="3" name="Notes Placeholder 2"/>
+          <p:cNvSpPr>
+            <a:spLocks noGrp="1"/>
+          </p:cNvSpPr>
+          <p:nvPr>
+            <p:ph type="body" idx="3" sz="quarter"/>
+          </p:nvPr>
+        </p:nvSpPr>
+        <p:spPr/>
+        <p:txBody>
+          <a:bodyPr/>
+          <a:lstStyle/>
+          <a:p>
+            <a:r>
+              <a:t>Fuera de la lamina (habla de la practica, no del tema):</a:t>
+            </a:r>
+          </a:p>
+          <a:p>
+            <a:r>
+              <a:t>- Son 10 de los 100 puntos y es la bisagra con la Clase 4</a:t>
             </a:r>
           </a:p>
         </p:txBody>
@@ -1169,6 +1796,17 @@
           <a:lstStyle/>
           <a:p>
             <a:r>
+              <a:t>Fuera de la lamina (habla de la practica, no del tema):</a:t>
+            </a:r>
+          </a:p>
+          <a:p>
+            <a:r>
+              <a:t>- Esta es la parte que convierte una consulta con nombre en logica de negocio, y es el mecanismo que la pregunta 1 de la clase califica con treinta y cinco puntos.</a:t>
+            </a:r>
+          </a:p>
+          <a:p/>
+          <a:p>
+            <a:r>
               <a:t>No sale del procedimiento con un aviso, lanza un error que propaga hasta quien llamo, y todo lo que el procedimiento hubiera escrito antes se deshace.</a:t>
             </a:r>
           </a:p>
@@ -1429,6 +2067,17 @@
           <a:lstStyle/>
           <a:p>
             <a:r>
+              <a:t>Fuera de la lamina (habla de la practica, no del tema):</a:t>
+            </a:r>
+          </a:p>
+          <a:p>
+            <a:r>
+              <a:t>- Un procedimiento sin prueba no esta terminado, y esta parte vale veinticinco de los cien puntos de la clase, asi que hay que dictarla como tema y no como recomendacion.</a:t>
+            </a:r>
+          </a:p>
+          <a:p/>
+          <a:p>
+            <a:r>
               <a:t>Aparecen tres casos sin probar y una captura que no demuestra nada.</a:t>
             </a:r>
           </a:p>
@@ -1614,12 +2263,12 @@
           <a:lstStyle/>
           <a:p>
             <a:r>
-              <a:t>Un contrato sirve si permite escribir la llamada y manejar los errores sin leer el cuerpo.</a:t>
-            </a:r>
-          </a:p>
-          <a:p>
-            <a:r>
-              <a:t>Sin ella, quien llama no sabe si tiene que limpiar algo.</a:t>
+              <a:t>Fuera de la lamina (habla de la practica, no del tema):</a:t>
+            </a:r>
+          </a:p>
+          <a:p>
+            <a:r>
+              <a:t>- Las dos son defendibles; lo que no es defendible es no decir cual, porque entonces la columna no significa nada y el docente no puede calificar la captura.</a:t>
             </a:r>
           </a:p>
         </p:txBody>
@@ -6106,7 +6755,7 @@
                 </a:solidFill>
                 <a:latin typeface="Calibri"/>
               </a:rPr>
-              <a:t>–   Esta es la parte que convierte una consulta con nombre en logica de negocio, y es el mecanismo que la pregunta 1 del taller califica con treinta y cinco puntos.</a:t>
+              <a:t>–   Esta es la parte que convierte una consulta con nombre en logica de negocio.</a:t>
             </a:r>
           </a:p>
           <a:p>
@@ -8225,7 +8874,7 @@
                 </a:solidFill>
                 <a:latin typeface="Calibri"/>
               </a:rPr>
-              <a:t>PostgreSQL en el navegador + Google Docs</a:t>
+              <a:t>PostgreSQL + Google Docs</a:t>
             </a:r>
             <a:r>
               <a:rPr sz="2000" b="0" i="0">
@@ -8795,7 +9444,7 @@
                 </a:solidFill>
                 <a:latin typeface="Calibri"/>
               </a:rPr>
-              <a:t>–   Un procedimiento sin prueba no esta terminado, y esta parte vale veinticinco de los cien puntos del taller, asi que hay que dictarla como tema y no como recomendacion.</a:t>
+              <a:t>–   Un procedimiento sin prueba no esta terminado.</a:t>
             </a:r>
           </a:p>
           <a:p>
@@ -9899,7 +10548,7 @@
                 </a:solidFill>
                 <a:latin typeface="Calibri"/>
               </a:rPr>
-              <a:t>–   Las dos son defendibles; lo que no es defendible es no decir cual, porque entonces la columna no significa nada y el docente no puede calificar la captura.</a:t>
+              <a:t>–   Las dos son defendibles; lo que no es defendible es no decir cual.</a:t>
             </a:r>
           </a:p>
           <a:p>
@@ -10135,7 +10784,7 @@
                 </a:solidFill>
                 <a:latin typeface="Calibri"/>
               </a:rPr>
-              <a:t>–   El ultimo entregable son quince puntos y no es codigo: es el contrato, y hay que explicar para quien se escribe, porque si no el estudiante lo redacta como un resumen del codigo.</a:t>
+              <a:t>–   El contrato no es codigo, y hay que explicar para quien se escribe, porque si no el estudiante lo redacta como un resumen del codigo.</a:t>
             </a:r>
           </a:p>
           <a:p>
@@ -10451,7 +11100,7 @@
                 </a:solidFill>
                 <a:latin typeface="Calibri"/>
               </a:rPr>
-              <a:t>–   La tabla de errores lleva el mensaje LITERAL, no una parafrasis, porque quien llama va a comparar contra ese texto —y porque es el mismo texto que la bateria de pruebas verifica, de modo que los dos entregables tienen que coincidir palabra por palabra.</a:t>
+              <a:t>–   La tabla de errores lleva el mensaje LITERAL, no una parafrasis, porque quien llama va a comparar contra ese texto —y porque es el mismo texto que la bateria de pruebas verifica.</a:t>
             </a:r>
           </a:p>
           <a:p>
@@ -10735,7 +11384,7 @@
                 </a:solidFill>
                 <a:latin typeface="Calibri"/>
               </a:rPr>
-              <a:t>–   Otra diferencia que se nota en el taller: llamar a un procedimiento con SELECT sp_agendar_cita(...) devuelve un error explicito de PostgreSQL, que dice que sp_agendar_cita es un procedimiento y sugiere usar CALL.</a:t>
+              <a:t>–   Otra diferencia que se nota en la practica: llamar a un procedimiento con SELECT sp_agendar_cita(...) devuelve un error explicito de PostgreSQL, que dice que sp_agendar_cita es un procedimiento y sugiere usar CALL.</a:t>
             </a:r>
           </a:p>
         </p:txBody>
@@ -12343,7 +12992,7 @@
                 </a:solidFill>
                 <a:latin typeface="Calibri"/>
               </a:rPr>
-              <a:t>–   Cuarto, probar con casos deliberados, y aqui el numero es exigible porque es el entregable: un caso correcto y tres de error, cada uno en su bloque, escritos en resultado_prueba.</a:t>
+              <a:t>–   Cuarto, probar con casos deliberados: un caso correcto y tres de error, cada uno en su bloque, escritos en resultado_prueba.</a:t>
             </a:r>
           </a:p>
           <a:p>
@@ -12579,7 +13228,7 @@
                 </a:solidFill>
                 <a:latin typeface="Calibri"/>
               </a:rPr>
-              <a:t>–   Este punto hay que decirlo con precision porque una version anterior de esta guia decia lo contrario y costaria puntos repetirla.</a:t>
+              <a:t>–   El motor de la clase es PostgreSQL, que corre dentro del navegador, y por lo tanto todo el codigo de hoy es PL/pgSQL.</a:t>
             </a:r>
           </a:p>
           <a:p>
@@ -12595,23 +13244,7 @@
                 </a:solidFill>
                 <a:latin typeface="Calibri"/>
               </a:rPr>
-              <a:t>–   El taller se resuelve y se califica en la plataforma del curso, que ejecuta PostgreSQL dentro del navegador, y por lo tanto todo el codigo de hoy es PL/pgSQL.</a:t>
-            </a:r>
-          </a:p>
-          <a:p>
-            <a:pPr>
-              <a:spcAft>
-                <a:spcPts val="800"/>
-              </a:spcAft>
-            </a:pPr>
-            <a:r>
-              <a:rPr sz="2000" b="0" i="0">
-                <a:solidFill>
-                  <a:srgbClr val="333333"/>
-                </a:solidFill>
-                <a:latin typeface="Calibri"/>
-              </a:rPr>
-              <a:t>–   Oracle Live SQL sigue en el kit, pero cambia de papel y hay que decirlo sin ambiguedad: sirve como CONTRASTE de sintaxis para quien se vaya a encontrar Oracle en el trabajo, no como sitio donde se hace el taller.</a:t>
+              <a:t>–   Oracle Live SQL sigue en el kit, pero cambia de papel y hay que decirlo sin ambiguedad: sirve como CONTRASTE de sintaxis para quien se vaya a encontrar Oracle en el trabajo.</a:t>
             </a:r>
           </a:p>
           <a:p>
@@ -13083,7 +13716,7 @@
                 </a:solidFill>
                 <a:latin typeface="Calibri"/>
               </a:rPr>
-              <a:t>–   El taller pide un segundo procedimiento y no es relleno: es donde se practica una decision distinta. sp_registrar_consulta escribe en consulta</a:t>
+              <a:t>–   Un segundo procedimiento no es relleno: es donde se practica una decision distinta. sp_registrar_consulta escribe en consulta</a:t>
             </a:r>
           </a:p>
           <a:p>
@@ -13920,7 +14553,7 @@
                 </a:solidFill>
                 <a:latin typeface="Calibri"/>
               </a:rPr>
-              <a:t>Como amarra con las clases vecinas y con la rubrica del PI (1/2)</a:t>
+              <a:t>Como amarra con las clases vecinas y con el PI (1/2)</a:t>
             </a:r>
           </a:p>
         </p:txBody>
@@ -13959,7 +14592,7 @@
                 </a:solidFill>
                 <a:latin typeface="Calibri"/>
               </a:rPr>
-              <a:t>–   Lo de hoy no es una isla, y decirlo en voz alta le da sentido al entregable.</a:t>
+              <a:t>–   Lo de hoy no es una isla.</a:t>
             </a:r>
           </a:p>
           <a:p>
@@ -14172,7 +14805,7 @@
                 </a:solidFill>
                 <a:latin typeface="Calibri"/>
               </a:rPr>
-              <a:t>Como amarra con las clases vecinas y con la rubrica del PI (2/2)</a:t>
+              <a:t>Como amarra con las clases vecinas y con el PI (2/2)</a:t>
             </a:r>
           </a:p>
         </p:txBody>
@@ -14243,7 +14876,7 @@
                 </a:solidFill>
                 <a:latin typeface="Calibri"/>
               </a:rPr>
-              <a:t>–   Y la Clase 12 consume estos procedimientos desde la aplicacion, que es cuando el contrato de la pregunta 5 deja de ser un documento y se vuelve la especificacion que alguien lee.</a:t>
+              <a:t>–   Y la Clase 12 consume estos procedimientos desde la aplicacion.</a:t>
             </a:r>
           </a:p>
         </p:txBody>
@@ -14795,7 +15428,7 @@
                 </a:solidFill>
                 <a:latin typeface="Calibri"/>
               </a:rPr>
-              <a:t>–   Ese detalle vale decirlo porque resuelve la primera pregunta practica del taller: si el estudiante cierra la pestana, el procedimiento no se perdio, esta en el motor.</a:t>
+              <a:t>–   Consecuencia practica: si el estudiante cierra la pestana, el procedimiento no se perdio, esta en el motor.</a:t>
             </a:r>
           </a:p>
           <a:p>
@@ -18902,7 +19535,7 @@
                 </a:solidFill>
                 <a:latin typeface="Calibri"/>
               </a:rPr>
-              <a:t>Un procedimiento sin bateria no esta terminado: son 25 de los 100 puntos</a:t>
+              <a:t>Un procedimiento sin bateria no esta terminado.</a:t>
             </a:r>
           </a:p>
         </p:txBody>
@@ -19156,7 +19789,7 @@
         <p:spPr>
           <a:xfrm>
             <a:off x="0" y="0"/>
-            <a:ext cx="12191695" cy="1170432"/>
+            <a:ext cx="12191695" cy="960120"/>
           </a:xfrm>
           <a:prstGeom prst="rect">
             <a:avLst/>
@@ -19198,7 +19831,7 @@
         </p:nvSpPr>
         <p:spPr>
           <a:xfrm>
-            <a:off x="0" y="1170432"/>
+            <a:off x="0" y="960120"/>
             <a:ext cx="12191695" cy="41148"/>
           </a:xfrm>
           <a:prstGeom prst="rect">
@@ -19242,7 +19875,7 @@
         <p:spPr>
           <a:xfrm>
             <a:off x="457200" y="164592"/>
-            <a:ext cx="11277295" cy="384048"/>
+            <a:ext cx="11277295" cy="502920"/>
           </a:xfrm>
           <a:prstGeom prst="rect">
             <a:avLst/>
@@ -19275,8 +19908,8 @@
         </p:nvSpPr>
         <p:spPr>
           <a:xfrm>
-            <a:off x="457200" y="566928"/>
-            <a:ext cx="11277295" cy="411480"/>
+            <a:off x="457200" y="1170432"/>
+            <a:ext cx="11277295" cy="5230368"/>
           </a:xfrm>
           <a:prstGeom prst="rect">
             <a:avLst/>
@@ -19289,14 +19922,125 @@
           </a:bodyPr>
           <a:lstStyle/>
           <a:p>
-            <a:r>
-              <a:rPr sz="1400" b="0" i="0">
-                <a:solidFill>
-                  <a:srgbClr val="B8D8EE"/>
-                </a:solidFill>
-                <a:latin typeface="Calibri"/>
-              </a:rPr>
-              <a:t>Los 25 puntos se califican por esta tabla, no por el CALL suelto</a:t>
+            <a:pPr>
+              <a:spcAft>
+                <a:spcPts val="800"/>
+              </a:spcAft>
+            </a:pPr>
+            <a:r>
+              <a:rPr sz="2000" b="0" i="0">
+                <a:solidFill>
+                  <a:srgbClr val="333333"/>
+                </a:solidFill>
+                <a:latin typeface="Calibri"/>
+              </a:rPr>
+              <a:t>–   </a:t>
+            </a:r>
+            <a:r>
+              <a:rPr sz="2000" b="1" i="0">
+                <a:solidFill>
+                  <a:srgbClr val="333333"/>
+                </a:solidFill>
+                <a:latin typeface="Calibri"/>
+              </a:rPr>
+              <a:t>Ojo con la logica invertida, y con «WHEN OTHERS» a secas.</a:t>
+            </a:r>
+            <a:r>
+              <a:rPr sz="2000" b="0" i="0">
+                <a:solidFill>
+                  <a:srgbClr val="333333"/>
+                </a:solidFill>
+                <a:latin typeface="Calibri"/>
+              </a:rPr>
+              <a:t> En un caso error, </a:t>
+            </a:r>
+            <a:r>
+              <a:rPr sz="2000" b="1" i="0">
+                <a:solidFill>
+                  <a:srgbClr val="333333"/>
+                </a:solidFill>
+                <a:latin typeface="Calibri"/>
+              </a:rPr>
+              <a:t>llegar al final sin excepcion es el fallo</a:t>
+            </a:r>
+            <a:r>
+              <a:rPr sz="2000" b="0" i="0">
+                <a:solidFill>
+                  <a:srgbClr val="333333"/>
+                </a:solidFill>
+                <a:latin typeface="Calibri"/>
+              </a:rPr>
+              <a:t>. Y no basta con que falle: hay que verificar </a:t>
+            </a:r>
+            <a:r>
+              <a:rPr sz="2000" b="1" i="0">
+                <a:solidFill>
+                  <a:srgbClr val="333333"/>
+                </a:solidFill>
+                <a:latin typeface="Calibri"/>
+              </a:rPr>
+              <a:t>que falle por lo esperado</a:t>
+            </a:r>
+            <a:r>
+              <a:rPr sz="2000" b="0" i="0">
+                <a:solidFill>
+                  <a:srgbClr val="333333"/>
+                </a:solidFill>
+                <a:latin typeface="Calibri"/>
+              </a:rPr>
+              <a:t> («SQLERRM ILIKE '%inactiva%'»), porque un typo en un nombre de columna tambien lanza excepcion y se reportaria como prueba superada.</a:t>
+            </a:r>
+          </a:p>
+          <a:p>
+            <a:pPr>
+              <a:spcAft>
+                <a:spcPts val="800"/>
+              </a:spcAft>
+            </a:pPr>
+            <a:r>
+              <a:rPr sz="2000" b="0" i="0">
+                <a:solidFill>
+                  <a:srgbClr val="333333"/>
+                </a:solidFill>
+                <a:latin typeface="Calibri"/>
+              </a:rPr>
+              <a:t>–   </a:t>
+            </a:r>
+            <a:r>
+              <a:rPr sz="2000" b="1" i="0">
+                <a:solidFill>
+                  <a:srgbClr val="333333"/>
+                </a:solidFill>
+                <a:latin typeface="Calibri"/>
+              </a:rPr>
+              <a:t>La tabla de resultados.</a:t>
+            </a:r>
+            <a:r>
+              <a:rPr sz="2000" b="0" i="0">
+                <a:solidFill>
+                  <a:srgbClr val="333333"/>
+                </a:solidFill>
+                <a:latin typeface="Calibri"/>
+              </a:rPr>
+              <a:t> «resultado_prueba(id_prueba SERIAL, caso TEXT, esperado TEXT, obtenido TEXT, paso BOOLEAN)», y un «SELECT * ... ORDER BY id_prueba;» con las 4 filas. «paso» admite dos lecturas —«coincidio con lo esperado» o «la operacion se completo»— y las dos valen; lo que se exige es </a:t>
+            </a:r>
+            <a:r>
+              <a:rPr sz="2000" b="1" i="0">
+                <a:solidFill>
+                  <a:srgbClr val="333333"/>
+                </a:solidFill>
+                <a:latin typeface="Calibri"/>
+              </a:rPr>
+              <a:t>usar la misma para las 4 y decir cual</a:t>
+            </a:r>
+            <a:r>
+              <a:rPr sz="2000" b="0" i="0">
+                <a:solidFill>
+                  <a:srgbClr val="333333"/>
+                </a:solidFill>
+                <a:latin typeface="Calibri"/>
+              </a:rPr>
+              <a:t>.</a:t>
             </a:r>
           </a:p>
         </p:txBody>
@@ -19304,151 +20048,6 @@
       <p:sp>
         <p:nvSpPr>
           <p:cNvPr id="6" name="TextBox 5"/>
-          <p:cNvSpPr txBox="1"/>
-          <p:nvPr/>
-        </p:nvSpPr>
-        <p:spPr>
-          <a:xfrm>
-            <a:off x="457200" y="1380744"/>
-            <a:ext cx="11277295" cy="5020056"/>
-          </a:xfrm>
-          <a:prstGeom prst="rect">
-            <a:avLst/>
-          </a:prstGeom>
-          <a:noFill/>
-        </p:spPr>
-        <p:txBody>
-          <a:bodyPr wrap="square">
-            <a:spAutoFit/>
-          </a:bodyPr>
-          <a:lstStyle/>
-          <a:p>
-            <a:pPr>
-              <a:spcAft>
-                <a:spcPts val="800"/>
-              </a:spcAft>
-            </a:pPr>
-            <a:r>
-              <a:rPr sz="2000" b="0" i="0">
-                <a:solidFill>
-                  <a:srgbClr val="333333"/>
-                </a:solidFill>
-                <a:latin typeface="Calibri"/>
-              </a:rPr>
-              <a:t>–   </a:t>
-            </a:r>
-            <a:r>
-              <a:rPr sz="2000" b="1" i="0">
-                <a:solidFill>
-                  <a:srgbClr val="333333"/>
-                </a:solidFill>
-                <a:latin typeface="Calibri"/>
-              </a:rPr>
-              <a:t>Ojo con la logica invertida, y con «WHEN OTHERS» a secas.</a:t>
-            </a:r>
-            <a:r>
-              <a:rPr sz="2000" b="0" i="0">
-                <a:solidFill>
-                  <a:srgbClr val="333333"/>
-                </a:solidFill>
-                <a:latin typeface="Calibri"/>
-              </a:rPr>
-              <a:t> En un caso error, </a:t>
-            </a:r>
-            <a:r>
-              <a:rPr sz="2000" b="1" i="0">
-                <a:solidFill>
-                  <a:srgbClr val="333333"/>
-                </a:solidFill>
-                <a:latin typeface="Calibri"/>
-              </a:rPr>
-              <a:t>llegar al final sin excepcion es el fallo</a:t>
-            </a:r>
-            <a:r>
-              <a:rPr sz="2000" b="0" i="0">
-                <a:solidFill>
-                  <a:srgbClr val="333333"/>
-                </a:solidFill>
-                <a:latin typeface="Calibri"/>
-              </a:rPr>
-              <a:t>. Y no basta con que falle: hay que verificar </a:t>
-            </a:r>
-            <a:r>
-              <a:rPr sz="2000" b="1" i="0">
-                <a:solidFill>
-                  <a:srgbClr val="333333"/>
-                </a:solidFill>
-                <a:latin typeface="Calibri"/>
-              </a:rPr>
-              <a:t>que falle por lo esperado</a:t>
-            </a:r>
-            <a:r>
-              <a:rPr sz="2000" b="0" i="0">
-                <a:solidFill>
-                  <a:srgbClr val="333333"/>
-                </a:solidFill>
-                <a:latin typeface="Calibri"/>
-              </a:rPr>
-              <a:t> («SQLERRM ILIKE '%inactiva%'»), porque un typo en un nombre de columna tambien lanza excepcion y se reportaria como prueba superada.</a:t>
-            </a:r>
-          </a:p>
-          <a:p>
-            <a:pPr>
-              <a:spcAft>
-                <a:spcPts val="800"/>
-              </a:spcAft>
-            </a:pPr>
-            <a:r>
-              <a:rPr sz="2000" b="0" i="0">
-                <a:solidFill>
-                  <a:srgbClr val="333333"/>
-                </a:solidFill>
-                <a:latin typeface="Calibri"/>
-              </a:rPr>
-              <a:t>–   </a:t>
-            </a:r>
-            <a:r>
-              <a:rPr sz="2000" b="1" i="0">
-                <a:solidFill>
-                  <a:srgbClr val="333333"/>
-                </a:solidFill>
-                <a:latin typeface="Calibri"/>
-              </a:rPr>
-              <a:t>La tabla de resultados.</a:t>
-            </a:r>
-            <a:r>
-              <a:rPr sz="2000" b="0" i="0">
-                <a:solidFill>
-                  <a:srgbClr val="333333"/>
-                </a:solidFill>
-                <a:latin typeface="Calibri"/>
-              </a:rPr>
-              <a:t> «resultado_prueba(id_prueba SERIAL, caso TEXT, esperado TEXT, obtenido TEXT, paso BOOLEAN)», y un «SELECT * ... ORDER BY id_prueba;» con las 4 filas. «paso» admite dos lecturas —«coincidio con lo esperado» o «la operacion se completo»— y las dos valen; lo que se exige es </a:t>
-            </a:r>
-            <a:r>
-              <a:rPr sz="2000" b="1" i="0">
-                <a:solidFill>
-                  <a:srgbClr val="333333"/>
-                </a:solidFill>
-                <a:latin typeface="Calibri"/>
-              </a:rPr>
-              <a:t>usar la misma para las 4 y decir cual</a:t>
-            </a:r>
-            <a:r>
-              <a:rPr sz="2000" b="0" i="0">
-                <a:solidFill>
-                  <a:srgbClr val="333333"/>
-                </a:solidFill>
-                <a:latin typeface="Calibri"/>
-              </a:rPr>
-              <a:t>.</a:t>
-            </a:r>
-          </a:p>
-        </p:txBody>
-      </p:sp>
-      <p:sp>
-        <p:nvSpPr>
-          <p:cNvPr id="7" name="TextBox 6"/>
           <p:cNvSpPr txBox="1"/>
           <p:nvPr/>
         </p:nvSpPr>
@@ -19784,7 +20383,7 @@
         <p:spPr>
           <a:xfrm>
             <a:off x="0" y="0"/>
-            <a:ext cx="12191695" cy="1170432"/>
+            <a:ext cx="12191695" cy="960120"/>
           </a:xfrm>
           <a:prstGeom prst="rect">
             <a:avLst/>
@@ -19826,7 +20425,7 @@
         </p:nvSpPr>
         <p:spPr>
           <a:xfrm>
-            <a:off x="0" y="1170432"/>
+            <a:off x="0" y="960120"/>
             <a:ext cx="12191695" cy="41148"/>
           </a:xfrm>
           <a:prstGeom prst="rect">
@@ -19870,7 +20469,7 @@
         <p:spPr>
           <a:xfrm>
             <a:off x="457200" y="164592"/>
-            <a:ext cx="11277295" cy="384048"/>
+            <a:ext cx="11277295" cy="502920"/>
           </a:xfrm>
           <a:prstGeom prst="rect">
             <a:avLst/>
@@ -19903,8 +20502,8 @@
         </p:nvSpPr>
         <p:spPr>
           <a:xfrm>
-            <a:off x="457200" y="566928"/>
-            <a:ext cx="11277295" cy="411480"/>
+            <a:off x="457200" y="1170432"/>
+            <a:ext cx="11277295" cy="5230368"/>
           </a:xfrm>
           <a:prstGeom prst="rect">
             <a:avLst/>
@@ -19917,14 +20516,263 @@
           </a:bodyPr>
           <a:lstStyle/>
           <a:p>
-            <a:r>
-              <a:rPr sz="1400" b="0" i="0">
-                <a:solidFill>
-                  <a:srgbClr val="B8D8EE"/>
-                </a:solidFill>
-                <a:latin typeface="Calibri"/>
-              </a:rPr>
-              <a:t>Es el entregable de la pregunta 5, vale 15 puntos, y la plantilla en blanco de los 6 bloques esta en el Taller del PI</a:t>
+            <a:pPr>
+              <a:spcAft>
+                <a:spcPts val="800"/>
+              </a:spcAft>
+            </a:pPr>
+            <a:r>
+              <a:rPr sz="2000" b="0" i="0">
+                <a:solidFill>
+                  <a:srgbClr val="333333"/>
+                </a:solidFill>
+                <a:latin typeface="Calibri"/>
+              </a:rPr>
+              <a:t>–   </a:t>
+            </a:r>
+            <a:r>
+              <a:rPr sz="2000" b="1" i="0">
+                <a:solidFill>
+                  <a:srgbClr val="333333"/>
+                </a:solidFill>
+                <a:latin typeface="Calibri"/>
+              </a:rPr>
+              <a:t>1. Firma exacta.</a:t>
+            </a:r>
+            <a:r>
+              <a:rPr sz="2000" b="0" i="0">
+                <a:solidFill>
+                  <a:srgbClr val="333333"/>
+                </a:solidFill>
+                <a:latin typeface="Calibri"/>
+              </a:rPr>
+              <a:t> «sp_agendar_cita(p_id_mascota INT, p_id_veterinario INT, p_fecha_hora TIMESTAMP)»: nombre, orden y </a:t>
+            </a:r>
+            <a:r>
+              <a:rPr sz="2000" b="1" i="0">
+                <a:solidFill>
+                  <a:srgbClr val="333333"/>
+                </a:solidFill>
+                <a:latin typeface="Calibri"/>
+              </a:rPr>
+              <a:t>tipo</a:t>
+            </a:r>
+            <a:r>
+              <a:rPr sz="2000" b="0" i="0">
+                <a:solidFill>
+                  <a:srgbClr val="333333"/>
+                </a:solidFill>
+                <a:latin typeface="Calibri"/>
+              </a:rPr>
+              <a:t> de cada parametro. Sin los tipos no es un contrato, es una descripcion. </a:t>
+            </a:r>
+            <a:r>
+              <a:rPr sz="2000" b="1" i="0">
+                <a:solidFill>
+                  <a:srgbClr val="333333"/>
+                </a:solidFill>
+                <a:latin typeface="Calibri"/>
+              </a:rPr>
+              <a:t>2. Como se llama:</a:t>
+            </a:r>
+            <a:r>
+              <a:rPr sz="2000" b="0" i="0">
+                <a:solidFill>
+                  <a:srgbClr val="333333"/>
+                </a:solidFill>
+                <a:latin typeface="Calibri"/>
+              </a:rPr>
+              <a:t> un «CALL» de ejemplo con valores reales, copiable tal cual.</a:t>
+            </a:r>
+          </a:p>
+          <a:p>
+            <a:pPr>
+              <a:spcAft>
+                <a:spcPts val="800"/>
+              </a:spcAft>
+            </a:pPr>
+            <a:r>
+              <a:rPr sz="2000" b="0" i="0">
+                <a:solidFill>
+                  <a:srgbClr val="333333"/>
+                </a:solidFill>
+                <a:latin typeface="Calibri"/>
+              </a:rPr>
+              <a:t>–   </a:t>
+            </a:r>
+            <a:r>
+              <a:rPr sz="2000" b="1" i="0">
+                <a:solidFill>
+                  <a:srgbClr val="333333"/>
+                </a:solidFill>
+                <a:latin typeface="Calibri"/>
+              </a:rPr>
+              <a:t>3. Precondiciones</a:t>
+            </a:r>
+            <a:r>
+              <a:rPr sz="2000" b="0" i="0">
+                <a:solidFill>
+                  <a:srgbClr val="333333"/>
+                </a:solidFill>
+                <a:latin typeface="Calibri"/>
+              </a:rPr>
+              <a:t> — lo que garantiza quien llama: la mascota existe y esta activa, la franja del veterinario esta libre.</a:t>
+            </a:r>
+          </a:p>
+          <a:p>
+            <a:pPr>
+              <a:spcAft>
+                <a:spcPts val="800"/>
+              </a:spcAft>
+            </a:pPr>
+            <a:r>
+              <a:rPr sz="2000" b="0" i="0">
+                <a:solidFill>
+                  <a:srgbClr val="333333"/>
+                </a:solidFill>
+                <a:latin typeface="Calibri"/>
+              </a:rPr>
+              <a:t>–   </a:t>
+            </a:r>
+            <a:r>
+              <a:rPr sz="2000" b="1" i="0">
+                <a:solidFill>
+                  <a:srgbClr val="333333"/>
+                </a:solidFill>
+                <a:latin typeface="Calibri"/>
+              </a:rPr>
+              <a:t>4. Postcondiciones</a:t>
+            </a:r>
+            <a:r>
+              <a:rPr sz="2000" b="0" i="0">
+                <a:solidFill>
+                  <a:srgbClr val="333333"/>
+                </a:solidFill>
+                <a:latin typeface="Calibri"/>
+              </a:rPr>
+              <a:t> — lo que queda cierto si termina bien: una fila nueva en «cita» con estado «PROGRAMADA», y </a:t>
+            </a:r>
+            <a:r>
+              <a:rPr sz="2000" b="1" i="0">
+                <a:solidFill>
+                  <a:srgbClr val="333333"/>
+                </a:solidFill>
+                <a:latin typeface="Calibri"/>
+              </a:rPr>
+              <a:t>ninguna</a:t>
+            </a:r>
+            <a:r>
+              <a:rPr sz="2000" b="0" i="0">
+                <a:solidFill>
+                  <a:srgbClr val="333333"/>
+                </a:solidFill>
+                <a:latin typeface="Calibri"/>
+              </a:rPr>
+              <a:t> si termina mal.</a:t>
+            </a:r>
+          </a:p>
+          <a:p>
+            <a:pPr>
+              <a:spcAft>
+                <a:spcPts val="800"/>
+              </a:spcAft>
+            </a:pPr>
+            <a:r>
+              <a:rPr sz="2000" b="0" i="0">
+                <a:solidFill>
+                  <a:srgbClr val="333333"/>
+                </a:solidFill>
+                <a:latin typeface="Calibri"/>
+              </a:rPr>
+              <a:t>–   </a:t>
+            </a:r>
+            <a:r>
+              <a:rPr sz="2000" b="1" i="0">
+                <a:solidFill>
+                  <a:srgbClr val="333333"/>
+                </a:solidFill>
+                <a:latin typeface="Calibri"/>
+              </a:rPr>
+              <a:t>5. Tabla de errores.</a:t>
+            </a:r>
+            <a:r>
+              <a:rPr sz="2000" b="0" i="0">
+                <a:solidFill>
+                  <a:srgbClr val="333333"/>
+                </a:solidFill>
+                <a:latin typeface="Calibri"/>
+              </a:rPr>
+              <a:t> Una fila por cada «RAISE EXCEPTION», con el </a:t>
+            </a:r>
+            <a:r>
+              <a:rPr sz="2000" b="1" i="0">
+                <a:solidFill>
+                  <a:srgbClr val="333333"/>
+                </a:solidFill>
+                <a:latin typeface="Calibri"/>
+              </a:rPr>
+              <a:t>mensaje literal</a:t>
+            </a:r>
+            <a:r>
+              <a:rPr sz="2000" b="0" i="0">
+                <a:solidFill>
+                  <a:srgbClr val="333333"/>
+                </a:solidFill>
+                <a:latin typeface="Calibri"/>
+              </a:rPr>
+              <a:t> y que debe hacer la app al recibirlo. Es lo que vuelve programable el contrato: sin el texto exacto, la app no puede distinguir un error de otro.</a:t>
+            </a:r>
+          </a:p>
+          <a:p>
+            <a:pPr>
+              <a:spcAft>
+                <a:spcPts val="800"/>
+              </a:spcAft>
+            </a:pPr>
+            <a:r>
+              <a:rPr sz="2000" b="0" i="0">
+                <a:solidFill>
+                  <a:srgbClr val="333333"/>
+                </a:solidFill>
+                <a:latin typeface="Calibri"/>
+              </a:rPr>
+              <a:t>–   </a:t>
+            </a:r>
+            <a:r>
+              <a:rPr sz="2000" b="1" i="0">
+                <a:solidFill>
+                  <a:srgbClr val="333333"/>
+                </a:solidFill>
+                <a:latin typeface="Calibri"/>
+              </a:rPr>
+              <a:t>6. Decision de diseno.</a:t>
+            </a:r>
+            <a:r>
+              <a:rPr sz="2000" b="0" i="0">
+                <a:solidFill>
+                  <a:srgbClr val="333333"/>
+                </a:solidFill>
+                <a:latin typeface="Calibri"/>
+              </a:rPr>
+              <a:t> Por que se aborta en vez de devolver un codigo en un «OUT»: porque abortar </a:t>
+            </a:r>
+            <a:r>
+              <a:rPr sz="2000" b="1" i="0">
+                <a:solidFill>
+                  <a:srgbClr val="333333"/>
+                </a:solidFill>
+                <a:latin typeface="Calibri"/>
+              </a:rPr>
+              <a:t>deshace</a:t>
+            </a:r>
+            <a:r>
+              <a:rPr sz="2000" b="0" i="0">
+                <a:solidFill>
+                  <a:srgbClr val="333333"/>
+                </a:solidFill>
+                <a:latin typeface="Calibri"/>
+              </a:rPr>
+              <a:t> lo hecho, y un codigo que nadie revise deja la cita creada igual.</a:t>
             </a:r>
           </a:p>
         </p:txBody>
@@ -19932,289 +20780,6 @@
       <p:sp>
         <p:nvSpPr>
           <p:cNvPr id="6" name="TextBox 5"/>
-          <p:cNvSpPr txBox="1"/>
-          <p:nvPr/>
-        </p:nvSpPr>
-        <p:spPr>
-          <a:xfrm>
-            <a:off x="457200" y="1380744"/>
-            <a:ext cx="11277295" cy="5020056"/>
-          </a:xfrm>
-          <a:prstGeom prst="rect">
-            <a:avLst/>
-          </a:prstGeom>
-          <a:noFill/>
-        </p:spPr>
-        <p:txBody>
-          <a:bodyPr wrap="square">
-            <a:spAutoFit/>
-          </a:bodyPr>
-          <a:lstStyle/>
-          <a:p>
-            <a:pPr>
-              <a:spcAft>
-                <a:spcPts val="800"/>
-              </a:spcAft>
-            </a:pPr>
-            <a:r>
-              <a:rPr sz="2000" b="0" i="0">
-                <a:solidFill>
-                  <a:srgbClr val="333333"/>
-                </a:solidFill>
-                <a:latin typeface="Calibri"/>
-              </a:rPr>
-              <a:t>–   </a:t>
-            </a:r>
-            <a:r>
-              <a:rPr sz="2000" b="1" i="0">
-                <a:solidFill>
-                  <a:srgbClr val="333333"/>
-                </a:solidFill>
-                <a:latin typeface="Calibri"/>
-              </a:rPr>
-              <a:t>1. Firma exacta.</a:t>
-            </a:r>
-            <a:r>
-              <a:rPr sz="2000" b="0" i="0">
-                <a:solidFill>
-                  <a:srgbClr val="333333"/>
-                </a:solidFill>
-                <a:latin typeface="Calibri"/>
-              </a:rPr>
-              <a:t> «sp_agendar_cita(p_id_mascota INT, p_id_veterinario INT, p_fecha_hora TIMESTAMP)»: nombre, orden y </a:t>
-            </a:r>
-            <a:r>
-              <a:rPr sz="2000" b="1" i="0">
-                <a:solidFill>
-                  <a:srgbClr val="333333"/>
-                </a:solidFill>
-                <a:latin typeface="Calibri"/>
-              </a:rPr>
-              <a:t>tipo</a:t>
-            </a:r>
-            <a:r>
-              <a:rPr sz="2000" b="0" i="0">
-                <a:solidFill>
-                  <a:srgbClr val="333333"/>
-                </a:solidFill>
-                <a:latin typeface="Calibri"/>
-              </a:rPr>
-              <a:t> de cada parametro. Sin los tipos no es un contrato, es una descripcion. </a:t>
-            </a:r>
-            <a:r>
-              <a:rPr sz="2000" b="1" i="0">
-                <a:solidFill>
-                  <a:srgbClr val="333333"/>
-                </a:solidFill>
-                <a:latin typeface="Calibri"/>
-              </a:rPr>
-              <a:t>2. Como se llama:</a:t>
-            </a:r>
-            <a:r>
-              <a:rPr sz="2000" b="0" i="0">
-                <a:solidFill>
-                  <a:srgbClr val="333333"/>
-                </a:solidFill>
-                <a:latin typeface="Calibri"/>
-              </a:rPr>
-              <a:t> un «CALL» de ejemplo con valores reales, copiable tal cual.</a:t>
-            </a:r>
-          </a:p>
-          <a:p>
-            <a:pPr>
-              <a:spcAft>
-                <a:spcPts val="800"/>
-              </a:spcAft>
-            </a:pPr>
-            <a:r>
-              <a:rPr sz="2000" b="0" i="0">
-                <a:solidFill>
-                  <a:srgbClr val="333333"/>
-                </a:solidFill>
-                <a:latin typeface="Calibri"/>
-              </a:rPr>
-              <a:t>–   </a:t>
-            </a:r>
-            <a:r>
-              <a:rPr sz="2000" b="1" i="0">
-                <a:solidFill>
-                  <a:srgbClr val="333333"/>
-                </a:solidFill>
-                <a:latin typeface="Calibri"/>
-              </a:rPr>
-              <a:t>3. Precondiciones</a:t>
-            </a:r>
-            <a:r>
-              <a:rPr sz="2000" b="0" i="0">
-                <a:solidFill>
-                  <a:srgbClr val="333333"/>
-                </a:solidFill>
-                <a:latin typeface="Calibri"/>
-              </a:rPr>
-              <a:t> — lo que garantiza quien llama: la mascota existe y esta activa, la franja del veterinario esta libre.</a:t>
-            </a:r>
-          </a:p>
-          <a:p>
-            <a:pPr>
-              <a:spcAft>
-                <a:spcPts val="800"/>
-              </a:spcAft>
-            </a:pPr>
-            <a:r>
-              <a:rPr sz="2000" b="0" i="0">
-                <a:solidFill>
-                  <a:srgbClr val="333333"/>
-                </a:solidFill>
-                <a:latin typeface="Calibri"/>
-              </a:rPr>
-              <a:t>–   </a:t>
-            </a:r>
-            <a:r>
-              <a:rPr sz="2000" b="1" i="0">
-                <a:solidFill>
-                  <a:srgbClr val="333333"/>
-                </a:solidFill>
-                <a:latin typeface="Calibri"/>
-              </a:rPr>
-              <a:t>4. Postcondiciones</a:t>
-            </a:r>
-            <a:r>
-              <a:rPr sz="2000" b="0" i="0">
-                <a:solidFill>
-                  <a:srgbClr val="333333"/>
-                </a:solidFill>
-                <a:latin typeface="Calibri"/>
-              </a:rPr>
-              <a:t> — lo que queda cierto si termina bien: una fila nueva en «cita» con estado «PROGRAMADA», y </a:t>
-            </a:r>
-            <a:r>
-              <a:rPr sz="2000" b="1" i="0">
-                <a:solidFill>
-                  <a:srgbClr val="333333"/>
-                </a:solidFill>
-                <a:latin typeface="Calibri"/>
-              </a:rPr>
-              <a:t>ninguna</a:t>
-            </a:r>
-            <a:r>
-              <a:rPr sz="2000" b="0" i="0">
-                <a:solidFill>
-                  <a:srgbClr val="333333"/>
-                </a:solidFill>
-                <a:latin typeface="Calibri"/>
-              </a:rPr>
-              <a:t> si termina mal.</a:t>
-            </a:r>
-          </a:p>
-          <a:p>
-            <a:pPr>
-              <a:spcAft>
-                <a:spcPts val="800"/>
-              </a:spcAft>
-            </a:pPr>
-            <a:r>
-              <a:rPr sz="2000" b="0" i="0">
-                <a:solidFill>
-                  <a:srgbClr val="333333"/>
-                </a:solidFill>
-                <a:latin typeface="Calibri"/>
-              </a:rPr>
-              <a:t>–   </a:t>
-            </a:r>
-            <a:r>
-              <a:rPr sz="2000" b="1" i="0">
-                <a:solidFill>
-                  <a:srgbClr val="333333"/>
-                </a:solidFill>
-                <a:latin typeface="Calibri"/>
-              </a:rPr>
-              <a:t>5. Tabla de errores.</a:t>
-            </a:r>
-            <a:r>
-              <a:rPr sz="2000" b="0" i="0">
-                <a:solidFill>
-                  <a:srgbClr val="333333"/>
-                </a:solidFill>
-                <a:latin typeface="Calibri"/>
-              </a:rPr>
-              <a:t> Una fila por cada «RAISE EXCEPTION», con el </a:t>
-            </a:r>
-            <a:r>
-              <a:rPr sz="2000" b="1" i="0">
-                <a:solidFill>
-                  <a:srgbClr val="333333"/>
-                </a:solidFill>
-                <a:latin typeface="Calibri"/>
-              </a:rPr>
-              <a:t>mensaje literal</a:t>
-            </a:r>
-            <a:r>
-              <a:rPr sz="2000" b="0" i="0">
-                <a:solidFill>
-                  <a:srgbClr val="333333"/>
-                </a:solidFill>
-                <a:latin typeface="Calibri"/>
-              </a:rPr>
-              <a:t> y que debe hacer la app al recibirlo. Es lo que vuelve programable el contrato: sin el texto exacto, la app no puede distinguir un error de otro.</a:t>
-            </a:r>
-          </a:p>
-          <a:p>
-            <a:pPr>
-              <a:spcAft>
-                <a:spcPts val="800"/>
-              </a:spcAft>
-            </a:pPr>
-            <a:r>
-              <a:rPr sz="2000" b="0" i="0">
-                <a:solidFill>
-                  <a:srgbClr val="333333"/>
-                </a:solidFill>
-                <a:latin typeface="Calibri"/>
-              </a:rPr>
-              <a:t>–   </a:t>
-            </a:r>
-            <a:r>
-              <a:rPr sz="2000" b="1" i="0">
-                <a:solidFill>
-                  <a:srgbClr val="333333"/>
-                </a:solidFill>
-                <a:latin typeface="Calibri"/>
-              </a:rPr>
-              <a:t>6. Decision de diseno.</a:t>
-            </a:r>
-            <a:r>
-              <a:rPr sz="2000" b="0" i="0">
-                <a:solidFill>
-                  <a:srgbClr val="333333"/>
-                </a:solidFill>
-                <a:latin typeface="Calibri"/>
-              </a:rPr>
-              <a:t> Por que se aborta en vez de devolver un codigo en un «OUT»: porque abortar </a:t>
-            </a:r>
-            <a:r>
-              <a:rPr sz="2000" b="1" i="0">
-                <a:solidFill>
-                  <a:srgbClr val="333333"/>
-                </a:solidFill>
-                <a:latin typeface="Calibri"/>
-              </a:rPr>
-              <a:t>deshace</a:t>
-            </a:r>
-            <a:r>
-              <a:rPr sz="2000" b="0" i="0">
-                <a:solidFill>
-                  <a:srgbClr val="333333"/>
-                </a:solidFill>
-                <a:latin typeface="Calibri"/>
-              </a:rPr>
-              <a:t> lo hecho, y un codigo que nadie revise deja la cita creada igual.</a:t>
-            </a:r>
-          </a:p>
-        </p:txBody>
-      </p:sp>
-      <p:sp>
-        <p:nvSpPr>
-          <p:cNvPr id="7" name="TextBox 6"/>
           <p:cNvSpPr txBox="1"/>
           <p:nvPr/>
         </p:nvSpPr>
@@ -20422,7 +20987,7 @@
                 </a:solidFill>
                 <a:latin typeface="Calibri"/>
               </a:rPr>
-              <a:t>PROCEDURE y FUNCTION no son sinonimos: si el resultado tiene que entrar en un SELECT, es FUNCTION. Son 10 de los 100 puntos y es la bisagra con la Clase 4</a:t>
+              <a:t>PROCEDURE y FUNCTION no son sinonimos: si el resultado tiene que entrar en un SELECT, es FUNCTION.</a:t>
             </a:r>
           </a:p>
         </p:txBody>
@@ -20925,7 +21490,7 @@
                 </a:solidFill>
                 <a:latin typeface="Calibri"/>
               </a:rPr>
-              <a:t> PostgreSQL en el navegador + Google Docs</a:t>
+              <a:t> PostgreSQL + Google Docs</a:t>
             </a:r>
           </a:p>
           <a:p>
@@ -20959,7 +21524,7 @@
                 </a:solidFill>
                 <a:latin typeface="Calibri"/>
               </a:rPr>
-              <a:t> sp_agendar_cita en PL/pgSQL dentro de la plataforma del curso: las 3 validaciones con RAISE EXCEPTION y la bateria de bloques DO que las prueba.</a:t>
+              <a:t> sp_agendar_cita en PL/pgSQL: las 3 validaciones con RAISE EXCEPTION y la bateria de bloques DO que las prueba.</a:t>
             </a:r>
           </a:p>
           <a:p>
@@ -21783,7 +22348,7 @@
                 </a:solidFill>
                 <a:latin typeface="Calibri"/>
               </a:rPr>
-              <a:t>–   El molde es fijo y conviene dictarlo entero antes de escribir una sola validacion, porque es donde se pierden los puntos sin haber entendido nada mal.</a:t>
+              <a:t>–   El molde es fijo y conviene dictarlo entero antes de escribir una sola validacion.</a:t>
             </a:r>
           </a:p>
           <a:p>

--- a/Bases de Datos II/Clases/Clase 3 - Procedimientos almacenados/Presentacion.pptx
+++ b/Bases de Datos II/Clases/Clase 3 - Procedimientos almacenados/Presentacion.pptx
@@ -639,12 +639,12 @@
           <a:lstStyle/>
           <a:p>
             <a:r>
-              <a:t>Un contrato sirve si permite escribir la llamada y manejar los errores sin leer el cuerpo.</a:t>
-            </a:r>
-          </a:p>
-          <a:p>
-            <a:r>
-              <a:t>Sin ella, quien llama no sabe si tiene que limpiar algo.</a:t>
+              <a:t>Conviene cerrar la teoria con esta distincion, y decirla HOY.</a:t>
+            </a:r>
+          </a:p>
+          <a:p>
+            <a:r>
+              <a:t>Fuera de la lamina (habla de la practica): Conviene cerrar la teoria con esta distincion, y decirla HOY, porque el estudiante la va a necesitar en el taller de hoy y no la semana entrante.</a:t>
             </a:r>
           </a:p>
         </p:txBody>
@@ -714,12 +714,7 @@
           <a:lstStyle/>
           <a:p>
             <a:r>
-              <a:t>Fuera de la lamina (habla de la practica, no del tema):</a:t>
-            </a:r>
-          </a:p>
-          <a:p>
-            <a:r>
-              <a:t>- La tabla de errores lleva el mensaje LITERAL, no una parafrasis, porque quien llama va a comparar contra ese texto —y porque es el mismo texto que la bateria de pruebas verifica, de modo que los dos entregables tienen que coincidir palabra por palabra.</a:t>
+              <a:t>Conviene mencionar que RAISE tiene niveles —NOTICE, WARNING, EXCEPTION— y que solo el ultimo aborta.</a:t>
             </a:r>
           </a:p>
         </p:txBody>
@@ -789,7 +784,17 @@
           <a:lstStyle/>
           <a:p>
             <a:r>
-              <a:t>Conviene cerrar la teoria con esta distincion, y decirla HOY, porque el estudiante la va a necesitar en el taller de hoy y no la semana entrante.</a:t>
+              <a:t>Ahi funcionan CREATE PROCEDURE, el dollar-quoting, RAISE EXCEPTION, los bloques DO, SQLERRM y SQLSTATE, y la tabla resultado_prueba: la evidencia de la clase es la salida del motor y no una promesa.</a:t>
+            </a:r>
+          </a:p>
+          <a:p>
+            <a:r>
+              <a:t>Fuera de la lamina (habla de la practica): Este punto hay que decirlo con precision porque una version anterior de esta guia decia lo contrario y costaria puntos repetirla.</a:t>
+            </a:r>
+          </a:p>
+          <a:p>
+            <a:r>
+              <a:t>Fuera de la lamina (habla de la practica): Oracle Live SQL sigue en el kit, pero cambia de papel y hay que decirlo sin ambiguedad: sirve como CONTRASTE de sintaxis para quien se vaya a encontrar Oracle en el trabajo, no como sitio donde se hace el taller.</a:t>
             </a:r>
           </a:p>
         </p:txBody>
@@ -859,7 +864,22 @@
           <a:lstStyle/>
           <a:p>
             <a:r>
-              <a:t>Conviene mencionar que RAISE tiene niveles —NOTICE, WARNING, EXCEPTION— y que solo el ultimo aborta.</a:t>
+              <a:t>Eso significa que registrar dos veces la consulta de la misma cita ya esta impedido por el motor: el segundo INSERT choca contra la restriccion de unicidad y falla.</a:t>
+            </a:r>
+          </a:p>
+          <a:p>
+            <a:r>
+              <a:t>La respuesta tiene dos partes y las dos valen.</a:t>
+            </a:r>
+          </a:p>
+          <a:p>
+            <a:r>
+              <a:t>Conviene decir tambien lo que NO hay que hacer: quitar la restriccion porque ya esta el procedimiento.</a:t>
+            </a:r>
+          </a:p>
+          <a:p>
+            <a:r>
+              <a:t>Esa jerarquia —declarativo primero, procedimiento encima— es exactamente lo que la Clase 4 va a formalizar.</a:t>
             </a:r>
           </a:p>
         </p:txBody>
@@ -929,23 +949,12 @@
           <a:lstStyle/>
           <a:p>
             <a:r>
-              <a:t>Fuera de la lamina (habla de la practica, no del tema):</a:t>
-            </a:r>
-          </a:p>
-          <a:p>
-            <a:r>
-              <a:t>- Este punto hay que decirlo con precision porque una version anterior de esta guia decia lo contrario y costaria puntos repetirla.</a:t>
-            </a:r>
-          </a:p>
-          <a:p>
-            <a:r>
-              <a:t>- Oracle Live SQL sigue en el kit, pero cambia de papel y hay que decirlo sin ambiguedad: sirve como CONTRASTE de sintaxis para quien se vaya a encontrar Oracle en el trabajo, no como sitio donde se hace el taller.</a:t>
-            </a:r>
-          </a:p>
-          <a:p/>
-          <a:p>
-            <a:r>
-              <a:t>Ahi funcionan CREATE PROCEDURE, el dollar-quoting, RAISE EXCEPTION, los bloques DO, SQLERRM y SQLSTATE, y la tabla resultado_prueba: la evidencia del taller es la salida del motor y no una promesa.</a:t>
+              <a:t>Fuera de la lamina (habla de la practica): Lo de hoy no es una isla, y decirlo en voz alta le da sentido al entregable.</a:t>
+            </a:r>
+          </a:p>
+          <a:p>
+            <a:r>
+              <a:t>Fuera de la lamina (habla de la practica): Y la Clase 12 consume estos procedimientos desde la aplicacion, que es cuando el contrato de la pregunta 5 deja de ser un documento y se vuelve la especificacion que alguien lee.</a:t>
             </a:r>
           </a:p>
         </p:txBody>
@@ -1015,22 +1024,7 @@
           <a:lstStyle/>
           <a:p>
             <a:r>
-              <a:t>Eso significa que registrar dos veces la consulta de la misma cita ya esta impedido por el motor: el segundo INSERT choca contra la restriccion de unicidad y falla.</a:t>
-            </a:r>
-          </a:p>
-          <a:p>
-            <a:r>
-              <a:t>La respuesta tiene dos partes y las dos valen.</a:t>
-            </a:r>
-          </a:p>
-          <a:p>
-            <a:r>
-              <a:t>Conviene decir tambien lo que NO hay que hacer: quitar la restriccion porque ya esta el procedimiento.</a:t>
-            </a:r>
-          </a:p>
-          <a:p>
-            <a:r>
-              <a:t>Esa jerarquia —declarativo primero, procedimiento encima— es exactamente lo que la Clase 4 va a formalizar.</a:t>
+              <a:t>Se limpia con DROP PROCEDURE nombrando los tipos.</a:t>
             </a:r>
           </a:p>
         </p:txBody>
@@ -1105,227 +1099,7 @@
           </a:p>
           <a:p>
             <a:r>
-              <a:t>- Lo de hoy no es una isla, y decirlo en voz alta le da sentido al entregable.</a:t>
-            </a:r>
-          </a:p>
-        </p:txBody>
-      </p:sp>
-      <p:sp>
-        <p:nvSpPr>
-          <p:cNvPr id="4" name="Slide Number Placeholder 3"/>
-          <p:cNvSpPr>
-            <a:spLocks noGrp="1"/>
-          </p:cNvSpPr>
-          <p:nvPr>
-            <p:ph type="sldNum" idx="5" sz="quarter"/>
-          </p:nvPr>
-        </p:nvSpPr>
-        <p:spPr/>
-      </p:sp>
-    </p:spTree>
-  </p:cSld>
-  <p:clrMapOvr>
-    <a:masterClrMapping/>
-  </p:clrMapOvr>
-</p:notes>
-</file>
-
-<file path=ppt/notesSlides/notesSlide17.xml><?xml version="1.0" encoding="utf-8"?>
-<p:notes xmlns:a="http://schemas.openxmlformats.org/drawingml/2006/main" xmlns:p="http://schemas.openxmlformats.org/presentationml/2006/main" xmlns:r="http://schemas.openxmlformats.org/officeDocument/2006/relationships">
-  <p:cSld>
-    <p:spTree>
-      <p:nvGrpSpPr>
-        <p:cNvPr id="1" name=""/>
-        <p:cNvGrpSpPr/>
-        <p:nvPr/>
-      </p:nvGrpSpPr>
-      <p:grpSpPr>
-        <a:xfrm>
-          <a:off x="0" y="0"/>
-          <a:ext cx="0" cy="0"/>
-          <a:chOff x="0" y="0"/>
-          <a:chExt cx="0" cy="0"/>
-        </a:xfrm>
-      </p:grpSpPr>
-      <p:sp>
-        <p:nvSpPr>
-          <p:cNvPr id="2" name="Slide Image Placeholder 1"/>
-          <p:cNvSpPr>
-            <a:spLocks noGrp="1"/>
-          </p:cNvSpPr>
-          <p:nvPr>
-            <p:ph type="sldImg" idx="2"/>
-          </p:nvPr>
-        </p:nvSpPr>
-        <p:spPr/>
-      </p:sp>
-      <p:sp>
-        <p:nvSpPr>
-          <p:cNvPr id="3" name="Notes Placeholder 2"/>
-          <p:cNvSpPr>
-            <a:spLocks noGrp="1"/>
-          </p:cNvSpPr>
-          <p:nvPr>
-            <p:ph type="body" idx="3" sz="quarter"/>
-          </p:nvPr>
-        </p:nvSpPr>
-        <p:spPr/>
-        <p:txBody>
-          <a:bodyPr/>
-          <a:lstStyle/>
-          <a:p>
-            <a:r>
-              <a:t>Fuera de la lamina (habla de la practica, no del tema):</a:t>
-            </a:r>
-          </a:p>
-          <a:p>
-            <a:r>
-              <a:t>- Y la Clase 12 consume estos procedimientos desde la aplicacion, que es cuando el contrato de la pregunta 5 deja de ser un documento y se vuelve la especificacion que alguien lee.</a:t>
-            </a:r>
-          </a:p>
-        </p:txBody>
-      </p:sp>
-      <p:sp>
-        <p:nvSpPr>
-          <p:cNvPr id="4" name="Slide Number Placeholder 3"/>
-          <p:cNvSpPr>
-            <a:spLocks noGrp="1"/>
-          </p:cNvSpPr>
-          <p:nvPr>
-            <p:ph type="sldNum" idx="5" sz="quarter"/>
-          </p:nvPr>
-        </p:nvSpPr>
-        <p:spPr/>
-      </p:sp>
-    </p:spTree>
-  </p:cSld>
-  <p:clrMapOvr>
-    <a:masterClrMapping/>
-  </p:clrMapOvr>
-</p:notes>
-</file>
-
-<file path=ppt/notesSlides/notesSlide18.xml><?xml version="1.0" encoding="utf-8"?>
-<p:notes xmlns:a="http://schemas.openxmlformats.org/drawingml/2006/main" xmlns:p="http://schemas.openxmlformats.org/presentationml/2006/main" xmlns:r="http://schemas.openxmlformats.org/officeDocument/2006/relationships">
-  <p:cSld>
-    <p:spTree>
-      <p:nvGrpSpPr>
-        <p:cNvPr id="1" name=""/>
-        <p:cNvGrpSpPr/>
-        <p:nvPr/>
-      </p:nvGrpSpPr>
-      <p:grpSpPr>
-        <a:xfrm>
-          <a:off x="0" y="0"/>
-          <a:ext cx="0" cy="0"/>
-          <a:chOff x="0" y="0"/>
-          <a:chExt cx="0" cy="0"/>
-        </a:xfrm>
-      </p:grpSpPr>
-      <p:sp>
-        <p:nvSpPr>
-          <p:cNvPr id="2" name="Slide Image Placeholder 1"/>
-          <p:cNvSpPr>
-            <a:spLocks noGrp="1"/>
-          </p:cNvSpPr>
-          <p:nvPr>
-            <p:ph type="sldImg" idx="2"/>
-          </p:nvPr>
-        </p:nvSpPr>
-        <p:spPr/>
-      </p:sp>
-      <p:sp>
-        <p:nvSpPr>
-          <p:cNvPr id="3" name="Notes Placeholder 2"/>
-          <p:cNvSpPr>
-            <a:spLocks noGrp="1"/>
-          </p:cNvSpPr>
-          <p:nvPr>
-            <p:ph type="body" idx="3" sz="quarter"/>
-          </p:nvPr>
-        </p:nvSpPr>
-        <p:spPr/>
-        <p:txBody>
-          <a:bodyPr/>
-          <a:lstStyle/>
-          <a:p>
-            <a:r>
-              <a:t>Se limpia con DROP PROCEDURE nombrando los tipos.</a:t>
-            </a:r>
-          </a:p>
-        </p:txBody>
-      </p:sp>
-      <p:sp>
-        <p:nvSpPr>
-          <p:cNvPr id="4" name="Slide Number Placeholder 3"/>
-          <p:cNvSpPr>
-            <a:spLocks noGrp="1"/>
-          </p:cNvSpPr>
-          <p:nvPr>
-            <p:ph type="sldNum" idx="5" sz="quarter"/>
-          </p:nvPr>
-        </p:nvSpPr>
-        <p:spPr/>
-      </p:sp>
-    </p:spTree>
-  </p:cSld>
-  <p:clrMapOvr>
-    <a:masterClrMapping/>
-  </p:clrMapOvr>
-</p:notes>
-</file>
-
-<file path=ppt/notesSlides/notesSlide19.xml><?xml version="1.0" encoding="utf-8"?>
-<p:notes xmlns:a="http://schemas.openxmlformats.org/drawingml/2006/main" xmlns:p="http://schemas.openxmlformats.org/presentationml/2006/main" xmlns:r="http://schemas.openxmlformats.org/officeDocument/2006/relationships">
-  <p:cSld>
-    <p:spTree>
-      <p:nvGrpSpPr>
-        <p:cNvPr id="1" name=""/>
-        <p:cNvGrpSpPr/>
-        <p:nvPr/>
-      </p:nvGrpSpPr>
-      <p:grpSpPr>
-        <a:xfrm>
-          <a:off x="0" y="0"/>
-          <a:ext cx="0" cy="0"/>
-          <a:chOff x="0" y="0"/>
-          <a:chExt cx="0" cy="0"/>
-        </a:xfrm>
-      </p:grpSpPr>
-      <p:sp>
-        <p:nvSpPr>
-          <p:cNvPr id="2" name="Slide Image Placeholder 1"/>
-          <p:cNvSpPr>
-            <a:spLocks noGrp="1"/>
-          </p:cNvSpPr>
-          <p:nvPr>
-            <p:ph type="sldImg" idx="2"/>
-          </p:nvPr>
-        </p:nvSpPr>
-        <p:spPr/>
-      </p:sp>
-      <p:sp>
-        <p:nvSpPr>
-          <p:cNvPr id="3" name="Notes Placeholder 2"/>
-          <p:cNvSpPr>
-            <a:spLocks noGrp="1"/>
-          </p:cNvSpPr>
-          <p:nvPr>
-            <p:ph type="body" idx="3" sz="quarter"/>
-          </p:nvPr>
-        </p:nvSpPr>
-        <p:spPr/>
-        <p:txBody>
-          <a:bodyPr/>
-          <a:lstStyle/>
-          <a:p>
-            <a:r>
-              <a:t>Fuera de la lamina (habla de la practica, no del tema):</a:t>
-            </a:r>
-          </a:p>
-          <a:p>
-            <a:r>
-              <a:t>- Un procedimiento sin bateria no esta terminado: son 25 de los 100 puntos</a:t>
+              <a:t>- Los 25 puntos se califican por esta tabla, no por el CALL suelto</a:t>
             </a:r>
           </a:p>
         </p:txBody>
@@ -1395,17 +1169,6 @@
           <a:lstStyle/>
           <a:p>
             <a:r>
-              <a:t>Fuera de la lamina (habla de la practica, no del tema):</a:t>
-            </a:r>
-          </a:p>
-          <a:p>
-            <a:r>
-              <a:t>- El molde es fijo y conviene dictarlo entero antes de escribir una sola validacion, porque es donde se pierden los puntos sin haber entendido nada mal.</a:t>
-            </a:r>
-          </a:p>
-          <a:p/>
-          <a:p>
-            <a:r>
               <a:t>END; $proc$; y cada pieza tiene su razon.</a:t>
             </a:r>
           </a:p>
@@ -1416,232 +1179,17 @@
           </a:p>
           <a:p>
             <a:r>
-              <a:t>Un estudiante que agregue p_id_cita no comete un error de sintaxis, comete un error de diseno, y la rubrica lo mira.</a:t>
-            </a:r>
-          </a:p>
-        </p:txBody>
-      </p:sp>
-      <p:sp>
-        <p:nvSpPr>
-          <p:cNvPr id="4" name="Slide Number Placeholder 3"/>
-          <p:cNvSpPr>
-            <a:spLocks noGrp="1"/>
-          </p:cNvSpPr>
-          <p:nvPr>
-            <p:ph type="sldNum" idx="5" sz="quarter"/>
-          </p:nvPr>
-        </p:nvSpPr>
-        <p:spPr/>
-      </p:sp>
-    </p:spTree>
-  </p:cSld>
-  <p:clrMapOvr>
-    <a:masterClrMapping/>
-  </p:clrMapOvr>
-</p:notes>
-</file>
-
-<file path=ppt/notesSlides/notesSlide20.xml><?xml version="1.0" encoding="utf-8"?>
-<p:notes xmlns:a="http://schemas.openxmlformats.org/drawingml/2006/main" xmlns:p="http://schemas.openxmlformats.org/presentationml/2006/main" xmlns:r="http://schemas.openxmlformats.org/officeDocument/2006/relationships">
-  <p:cSld>
-    <p:spTree>
-      <p:nvGrpSpPr>
-        <p:cNvPr id="1" name=""/>
-        <p:cNvGrpSpPr/>
-        <p:nvPr/>
-      </p:nvGrpSpPr>
-      <p:grpSpPr>
-        <a:xfrm>
-          <a:off x="0" y="0"/>
-          <a:ext cx="0" cy="0"/>
-          <a:chOff x="0" y="0"/>
-          <a:chExt cx="0" cy="0"/>
-        </a:xfrm>
-      </p:grpSpPr>
-      <p:sp>
-        <p:nvSpPr>
-          <p:cNvPr id="2" name="Slide Image Placeholder 1"/>
-          <p:cNvSpPr>
-            <a:spLocks noGrp="1"/>
-          </p:cNvSpPr>
-          <p:nvPr>
-            <p:ph type="sldImg" idx="2"/>
-          </p:nvPr>
-        </p:nvSpPr>
-        <p:spPr/>
-      </p:sp>
-      <p:sp>
-        <p:nvSpPr>
-          <p:cNvPr id="3" name="Notes Placeholder 2"/>
-          <p:cNvSpPr>
-            <a:spLocks noGrp="1"/>
-          </p:cNvSpPr>
-          <p:nvPr>
-            <p:ph type="body" idx="3" sz="quarter"/>
-          </p:nvPr>
-        </p:nvSpPr>
-        <p:spPr/>
-        <p:txBody>
-          <a:bodyPr/>
-          <a:lstStyle/>
-          <a:p>
-            <a:r>
-              <a:t>Fuera de la lamina (habla de la practica, no del tema):</a:t>
-            </a:r>
-          </a:p>
-          <a:p>
-            <a:r>
-              <a:t>- Los 25 puntos se califican por esta tabla, no por el CALL suelto</a:t>
-            </a:r>
-          </a:p>
-        </p:txBody>
-      </p:sp>
-      <p:sp>
-        <p:nvSpPr>
-          <p:cNvPr id="4" name="Slide Number Placeholder 3"/>
-          <p:cNvSpPr>
-            <a:spLocks noGrp="1"/>
-          </p:cNvSpPr>
-          <p:nvPr>
-            <p:ph type="sldNum" idx="5" sz="quarter"/>
-          </p:nvPr>
-        </p:nvSpPr>
-        <p:spPr/>
-      </p:sp>
-    </p:spTree>
-  </p:cSld>
-  <p:clrMapOvr>
-    <a:masterClrMapping/>
-  </p:clrMapOvr>
-</p:notes>
-</file>
-
-<file path=ppt/notesSlides/notesSlide21.xml><?xml version="1.0" encoding="utf-8"?>
-<p:notes xmlns:a="http://schemas.openxmlformats.org/drawingml/2006/main" xmlns:p="http://schemas.openxmlformats.org/presentationml/2006/main" xmlns:r="http://schemas.openxmlformats.org/officeDocument/2006/relationships">
-  <p:cSld>
-    <p:spTree>
-      <p:nvGrpSpPr>
-        <p:cNvPr id="1" name=""/>
-        <p:cNvGrpSpPr/>
-        <p:nvPr/>
-      </p:nvGrpSpPr>
-      <p:grpSpPr>
-        <a:xfrm>
-          <a:off x="0" y="0"/>
-          <a:ext cx="0" cy="0"/>
-          <a:chOff x="0" y="0"/>
-          <a:chExt cx="0" cy="0"/>
-        </a:xfrm>
-      </p:grpSpPr>
-      <p:sp>
-        <p:nvSpPr>
-          <p:cNvPr id="2" name="Slide Image Placeholder 1"/>
-          <p:cNvSpPr>
-            <a:spLocks noGrp="1"/>
-          </p:cNvSpPr>
-          <p:nvPr>
-            <p:ph type="sldImg" idx="2"/>
-          </p:nvPr>
-        </p:nvSpPr>
-        <p:spPr/>
-      </p:sp>
-      <p:sp>
-        <p:nvSpPr>
-          <p:cNvPr id="3" name="Notes Placeholder 2"/>
-          <p:cNvSpPr>
-            <a:spLocks noGrp="1"/>
-          </p:cNvSpPr>
-          <p:nvPr>
-            <p:ph type="body" idx="3" sz="quarter"/>
-          </p:nvPr>
-        </p:nvSpPr>
-        <p:spPr/>
-        <p:txBody>
-          <a:bodyPr/>
-          <a:lstStyle/>
-          <a:p>
-            <a:r>
-              <a:t>Fuera de la lamina (habla de la practica, no del tema):</a:t>
-            </a:r>
-          </a:p>
-          <a:p>
-            <a:r>
-              <a:t>- Es el entregable de la pregunta 5, vale 15 puntos, y la plantilla en blanco de los 6 bloques esta en el Taller del PI</a:t>
-            </a:r>
-          </a:p>
-        </p:txBody>
-      </p:sp>
-      <p:sp>
-        <p:nvSpPr>
-          <p:cNvPr id="4" name="Slide Number Placeholder 3"/>
-          <p:cNvSpPr>
-            <a:spLocks noGrp="1"/>
-          </p:cNvSpPr>
-          <p:nvPr>
-            <p:ph type="sldNum" idx="5" sz="quarter"/>
-          </p:nvPr>
-        </p:nvSpPr>
-        <p:spPr/>
-      </p:sp>
-    </p:spTree>
-  </p:cSld>
-  <p:clrMapOvr>
-    <a:masterClrMapping/>
-  </p:clrMapOvr>
-</p:notes>
-</file>
-
-<file path=ppt/notesSlides/notesSlide22.xml><?xml version="1.0" encoding="utf-8"?>
-<p:notes xmlns:a="http://schemas.openxmlformats.org/drawingml/2006/main" xmlns:p="http://schemas.openxmlformats.org/presentationml/2006/main" xmlns:r="http://schemas.openxmlformats.org/officeDocument/2006/relationships">
-  <p:cSld>
-    <p:spTree>
-      <p:nvGrpSpPr>
-        <p:cNvPr id="1" name=""/>
-        <p:cNvGrpSpPr/>
-        <p:nvPr/>
-      </p:nvGrpSpPr>
-      <p:grpSpPr>
-        <a:xfrm>
-          <a:off x="0" y="0"/>
-          <a:ext cx="0" cy="0"/>
-          <a:chOff x="0" y="0"/>
-          <a:chExt cx="0" cy="0"/>
-        </a:xfrm>
-      </p:grpSpPr>
-      <p:sp>
-        <p:nvSpPr>
-          <p:cNvPr id="2" name="Slide Image Placeholder 1"/>
-          <p:cNvSpPr>
-            <a:spLocks noGrp="1"/>
-          </p:cNvSpPr>
-          <p:nvPr>
-            <p:ph type="sldImg" idx="2"/>
-          </p:nvPr>
-        </p:nvSpPr>
-        <p:spPr/>
-      </p:sp>
-      <p:sp>
-        <p:nvSpPr>
-          <p:cNvPr id="3" name="Notes Placeholder 2"/>
-          <p:cNvSpPr>
-            <a:spLocks noGrp="1"/>
-          </p:cNvSpPr>
-          <p:nvPr>
-            <p:ph type="body" idx="3" sz="quarter"/>
-          </p:nvPr>
-        </p:nvSpPr>
-        <p:spPr/>
-        <p:txBody>
-          <a:bodyPr/>
-          <a:lstStyle/>
-          <a:p>
-            <a:r>
-              <a:t>Fuera de la lamina (habla de la practica, no del tema):</a:t>
-            </a:r>
-          </a:p>
-          <a:p>
-            <a:r>
-              <a:t>- Son 10 de los 100 puntos y es la bisagra con la Clase 4</a:t>
+              <a:t>Un estudiante que agregue p_id_cita no comete un error de sintaxis, comete un error de diseno.</a:t>
+            </a:r>
+          </a:p>
+          <a:p>
+            <a:r>
+              <a:t>Fuera de la lamina (habla de la practica): El molde es fijo y conviene dictarlo entero antes de escribir una sola validacion, porque es donde se pierden los puntos sin haber entendido nada mal.</a:t>
+            </a:r>
+          </a:p>
+          <a:p>
+            <a:r>
+              <a:t>Fuera de la lamina (habla de la practica): Un estudiante que agregue p_id_cita no comete un error de sintaxis, comete un error de diseno, y la rubrica lo mira.</a:t>
             </a:r>
           </a:p>
         </p:txBody>
@@ -1721,12 +1269,17 @@
           </a:p>
           <a:p>
             <a:r>
-              <a:t>La otra razon es de diseno y es la que hay que defender en clase, porque es la decision que la solucion docente califica.</a:t>
+              <a:t>La otra razon es de diseno y es la que hay que defender en clase.</a:t>
             </a:r>
           </a:p>
           <a:p>
             <a:r>
               <a:t>Devolver el error en un parametro OUT significa que el procedimiento hizo su trabajo, dejo la fila insertada y ademas puso un texto en una variable que la aplicacion PUEDE mirar.</a:t>
+            </a:r>
+          </a:p>
+          <a:p>
+            <a:r>
+              <a:t>Fuera de la lamina (habla de la practica): La otra razon es de diseno y es la que hay que defender en clase, porque es la decision que la solucion docente califica.</a:t>
             </a:r>
           </a:p>
         </p:txBody>
@@ -1796,17 +1349,6 @@
           <a:lstStyle/>
           <a:p>
             <a:r>
-              <a:t>Fuera de la lamina (habla de la practica, no del tema):</a:t>
-            </a:r>
-          </a:p>
-          <a:p>
-            <a:r>
-              <a:t>- Esta es la parte que convierte una consulta con nombre en logica de negocio, y es el mecanismo que la pregunta 1 de la clase califica con treinta y cinco puntos.</a:t>
-            </a:r>
-          </a:p>
-          <a:p/>
-          <a:p>
-            <a:r>
               <a:t>No sale del procedimiento con un aviso, lanza un error que propaga hasta quien llamo, y todo lo que el procedimiento hubiera escrito antes se deshace.</a:t>
             </a:r>
           </a:p>
@@ -1823,6 +1365,11 @@
           <a:p>
             <a:r>
               <a:t>Si el SELECT devuelve varias filas, en cambio, PL/pgSQL se queda con la primera sin avisar, salvo que se escriba STRICT, que entonces si lanza excepcion en los dos casos.</a:t>
+            </a:r>
+          </a:p>
+          <a:p>
+            <a:r>
+              <a:t>Fuera de la lamina (habla de la practica): Esta es la parte que convierte una consulta con nombre en logica de negocio, y es el mecanismo que la pregunta 1 de la clase califica con treinta y cinco puntos.</a:t>
             </a:r>
           </a:p>
         </p:txBody>
@@ -2067,15 +1614,9 @@
           <a:lstStyle/>
           <a:p>
             <a:r>
-              <a:t>Fuera de la lamina (habla de la practica, no del tema):</a:t>
-            </a:r>
-          </a:p>
-          <a:p>
-            <a:r>
-              <a:t>- Un procedimiento sin prueba no esta terminado, y esta parte vale veinticinco de los cien puntos de la clase, asi que hay que dictarla como tema y no como recomendacion.</a:t>
-            </a:r>
-          </a:p>
-          <a:p/>
+              <a:t>Un procedimiento sin prueba no esta terminado.</a:t>
+            </a:r>
+          </a:p>
           <a:p>
             <a:r>
               <a:t>Aparecen tres casos sin probar y una captura que no demuestra nada.</a:t>
@@ -2108,7 +1649,12 @@
           </a:p>
           <a:p>
             <a:r>
-              <a:t>Dos, y es la que importa hoy, que el procedimiento del taller NO lleva COMMIT: si lo llevara, llamarlo desde dentro de un bloque con EXCEPTION fallaria, porque PostgreSQL no permite confirmar la transaccion mientras hay un savepoint activo.</a:t>
+              <a:t>Dos, y es la que importa hoy, que el procedimiento de la clase NO lleva COMMIT: si lo llevara, llamarlo desde dentro de un bloque con EXCEPTION fallaria, porque PostgreSQL no permite confirmar la transaccion mientras hay un savepoint activo.</a:t>
+            </a:r>
+          </a:p>
+          <a:p>
+            <a:r>
+              <a:t>Fuera de la lamina (habla de la practica): Un procedimiento sin prueba no esta terminado, y esta parte vale veinticinco de los cien puntos de la clase, asi que hay que dictarla como tema y no como recomendacion.</a:t>
             </a:r>
           </a:p>
         </p:txBody>
@@ -2178,7 +1724,7 @@
           <a:lstStyle/>
           <a:p>
             <a:r>
-              <a:t>Aqui esta el matiz que separa una bateria que prueba algo de una que se prueba a si misma, y conviene dictarlo despacio porque la solucion docente lo califica.</a:t>
+              <a:t>Aqui esta el matiz que separa una bateria que prueba algo de una que se prueba a si misma.</a:t>
             </a:r>
           </a:p>
           <a:p>
@@ -2194,6 +1740,16 @@
           <a:p>
             <a:r>
               <a:t>Conviene decir en voz alta la consecuencia, porque es la que evita reclamos: no se descuenta por elegir una u otra, se descuenta por las cuatro filas en verdadero sin haber verificado el texto.</a:t>
+            </a:r>
+          </a:p>
+          <a:p>
+            <a:r>
+              <a:t>Fuera de la lamina (habla de la practica): Aqui esta el matiz que separa una bateria que prueba algo de una que se prueba a si misma, y conviene dictarlo despacio porque la solucion docente lo califica.</a:t>
+            </a:r>
+          </a:p>
+          <a:p>
+            <a:r>
+              <a:t>Fuera de la lamina (habla de la practica): Las dos son defendibles; lo que no es defendible es no decir cual, porque entonces la columna no significa nada y el docente no puede calificar la captura.</a:t>
             </a:r>
           </a:p>
         </p:txBody>
@@ -2263,12 +1819,17 @@
           <a:lstStyle/>
           <a:p>
             <a:r>
-              <a:t>Fuera de la lamina (habla de la practica, no del tema):</a:t>
-            </a:r>
-          </a:p>
-          <a:p>
-            <a:r>
-              <a:t>- Las dos son defendibles; lo que no es defendible es no decir cual, porque entonces la columna no significa nada y el docente no puede calificar la captura.</a:t>
+              <a:t>Un contrato sirve si permite escribir la llamada y manejar los errores sin leer el cuerpo.</a:t>
+            </a:r>
+          </a:p>
+          <a:p>
+            <a:r>
+              <a:t>Sin ella, quien llama no sabe si tiene que limpiar algo.</a:t>
+            </a:r>
+          </a:p>
+          <a:p>
+            <a:r>
+              <a:t>Fuera de la lamina (habla de la practica): La tabla de errores lleva el mensaje LITERAL, no una parafrasis, porque quien llama va a comparar contra ese texto —y porque es el mismo texto que la bateria de pruebas verifica, de modo que los dos entregables tienen que coincidir palabra por palabra.</a:t>
             </a:r>
           </a:p>
         </p:txBody>
@@ -8943,6 +8504,40 @@
               <a:t>–   Cada lámina se sostiene sola: sirve para repasar aunque hayas faltado.</a:t>
             </a:r>
           </a:p>
+          <a:p>
+            <a:pPr>
+              <a:spcAft>
+                <a:spcPts val="800"/>
+              </a:spcAft>
+            </a:pPr>
+            <a:r>
+              <a:rPr sz="2000" b="0" i="0">
+                <a:solidFill>
+                  <a:srgbClr val="333333"/>
+                </a:solidFill>
+                <a:latin typeface="Calibri"/>
+              </a:rPr>
+              <a:t>–   </a:t>
+            </a:r>
+            <a:r>
+              <a:rPr sz="2000" b="1" i="0">
+                <a:solidFill>
+                  <a:srgbClr val="333333"/>
+                </a:solidFill>
+                <a:latin typeface="Calibri"/>
+              </a:rPr>
+              <a:t>Conceptos de hoy:</a:t>
+            </a:r>
+            <a:r>
+              <a:rPr sz="2000" b="0" i="0">
+                <a:solidFill>
+                  <a:srgbClr val="333333"/>
+                </a:solidFill>
+                <a:latin typeface="Calibri"/>
+              </a:rPr>
+              <a:t> Que es un procedimiento almacenado, y las dos palabras que importan · Que es un procedimiento almacenado, y las dos... · El molde de PL/pgSQL, y por que el cuerpo va entre signos de dolar · El molde de PL/pgSQL, y por que el cuerpo va....</a:t>
+            </a:r>
+          </a:p>
         </p:txBody>
       </p:sp>
       <p:sp>
@@ -9444,7 +9039,7 @@
                 </a:solidFill>
                 <a:latin typeface="Calibri"/>
               </a:rPr>
-              <a:t>–   Un procedimiento sin prueba no esta terminado.</a:t>
+              <a:t>–   El punto de partida es un problema practico: si el estudiante escribe los cuatro CALL uno tras otro y ejecuta todo de un tiro, el primero que falla aborta la ejecucion y los siguientes no corren.</a:t>
             </a:r>
           </a:p>
           <a:p>
@@ -9460,7 +9055,7 @@
                 </a:solidFill>
                 <a:latin typeface="Calibri"/>
               </a:rPr>
-              <a:t>–   El punto de partida es un problema practico: si el estudiante escribe los cuatro CALL uno tras otro y ejecuta todo de un tiro, el primero que falla aborta la ejecucion y los siguientes no corren.</a:t>
+              <a:t>–   La solucion es el bloque anonimo: DO $$ BEGIN...</a:t>
             </a:r>
           </a:p>
           <a:p>
@@ -9476,7 +9071,7 @@
                 </a:solidFill>
                 <a:latin typeface="Calibri"/>
               </a:rPr>
-              <a:t>–   La solucion es el bloque anonimo: DO $$ BEGIN...</a:t>
+              <a:t>–   END $$; es un bloque de PL/pgSQL que se ejecuta una vez y no se guarda en ningun catalogo.</a:t>
             </a:r>
           </a:p>
           <a:p>
@@ -9492,7 +9087,7 @@
                 </a:solidFill>
                 <a:latin typeface="Calibri"/>
               </a:rPr>
-              <a:t>–   END $$; es un bloque de PL/pgSQL que se ejecuta una vez y no se guarda en ningun catalogo.</a:t>
+              <a:t>–   Los resultados van a una tabla, no a la pantalla, y eso tambien tiene razon: una captura de cuatro mensajes sueltos no se puede comparar contra nada</a:t>
             </a:r>
           </a:p>
           <a:p>
@@ -9508,7 +9103,7 @@
                 </a:solidFill>
                 <a:latin typeface="Calibri"/>
               </a:rPr>
-              <a:t>–   Los resultados van a una tabla, no a la pantalla, y eso tambien tiene razon: una captura de cuatro mensajes sueltos no se puede comparar contra nada</a:t>
+              <a:t>–   Mientras que un SELECT sobre resultado_prueba(id_prueba, caso, esperado, obtenido, paso) es una sola imagen que muestra los cuatro casos con su veredicto.</a:t>
             </a:r>
           </a:p>
         </p:txBody>
@@ -9728,7 +9323,7 @@
                 </a:solidFill>
                 <a:latin typeface="Calibri"/>
               </a:rPr>
-              <a:t>–   Mientras que un SELECT sobre resultado_prueba(id_prueba, caso, esperado, obtenido, paso) es una sola imagen que muestra los cuatro casos con su veredicto.</a:t>
+              <a:t>–   Los cuatro casos del PI son el positivo, con una mascota activa y una franja libre, y los tres negativos: mascota inactiva —Rocky, identificador 3</a:t>
             </a:r>
           </a:p>
           <a:p>
@@ -9744,7 +9339,7 @@
                 </a:solidFill>
                 <a:latin typeface="Calibri"/>
               </a:rPr>
-              <a:t>–   Los cuatro casos del PI son el positivo, con una mascota activa y una franja libre, y los tres negativos: mascota inactiva —Rocky, identificador 3</a:t>
+              <a:t>–   Y Kiara, identificador 8, estan inactivas en los datos sembrados—, mascota inexistente con el identificador 99, y franja ocupada, para la que sirve la cita que el veterinario 1 ya tiene el 2026-09-01 a las 08:00.</a:t>
             </a:r>
           </a:p>
           <a:p>
@@ -9760,7 +9355,7 @@
                 </a:solidFill>
                 <a:latin typeface="Calibri"/>
               </a:rPr>
-              <a:t>–   Y Kiara, identificador 8, estan inactivas en los datos sembrados—, mascota inexistente con el identificador 99, y franja ocupada, para la que sirve la cita que el veterinario 1 ya tiene el 2026-09-01 a las 08:00.</a:t>
+              <a:t>–   Y hay que cerrar con la prueba que nadie piensa: un SELECT COUNT(*) FROM cita que demuestre que la tabla paso de diez filas a once y no a catorce.</a:t>
             </a:r>
           </a:p>
           <a:p>
@@ -9776,7 +9371,7 @@
                 </a:solidFill>
                 <a:latin typeface="Calibri"/>
               </a:rPr>
-              <a:t>–   Y hay que cerrar con la prueba que nadie piensa: un SELECT COUNT(*) FROM cita que demuestre que la tabla paso de diez filas a once y no a catorce.</a:t>
+              <a:t>–   Ese conteo es lo que evidencia que los tres errores no dejaron basura, es decir que RAISE EXCEPTION hizo lo que se dijo que hacia.</a:t>
             </a:r>
           </a:p>
         </p:txBody>
@@ -9996,22 +9591,6 @@
                 </a:solidFill>
                 <a:latin typeface="Calibri"/>
               </a:rPr>
-              <a:t>–   Ese conteo es lo que evidencia que los tres errores no dejaron basura, es decir que RAISE EXCEPTION hizo lo que se dijo que hacia.</a:t>
-            </a:r>
-          </a:p>
-          <a:p>
-            <a:pPr>
-              <a:spcAft>
-                <a:spcPts val="800"/>
-              </a:spcAft>
-            </a:pPr>
-            <a:r>
-              <a:rPr sz="2000" b="0" i="0">
-                <a:solidFill>
-                  <a:srgbClr val="333333"/>
-                </a:solidFill>
-                <a:latin typeface="Calibri"/>
-              </a:rPr>
               <a:t>–   Hay un detalle de mecanica que conviene conocer porque explica por que esto funciona: un bloque de PL/pgSQL con clausula EXCEPTION abre internamente un punto de retorno, un savepoint, de modo que al capturar el error se deshace solo lo que ese bloque hizo.</a:t>
             </a:r>
           </a:p>
@@ -10315,6 +9894,22 @@
               <a:t>–   La segunda mitad es que la columna paso admite dos lecturas legitimas y hay que elegir una.</a:t>
             </a:r>
           </a:p>
+          <a:p>
+            <a:pPr>
+              <a:spcAft>
+                <a:spcPts val="800"/>
+              </a:spcAft>
+            </a:pPr>
+            <a:r>
+              <a:rPr sz="2000" b="0" i="0">
+                <a:solidFill>
+                  <a:srgbClr val="333333"/>
+                </a:solidFill>
+                <a:latin typeface="Calibri"/>
+              </a:rPr>
+              <a:t>–   Si paso significa el resultado coincidio con lo esperado, las cuatro filas quedan en verdadero cuando todo esta bien, porque en un caso negativo lo esperado es la excepcion.</a:t>
+            </a:r>
+          </a:p>
         </p:txBody>
       </p:sp>
       <p:sp>
@@ -10532,7 +10127,7 @@
                 </a:solidFill>
                 <a:latin typeface="Calibri"/>
               </a:rPr>
-              <a:t>–   Si paso significa el resultado coincidio con lo esperado, las cuatro filas quedan en verdadero cuando todo esta bien, porque en un caso negativo lo esperado es la excepcion.</a:t>
+              <a:t>–   Las dos son defendibles; lo que no es defendible es no decir cual.</a:t>
             </a:r>
           </a:p>
           <a:p>
@@ -10548,7 +10143,7 @@
                 </a:solidFill>
                 <a:latin typeface="Calibri"/>
               </a:rPr>
-              <a:t>–   Las dos son defendibles; lo que no es defendible es no decir cual.</a:t>
+              <a:t>–   La regla del curso es explicita: se usa la misma lectura para las cuatro filas y se declara en una linea junto a la tabla.</a:t>
             </a:r>
           </a:p>
           <a:p>
@@ -10564,7 +10159,23 @@
                 </a:solidFill>
                 <a:latin typeface="Calibri"/>
               </a:rPr>
-              <a:t>–   La regla del curso es explicita: se usa la misma lectura para las cuatro filas y se declara en una linea junto a la tabla.</a:t>
+              <a:t>–   Salida esperada de una bateria sana: 4 filas, el caso valido con paso TRUE y los 3 invalidos con paso TRUE y el SQLERRM literal del procedimiento.</a:t>
+            </a:r>
+          </a:p>
+          <a:p>
+            <a:pPr>
+              <a:spcAft>
+                <a:spcPts val="800"/>
+              </a:spcAft>
+            </a:pPr>
+            <a:r>
+              <a:rPr sz="2000" b="0" i="0">
+                <a:solidFill>
+                  <a:srgbClr val="333333"/>
+                </a:solidFill>
+                <a:latin typeface="Calibri"/>
+              </a:rPr>
+              <a:t>–   Un caso invalido con paso FALSE es un hallazgo: el procedimiento dejo pasar algo que debia rechazar.</a:t>
             </a:r>
           </a:p>
         </p:txBody>
@@ -10851,22 +10462,6 @@
               <a:t>–   El ejemplo de llamada, con valores concretos que funcionan, responde como se invoca; y conviene exigirlo porque es lo que convierte el contrato en algo copiable.</a:t>
             </a:r>
           </a:p>
-          <a:p>
-            <a:pPr>
-              <a:spcAft>
-                <a:spcPts val="800"/>
-              </a:spcAft>
-            </a:pPr>
-            <a:r>
-              <a:rPr sz="2000" b="0" i="0">
-                <a:solidFill>
-                  <a:srgbClr val="333333"/>
-                </a:solidFill>
-                <a:latin typeface="Calibri"/>
-              </a:rPr>
-              <a:t>–   Las precondiciones responden que tiene que ser verdad antes: la mascota existe y esta activa, la franja del veterinario esta libre.</a:t>
-            </a:r>
-          </a:p>
         </p:txBody>
       </p:sp>
       <p:sp>
@@ -11084,6 +10679,22 @@
                 </a:solidFill>
                 <a:latin typeface="Calibri"/>
               </a:rPr>
+              <a:t>–   Las precondiciones responden que tiene que ser verdad antes: la mascota existe y esta activa, la franja del veterinario esta libre.</a:t>
+            </a:r>
+          </a:p>
+          <a:p>
+            <a:pPr>
+              <a:spcAft>
+                <a:spcPts val="800"/>
+              </a:spcAft>
+            </a:pPr>
+            <a:r>
+              <a:rPr sz="2000" b="0" i="0">
+                <a:solidFill>
+                  <a:srgbClr val="333333"/>
+                </a:solidFill>
+                <a:latin typeface="Calibri"/>
+              </a:rPr>
               <a:t>–   Las postcondiciones responden que queda despues, y aqui la frase importante es la del caso malo: si falla, no queda NADA.</a:t>
             </a:r>
           </a:p>
@@ -11623,6 +11234,54 @@
               <a:t>–   La funcion llega en la Clase 4 con fn_precio_consulta, y ahi la comparacion ya estara hecha.</a:t>
             </a:r>
           </a:p>
+          <a:p>
+            <a:pPr>
+              <a:spcAft>
+                <a:spcPts val="800"/>
+              </a:spcAft>
+            </a:pPr>
+            <a:r>
+              <a:rPr sz="2000" b="0" i="0">
+                <a:solidFill>
+                  <a:srgbClr val="333333"/>
+                </a:solidFill>
+                <a:latin typeface="Calibri"/>
+              </a:rPr>
+              <a:t>–   Una FUNCTION devuelve un valor y se usa dentro de una consulta: FROM....</a:t>
+            </a:r>
+          </a:p>
+          <a:p>
+            <a:pPr>
+              <a:spcAft>
+                <a:spcPts val="800"/>
+              </a:spcAft>
+            </a:pPr>
+            <a:r>
+              <a:rPr sz="2000" b="0" i="0">
+                <a:solidFill>
+                  <a:srgbClr val="333333"/>
+                </a:solidFill>
+                <a:latin typeface="Calibri"/>
+              </a:rPr>
+              <a:t>–   Un PROCEDURE no devuelve valor y se invoca como sentencia suelta:.</a:t>
+            </a:r>
+          </a:p>
+          <a:p>
+            <a:pPr>
+              <a:spcAft>
+                <a:spcPts val="800"/>
+              </a:spcAft>
+            </a:pPr>
+            <a:r>
+              <a:rPr sz="2000" b="0" i="0">
+                <a:solidFill>
+                  <a:srgbClr val="333333"/>
+                </a:solidFill>
+                <a:latin typeface="Calibri"/>
+              </a:rPr>
+              <a:t>–   Llamar un procedimiento con SELECT es un error de PostgreSQL, no una variante.</a:t>
+            </a:r>
+          </a:p>
         </p:txBody>
       </p:sp>
       <p:sp>
@@ -12653,21 +12312,141 @@
                 </a:solidFill>
                 <a:latin typeface="Calibri"/>
               </a:rPr>
-              <a:t>Depurar sin depurador: los cuatro movimientos, en PostgreSQL (1/2)</a:t>
-            </a:r>
-          </a:p>
-        </p:txBody>
-      </p:sp>
-      <p:sp>
-        <p:nvSpPr>
-          <p:cNvPr id="5" name="TextBox 4"/>
+              <a:t>Procedimiento y funcion: la diferencia se... — sintaxis</a:t>
+            </a:r>
+          </a:p>
+        </p:txBody>
+      </p:sp>
+      <p:sp>
+        <p:nvSpPr>
+          <p:cNvPr id="5" name="Rounded Rectangle 4"/>
+          <p:cNvSpPr/>
+          <p:nvPr/>
+        </p:nvSpPr>
+        <p:spPr>
+          <a:xfrm>
+            <a:off x="457200" y="1261872"/>
+            <a:ext cx="11277295" cy="5093208"/>
+          </a:xfrm>
+          <a:prstGeom prst="roundRect">
+            <a:avLst>
+              <a:gd name="adj" fmla="val 12000"/>
+            </a:avLst>
+          </a:prstGeom>
+          <a:solidFill>
+            <a:srgbClr val="1E2A38"/>
+          </a:solidFill>
+          <a:ln>
+            <a:noFill/>
+          </a:ln>
+        </p:spPr>
+        <p:style>
+          <a:lnRef idx="1">
+            <a:schemeClr val="accent1"/>
+          </a:lnRef>
+          <a:fillRef idx="3">
+            <a:schemeClr val="accent1"/>
+          </a:fillRef>
+          <a:effectRef idx="2">
+            <a:schemeClr val="accent1"/>
+          </a:effectRef>
+          <a:fontRef idx="minor">
+            <a:schemeClr val="lt1"/>
+          </a:fontRef>
+        </p:style>
+        <p:txBody>
+          <a:bodyPr rtlCol="0" anchor="ctr"/>
+          <a:lstStyle/>
+          <a:p>
+            <a:pPr algn="ctr"/>
+          </a:p>
+        </p:txBody>
+      </p:sp>
+      <p:sp>
+        <p:nvSpPr>
+          <p:cNvPr id="6" name="Rectangle 5"/>
+          <p:cNvSpPr/>
+          <p:nvPr/>
+        </p:nvSpPr>
+        <p:spPr>
+          <a:xfrm>
+            <a:off x="457200" y="1261872"/>
+            <a:ext cx="11277295" cy="320040"/>
+          </a:xfrm>
+          <a:prstGeom prst="rect">
+            <a:avLst/>
+          </a:prstGeom>
+          <a:solidFill>
+            <a:srgbClr val="095292"/>
+          </a:solidFill>
+          <a:ln>
+            <a:noFill/>
+          </a:ln>
+        </p:spPr>
+        <p:style>
+          <a:lnRef idx="1">
+            <a:schemeClr val="accent1"/>
+          </a:lnRef>
+          <a:fillRef idx="3">
+            <a:schemeClr val="accent1"/>
+          </a:fillRef>
+          <a:effectRef idx="2">
+            <a:schemeClr val="accent1"/>
+          </a:effectRef>
+          <a:fontRef idx="minor">
+            <a:schemeClr val="lt1"/>
+          </a:fontRef>
+        </p:style>
+        <p:txBody>
+          <a:bodyPr rtlCol="0" anchor="ctr"/>
+          <a:lstStyle/>
+          <a:p>
+            <a:pPr algn="ctr"/>
+          </a:p>
+        </p:txBody>
+      </p:sp>
+      <p:sp>
+        <p:nvSpPr>
+          <p:cNvPr id="7" name="TextBox 6"/>
           <p:cNvSpPr txBox="1"/>
           <p:nvPr/>
         </p:nvSpPr>
         <p:spPr>
           <a:xfrm>
-            <a:off x="457200" y="1170432"/>
-            <a:ext cx="11277295" cy="5230368"/>
+            <a:off x="685800" y="1307592"/>
+            <a:ext cx="10820095" cy="256032"/>
+          </a:xfrm>
+          <a:prstGeom prst="rect">
+            <a:avLst/>
+          </a:prstGeom>
+          <a:noFill/>
+        </p:spPr>
+        <p:txBody>
+          <a:bodyPr wrap="square" anchor="ctr"/>
+          <a:lstStyle/>
+          <a:p>
+            <a:r>
+              <a:rPr sz="1000" b="1" i="0">
+                <a:solidFill>
+                  <a:srgbClr val="269CCB"/>
+                </a:solidFill>
+                <a:latin typeface="Calibri"/>
+              </a:rPr>
+              <a:t>● ● ●</a:t>
+            </a:r>
+          </a:p>
+        </p:txBody>
+      </p:sp>
+      <p:sp>
+        <p:nvSpPr>
+          <p:cNvPr id="8" name="TextBox 7"/>
+          <p:cNvSpPr txBox="1"/>
+          <p:nvPr/>
+        </p:nvSpPr>
+        <p:spPr>
+          <a:xfrm>
+            <a:off x="777240" y="1719072"/>
+            <a:ext cx="10637215" cy="4453128"/>
           </a:xfrm>
           <a:prstGeom prst="rect">
             <a:avLst/>
@@ -12682,88 +12461,56 @@
           <a:p>
             <a:pPr>
               <a:spcAft>
-                <a:spcPts val="800"/>
-              </a:spcAft>
-            </a:pPr>
-            <a:r>
-              <a:rPr sz="2000" b="0" i="0">
-                <a:solidFill>
-                  <a:srgbClr val="333333"/>
-                </a:solidFill>
-                <a:latin typeface="Calibri"/>
-              </a:rPr>
-              <a:t>–   Depurar sin depurador es una habilidad concreta y se ensena en cuatro movimientos.</a:t>
-            </a:r>
-          </a:p>
-          <a:p>
-            <a:pPr>
-              <a:spcAft>
-                <a:spcPts val="800"/>
-              </a:spcAft>
-            </a:pPr>
-            <a:r>
-              <a:rPr sz="2000" b="0" i="0">
-                <a:solidFill>
-                  <a:srgbClr val="333333"/>
-                </a:solidFill>
-                <a:latin typeface="Calibri"/>
-              </a:rPr>
-              <a:t>–   Primero, entender que error se esta leyendo, porque hay dos momentos distintos: el error de creacion, que es de sintaxis y lo devuelve el CREATE PROCEDURE senalando linea y posicion</a:t>
-            </a:r>
-          </a:p>
-          <a:p>
-            <a:pPr>
-              <a:spcAft>
-                <a:spcPts val="800"/>
-              </a:spcAft>
-            </a:pPr>
-            <a:r>
-              <a:rPr sz="2000" b="0" i="0">
-                <a:solidFill>
-                  <a:srgbClr val="333333"/>
-                </a:solidFill>
-                <a:latin typeface="Calibri"/>
-              </a:rPr>
-              <a:t>–   Y el error de ejecucion, que es el que aparece con el CALL y es donde salen los nombres de tabla o columna equivocados.</a:t>
-            </a:r>
-          </a:p>
-          <a:p>
-            <a:pPr>
-              <a:spcAft>
-                <a:spcPts val="800"/>
-              </a:spcAft>
-            </a:pPr>
-            <a:r>
-              <a:rPr sz="2000" b="0" i="0">
-                <a:solidFill>
-                  <a:srgbClr val="333333"/>
-                </a:solidFill>
-                <a:latin typeface="Calibri"/>
-              </a:rPr>
-              <a:t>–   A diferencia de Oracle no hay que consultar ninguna vista de errores ni verificar si el objeto quedo invalido: si el CREATE no protesto, el objeto esta creado; lo que no significa que funcione.</a:t>
-            </a:r>
-          </a:p>
-          <a:p>
-            <a:pPr>
-              <a:spcAft>
-                <a:spcPts val="800"/>
-              </a:spcAft>
-            </a:pPr>
-            <a:r>
-              <a:rPr sz="2000" b="0" i="0">
-                <a:solidFill>
-                  <a:srgbClr val="333333"/>
-                </a:solidFill>
-                <a:latin typeface="Calibri"/>
-              </a:rPr>
-              <a:t>–   Segundo, dejar trazas con RAISE NOTICE 'llegue al paso 2, v_activa = %', v_activa; que imprime en la salida de mensajes sin abortar nada, y es el equivalente directo de lo que en Oracle se hace con la salida de servidor.</a:t>
-            </a:r>
-          </a:p>
-        </p:txBody>
-      </p:sp>
-      <p:sp>
-        <p:nvSpPr>
-          <p:cNvPr id="6" name="TextBox 5"/>
+                <a:spcPts val="400"/>
+              </a:spcAft>
+            </a:pPr>
+            <a:r>
+              <a:rPr sz="1400" b="0" i="0">
+                <a:solidFill>
+                  <a:srgbClr val="FFFFFF"/>
+                </a:solidFill>
+                <a:latin typeface="Calibri"/>
+              </a:rPr>
+              <a:t>SELECT nombre, fn_precio_consulta(...)</a:t>
+            </a:r>
+          </a:p>
+          <a:p>
+            <a:pPr>
+              <a:spcAft>
+                <a:spcPts val="400"/>
+              </a:spcAft>
+            </a:pPr>
+            <a:r>
+              <a:rPr sz="1400" b="0" i="0">
+                <a:solidFill>
+                  <a:srgbClr val="FFFFFF"/>
+                </a:solidFill>
+                <a:latin typeface="Calibri"/>
+              </a:rPr>
+              <a:t/>
+            </a:r>
+          </a:p>
+          <a:p>
+            <a:pPr>
+              <a:spcAft>
+                <a:spcPts val="400"/>
+              </a:spcAft>
+            </a:pPr>
+            <a:r>
+              <a:rPr sz="1400" b="0" i="0">
+                <a:solidFill>
+                  <a:srgbClr val="FFFFFF"/>
+                </a:solidFill>
+                <a:latin typeface="Calibri"/>
+              </a:rPr>
+              <a:t>CALL sp_agendar_cita(3, 1, TIMESTAMP '2026-09-01 09:00')</a:t>
+            </a:r>
+          </a:p>
+        </p:txBody>
+      </p:sp>
+      <p:sp>
+        <p:nvSpPr>
+          <p:cNvPr id="9" name="TextBox 8"/>
           <p:cNvSpPr txBox="1"/>
           <p:nvPr/>
         </p:nvSpPr>
@@ -12937,7 +12684,7 @@
                 </a:solidFill>
                 <a:latin typeface="Calibri"/>
               </a:rPr>
-              <a:t>Depurar sin depurador: los cuatro movimientos, en PostgreSQL (2/2)</a:t>
+              <a:t>Depurar sin depurador: los cuatro movimientos, en PostgreSQL (1/2)</a:t>
             </a:r>
           </a:p>
         </p:txBody>
@@ -12976,7 +12723,7 @@
                 </a:solidFill>
                 <a:latin typeface="Calibri"/>
               </a:rPr>
-              <a:t>–   Tercero, aislar: tomar el SELECT activa INTO v_activa FROM mascota WHERE id_mascota = 3 y ejecutarlo suelto con el valor que fallo, para saber si el problema esta en la consulta o en la logica que la rodea.</a:t>
+              <a:t>–   Depurar sin depurador es una habilidad concreta y se ensena en cuatro movimientos.</a:t>
             </a:r>
           </a:p>
           <a:p>
@@ -12992,7 +12739,7 @@
                 </a:solidFill>
                 <a:latin typeface="Calibri"/>
               </a:rPr>
-              <a:t>–   Cuarto, probar con casos deliberados: un caso correcto y tres de error, cada uno en su bloque, escritos en resultado_prueba.</a:t>
+              <a:t>–   Primero, entender que error se esta leyendo, porque hay dos momentos distintos: el error de creacion, que es de sintaxis y lo devuelve el CREATE PROCEDURE senalando linea y posicion</a:t>
             </a:r>
           </a:p>
           <a:p>
@@ -13008,7 +12755,39 @@
                 </a:solidFill>
                 <a:latin typeface="Calibri"/>
               </a:rPr>
-              <a:t>–   Un procedimiento con solo la captura del caso feliz no demuestra manejo de errores, y el Parcial 1 lo pregunta de frente.</a:t>
+              <a:t>–   Y el error de ejecucion, que es el que aparece con el CALL y es donde salen los nombres de tabla o columna equivocados.</a:t>
+            </a:r>
+          </a:p>
+          <a:p>
+            <a:pPr>
+              <a:spcAft>
+                <a:spcPts val="800"/>
+              </a:spcAft>
+            </a:pPr>
+            <a:r>
+              <a:rPr sz="2000" b="0" i="0">
+                <a:solidFill>
+                  <a:srgbClr val="333333"/>
+                </a:solidFill>
+                <a:latin typeface="Calibri"/>
+              </a:rPr>
+              <a:t>–   A diferencia de Oracle no hay que consultar ninguna vista de errores ni verificar si el objeto quedo invalido: si el CREATE no protesto, el objeto esta creado; lo que no significa que funcione.</a:t>
+            </a:r>
+          </a:p>
+          <a:p>
+            <a:pPr>
+              <a:spcAft>
+                <a:spcPts val="800"/>
+              </a:spcAft>
+            </a:pPr>
+            <a:r>
+              <a:rPr sz="2000" b="0" i="0">
+                <a:solidFill>
+                  <a:srgbClr val="333333"/>
+                </a:solidFill>
+                <a:latin typeface="Calibri"/>
+              </a:rPr>
+              <a:t>–   Segundo, dejar trazas con RAISE NOTICE 'llegue al paso 2, v_activa = %', v_activa; que imprime en la salida de mensajes sin abortar nada, y es el equivalente directo de lo que en Oracle se hace con la salida de servidor.</a:t>
             </a:r>
           </a:p>
         </p:txBody>
@@ -13189,7 +12968,7 @@
                 </a:solidFill>
                 <a:latin typeface="Calibri"/>
               </a:rPr>
-              <a:t>El motor de hoy es PostgreSQL, y eso decide que se puede demostrar (1/2)</a:t>
+              <a:t>Depurar sin depurador: los cuatro movimientos, en PostgreSQL (2/2)</a:t>
             </a:r>
           </a:p>
         </p:txBody>
@@ -13228,7 +13007,7 @@
                 </a:solidFill>
                 <a:latin typeface="Calibri"/>
               </a:rPr>
-              <a:t>–   El motor de la clase es PostgreSQL, que corre dentro del navegador, y por lo tanto todo el codigo de hoy es PL/pgSQL.</a:t>
+              <a:t>–   Tercero, aislar: tomar el SELECT activa INTO v_activa FROM mascota WHERE id_mascota = 3 y ejecutarlo suelto con el valor que fallo, para saber si el problema esta en la consulta o en la logica que la rodea.</a:t>
             </a:r>
           </a:p>
           <a:p>
@@ -13244,7 +13023,7 @@
                 </a:solidFill>
                 <a:latin typeface="Calibri"/>
               </a:rPr>
-              <a:t>–   Oracle Live SQL sigue en el kit, pero cambia de papel y hay que decirlo sin ambiguedad: sirve como CONTRASTE de sintaxis para quien se vaya a encontrar Oracle en el trabajo.</a:t>
+              <a:t>–   Cuarto, probar con casos deliberados: un caso correcto y tres de error, cada uno en su bloque, escritos en resultado_prueba.</a:t>
             </a:r>
           </a:p>
           <a:p>
@@ -13260,7 +13039,7 @@
                 </a:solidFill>
                 <a:latin typeface="Calibri"/>
               </a:rPr>
-              <a:t>–   Vale un minuto de clase senalar las cuatro diferencias que mas cuestan —IS en lugar de AS, VARCHAR2 y NUMBER en lugar de TEXT e INT, RAISE_APPLICATION_ERROR en lugar de RAISE EXCEPTION</a:t>
+              <a:t>–   Un procedimiento con solo la captura del caso feliz no demuestra manejo de errores, y el Parcial 1 lo pregunta de frente.</a:t>
             </a:r>
           </a:p>
         </p:txBody>
@@ -13441,7 +13220,7 @@
                 </a:solidFill>
                 <a:latin typeface="Calibri"/>
               </a:rPr>
-              <a:t>El motor de hoy es PostgreSQL, y eso decide que se puede demostrar (2/2)</a:t>
+              <a:t>El motor de hoy es PostgreSQL, y eso decide que se puede demostrar (1/2)</a:t>
             </a:r>
           </a:p>
         </p:txBody>
@@ -13480,7 +13259,7 @@
                 </a:solidFill>
                 <a:latin typeface="Calibri"/>
               </a:rPr>
-              <a:t>–   Y la barra final que aqui es un error— y no vale mas, porque cada minuto invertido en sintaxis del otro motor es un minuto que el estudiante no dedica a lo que se le va a evaluar.</a:t>
+              <a:t>–   El motor de la clase es PostgreSQL, que corre dentro del navegador, y por lo tanto todo el codigo de hoy es PL/pgSQL.</a:t>
             </a:r>
           </a:p>
           <a:p>
@@ -13496,7 +13275,23 @@
                 </a:solidFill>
                 <a:latin typeface="Calibri"/>
               </a:rPr>
-              <a:t>–   La regla operativa del curso se mantiene: la fuente de verdad es el archivo sql en la carpeta del proyecto, nunca la pestana del navegador, y el estudiante va bien si reconstruye procedimiento, pruebas y datos pegando su propio guion.</a:t>
+              <a:t>–   Oracle Live SQL sigue en el kit, pero cambia de papel y hay que decirlo sin ambiguedad: sirve como CONTRASTE de sintaxis para quien se vaya a encontrar Oracle en el trabajo.</a:t>
+            </a:r>
+          </a:p>
+          <a:p>
+            <a:pPr>
+              <a:spcAft>
+                <a:spcPts val="800"/>
+              </a:spcAft>
+            </a:pPr>
+            <a:r>
+              <a:rPr sz="2000" b="0" i="0">
+                <a:solidFill>
+                  <a:srgbClr val="333333"/>
+                </a:solidFill>
+                <a:latin typeface="Calibri"/>
+              </a:rPr>
+              <a:t>–   Vale un minuto de clase senalar las cuatro diferencias que mas cuestan —IS en lugar de AS, VARCHAR2 y NUMBER en lugar de TEXT e INT, RAISE_APPLICATION_ERROR en lugar de RAISE EXCEPTION</a:t>
             </a:r>
           </a:p>
         </p:txBody>
@@ -13677,7 +13472,7 @@
                 </a:solidFill>
                 <a:latin typeface="Calibri"/>
               </a:rPr>
-              <a:t>El segundo procedimiento: sp_registrar_consulta y el EXISTS (1/2)</a:t>
+              <a:t>El motor de hoy es PostgreSQL, y eso decide que se puede demostrar (2/2)</a:t>
             </a:r>
           </a:p>
         </p:txBody>
@@ -13716,7 +13511,7 @@
                 </a:solidFill>
                 <a:latin typeface="Calibri"/>
               </a:rPr>
-              <a:t>–   Un segundo procedimiento no es relleno: es donde se practica una decision distinta. sp_registrar_consulta escribe en consulta</a:t>
+              <a:t>–   Y la barra final que aqui es un error— y no vale mas, porque cada minuto invertido en sintaxis del otro motor es un minuto que el estudiante no dedica a lo que se le va a evaluar.</a:t>
             </a:r>
           </a:p>
           <a:p>
@@ -13732,39 +13527,7 @@
                 </a:solidFill>
                 <a:latin typeface="Calibri"/>
               </a:rPr>
-              <a:t>–   Y la Clase 1 dejo esa tabla con id_cita NOT NULL UNIQUE, porque una consulta pertenece a una cita y una cita tiene a lo sumo una consulta.</a:t>
-            </a:r>
-          </a:p>
-          <a:p>
-            <a:pPr>
-              <a:spcAft>
-                <a:spcPts val="800"/>
-              </a:spcAft>
-            </a:pPr>
-            <a:r>
-              <a:rPr sz="2000" b="0" i="0">
-                <a:solidFill>
-                  <a:srgbClr val="333333"/>
-                </a:solidFill>
-                <a:latin typeface="Calibri"/>
-              </a:rPr>
-              <a:t>–   La pregunta interesante es entonces para que escribir la validacion, si el motor ya defiende el dato.</a:t>
-            </a:r>
-          </a:p>
-          <a:p>
-            <a:pPr>
-              <a:spcAft>
-                <a:spcPts val="800"/>
-              </a:spcAft>
-            </a:pPr>
-            <a:r>
-              <a:rPr sz="2000" b="0" i="0">
-                <a:solidFill>
-                  <a:srgbClr val="333333"/>
-                </a:solidFill>
-                <a:latin typeface="Calibri"/>
-              </a:rPr>
-              <a:t>–   La primera es el mensaje: la restriccion produce un error tecnico que menciona el nombre del indice, y un IF EXISTS () THEN RAISE EXCEPTION 'ERROR: la cita % ya tiene consulta registrada', p_id_cita; produce el mensaje que la recepcionista puede entender.</a:t>
+              <a:t>–   La regla operativa del curso se mantiene: la fuente de verdad es el archivo sql en la carpeta del proyecto, nunca la pestana del navegador, y el estudiante va bien si reconstruye procedimiento, pruebas y datos pegando su propio guion.</a:t>
             </a:r>
           </a:p>
         </p:txBody>
@@ -13945,7 +13708,7 @@
                 </a:solidFill>
                 <a:latin typeface="Calibri"/>
               </a:rPr>
-              <a:t>El segundo procedimiento: sp_registrar_consulta y el EXISTS (2/2)</a:t>
+              <a:t>El segundo procedimiento: sp_registrar_consulta y el EXISTS (1/2)</a:t>
             </a:r>
           </a:p>
         </p:txBody>
@@ -13984,7 +13747,7 @@
                 </a:solidFill>
                 <a:latin typeface="Calibri"/>
               </a:rPr>
-              <a:t>–   La segunda es que el procedimiento puede validar lo que la restriccion no ve: que la cita exista, y que su estado no sea 'CANCELADA', porque no se documenta la atencion de una cita que se cancelo.</a:t>
+              <a:t>–   Un segundo procedimiento no es relleno: es donde se practica una decision distinta. sp_registrar_consulta escribe en consulta</a:t>
             </a:r>
           </a:p>
           <a:p>
@@ -14000,7 +13763,39 @@
                 </a:solidFill>
                 <a:latin typeface="Calibri"/>
               </a:rPr>
-              <a:t>–   La restriccion es la ultima linea de defensa y sigue actuando cuando alguien entra por fuera; el procedimiento mejora el mensaje, no reemplaza la garantia.</a:t>
+              <a:t>–   Y la Clase 1 dejo esa tabla con id_cita NOT NULL UNIQUE, porque una consulta pertenece a una cita y una cita tiene a lo sumo una consulta.</a:t>
+            </a:r>
+          </a:p>
+          <a:p>
+            <a:pPr>
+              <a:spcAft>
+                <a:spcPts val="800"/>
+              </a:spcAft>
+            </a:pPr>
+            <a:r>
+              <a:rPr sz="2000" b="0" i="0">
+                <a:solidFill>
+                  <a:srgbClr val="333333"/>
+                </a:solidFill>
+                <a:latin typeface="Calibri"/>
+              </a:rPr>
+              <a:t>–   La pregunta interesante es entonces para que escribir la validacion, si el motor ya defiende el dato.</a:t>
+            </a:r>
+          </a:p>
+          <a:p>
+            <a:pPr>
+              <a:spcAft>
+                <a:spcPts val="800"/>
+              </a:spcAft>
+            </a:pPr>
+            <a:r>
+              <a:rPr sz="2000" b="0" i="0">
+                <a:solidFill>
+                  <a:srgbClr val="333333"/>
+                </a:solidFill>
+                <a:latin typeface="Calibri"/>
+              </a:rPr>
+              <a:t>–   La primera es el mensaje: la restriccion produce un error tecnico que menciona el nombre del indice, y un IF EXISTS () THEN RAISE EXCEPTION 'ERROR: la cita % ya tiene consulta registrada', p_id_cita; produce el mensaje que la recepcionista puede entender.</a:t>
             </a:r>
           </a:p>
         </p:txBody>
@@ -14181,141 +13976,21 @@
                 </a:solidFill>
                 <a:latin typeface="Calibri"/>
               </a:rPr>
-              <a:t>El segundo procedimiento:... — sintaxis</a:t>
-            </a:r>
-          </a:p>
-        </p:txBody>
-      </p:sp>
-      <p:sp>
-        <p:nvSpPr>
-          <p:cNvPr id="5" name="Rounded Rectangle 4"/>
-          <p:cNvSpPr/>
-          <p:nvPr/>
-        </p:nvSpPr>
-        <p:spPr>
-          <a:xfrm>
-            <a:off x="457200" y="1261872"/>
-            <a:ext cx="11277295" cy="5093208"/>
-          </a:xfrm>
-          <a:prstGeom prst="roundRect">
-            <a:avLst>
-              <a:gd name="adj" fmla="val 12000"/>
-            </a:avLst>
-          </a:prstGeom>
-          <a:solidFill>
-            <a:srgbClr val="1E2A38"/>
-          </a:solidFill>
-          <a:ln>
-            <a:noFill/>
-          </a:ln>
-        </p:spPr>
-        <p:style>
-          <a:lnRef idx="1">
-            <a:schemeClr val="accent1"/>
-          </a:lnRef>
-          <a:fillRef idx="3">
-            <a:schemeClr val="accent1"/>
-          </a:fillRef>
-          <a:effectRef idx="2">
-            <a:schemeClr val="accent1"/>
-          </a:effectRef>
-          <a:fontRef idx="minor">
-            <a:schemeClr val="lt1"/>
-          </a:fontRef>
-        </p:style>
-        <p:txBody>
-          <a:bodyPr rtlCol="0" anchor="ctr"/>
-          <a:lstStyle/>
-          <a:p>
-            <a:pPr algn="ctr"/>
-          </a:p>
-        </p:txBody>
-      </p:sp>
-      <p:sp>
-        <p:nvSpPr>
-          <p:cNvPr id="6" name="Rectangle 5"/>
-          <p:cNvSpPr/>
-          <p:nvPr/>
-        </p:nvSpPr>
-        <p:spPr>
-          <a:xfrm>
-            <a:off x="457200" y="1261872"/>
-            <a:ext cx="11277295" cy="320040"/>
-          </a:xfrm>
-          <a:prstGeom prst="rect">
-            <a:avLst/>
-          </a:prstGeom>
-          <a:solidFill>
-            <a:srgbClr val="095292"/>
-          </a:solidFill>
-          <a:ln>
-            <a:noFill/>
-          </a:ln>
-        </p:spPr>
-        <p:style>
-          <a:lnRef idx="1">
-            <a:schemeClr val="accent1"/>
-          </a:lnRef>
-          <a:fillRef idx="3">
-            <a:schemeClr val="accent1"/>
-          </a:fillRef>
-          <a:effectRef idx="2">
-            <a:schemeClr val="accent1"/>
-          </a:effectRef>
-          <a:fontRef idx="minor">
-            <a:schemeClr val="lt1"/>
-          </a:fontRef>
-        </p:style>
-        <p:txBody>
-          <a:bodyPr rtlCol="0" anchor="ctr"/>
-          <a:lstStyle/>
-          <a:p>
-            <a:pPr algn="ctr"/>
-          </a:p>
-        </p:txBody>
-      </p:sp>
-      <p:sp>
-        <p:nvSpPr>
-          <p:cNvPr id="7" name="TextBox 6"/>
+              <a:t>El segundo procedimiento: sp_registrar_consulta y el EXISTS (2/2)</a:t>
+            </a:r>
+          </a:p>
+        </p:txBody>
+      </p:sp>
+      <p:sp>
+        <p:nvSpPr>
+          <p:cNvPr id="5" name="TextBox 4"/>
           <p:cNvSpPr txBox="1"/>
           <p:nvPr/>
         </p:nvSpPr>
         <p:spPr>
           <a:xfrm>
-            <a:off x="685800" y="1307592"/>
-            <a:ext cx="10820095" cy="256032"/>
-          </a:xfrm>
-          <a:prstGeom prst="rect">
-            <a:avLst/>
-          </a:prstGeom>
-          <a:noFill/>
-        </p:spPr>
-        <p:txBody>
-          <a:bodyPr wrap="square" anchor="ctr"/>
-          <a:lstStyle/>
-          <a:p>
-            <a:r>
-              <a:rPr sz="1000" b="1" i="0">
-                <a:solidFill>
-                  <a:srgbClr val="269CCB"/>
-                </a:solidFill>
-                <a:latin typeface="Calibri"/>
-              </a:rPr>
-              <a:t>● ● ●</a:t>
-            </a:r>
-          </a:p>
-        </p:txBody>
-      </p:sp>
-      <p:sp>
-        <p:nvSpPr>
-          <p:cNvPr id="8" name="TextBox 7"/>
-          <p:cNvSpPr txBox="1"/>
-          <p:nvPr/>
-        </p:nvSpPr>
-        <p:spPr>
-          <a:xfrm>
-            <a:off x="777240" y="1719072"/>
-            <a:ext cx="10637215" cy="4453128"/>
+            <a:off x="457200" y="1170432"/>
+            <a:ext cx="11277295" cy="5230368"/>
           </a:xfrm>
           <a:prstGeom prst="rect">
             <a:avLst/>
@@ -14330,56 +14005,56 @@
           <a:p>
             <a:pPr>
               <a:spcAft>
-                <a:spcPts val="400"/>
-              </a:spcAft>
-            </a:pPr>
-            <a:r>
-              <a:rPr sz="1400" b="0" i="0">
-                <a:solidFill>
-                  <a:srgbClr val="FFFFFF"/>
-                </a:solidFill>
-                <a:latin typeface="Calibri"/>
-              </a:rPr>
-              <a:t>SELECT 1</a:t>
-            </a:r>
-          </a:p>
-          <a:p>
-            <a:pPr>
-              <a:spcAft>
-                <a:spcPts val="400"/>
-              </a:spcAft>
-            </a:pPr>
-            <a:r>
-              <a:rPr sz="1400" b="0" i="0">
-                <a:solidFill>
-                  <a:srgbClr val="FFFFFF"/>
-                </a:solidFill>
-                <a:latin typeface="Calibri"/>
-              </a:rPr>
-              <a:t>FROM consulta</a:t>
-            </a:r>
-          </a:p>
-          <a:p>
-            <a:pPr>
-              <a:spcAft>
-                <a:spcPts val="400"/>
-              </a:spcAft>
-            </a:pPr>
-            <a:r>
-              <a:rPr sz="1400" b="0" i="0">
-                <a:solidFill>
-                  <a:srgbClr val="FFFFFF"/>
-                </a:solidFill>
-                <a:latin typeface="Calibri"/>
-              </a:rPr>
-              <a:t>WHERE id_cita = p_id_cita</a:t>
-            </a:r>
-          </a:p>
-        </p:txBody>
-      </p:sp>
-      <p:sp>
-        <p:nvSpPr>
-          <p:cNvPr id="9" name="TextBox 8"/>
+                <a:spcPts val="800"/>
+              </a:spcAft>
+            </a:pPr>
+            <a:r>
+              <a:rPr sz="2000" b="0" i="0">
+                <a:solidFill>
+                  <a:srgbClr val="333333"/>
+                </a:solidFill>
+                <a:latin typeface="Calibri"/>
+              </a:rPr>
+              <a:t>–   La segunda es que el procedimiento puede validar lo que la restriccion no ve: que la cita exista, y que su estado no sea 'CANCELADA', porque no se documenta la atencion de una cita que se cancelo.</a:t>
+            </a:r>
+          </a:p>
+          <a:p>
+            <a:pPr>
+              <a:spcAft>
+                <a:spcPts val="800"/>
+              </a:spcAft>
+            </a:pPr>
+            <a:r>
+              <a:rPr sz="2000" b="0" i="0">
+                <a:solidFill>
+                  <a:srgbClr val="333333"/>
+                </a:solidFill>
+                <a:latin typeface="Calibri"/>
+              </a:rPr>
+              <a:t>–   La restriccion es la ultima linea de defensa y sigue actuando cuando alguien entra por fuera; el procedimiento mejora el mensaje, no reemplaza la garantia.</a:t>
+            </a:r>
+          </a:p>
+          <a:p>
+            <a:pPr>
+              <a:spcAft>
+                <a:spcPts val="800"/>
+              </a:spcAft>
+            </a:pPr>
+            <a:r>
+              <a:rPr sz="2000" b="0" i="0">
+                <a:solidFill>
+                  <a:srgbClr val="333333"/>
+                </a:solidFill>
+                <a:latin typeface="Calibri"/>
+              </a:rPr>
+              <a:t>–   El orden importa: comprobar con IF EXISTS () antes de insertar permite responder con un mensaje de negocio claro; dejar que choque contra el UNIQUE produce un error del motor que la aplicacion no sabe traducir.</a:t>
+            </a:r>
+          </a:p>
+        </p:txBody>
+      </p:sp>
+      <p:sp>
+        <p:nvSpPr>
+          <p:cNvPr id="6" name="TextBox 5"/>
           <p:cNvSpPr txBox="1"/>
           <p:nvPr/>
         </p:nvSpPr>
@@ -14553,21 +14228,141 @@
                 </a:solidFill>
                 <a:latin typeface="Calibri"/>
               </a:rPr>
-              <a:t>Como amarra con las clases vecinas y con el PI (1/2)</a:t>
-            </a:r>
-          </a:p>
-        </p:txBody>
-      </p:sp>
-      <p:sp>
-        <p:nvSpPr>
-          <p:cNvPr id="5" name="TextBox 4"/>
+              <a:t>El segundo procedimiento:... — sintaxis</a:t>
+            </a:r>
+          </a:p>
+        </p:txBody>
+      </p:sp>
+      <p:sp>
+        <p:nvSpPr>
+          <p:cNvPr id="5" name="Rounded Rectangle 4"/>
+          <p:cNvSpPr/>
+          <p:nvPr/>
+        </p:nvSpPr>
+        <p:spPr>
+          <a:xfrm>
+            <a:off x="457200" y="1261872"/>
+            <a:ext cx="11277295" cy="5093208"/>
+          </a:xfrm>
+          <a:prstGeom prst="roundRect">
+            <a:avLst>
+              <a:gd name="adj" fmla="val 12000"/>
+            </a:avLst>
+          </a:prstGeom>
+          <a:solidFill>
+            <a:srgbClr val="1E2A38"/>
+          </a:solidFill>
+          <a:ln>
+            <a:noFill/>
+          </a:ln>
+        </p:spPr>
+        <p:style>
+          <a:lnRef idx="1">
+            <a:schemeClr val="accent1"/>
+          </a:lnRef>
+          <a:fillRef idx="3">
+            <a:schemeClr val="accent1"/>
+          </a:fillRef>
+          <a:effectRef idx="2">
+            <a:schemeClr val="accent1"/>
+          </a:effectRef>
+          <a:fontRef idx="minor">
+            <a:schemeClr val="lt1"/>
+          </a:fontRef>
+        </p:style>
+        <p:txBody>
+          <a:bodyPr rtlCol="0" anchor="ctr"/>
+          <a:lstStyle/>
+          <a:p>
+            <a:pPr algn="ctr"/>
+          </a:p>
+        </p:txBody>
+      </p:sp>
+      <p:sp>
+        <p:nvSpPr>
+          <p:cNvPr id="6" name="Rectangle 5"/>
+          <p:cNvSpPr/>
+          <p:nvPr/>
+        </p:nvSpPr>
+        <p:spPr>
+          <a:xfrm>
+            <a:off x="457200" y="1261872"/>
+            <a:ext cx="11277295" cy="320040"/>
+          </a:xfrm>
+          <a:prstGeom prst="rect">
+            <a:avLst/>
+          </a:prstGeom>
+          <a:solidFill>
+            <a:srgbClr val="095292"/>
+          </a:solidFill>
+          <a:ln>
+            <a:noFill/>
+          </a:ln>
+        </p:spPr>
+        <p:style>
+          <a:lnRef idx="1">
+            <a:schemeClr val="accent1"/>
+          </a:lnRef>
+          <a:fillRef idx="3">
+            <a:schemeClr val="accent1"/>
+          </a:fillRef>
+          <a:effectRef idx="2">
+            <a:schemeClr val="accent1"/>
+          </a:effectRef>
+          <a:fontRef idx="minor">
+            <a:schemeClr val="lt1"/>
+          </a:fontRef>
+        </p:style>
+        <p:txBody>
+          <a:bodyPr rtlCol="0" anchor="ctr"/>
+          <a:lstStyle/>
+          <a:p>
+            <a:pPr algn="ctr"/>
+          </a:p>
+        </p:txBody>
+      </p:sp>
+      <p:sp>
+        <p:nvSpPr>
+          <p:cNvPr id="7" name="TextBox 6"/>
           <p:cNvSpPr txBox="1"/>
           <p:nvPr/>
         </p:nvSpPr>
         <p:spPr>
           <a:xfrm>
-            <a:off x="457200" y="1170432"/>
-            <a:ext cx="11277295" cy="5230368"/>
+            <a:off x="685800" y="1307592"/>
+            <a:ext cx="10820095" cy="256032"/>
+          </a:xfrm>
+          <a:prstGeom prst="rect">
+            <a:avLst/>
+          </a:prstGeom>
+          <a:noFill/>
+        </p:spPr>
+        <p:txBody>
+          <a:bodyPr wrap="square" anchor="ctr"/>
+          <a:lstStyle/>
+          <a:p>
+            <a:r>
+              <a:rPr sz="1000" b="1" i="0">
+                <a:solidFill>
+                  <a:srgbClr val="269CCB"/>
+                </a:solidFill>
+                <a:latin typeface="Calibri"/>
+              </a:rPr>
+              <a:t>● ● ●</a:t>
+            </a:r>
+          </a:p>
+        </p:txBody>
+      </p:sp>
+      <p:sp>
+        <p:nvSpPr>
+          <p:cNvPr id="8" name="TextBox 7"/>
+          <p:cNvSpPr txBox="1"/>
+          <p:nvPr/>
+        </p:nvSpPr>
+        <p:spPr>
+          <a:xfrm>
+            <a:off x="777240" y="1719072"/>
+            <a:ext cx="10637215" cy="4453128"/>
           </a:xfrm>
           <a:prstGeom prst="rect">
             <a:avLst/>
@@ -14582,56 +14377,120 @@
           <a:p>
             <a:pPr>
               <a:spcAft>
-                <a:spcPts val="800"/>
-              </a:spcAft>
-            </a:pPr>
-            <a:r>
-              <a:rPr sz="2000" b="0" i="0">
-                <a:solidFill>
-                  <a:srgbClr val="333333"/>
-                </a:solidFill>
-                <a:latin typeface="Calibri"/>
-              </a:rPr>
-              <a:t>–   Lo de hoy no es una isla.</a:t>
-            </a:r>
-          </a:p>
-          <a:p>
-            <a:pPr>
-              <a:spcAft>
-                <a:spcPts val="800"/>
-              </a:spcAft>
-            </a:pPr>
-            <a:r>
-              <a:rPr sz="2000" b="0" i="0">
-                <a:solidFill>
-                  <a:srgbClr val="333333"/>
-                </a:solidFill>
-                <a:latin typeface="Calibri"/>
-              </a:rPr>
-              <a:t>–   La Clase 1 dejo el esquema, la baja logica con activa igual a 'S' o 'N' y la restriccion de unicidad sobre la franja del veterinario, que son justamente las tres cosas que las validaciones de hoy usan.</a:t>
-            </a:r>
-          </a:p>
-          <a:p>
-            <a:pPr>
-              <a:spcAft>
-                <a:spcPts val="800"/>
-              </a:spcAft>
-            </a:pPr>
-            <a:r>
-              <a:rPr sz="2000" b="0" i="0">
-                <a:solidFill>
-                  <a:srgbClr val="333333"/>
-                </a:solidFill>
-                <a:latin typeface="Calibri"/>
-              </a:rPr>
-              <a:t>–   La Clase 2 dejo los cuatro roles y hoy aparece el patron mas fino de todos: no dar INSERT sobre cita al rol recepcion, sino EXECUTE sobre sp_agendar_cita, de modo que el usuario solo pueda escribir a traves de la regla de negocio.</a:t>
-            </a:r>
-          </a:p>
-        </p:txBody>
-      </p:sp>
-      <p:sp>
-        <p:nvSpPr>
-          <p:cNvPr id="6" name="TextBox 5"/>
+                <a:spcPts val="400"/>
+              </a:spcAft>
+            </a:pPr>
+            <a:r>
+              <a:rPr sz="1400" b="0" i="0">
+                <a:solidFill>
+                  <a:srgbClr val="FFFFFF"/>
+                </a:solidFill>
+                <a:latin typeface="Calibri"/>
+              </a:rPr>
+              <a:t>SELECT 1</a:t>
+            </a:r>
+          </a:p>
+          <a:p>
+            <a:pPr>
+              <a:spcAft>
+                <a:spcPts val="400"/>
+              </a:spcAft>
+            </a:pPr>
+            <a:r>
+              <a:rPr sz="1400" b="0" i="0">
+                <a:solidFill>
+                  <a:srgbClr val="FFFFFF"/>
+                </a:solidFill>
+                <a:latin typeface="Calibri"/>
+              </a:rPr>
+              <a:t>FROM consulta</a:t>
+            </a:r>
+          </a:p>
+          <a:p>
+            <a:pPr>
+              <a:spcAft>
+                <a:spcPts val="400"/>
+              </a:spcAft>
+            </a:pPr>
+            <a:r>
+              <a:rPr sz="1400" b="0" i="0">
+                <a:solidFill>
+                  <a:srgbClr val="FFFFFF"/>
+                </a:solidFill>
+                <a:latin typeface="Calibri"/>
+              </a:rPr>
+              <a:t>WHERE id_cita = p_id_cita</a:t>
+            </a:r>
+          </a:p>
+          <a:p>
+            <a:pPr>
+              <a:spcAft>
+                <a:spcPts val="400"/>
+              </a:spcAft>
+            </a:pPr>
+            <a:r>
+              <a:rPr sz="1400" b="0" i="0">
+                <a:solidFill>
+                  <a:srgbClr val="FFFFFF"/>
+                </a:solidFill>
+                <a:latin typeface="Calibri"/>
+              </a:rPr>
+              <a:t/>
+            </a:r>
+          </a:p>
+          <a:p>
+            <a:pPr>
+              <a:spcAft>
+                <a:spcPts val="400"/>
+              </a:spcAft>
+            </a:pPr>
+            <a:r>
+              <a:rPr sz="1400" b="0" i="0">
+                <a:solidFill>
+                  <a:srgbClr val="FFFFFF"/>
+                </a:solidFill>
+                <a:latin typeface="Calibri"/>
+              </a:rPr>
+              <a:t>SELECT 1</a:t>
+            </a:r>
+          </a:p>
+          <a:p>
+            <a:pPr>
+              <a:spcAft>
+                <a:spcPts val="400"/>
+              </a:spcAft>
+            </a:pPr>
+            <a:r>
+              <a:rPr sz="1400" b="0" i="0">
+                <a:solidFill>
+                  <a:srgbClr val="FFFFFF"/>
+                </a:solidFill>
+                <a:latin typeface="Calibri"/>
+              </a:rPr>
+              <a:t>FROM consulta</a:t>
+            </a:r>
+          </a:p>
+          <a:p>
+            <a:pPr>
+              <a:spcAft>
+                <a:spcPts val="400"/>
+              </a:spcAft>
+            </a:pPr>
+            <a:r>
+              <a:rPr sz="1400" b="0" i="0">
+                <a:solidFill>
+                  <a:srgbClr val="FFFFFF"/>
+                </a:solidFill>
+                <a:latin typeface="Calibri"/>
+              </a:rPr>
+              <a:t>WHERE id_cita = p_id_cita</a:t>
+            </a:r>
+          </a:p>
+        </p:txBody>
+      </p:sp>
+      <p:sp>
+        <p:nvSpPr>
+          <p:cNvPr id="9" name="TextBox 8"/>
           <p:cNvSpPr txBox="1"/>
           <p:nvPr/>
         </p:nvSpPr>
@@ -14805,7 +14664,7 @@
                 </a:solidFill>
                 <a:latin typeface="Calibri"/>
               </a:rPr>
-              <a:t>Como amarra con las clases vecinas y con el PI (2/2)</a:t>
+              <a:t>Como amarra con las clases vecinas y con el PI</a:t>
             </a:r>
           </a:p>
         </p:txBody>
@@ -14831,6 +14690,54 @@
             <a:spAutoFit/>
           </a:bodyPr>
           <a:lstStyle/>
+          <a:p>
+            <a:pPr>
+              <a:spcAft>
+                <a:spcPts val="800"/>
+              </a:spcAft>
+            </a:pPr>
+            <a:r>
+              <a:rPr sz="2000" b="0" i="0">
+                <a:solidFill>
+                  <a:srgbClr val="333333"/>
+                </a:solidFill>
+                <a:latin typeface="Calibri"/>
+              </a:rPr>
+              <a:t>–   Lo de hoy no es una isla.</a:t>
+            </a:r>
+          </a:p>
+          <a:p>
+            <a:pPr>
+              <a:spcAft>
+                <a:spcPts val="800"/>
+              </a:spcAft>
+            </a:pPr>
+            <a:r>
+              <a:rPr sz="2000" b="0" i="0">
+                <a:solidFill>
+                  <a:srgbClr val="333333"/>
+                </a:solidFill>
+                <a:latin typeface="Calibri"/>
+              </a:rPr>
+              <a:t>–   La Clase 1 dejo el esquema, la baja logica con activa igual a 'S' o 'N' y la restriccion de unicidad sobre la franja del veterinario, que son justamente las tres cosas que las validaciones de hoy usan.</a:t>
+            </a:r>
+          </a:p>
+          <a:p>
+            <a:pPr>
+              <a:spcAft>
+                <a:spcPts val="800"/>
+              </a:spcAft>
+            </a:pPr>
+            <a:r>
+              <a:rPr sz="2000" b="0" i="0">
+                <a:solidFill>
+                  <a:srgbClr val="333333"/>
+                </a:solidFill>
+                <a:latin typeface="Calibri"/>
+              </a:rPr>
+              <a:t>–   La Clase 2 dejo los cuatro roles y hoy aparece el patron mas fino de todos: no dar INSERT sobre cita al rol recepcion, sino EXECUTE sobre sp_agendar_cita, de modo que el usuario solo pueda escribir a traves de la regla de negocio.</a:t>
+            </a:r>
+          </a:p>
           <a:p>
             <a:pPr>
               <a:spcAft>
@@ -16159,7 +16066,7 @@
         <p:spPr>
           <a:xfrm>
             <a:off x="457200" y="1261872"/>
-            <a:ext cx="11277295" cy="5093208"/>
+            <a:ext cx="11277295" cy="4773168"/>
           </a:xfrm>
           <a:prstGeom prst="roundRect">
             <a:avLst>
@@ -16279,7 +16186,7 @@
         <p:spPr>
           <a:xfrm>
             <a:off x="777240" y="1719072"/>
-            <a:ext cx="10637215" cy="4453128"/>
+            <a:ext cx="10637215" cy="4133087"/>
           </a:xfrm>
           <a:prstGeom prst="rect">
             <a:avLst/>
@@ -16294,11 +16201,11 @@
           <a:p>
             <a:pPr>
               <a:spcAft>
-                <a:spcPts val="342"/>
-              </a:spcAft>
-            </a:pPr>
-            <a:r>
-              <a:rPr sz="1200" b="0" i="0">
+                <a:spcPts val="314"/>
+              </a:spcAft>
+            </a:pPr>
+            <a:r>
+              <a:rPr sz="1100" b="0" i="0">
                 <a:solidFill>
                   <a:srgbClr val="FFFFFF"/>
                 </a:solidFill>
@@ -16310,11 +16217,11 @@
           <a:p>
             <a:pPr>
               <a:spcAft>
-                <a:spcPts val="342"/>
-              </a:spcAft>
-            </a:pPr>
-            <a:r>
-              <a:rPr sz="1200" b="0" i="0">
+                <a:spcPts val="314"/>
+              </a:spcAft>
+            </a:pPr>
+            <a:r>
+              <a:rPr sz="1100" b="0" i="0">
                 <a:solidFill>
                   <a:srgbClr val="FFFFFF"/>
                 </a:solidFill>
@@ -16326,11 +16233,11 @@
           <a:p>
             <a:pPr>
               <a:spcAft>
-                <a:spcPts val="342"/>
-              </a:spcAft>
-            </a:pPr>
-            <a:r>
-              <a:rPr sz="1200" b="0" i="0">
+                <a:spcPts val="314"/>
+              </a:spcAft>
+            </a:pPr>
+            <a:r>
+              <a:rPr sz="1100" b="0" i="0">
                 <a:solidFill>
                   <a:srgbClr val="FFFFFF"/>
                 </a:solidFill>
@@ -16342,11 +16249,11 @@
           <a:p>
             <a:pPr>
               <a:spcAft>
-                <a:spcPts val="342"/>
-              </a:spcAft>
-            </a:pPr>
-            <a:r>
-              <a:rPr sz="1200" b="0" i="0">
+                <a:spcPts val="314"/>
+              </a:spcAft>
+            </a:pPr>
+            <a:r>
+              <a:rPr sz="1100" b="0" i="0">
                 <a:solidFill>
                   <a:srgbClr val="FFFFFF"/>
                 </a:solidFill>
@@ -16358,11 +16265,11 @@
           <a:p>
             <a:pPr>
               <a:spcAft>
-                <a:spcPts val="342"/>
-              </a:spcAft>
-            </a:pPr>
-            <a:r>
-              <a:rPr sz="1200" b="0" i="0">
+                <a:spcPts val="314"/>
+              </a:spcAft>
+            </a:pPr>
+            <a:r>
+              <a:rPr sz="1100" b="0" i="0">
                 <a:solidFill>
                   <a:srgbClr val="FFFFFF"/>
                 </a:solidFill>
@@ -16374,11 +16281,11 @@
           <a:p>
             <a:pPr>
               <a:spcAft>
-                <a:spcPts val="342"/>
-              </a:spcAft>
-            </a:pPr>
-            <a:r>
-              <a:rPr sz="1200" b="0" i="0">
+                <a:spcPts val="314"/>
+              </a:spcAft>
+            </a:pPr>
+            <a:r>
+              <a:rPr sz="1100" b="0" i="0">
                 <a:solidFill>
                   <a:srgbClr val="FFFFFF"/>
                 </a:solidFill>
@@ -16390,11 +16297,11 @@
           <a:p>
             <a:pPr>
               <a:spcAft>
-                <a:spcPts val="342"/>
-              </a:spcAft>
-            </a:pPr>
-            <a:r>
-              <a:rPr sz="1200" b="0" i="0">
+                <a:spcPts val="314"/>
+              </a:spcAft>
+            </a:pPr>
+            <a:r>
+              <a:rPr sz="1100" b="0" i="0">
                 <a:solidFill>
                   <a:srgbClr val="FFFFFF"/>
                 </a:solidFill>
@@ -16406,11 +16313,11 @@
           <a:p>
             <a:pPr>
               <a:spcAft>
-                <a:spcPts val="342"/>
-              </a:spcAft>
-            </a:pPr>
-            <a:r>
-              <a:rPr sz="1200" b="0" i="0">
+                <a:spcPts val="314"/>
+              </a:spcAft>
+            </a:pPr>
+            <a:r>
+              <a:rPr sz="1100" b="0" i="0">
                 <a:solidFill>
                   <a:srgbClr val="FFFFFF"/>
                 </a:solidFill>
@@ -16422,11 +16329,11 @@
           <a:p>
             <a:pPr>
               <a:spcAft>
-                <a:spcPts val="342"/>
-              </a:spcAft>
-            </a:pPr>
-            <a:r>
-              <a:rPr sz="1200" b="0" i="0">
+                <a:spcPts val="314"/>
+              </a:spcAft>
+            </a:pPr>
+            <a:r>
+              <a:rPr sz="1100" b="0" i="0">
                 <a:solidFill>
                   <a:srgbClr val="FFFFFF"/>
                 </a:solidFill>
@@ -16438,11 +16345,11 @@
           <a:p>
             <a:pPr>
               <a:spcAft>
-                <a:spcPts val="342"/>
-              </a:spcAft>
-            </a:pPr>
-            <a:r>
-              <a:rPr sz="1200" b="0" i="0">
+                <a:spcPts val="314"/>
+              </a:spcAft>
+            </a:pPr>
+            <a:r>
+              <a:rPr sz="1100" b="0" i="0">
                 <a:solidFill>
                   <a:srgbClr val="FFFFFF"/>
                 </a:solidFill>
@@ -16454,11 +16361,11 @@
           <a:p>
             <a:pPr>
               <a:spcAft>
-                <a:spcPts val="342"/>
-              </a:spcAft>
-            </a:pPr>
-            <a:r>
-              <a:rPr sz="1200" b="0" i="0">
+                <a:spcPts val="314"/>
+              </a:spcAft>
+            </a:pPr>
+            <a:r>
+              <a:rPr sz="1100" b="0" i="0">
                 <a:solidFill>
                   <a:srgbClr val="FFFFFF"/>
                 </a:solidFill>
@@ -16470,11 +16377,11 @@
           <a:p>
             <a:pPr>
               <a:spcAft>
-                <a:spcPts val="342"/>
-              </a:spcAft>
-            </a:pPr>
-            <a:r>
-              <a:rPr sz="1200" b="0" i="0">
+                <a:spcPts val="314"/>
+              </a:spcAft>
+            </a:pPr>
+            <a:r>
+              <a:rPr sz="1100" b="0" i="0">
                 <a:solidFill>
                   <a:srgbClr val="FFFFFF"/>
                 </a:solidFill>
@@ -16486,11 +16393,11 @@
           <a:p>
             <a:pPr>
               <a:spcAft>
-                <a:spcPts val="342"/>
-              </a:spcAft>
-            </a:pPr>
-            <a:r>
-              <a:rPr sz="1200" b="0" i="0">
+                <a:spcPts val="314"/>
+              </a:spcAft>
+            </a:pPr>
+            <a:r>
+              <a:rPr sz="1100" b="0" i="0">
                 <a:solidFill>
                   <a:srgbClr val="FFFFFF"/>
                 </a:solidFill>
@@ -16502,11 +16409,11 @@
           <a:p>
             <a:pPr>
               <a:spcAft>
-                <a:spcPts val="342"/>
-              </a:spcAft>
-            </a:pPr>
-            <a:r>
-              <a:rPr sz="1200" b="0" i="0">
+                <a:spcPts val="314"/>
+              </a:spcAft>
+            </a:pPr>
+            <a:r>
+              <a:rPr sz="1100" b="0" i="0">
                 <a:solidFill>
                   <a:srgbClr val="FFFFFF"/>
                 </a:solidFill>
@@ -16518,11 +16425,11 @@
           <a:p>
             <a:pPr>
               <a:spcAft>
-                <a:spcPts val="342"/>
-              </a:spcAft>
-            </a:pPr>
-            <a:r>
-              <a:rPr sz="1200" b="0" i="0">
+                <a:spcPts val="314"/>
+              </a:spcAft>
+            </a:pPr>
+            <a:r>
+              <a:rPr sz="1100" b="0" i="0">
                 <a:solidFill>
                   <a:srgbClr val="FFFFFF"/>
                 </a:solidFill>
@@ -16534,11 +16441,11 @@
           <a:p>
             <a:pPr>
               <a:spcAft>
-                <a:spcPts val="342"/>
-              </a:spcAft>
-            </a:pPr>
-            <a:r>
-              <a:rPr sz="1200" b="0" i="0">
+                <a:spcPts val="314"/>
+              </a:spcAft>
+            </a:pPr>
+            <a:r>
+              <a:rPr sz="1100" b="0" i="0">
                 <a:solidFill>
                   <a:srgbClr val="FFFFFF"/>
                 </a:solidFill>
@@ -16550,11 +16457,11 @@
           <a:p>
             <a:pPr>
               <a:spcAft>
-                <a:spcPts val="342"/>
-              </a:spcAft>
-            </a:pPr>
-            <a:r>
-              <a:rPr sz="1200" b="0" i="0">
+                <a:spcPts val="314"/>
+              </a:spcAft>
+            </a:pPr>
+            <a:r>
+              <a:rPr sz="1100" b="0" i="0">
                 <a:solidFill>
                   <a:srgbClr val="FFFFFF"/>
                 </a:solidFill>
@@ -16566,11 +16473,11 @@
           <a:p>
             <a:pPr>
               <a:spcAft>
-                <a:spcPts val="342"/>
-              </a:spcAft>
-            </a:pPr>
-            <a:r>
-              <a:rPr sz="1200" b="0" i="0">
+                <a:spcPts val="314"/>
+              </a:spcAft>
+            </a:pPr>
+            <a:r>
+              <a:rPr sz="1100" b="0" i="0">
                 <a:solidFill>
                   <a:srgbClr val="FFFFFF"/>
                 </a:solidFill>
@@ -16584,6 +16491,41 @@
       <p:sp>
         <p:nvSpPr>
           <p:cNvPr id="9" name="TextBox 8"/>
+          <p:cNvSpPr txBox="1"/>
+          <p:nvPr/>
+        </p:nvSpPr>
+        <p:spPr>
+          <a:xfrm>
+            <a:off x="457200" y="6080760"/>
+            <a:ext cx="11277295" cy="320040"/>
+          </a:xfrm>
+          <a:prstGeom prst="rect">
+            <a:avLst/>
+          </a:prstGeom>
+          <a:noFill/>
+        </p:spPr>
+        <p:txBody>
+          <a:bodyPr wrap="square">
+            <a:spAutoFit/>
+          </a:bodyPr>
+          <a:lstStyle/>
+          <a:p>
+            <a:pPr algn="ctr"/>
+            <a:r>
+              <a:rPr sz="1200" b="0" i="1">
+                <a:solidFill>
+                  <a:srgbClr val="666666"/>
+                </a:solidFill>
+                <a:latin typeface="Calibri"/>
+              </a:rPr>
+              <a:t>LANGUAGE plpgsql y el cuerpo entre $proc$: el motor guarda el procedimiento y cualquier cliente lo invoca con CALL. Un RAISE EXCEPTION aborta la llamada y deshace lo que alcanzo a escribir.</a:t>
+            </a:r>
+          </a:p>
+        </p:txBody>
+      </p:sp>
+      <p:sp>
+        <p:nvSpPr>
+          <p:cNvPr id="10" name="TextBox 9"/>
           <p:cNvSpPr txBox="1"/>
           <p:nvPr/>
         </p:nvSpPr>
@@ -17239,7 +17181,7 @@
         <p:spPr>
           <a:xfrm>
             <a:off x="457200" y="1261872"/>
-            <a:ext cx="11277295" cy="5093208"/>
+            <a:ext cx="11277295" cy="4773168"/>
           </a:xfrm>
           <a:prstGeom prst="roundRect">
             <a:avLst>
@@ -17359,7 +17301,7 @@
         <p:spPr>
           <a:xfrm>
             <a:off x="777240" y="1719072"/>
-            <a:ext cx="10637215" cy="4453128"/>
+            <a:ext cx="10637215" cy="4133087"/>
           </a:xfrm>
           <a:prstGeom prst="rect">
             <a:avLst/>
@@ -17568,6 +17510,41 @@
       <p:sp>
         <p:nvSpPr>
           <p:cNvPr id="9" name="TextBox 8"/>
+          <p:cNvSpPr txBox="1"/>
+          <p:nvPr/>
+        </p:nvSpPr>
+        <p:spPr>
+          <a:xfrm>
+            <a:off x="457200" y="6080760"/>
+            <a:ext cx="11277295" cy="320040"/>
+          </a:xfrm>
+          <a:prstGeom prst="rect">
+            <a:avLst/>
+          </a:prstGeom>
+          <a:noFill/>
+        </p:spPr>
+        <p:txBody>
+          <a:bodyPr wrap="square">
+            <a:spAutoFit/>
+          </a:bodyPr>
+          <a:lstStyle/>
+          <a:p>
+            <a:pPr algn="ctr"/>
+            <a:r>
+              <a:rPr sz="1200" b="0" i="1">
+                <a:solidFill>
+                  <a:srgbClr val="666666"/>
+                </a:solidFill>
+                <a:latin typeface="Calibri"/>
+              </a:rPr>
+              <a:t>Cada caso va en su propio DO con EXCEPTION: el error se captura, se registra con SQLERRM en resultado_prueba y el script sigue al caso siguiente en vez de abortar.</a:t>
+            </a:r>
+          </a:p>
+        </p:txBody>
+      </p:sp>
+      <p:sp>
+        <p:nvSpPr>
+          <p:cNvPr id="10" name="TextBox 9"/>
           <p:cNvSpPr txBox="1"/>
           <p:nvPr/>
         </p:nvSpPr>
@@ -18167,7 +18144,7 @@
         <p:spPr>
           <a:xfrm>
             <a:off x="0" y="0"/>
-            <a:ext cx="12191695" cy="960120"/>
+            <a:ext cx="12191695" cy="1170432"/>
           </a:xfrm>
           <a:prstGeom prst="rect">
             <a:avLst/>
@@ -18209,7 +18186,7 @@
         </p:nvSpPr>
         <p:spPr>
           <a:xfrm>
-            <a:off x="0" y="960120"/>
+            <a:off x="0" y="1170432"/>
             <a:ext cx="12191695" cy="41148"/>
           </a:xfrm>
           <a:prstGeom prst="rect">
@@ -18253,7 +18230,7 @@
         <p:spPr>
           <a:xfrm>
             <a:off x="457200" y="164592"/>
-            <a:ext cx="11277295" cy="502920"/>
+            <a:ext cx="11277295" cy="384048"/>
           </a:xfrm>
           <a:prstGeom prst="rect">
             <a:avLst/>
@@ -18280,14 +18257,48 @@
       </p:sp>
       <p:sp>
         <p:nvSpPr>
-          <p:cNvPr id="5" name="Rounded Rectangle 4"/>
+          <p:cNvPr id="5" name="TextBox 4"/>
+          <p:cNvSpPr txBox="1"/>
+          <p:nvPr/>
+        </p:nvSpPr>
+        <p:spPr>
+          <a:xfrm>
+            <a:off x="457200" y="566928"/>
+            <a:ext cx="11277295" cy="411480"/>
+          </a:xfrm>
+          <a:prstGeom prst="rect">
+            <a:avLst/>
+          </a:prstGeom>
+          <a:noFill/>
+        </p:spPr>
+        <p:txBody>
+          <a:bodyPr wrap="square">
+            <a:spAutoFit/>
+          </a:bodyPr>
+          <a:lstStyle/>
+          <a:p>
+            <a:r>
+              <a:rPr sz="1400" b="0" i="0">
+                <a:solidFill>
+                  <a:srgbClr val="B8D8EE"/>
+                </a:solidFill>
+                <a:latin typeface="Calibri"/>
+              </a:rPr>
+              <a:t>La regla de negocio vive en la base: vale igual para la app, un script de carga o soporte</a:t>
+            </a:r>
+          </a:p>
+        </p:txBody>
+      </p:sp>
+      <p:sp>
+        <p:nvSpPr>
+          <p:cNvPr id="6" name="Rounded Rectangle 5"/>
           <p:cNvSpPr/>
           <p:nvPr/>
         </p:nvSpPr>
         <p:spPr>
           <a:xfrm>
-            <a:off x="457200" y="1261872"/>
-            <a:ext cx="5478627" cy="5093208"/>
+            <a:off x="457200" y="1472184"/>
+            <a:ext cx="5478627" cy="4882896"/>
           </a:xfrm>
           <a:prstGeom prst="roundRect">
             <a:avLst>
@@ -18325,13 +18336,13 @@
       </p:sp>
       <p:sp>
         <p:nvSpPr>
-          <p:cNvPr id="6" name="Rectangle 5"/>
+          <p:cNvPr id="7" name="Rectangle 6"/>
           <p:cNvSpPr/>
           <p:nvPr/>
         </p:nvSpPr>
         <p:spPr>
           <a:xfrm>
-            <a:off x="457200" y="1261872"/>
+            <a:off x="457200" y="1472184"/>
             <a:ext cx="5478627" cy="502920"/>
           </a:xfrm>
           <a:prstGeom prst="rect">
@@ -18368,47 +18379,47 @@
       </p:sp>
       <p:sp>
         <p:nvSpPr>
-          <p:cNvPr id="7" name="TextBox 6"/>
-          <p:cNvSpPr txBox="1"/>
-          <p:nvPr/>
-        </p:nvSpPr>
-        <p:spPr>
-          <a:xfrm>
-            <a:off x="594360" y="1353312"/>
-            <a:ext cx="5204307" cy="365760"/>
-          </a:xfrm>
-          <a:prstGeom prst="rect">
-            <a:avLst/>
-          </a:prstGeom>
-          <a:noFill/>
-        </p:spPr>
-        <p:txBody>
-          <a:bodyPr wrap="square" anchor="ctr"/>
-          <a:lstStyle/>
-          <a:p>
-            <a:pPr algn="ctr"/>
-            <a:r>
-              <a:rPr sz="1600" b="1" i="0">
-                <a:solidFill>
-                  <a:srgbClr val="FFFFFF"/>
-                </a:solidFill>
-                <a:latin typeface="Calibri"/>
-              </a:rPr>
-              <a:t>Sin procedimiento</a:t>
-            </a:r>
-          </a:p>
-        </p:txBody>
-      </p:sp>
-      <p:sp>
-        <p:nvSpPr>
           <p:cNvPr id="8" name="TextBox 7"/>
           <p:cNvSpPr txBox="1"/>
           <p:nvPr/>
         </p:nvSpPr>
         <p:spPr>
           <a:xfrm>
-            <a:off x="621792" y="1901952"/>
-            <a:ext cx="5158587" cy="4498848"/>
+            <a:off x="594360" y="1563624"/>
+            <a:ext cx="5204307" cy="365760"/>
+          </a:xfrm>
+          <a:prstGeom prst="rect">
+            <a:avLst/>
+          </a:prstGeom>
+          <a:noFill/>
+        </p:spPr>
+        <p:txBody>
+          <a:bodyPr wrap="square" anchor="ctr"/>
+          <a:lstStyle/>
+          <a:p>
+            <a:pPr algn="ctr"/>
+            <a:r>
+              <a:rPr sz="1600" b="1" i="0">
+                <a:solidFill>
+                  <a:srgbClr val="FFFFFF"/>
+                </a:solidFill>
+                <a:latin typeface="Calibri"/>
+              </a:rPr>
+              <a:t>Sin procedimiento</a:t>
+            </a:r>
+          </a:p>
+        </p:txBody>
+      </p:sp>
+      <p:sp>
+        <p:nvSpPr>
+          <p:cNvPr id="9" name="TextBox 8"/>
+          <p:cNvSpPr txBox="1"/>
+          <p:nvPr/>
+        </p:nvSpPr>
+        <p:spPr>
+          <a:xfrm>
+            <a:off x="621792" y="2112263"/>
+            <a:ext cx="5158587" cy="4288536"/>
           </a:xfrm>
           <a:prstGeom prst="rect">
             <a:avLst/>
@@ -18488,14 +18499,14 @@
       </p:sp>
       <p:sp>
         <p:nvSpPr>
-          <p:cNvPr id="9" name="Rounded Rectangle 8"/>
+          <p:cNvPr id="10" name="Rounded Rectangle 9"/>
           <p:cNvSpPr/>
           <p:nvPr/>
         </p:nvSpPr>
         <p:spPr>
           <a:xfrm>
-            <a:off x="6255867" y="1261872"/>
-            <a:ext cx="5478627" cy="5093208"/>
+            <a:off x="6255867" y="1472184"/>
+            <a:ext cx="5478627" cy="4882896"/>
           </a:xfrm>
           <a:prstGeom prst="roundRect">
             <a:avLst>
@@ -18533,13 +18544,13 @@
       </p:sp>
       <p:sp>
         <p:nvSpPr>
-          <p:cNvPr id="10" name="Rectangle 9"/>
+          <p:cNvPr id="11" name="Rectangle 10"/>
           <p:cNvSpPr/>
           <p:nvPr/>
         </p:nvSpPr>
         <p:spPr>
           <a:xfrm>
-            <a:off x="6255867" y="1261872"/>
+            <a:off x="6255867" y="1472184"/>
             <a:ext cx="5478627" cy="502920"/>
           </a:xfrm>
           <a:prstGeom prst="rect">
@@ -18576,47 +18587,47 @@
       </p:sp>
       <p:sp>
         <p:nvSpPr>
-          <p:cNvPr id="11" name="TextBox 10"/>
-          <p:cNvSpPr txBox="1"/>
-          <p:nvPr/>
-        </p:nvSpPr>
-        <p:spPr>
-          <a:xfrm>
-            <a:off x="6393027" y="1353312"/>
-            <a:ext cx="5204307" cy="365760"/>
-          </a:xfrm>
-          <a:prstGeom prst="rect">
-            <a:avLst/>
-          </a:prstGeom>
-          <a:noFill/>
-        </p:spPr>
-        <p:txBody>
-          <a:bodyPr wrap="square" anchor="ctr"/>
-          <a:lstStyle/>
-          <a:p>
-            <a:pPr algn="ctr"/>
-            <a:r>
-              <a:rPr sz="1600" b="1" i="0">
-                <a:solidFill>
-                  <a:srgbClr val="FFFFFF"/>
-                </a:solidFill>
-                <a:latin typeface="Calibri"/>
-              </a:rPr>
-              <a:t>Con procedimiento</a:t>
-            </a:r>
-          </a:p>
-        </p:txBody>
-      </p:sp>
-      <p:sp>
-        <p:nvSpPr>
           <p:cNvPr id="12" name="TextBox 11"/>
           <p:cNvSpPr txBox="1"/>
           <p:nvPr/>
         </p:nvSpPr>
         <p:spPr>
           <a:xfrm>
-            <a:off x="6420459" y="1901952"/>
-            <a:ext cx="5158587" cy="4498848"/>
+            <a:off x="6393027" y="1563624"/>
+            <a:ext cx="5204307" cy="365760"/>
+          </a:xfrm>
+          <a:prstGeom prst="rect">
+            <a:avLst/>
+          </a:prstGeom>
+          <a:noFill/>
+        </p:spPr>
+        <p:txBody>
+          <a:bodyPr wrap="square" anchor="ctr"/>
+          <a:lstStyle/>
+          <a:p>
+            <a:pPr algn="ctr"/>
+            <a:r>
+              <a:rPr sz="1600" b="1" i="0">
+                <a:solidFill>
+                  <a:srgbClr val="FFFFFF"/>
+                </a:solidFill>
+                <a:latin typeface="Calibri"/>
+              </a:rPr>
+              <a:t>Con procedimiento</a:t>
+            </a:r>
+          </a:p>
+        </p:txBody>
+      </p:sp>
+      <p:sp>
+        <p:nvSpPr>
+          <p:cNvPr id="13" name="TextBox 12"/>
+          <p:cNvSpPr txBox="1"/>
+          <p:nvPr/>
+        </p:nvSpPr>
+        <p:spPr>
+          <a:xfrm>
+            <a:off x="6420459" y="2112263"/>
+            <a:ext cx="5158587" cy="4288536"/>
           </a:xfrm>
           <a:prstGeom prst="rect">
             <a:avLst/>
@@ -18696,7 +18707,7 @@
       </p:sp>
       <p:sp>
         <p:nvSpPr>
-          <p:cNvPr id="13" name="TextBox 12"/>
+          <p:cNvPr id="14" name="TextBox 13"/>
           <p:cNvSpPr txBox="1"/>
           <p:nvPr/>
         </p:nvSpPr>
@@ -19535,7 +19546,7 @@
                 </a:solidFill>
                 <a:latin typeface="Calibri"/>
               </a:rPr>
-              <a:t>Un procedimiento sin bateria no esta terminado.</a:t>
+              <a:t>Un procedimiento sin bateria no esta terminado: cada caso de error se prueba en su propio bloque</a:t>
             </a:r>
           </a:p>
         </p:txBody>
@@ -20383,7 +20394,7 @@
         <p:spPr>
           <a:xfrm>
             <a:off x="0" y="0"/>
-            <a:ext cx="12191695" cy="960120"/>
+            <a:ext cx="12191695" cy="1170432"/>
           </a:xfrm>
           <a:prstGeom prst="rect">
             <a:avLst/>
@@ -20425,7 +20436,7 @@
         </p:nvSpPr>
         <p:spPr>
           <a:xfrm>
-            <a:off x="0" y="960120"/>
+            <a:off x="0" y="1170432"/>
             <a:ext cx="12191695" cy="41148"/>
           </a:xfrm>
           <a:prstGeom prst="rect">
@@ -20469,7 +20480,7 @@
         <p:spPr>
           <a:xfrm>
             <a:off x="457200" y="164592"/>
-            <a:ext cx="11277295" cy="502920"/>
+            <a:ext cx="11277295" cy="384048"/>
           </a:xfrm>
           <a:prstGeom prst="rect">
             <a:avLst/>
@@ -20502,8 +20513,8 @@
         </p:nvSpPr>
         <p:spPr>
           <a:xfrm>
-            <a:off x="457200" y="1170432"/>
-            <a:ext cx="11277295" cy="5230368"/>
+            <a:off x="457200" y="566928"/>
+            <a:ext cx="11277295" cy="411480"/>
           </a:xfrm>
           <a:prstGeom prst="rect">
             <a:avLst/>
@@ -20516,6 +20527,40 @@
           </a:bodyPr>
           <a:lstStyle/>
           <a:p>
+            <a:r>
+              <a:rPr sz="1400" b="0" i="0">
+                <a:solidFill>
+                  <a:srgbClr val="B8D8EE"/>
+                </a:solidFill>
+                <a:latin typeface="Calibri"/>
+              </a:rPr>
+              <a:t>El contrato es lo que lee quien llama: firma, ejemplo, pre y postcondiciones, errores y la decision de diseno</a:t>
+            </a:r>
+          </a:p>
+        </p:txBody>
+      </p:sp>
+      <p:sp>
+        <p:nvSpPr>
+          <p:cNvPr id="6" name="TextBox 5"/>
+          <p:cNvSpPr txBox="1"/>
+          <p:nvPr/>
+        </p:nvSpPr>
+        <p:spPr>
+          <a:xfrm>
+            <a:off x="457200" y="1380744"/>
+            <a:ext cx="11277295" cy="5020056"/>
+          </a:xfrm>
+          <a:prstGeom prst="rect">
+            <a:avLst/>
+          </a:prstGeom>
+          <a:noFill/>
+        </p:spPr>
+        <p:txBody>
+          <a:bodyPr wrap="square">
+            <a:spAutoFit/>
+          </a:bodyPr>
+          <a:lstStyle/>
+          <a:p>
             <a:pPr>
               <a:spcAft>
                 <a:spcPts val="800"/>
@@ -20779,7 +20824,7 @@
       </p:sp>
       <p:sp>
         <p:nvSpPr>
-          <p:cNvPr id="6" name="TextBox 5"/>
+          <p:cNvPr id="7" name="TextBox 6"/>
           <p:cNvSpPr txBox="1"/>
           <p:nvPr/>
         </p:nvSpPr>
@@ -20987,7 +21032,7 @@
                 </a:solidFill>
                 <a:latin typeface="Calibri"/>
               </a:rPr>
-              <a:t>PROCEDURE y FUNCTION no son sinonimos: si el resultado tiene que entrar en un SELECT, es FUNCTION.</a:t>
+              <a:t>PROCEDURE y FUNCTION no son sinonimos: si el resultado tiene que entrar en un SELECT, es FUNCTION. Es la bisagra con la Clase 4</a:t>
             </a:r>
           </a:p>
         </p:txBody>
@@ -21556,7 +21601,59 @@
                 </a:solidFill>
                 <a:latin typeface="Calibri"/>
               </a:rPr>
-              <a:t>–   Al final de la demo: dejar enlace/script compartible al grupo.</a:t>
+              <a:t>–   </a:t>
+            </a:r>
+            <a:r>
+              <a:rPr sz="2000" b="1" i="0">
+                <a:solidFill>
+                  <a:srgbClr val="333333"/>
+                </a:solidFill>
+                <a:latin typeface="Calibri"/>
+              </a:rPr>
+              <a:t>Qué observar:</a:t>
+            </a:r>
+            <a:r>
+              <a:rPr sz="2000" b="0" i="0">
+                <a:solidFill>
+                  <a:srgbClr val="333333"/>
+                </a:solidFill>
+                <a:latin typeface="Calibri"/>
+              </a:rPr>
+              <a:t> el CALL valido inserta una cita y los invalidos abortan con su mensaje literal; el «COUNT(*)» de cita confirma que los fallidos no dejaron nada.</a:t>
+            </a:r>
+          </a:p>
+          <a:p>
+            <a:pPr>
+              <a:spcAft>
+                <a:spcPts val="800"/>
+              </a:spcAft>
+            </a:pPr>
+            <a:r>
+              <a:rPr sz="2000" b="0" i="0">
+                <a:solidFill>
+                  <a:srgbClr val="333333"/>
+                </a:solidFill>
+                <a:latin typeface="Calibri"/>
+              </a:rPr>
+              <a:t>–   </a:t>
+            </a:r>
+            <a:r>
+              <a:rPr sz="2000" b="1" i="0">
+                <a:solidFill>
+                  <a:srgbClr val="333333"/>
+                </a:solidFill>
+                <a:latin typeface="Calibri"/>
+              </a:rPr>
+              <a:t>Qué observar:</a:t>
+            </a:r>
+            <a:r>
+              <a:rPr sz="2000" b="0" i="0">
+                <a:solidFill>
+                  <a:srgbClr val="333333"/>
+                </a:solidFill>
+                <a:latin typeface="Calibri"/>
+              </a:rPr>
+              <a:t> el procedimiento queda guardado en el motor: cerrar la sesion no lo borra, y cualquier cliente lo invoca con CALL.</a:t>
             </a:r>
           </a:p>
         </p:txBody>

--- a/Bases de Datos II/Clases/Clase 3 - Procedimientos almacenados/Presentacion.pptx
+++ b/Bases de Datos II/Clases/Clase 3 - Procedimientos almacenados/Presentacion.pptx
@@ -1529,7 +1529,7 @@
           </a:p>
           <a:p>
             <a:r>
-              <a:t>En VetCare seria una pantalla de busqueda que construye SELECT * FROM mascota WHERE nombre = seguido de lo que el usuario digito entre comillas.</a:t>
+              <a:t>En la clínica seria una pantalla de busqueda que construye SELECT * FROM mascota WHERE nombre = seguido de lo que el usuario digito entre comillas.</a:t>
             </a:r>
           </a:p>
           <a:p>
@@ -5088,13 +5088,13 @@
           <a:p>
             <a:pPr algn="ctr"/>
             <a:r>
-              <a:rPr sz="4000" b="1" i="0">
+              <a:rPr sz="3400" b="1" i="0">
                 <a:solidFill>
                   <a:srgbClr val="FFFFFF"/>
                 </a:solidFill>
                 <a:latin typeface="Calibri"/>
               </a:rPr>
-              <a:t>Procedimientos almacenados · VetCare</a:t>
+              <a:t>Procedimientos almacenados · la clínica</a:t>
             </a:r>
           </a:p>
         </p:txBody>
@@ -5172,7 +5172,7 @@
                 </a:solidFill>
                 <a:latin typeface="Calibri"/>
               </a:rPr>
-              <a:t>Logica de negocio en la BD del PI</a:t>
+              <a:t>Logica de negocio en la BD del proyecto</a:t>
             </a:r>
           </a:p>
         </p:txBody>
@@ -6380,7 +6380,7 @@
                 </a:solidFill>
                 <a:latin typeface="Calibri"/>
               </a:rPr>
-              <a:t>–   Segunda, el mensaje es parte de la interfaz publica del procedimiento: es lo que la aplicacion va a mostrar y lo que la bateria de pruebas va a verificar, asi que se escribe pensando en la recepcionista de Huellitas y no en el programador.</a:t>
+              <a:t>–   Segunda, el mensaje es parte de la interfaz publica del procedimiento: es lo que la aplicacion va a mostrar y lo que la bateria de pruebas va a verificar, asi que se escribe pensando en la recepcionista de la clínica y no en el programador.</a:t>
             </a:r>
           </a:p>
         </p:txBody>
@@ -8410,7 +8410,7 @@
                 </a:solidFill>
                 <a:latin typeface="Calibri"/>
               </a:rPr>
-              <a:t> Procedimientos almacenados · VetCare</a:t>
+              <a:t> Procedimientos almacenados · la clínica</a:t>
             </a:r>
           </a:p>
           <a:p>
@@ -8485,7 +8485,7 @@
                 </a:solidFill>
                 <a:latin typeface="Calibri"/>
               </a:rPr>
-              <a:t>–   Recorrido: teoría del tema, una lámina por concepto, y demo del docente sobre VetCare DB.</a:t>
+              <a:t>–   Recorrido: teoría del tema, una lámina por concepto, y demo del docente sobre la base de la clínica.</a:t>
             </a:r>
           </a:p>
           <a:p>
@@ -9323,7 +9323,7 @@
                 </a:solidFill>
                 <a:latin typeface="Calibri"/>
               </a:rPr>
-              <a:t>–   Los cuatro casos del PI son el positivo, con una mascota activa y una franja libre, y los tres negativos: mascota inactiva —Rocky, identificador 3</a:t>
+              <a:t>–   Los cuatro casos del proyecto son el positivo, con una mascota activa y una franja libre, y los tres negativos: mascota inactiva —Rocky, identificador 3</a:t>
             </a:r>
           </a:p>
           <a:p>
@@ -10411,7 +10411,7 @@
                 </a:solidFill>
                 <a:latin typeface="Calibri"/>
               </a:rPr>
-              <a:t>–   Se escribe para quien va a LLAMAR al procedimiento sin abrirlo, y en este curso esa persona existe con nombre: es el mismo estudiante en la Clase 12, o su companero de Programacion II, construyendo la aplicacion de Huellitas.</a:t>
+              <a:t>–   Se escribe para quien va a LLAMAR al procedimiento sin abrirlo, y en este curso esa persona existe con nombre: es el mismo estudiante en la Clase 12, o su companero de Programacion II, construyendo la aplicacion de la clínica.</a:t>
             </a:r>
           </a:p>
           <a:p>
@@ -11618,7 +11618,7 @@
                 </a:solidFill>
                 <a:latin typeface="Calibri"/>
               </a:rPr>
-              <a:t>Encuadre · clase regular · VetCare</a:t>
+              <a:t>Encuadre · clase regular · la clínica</a:t>
             </a:r>
           </a:p>
         </p:txBody>
@@ -11733,7 +11733,7 @@
                 </a:solidFill>
                 <a:latin typeface="Calibri"/>
               </a:rPr>
-              <a:t>Teoría Core breve (al servicio del PI)</a:t>
+              <a:t>Teoría Core breve (al servicio del proyecto)</a:t>
             </a:r>
           </a:p>
         </p:txBody>
@@ -14664,7 +14664,7 @@
                 </a:solidFill>
                 <a:latin typeface="Calibri"/>
               </a:rPr>
-              <a:t>Como amarra con las clases vecinas y con el PI</a:t>
+              <a:t>Como amarra con las clases vecinas</a:t>
             </a:r>
           </a:p>
         </p:txBody>
@@ -21585,7 +21585,7 @@
                 </a:solidFill>
                 <a:latin typeface="Calibri"/>
               </a:rPr>
-              <a:t>–   Sigan el mismo dominio VetCare (no inventen otro caso).</a:t>
+              <a:t>–   Sigan el mismo dominio de la clínica (no inventen otro caso).</a:t>
             </a:r>
           </a:p>
           <a:p>
@@ -21814,7 +21814,7 @@
                 </a:solidFill>
                 <a:latin typeface="Calibri"/>
               </a:rPr>
-              <a:t>Clase 3 · Procedimientos almacenados · VetCare</a:t>
+              <a:t>Clase 3 · Procedimientos almacenados · la clínica</a:t>
             </a:r>
           </a:p>
         </p:txBody>
@@ -22809,7 +22809,7 @@
                 </a:solidFill>
                 <a:latin typeface="Calibri"/>
               </a:rPr>
-              <a:t>–   Y hay un detalle del PI que vale mas que la sintaxis: el procedimiento recibe TRES parametros y no cuatro, porque id_cita es SERIAL, es decir el motor genera el valor.</a:t>
+              <a:t>–   Y hay un detalle del proyecto que vale mas que la sintaxis: el procedimiento recibe TRES parametros y no cuatro, porque id_cita es SERIAL, es decir el motor genera el valor.</a:t>
             </a:r>
           </a:p>
           <a:p>

--- a/Bases de Datos II/Clases/Clase 3 - Procedimientos almacenados/Presentacion.pptx
+++ b/Bases de Datos II/Clases/Clase 3 - Procedimientos almacenados/Presentacion.pptx
@@ -7,8 +7,8 @@
   <p:sldIdLst>
     <p:sldId id="256" r:id="rId7"/>
     <p:sldId id="257" r:id="rId8"/>
-    <p:sldId id="258" r:id="rId10"/>
-    <p:sldId id="259" r:id="rId11"/>
+    <p:sldId id="258" r:id="rId9"/>
+    <p:sldId id="259" r:id="rId10"/>
     <p:sldId id="260" r:id="rId12"/>
     <p:sldId id="261" r:id="rId13"/>
     <p:sldId id="262" r:id="rId14"/>
@@ -530,43 +530,87 @@
           <a:lstStyle/>
           <a:p>
             <a:r>
-              <a:t>TEXTO COMPLETO DE LA LÁMINA (se proyecta resumido):</a:t>
-            </a:r>
-          </a:p>
-          <a:p/>
-          <a:p>
-            <a:r>
-              <a:t>Tema de hoy: Procedimientos almacenados · la clínica</a:t>
-            </a:r>
-          </a:p>
-          <a:p/>
-          <a:p>
-            <a:r>
-              <a:t>Herramienta: PostgreSQL + Google Docs · Bloque 120 min</a:t>
-            </a:r>
-          </a:p>
-          <a:p/>
-          <a:p>
-            <a:r>
-              <a:t>Gratis + navegador · free tier · sin software de pago obligatorio.</a:t>
-            </a:r>
-          </a:p>
-          <a:p/>
-          <a:p>
-            <a:r>
-              <a:t>Recorrido: teoría del tema, una lámina por concepto, y demo del docente sobre la base de la clínica.</a:t>
-            </a:r>
-          </a:p>
-          <a:p/>
-          <a:p>
-            <a:r>
-              <a:t>Cada lámina se sostiene sola: sirve para repasar aunque hayas faltado.</a:t>
-            </a:r>
-          </a:p>
-          <a:p/>
-          <a:p>
-            <a:r>
-              <a:t>Conceptos de hoy: Que es un procedimiento almacenado, y las dos palabras que importan · El molde de PL/pgSQL, y por que el cuerpo va entre signos de dolar · El molde de un procedimiento en PL/pgSQL · Los modos de parametro, y por que hoy no se usa OUT.</a:t>
+              <a:t>DESARROLLO (para explicarlo, no se proyecta):</a:t>
+            </a:r>
+          </a:p>
+          <a:p>
+            <a:r>
+              <a:t>Un procedimiento almacenado es un bloque de codigo con nombre propio que vive dentro de la base de datos, y las dos palabras que hay que desempacar son guardado e invocado, porque son las que lo separan de un archivo sql en el computador de alguien.</a:t>
+            </a:r>
+          </a:p>
+          <a:p>
+            <a:r>
+              <a:t>Guardado significa que el fuente queda en el catalogo del motor y se puede recuperar sin depender de que su autor siga en el proyecto: en PostgreSQL, SELECT prosrc FROM pg_proc WHERE proname = 'sp_agendar_cita' devuelve el cuerpo</a:t>
+            </a:r>
+          </a:p>
+          <a:p>
+            <a:r>
+              <a:t>Y SELECT pg_get_functiondef('sp_agendar_cita'::regproc) devuelve la definicion completa lista para volver a ejecutar.</a:t>
+            </a:r>
+          </a:p>
+          <a:p>
+            <a:r>
+              <a:t>Consecuencia practica: si el estudiante cierra la pestana, el procedimiento no se perdio, esta en el motor.</a:t>
+            </a:r>
+          </a:p>
+          <a:p>
+            <a:r>
+              <a:t>Invocado significa que hay una sola linea que dispara varias sentencias:.</a:t>
+            </a:r>
+          </a:p>
+          <a:p>
+            <a:r>
+              <a:t>Y hay algo mas importante que el ahorro: la regla queda escrita UNA vez y ninguna pantalla puede saltarsela.</a:t>
+            </a:r>
+          </a:p>
+          <a:p>
+            <a:r>
+              <a:t>La Clase 1 dejo el esquema y la Clase 2 la matriz de roles; esta clase es donde la base de datos deja de ser un almacen pasivo y empieza a contener comportamiento.</a:t>
+            </a:r>
+          </a:p>
+          <a:p>
+            <a:r>
+              <a:t>En PostgreSQL no existe ese estado intermedio: el CREATE PROCEDURE valida la SINTAXIS del cuerpo y, si esta bien escrito, el objeto queda creado y valido, pero las tablas y columnas que el cuerpo menciona NO se verifican hasta la primera ejecucion.</a:t>
+            </a:r>
+          </a:p>
+          <a:p>
+            <a:r>
+              <a:t>La consecuencia practica es concreta y hay que anticiparla: un procedimiento que escribe INSERT INTO citas en lugar de cita se crea sin una sola queja y falla la primera vez que se lo llama.</a:t>
+            </a:r>
+          </a:p>
+          <a:p>
+            <a:r>
+              <a:t>NOTAS:</a:t>
+            </a:r>
+          </a:p>
+          <a:p>
+            <a:r>
+              <a:t>En lugar de enviar cuatro sentencias y esperar cuatro respuestas por la red, la aplicacion envia una y recibe un resultado.</a:t>
+            </a:r>
+          </a:p>
+          <a:p>
+            <a:r>
+              <a:t>Conviene senalar de entrada una diferencia con Oracle que importa hoy, porque cambia como se depura.</a:t>
+            </a:r>
+          </a:p>
+          <a:p>
+            <a:r>
+              <a:t>En Oracle el procedimiento se compila al crearlo y, si algo esta mal, el objeto queda creado pero invalido.</a:t>
+            </a:r>
+          </a:p>
+          <a:p>
+            <a:r>
+              <a:t>Por eso la regla del dia es que crear el procedimiento no es evidencia de nada; la evidencia es el CALL corriendo.</a:t>
+            </a:r>
+          </a:p>
+          <a:p>
+            <a:r>
+              <a:t>CÓDIGO CITADO (referencia):</a:t>
+            </a:r>
+          </a:p>
+          <a:p>
+            <a:r>
+              <a:t>CALL sp_agendar_cita(1, 2, TIMESTAMP '2026-09-15 10:00:00')</a:t>
             </a:r>
           </a:p>
         </p:txBody>
@@ -641,47 +685,47 @@
           </a:p>
           <a:p>
             <a:r>
-              <a:t>Capturar WHEN OTHERS y escribir paso = TRUE porque hubo excepcion es insuficiente: una excepcion tambien la lanza un nombre de columna mal escrito, un tipo que no convierte o una tabla que no existe.</a:t>
-            </a:r>
-          </a:p>
-          <a:p>
-            <a:r>
-              <a:t>Con ese criterio, un procedimiento roto pasaria las tres pruebas negativas.</a:t>
-            </a:r>
-          </a:p>
-          <a:p>
-            <a:r>
-              <a:t>La forma es paso = SQLERRM ILIKE '%inactiva%', que es una comparacion insensible a mayusculas: se afirma que fallo Y que fallo por lo que se esperaba.</a:t>
-            </a:r>
-          </a:p>
-          <a:p>
-            <a:r>
-              <a:t>La segunda mitad es que la columna paso admite dos lecturas legitimas y hay que elegir una.</a:t>
-            </a:r>
-          </a:p>
-          <a:p>
-            <a:r>
-              <a:t>Si paso significa el resultado coincidio con lo esperado, las cuatro filas quedan en verdadero cuando todo esta bien, porque en un caso negativo lo esperado es la excepcion.</a:t>
-            </a:r>
-          </a:p>
-          <a:p>
-            <a:r>
-              <a:t>Las dos son defendibles; lo que no es defendible es no decir cual.</a:t>
-            </a:r>
-          </a:p>
-          <a:p>
-            <a:r>
-              <a:t>La regla del curso es explicita: se usa la misma lectura para las cuatro filas y se declara en una linea junto a la tabla.</a:t>
-            </a:r>
-          </a:p>
-          <a:p>
-            <a:r>
-              <a:t>Salida esperada de una bateria sana: 4 filas, el caso valido con paso TRUE y los 3 invalidos con paso TRUE y el SQLERRM literal del procedimiento.</a:t>
-            </a:r>
-          </a:p>
-          <a:p>
-            <a:r>
-              <a:t>Un caso invalido con paso FALSE es un hallazgo: el procedimiento dejo pasar algo que debia rechazar.</a:t>
+              <a:t>Se escribe para quien va a LLAMAR al procedimiento sin abrirlo, y en este curso esa persona existe con nombre: es el mismo estudiante en la Clase 12, o su companero de Programacion II, construyendo la aplicacion de la clínica.</a:t>
+            </a:r>
+          </a:p>
+          <a:p>
+            <a:r>
+              <a:t>Son seis bloques y cada uno responde una pregunta.</a:t>
+            </a:r>
+          </a:p>
+          <a:p>
+            <a:r>
+              <a:t>La firma exacta, con los tipos y en el orden real, responde como se declara.</a:t>
+            </a:r>
+          </a:p>
+          <a:p>
+            <a:r>
+              <a:t>El ejemplo de llamada, con valores concretos que funcionan, responde como se invoca; y conviene exigirlo porque es lo que convierte el contrato en algo copiable.</a:t>
+            </a:r>
+          </a:p>
+          <a:p>
+            <a:r>
+              <a:t>Las precondiciones responden que tiene que ser verdad antes: la mascota existe y esta activa, la franja del veterinario esta libre.</a:t>
+            </a:r>
+          </a:p>
+          <a:p>
+            <a:r>
+              <a:t>Las postcondiciones responden que queda despues, y aqui la frase importante es la del caso malo: si falla, no queda NADA.</a:t>
+            </a:r>
+          </a:p>
+          <a:p>
+            <a:r>
+              <a:t>La tabla de errores lleva el mensaje LITERAL, no una parafrasis, porque quien llama va a comparar contra ese texto —y porque es el mismo texto que la bateria de pruebas verifica.</a:t>
+            </a:r>
+          </a:p>
+          <a:p>
+            <a:r>
+              <a:t>Y el sexto bloque es la decision de diseno: por que se aborta en vez de devolver un codigo.</a:t>
+            </a:r>
+          </a:p>
+          <a:p>
+            <a:r>
+              <a:t>Ese bloque es el que distingue documentar de pensar, y es el que la solucion docente lee primero.</a:t>
             </a:r>
           </a:p>
           <a:p>
@@ -691,32 +735,22 @@
           </a:p>
           <a:p>
             <a:r>
-              <a:t>Aqui esta el matiz que separa una bateria que prueba algo de una que se prueba a si misma.</a:t>
-            </a:r>
-          </a:p>
-          <a:p>
-            <a:r>
-              <a:t>Lo que hay que verificar es el TEXTO de la excepcion, y para eso PL/pgSQL expone la variable SQLERRM con el mensaje y SQLSTATE con el codigo.</a:t>
-            </a:r>
-          </a:p>
-          <a:p>
-            <a:r>
-              <a:t>Si paso significa la operacion se completo, los tres casos negativos quedan en falso incluso con el procedimiento perfecto.</a:t>
-            </a:r>
-          </a:p>
-          <a:p>
-            <a:r>
-              <a:t>Conviene decir en voz alta la consecuencia, porque es la que evita reclamos: no se descuenta por elegir una u otra, se descuenta por las cuatro filas en verdadero sin haber verificado el texto.</a:t>
-            </a:r>
-          </a:p>
-          <a:p>
-            <a:r>
-              <a:t>Fuera de la lamina (habla de la practica): Aqui esta el matiz que separa una bateria que prueba algo de una que se prueba a si misma, y conviene dictarlo despacio porque la solucion docente lo califica.</a:t>
-            </a:r>
-          </a:p>
-          <a:p>
-            <a:r>
-              <a:t>Fuera de la lamina (habla de la practica): Las dos son defendibles; lo que no es defendible es no decir cual, porque entonces la columna no significa nada y el docente no puede calificar la captura.</a:t>
+              <a:t>El contrato no es codigo, y hay que explicar para quien se escribe, porque si no el estudiante lo redacta como un resumen del codigo.</a:t>
+            </a:r>
+          </a:p>
+          <a:p>
+            <a:r>
+              <a:t>Un contrato sirve si permite escribir la llamada y manejar los errores sin leer el cuerpo.</a:t>
+            </a:r>
+          </a:p>
+          <a:p>
+            <a:r>
+              <a:t>Sin ella, quien llama no sabe si tiene que limpiar algo.</a:t>
+            </a:r>
+          </a:p>
+          <a:p>
+            <a:r>
+              <a:t>Fuera de la lamina (habla de la practica): La tabla de errores lleva el mensaje LITERAL, no una parafrasis, porque quien llama va a comparar contra ese texto —y porque es el mismo texto que la bateria de pruebas verifica, de modo que los dos entregables tienen que coincidir palabra por palabra.</a:t>
             </a:r>
           </a:p>
         </p:txBody>
@@ -786,30 +820,77 @@
           <a:lstStyle/>
           <a:p>
             <a:r>
-              <a:t>TEXTO COMPLETO DE LA LÁMINA (se proyecta resumido):</a:t>
-            </a:r>
-          </a:p>
-          <a:p/>
-          <a:p>
-            <a:r>
-              <a:t>Ojo con la logica invertida, y con `WHEN OTHERS` a secas. En un caso error, llegar al final sin excepcion es el fallo. Y no basta con que falle: hay que verificar que falle por lo esperado (`SQLERRM ILIKE '%inactiva%'`), porque un typo en un nombre de columna tambien lanza excepcion y se reportaria como prueba superada.</a:t>
-            </a:r>
-          </a:p>
-          <a:p/>
-          <a:p>
-            <a:r>
-              <a:t>La tabla de resultados. `resultado_prueba(id_prueba SERIAL, caso TEXT, esperado TEXT, obtenido TEXT, paso BOOLEAN)`, y un `SELECT * ... ORDER BY id_prueba;` con las 4 filas. `paso` admite dos lecturas —«coincidio con lo esperado» o «la operacion se completo»— y las dos valen; lo que se exige es usar la misma para las 4 y decir cual.</a:t>
-            </a:r>
-          </a:p>
-          <a:p/>
-          <a:p>
-            <a:r>
-              <a:t>Fuera de la lamina (habla de la practica, no del tema):</a:t>
-            </a:r>
-          </a:p>
-          <a:p>
-            <a:r>
-              <a:t>- Los 25 puntos se califican por esta tabla, no por el CALL suelto</a:t>
+              <a:t>DESARROLLO (para explicarlo, no se proyecta):</a:t>
+            </a:r>
+          </a:p>
+          <a:p>
+            <a:r>
+              <a:t>Un procedimiento se invoca para que HAGA algo y se llama con CALL sp_x(...); una funcion se invoca para que DEVUELVA un valor y se llama dentro de una expresion, SELECT fn_x(...).</a:t>
+            </a:r>
+          </a:p>
+          <a:p>
+            <a:r>
+              <a:t>No son dos sabores del mismo objeto: en PostgreSQL una funcion no puede hacer COMMIT ni ROLLBACK y un procedimiento si, y esa es la razon tecnica por la que el objeto de hoy es un procedimiento.</a:t>
+            </a:r>
+          </a:p>
+          <a:p>
+            <a:r>
+              <a:t>Otra diferencia que se nota en la practica: llamar a un procedimiento con SELECT sp_agendar_cita(...) devuelve un error explicito de PostgreSQL, que dice que sp_agendar_cita es un procedimiento y sugiere usar CALL.</a:t>
+            </a:r>
+          </a:p>
+          <a:p>
+            <a:r>
+              <a:t>Vale mostrarlo a proposito, porque es un mensaje que el estudiante va a encontrar y conviene que lo reconozca en vez de asustarse.</a:t>
+            </a:r>
+          </a:p>
+          <a:p>
+            <a:r>
+              <a:t>La funcion llega en la Clase 4 con fn_precio_consulta, y ahi la comparacion ya estara hecha.</a:t>
+            </a:r>
+          </a:p>
+          <a:p>
+            <a:r>
+              <a:t>Una FUNCTION devuelve un valor y se usa dentro de una consulta: FROM....</a:t>
+            </a:r>
+          </a:p>
+          <a:p>
+            <a:r>
+              <a:t>Un PROCEDURE no devuelve valor y se invoca como sentencia suelta:.</a:t>
+            </a:r>
+          </a:p>
+          <a:p>
+            <a:r>
+              <a:t>Llamar un procedimiento con SELECT es un error de PostgreSQL, no una variante.</a:t>
+            </a:r>
+          </a:p>
+          <a:p>
+            <a:r>
+              <a:t>NOTAS:</a:t>
+            </a:r>
+          </a:p>
+          <a:p>
+            <a:r>
+              <a:t>Conviene cerrar la teoria con esta distincion, y decirla HOY.</a:t>
+            </a:r>
+          </a:p>
+          <a:p>
+            <a:r>
+              <a:t>CÓDIGO CITADO (referencia):</a:t>
+            </a:r>
+          </a:p>
+          <a:p>
+            <a:r>
+              <a:t>SELECT nombre, fn_precio_consulta(...)</a:t>
+            </a:r>
+          </a:p>
+          <a:p>
+            <a:r>
+              <a:t>CALL sp_agendar_cita(3, 1, TIMESTAMP '2026-09-01 09:00')</a:t>
+            </a:r>
+          </a:p>
+          <a:p>
+            <a:r>
+              <a:t>Fuera de la lamina (habla de la practica): Conviene cerrar la teoria con esta distincion, y decirla HOY, porque el estudiante la va a necesitar en el taller de hoy y no la semana entrante.</a:t>
             </a:r>
           </a:p>
         </p:txBody>
@@ -884,47 +965,42 @@
           </a:p>
           <a:p>
             <a:r>
-              <a:t>Se escribe para quien va a LLAMAR al procedimiento sin abrirlo, y en este curso esa persona existe con nombre: es el mismo estudiante en la Clase 12, o su companero de Programacion II, construyendo la aplicacion de la clínica.</a:t>
-            </a:r>
-          </a:p>
-          <a:p>
-            <a:r>
-              <a:t>Son seis bloques y cada uno responde una pregunta.</a:t>
-            </a:r>
-          </a:p>
-          <a:p>
-            <a:r>
-              <a:t>La firma exacta, con los tipos y en el orden real, responde como se declara.</a:t>
-            </a:r>
-          </a:p>
-          <a:p>
-            <a:r>
-              <a:t>El ejemplo de llamada, con valores concretos que funcionan, responde como se invoca; y conviene exigirlo porque es lo que convierte el contrato en algo copiable.</a:t>
-            </a:r>
-          </a:p>
-          <a:p>
-            <a:r>
-              <a:t>Las precondiciones responden que tiene que ser verdad antes: la mascota existe y esta activa, la franja del veterinario esta libre.</a:t>
-            </a:r>
-          </a:p>
-          <a:p>
-            <a:r>
-              <a:t>Las postcondiciones responden que queda despues, y aqui la frase importante es la del caso malo: si falla, no queda NADA.</a:t>
-            </a:r>
-          </a:p>
-          <a:p>
-            <a:r>
-              <a:t>La tabla de errores lleva el mensaje LITERAL, no una parafrasis, porque quien llama va a comparar contra ese texto —y porque es el mismo texto que la bateria de pruebas verifica.</a:t>
-            </a:r>
-          </a:p>
-          <a:p>
-            <a:r>
-              <a:t>Y el sexto bloque es la decision de diseno: por que se aborta en vez de devolver un codigo.</a:t>
-            </a:r>
-          </a:p>
-          <a:p>
-            <a:r>
-              <a:t>Ese bloque es el que distingue documentar de pensar, y es el que la solucion docente lee primero.</a:t>
+              <a:t>Depurar sin depurador es una habilidad concreta y se ensena en cuatro movimientos.</a:t>
+            </a:r>
+          </a:p>
+          <a:p>
+            <a:r>
+              <a:t>Primero, entender que error se esta leyendo, porque hay dos momentos distintos: el error de creacion, que es de sintaxis y lo devuelve el CREATE PROCEDURE senalando linea y posicion</a:t>
+            </a:r>
+          </a:p>
+          <a:p>
+            <a:r>
+              <a:t>Y el error de ejecucion, que es el que aparece con el CALL y es donde salen los nombres de tabla o columna equivocados.</a:t>
+            </a:r>
+          </a:p>
+          <a:p>
+            <a:r>
+              <a:t>A diferencia de Oracle no hay que consultar ninguna vista de errores ni verificar si el objeto quedo invalido: si el CREATE no protesto, el objeto esta creado; lo que no significa que funcione.</a:t>
+            </a:r>
+          </a:p>
+          <a:p>
+            <a:r>
+              <a:t>Segundo, dejar trazas con RAISE NOTICE 'llegue al paso 2, v_activa = %', v_activa; que imprime en la salida de mensajes sin abortar nada, y es el equivalente directo de lo que en Oracle se hace con la salida de servidor.</a:t>
+            </a:r>
+          </a:p>
+          <a:p>
+            <a:r>
+              <a:t>Tercero, aislar: tomar el SELECT activa INTO v_activa FROM mascota WHERE id_mascota = 3 y ejecutarlo suelto con el valor que fallo, para saber si el problema esta en la consulta o en la logica que la rodea.</a:t>
+            </a:r>
+          </a:p>
+          <a:p>
+            <a:r>
+              <a:t>Cuarto, probar con casos deliberados: un caso correcto y tres de error, cada uno en su bloque, escritos en resultado_prueba.</a:t>
+            </a:r>
+          </a:p>
+          <a:p>
+            <a:r>
+              <a:t>Un procedimiento con solo la captura del caso feliz no demuestra manejo de errores, y el Parcial 1 lo pregunta de frente.</a:t>
             </a:r>
           </a:p>
           <a:p>
@@ -934,22 +1010,7 @@
           </a:p>
           <a:p>
             <a:r>
-              <a:t>El contrato no es codigo, y hay que explicar para quien se escribe, porque si no el estudiante lo redacta como un resumen del codigo.</a:t>
-            </a:r>
-          </a:p>
-          <a:p>
-            <a:r>
-              <a:t>Un contrato sirve si permite escribir la llamada y manejar los errores sin leer el cuerpo.</a:t>
-            </a:r>
-          </a:p>
-          <a:p>
-            <a:r>
-              <a:t>Sin ella, quien llama no sabe si tiene que limpiar algo.</a:t>
-            </a:r>
-          </a:p>
-          <a:p>
-            <a:r>
-              <a:t>Fuera de la lamina (habla de la practica): La tabla de errores lleva el mensaje LITERAL, no una parafrasis, porque quien llama va a comparar contra ese texto —y porque es el mismo texto que la bateria de pruebas verifica, de modo que los dos entregables tienen que coincidir palabra por palabra.</a:t>
+              <a:t>Conviene mencionar que RAISE tiene niveles —NOTICE, WARNING, EXCEPTION— y que solo el ultimo aborta.</a:t>
             </a:r>
           </a:p>
         </p:txBody>
@@ -1019,37 +1080,52 @@
           <a:lstStyle/>
           <a:p>
             <a:r>
-              <a:t>TEXTO COMPLETO DE LA LÁMINA (se proyecta resumido):</a:t>
-            </a:r>
-          </a:p>
-          <a:p/>
-          <a:p>
-            <a:r>
-              <a:t>1. Firma exacta. `sp_agendar_cita(p_id_mascota INT, p_id_veterinario INT, p_fecha_hora TIMESTAMP)`: nombre, orden y tipo de cada parametro. Sin los tipos no es un contrato, es una descripcion. 2. Como se llama: un `CALL` de ejemplo con valores reales, copiable tal cual.</a:t>
-            </a:r>
-          </a:p>
-          <a:p/>
-          <a:p>
-            <a:r>
-              <a:t>3. Precondiciones — lo que garantiza quien llama: la mascota existe y esta activa, la franja del veterinario esta libre.</a:t>
-            </a:r>
-          </a:p>
-          <a:p/>
-          <a:p>
-            <a:r>
-              <a:t>4. Postcondiciones — lo que queda cierto si termina bien: una fila nueva en `cita` con estado `PROGRAMADA`, y ninguna si termina mal.</a:t>
-            </a:r>
-          </a:p>
-          <a:p/>
-          <a:p>
-            <a:r>
-              <a:t>5. Tabla de errores. Una fila por cada `RAISE EXCEPTION`, con el mensaje literal y que debe hacer la app al recibirlo. Es lo que vuelve programable el contrato: sin el texto exacto, la app no puede distinguir un error de otro.</a:t>
-            </a:r>
-          </a:p>
-          <a:p/>
-          <a:p>
-            <a:r>
-              <a:t>6. Decision de diseno. Por que se aborta en vez de devolver un codigo en un `OUT`: porque abortar deshace lo hecho, y un codigo que nadie revise deja la cita creada igual.</a:t>
+              <a:t>DESARROLLO (para explicarlo, no se proyecta):</a:t>
+            </a:r>
+          </a:p>
+          <a:p>
+            <a:r>
+              <a:t>El motor de la clase es PostgreSQL, que corre dentro del navegador, y por lo tanto todo el codigo de hoy es PL/pgSQL.</a:t>
+            </a:r>
+          </a:p>
+          <a:p>
+            <a:r>
+              <a:t>Vale un minuto de clase senalar las cuatro diferencias que mas cuestan —IS en lugar de AS, VARCHAR2 y NUMBER en lugar de TEXT e INT, RAISE_APPLICATION_ERROR en lugar de RAISE EXCEPTION</a:t>
+            </a:r>
+          </a:p>
+          <a:p>
+            <a:r>
+              <a:t>Y la barra final que aqui es un error— y no vale mas, porque cada minuto invertido en sintaxis del otro motor es un minuto que el estudiante no dedica a lo que se le va a evaluar.</a:t>
+            </a:r>
+          </a:p>
+          <a:p>
+            <a:r>
+              <a:t>La regla operativa del curso se mantiene: la fuente de verdad es el archivo sql en la carpeta del proyecto, nunca la pestana del navegador, y el estudiante va bien si reconstruye procedimiento, pruebas y datos pegando su propio guion.</a:t>
+            </a:r>
+          </a:p>
+          <a:p>
+            <a:r>
+              <a:t>NOTAS:</a:t>
+            </a:r>
+          </a:p>
+          <a:p>
+            <a:r>
+              <a:t>Ahi funcionan CREATE PROCEDURE, el dollar-quoting, RAISE EXCEPTION, los bloques DO, SQLERRM y SQLSTATE, y la tabla resultado_prueba: la evidencia de la clase es la salida del motor y no una promesa.</a:t>
+            </a:r>
+          </a:p>
+          <a:p>
+            <a:r>
+              <a:t>Oracle Live SQL sigue en el kit, pero cambia de papel y hay que decirlo sin ambiguedad: sirve como CONTRASTE de sintaxis para quien se vaya a encontrar Oracle en el trabajo.</a:t>
+            </a:r>
+          </a:p>
+          <a:p>
+            <a:r>
+              <a:t>Fuera de la lamina (habla de la practica): Este punto hay que decirlo con precision porque una version anterior de esta guia decia lo contrario y costaria puntos repetirla.</a:t>
+            </a:r>
+          </a:p>
+          <a:p>
+            <a:r>
+              <a:t>Fuera de la lamina (habla de la practica): Oracle Live SQL sigue en el kit, pero cambia de papel y hay que decirlo sin ambiguedad: sirve como CONTRASTE de sintaxis para quien se vaya a encontrar Oracle en el trabajo, no como sitio donde se hace el taller.</a:t>
             </a:r>
           </a:p>
         </p:txBody>
@@ -1124,42 +1200,37 @@
           </a:p>
           <a:p>
             <a:r>
-              <a:t>Un procedimiento se invoca para que HAGA algo y se llama con CALL sp_x(...); una funcion se invoca para que DEVUELVA un valor y se llama dentro de una expresion, SELECT fn_x(...).</a:t>
-            </a:r>
-          </a:p>
-          <a:p>
-            <a:r>
-              <a:t>No son dos sabores del mismo objeto: en PostgreSQL una funcion no puede hacer COMMIT ni ROLLBACK y un procedimiento si, y esa es la razon tecnica por la que el objeto de hoy es un procedimiento.</a:t>
-            </a:r>
-          </a:p>
-          <a:p>
-            <a:r>
-              <a:t>Otra diferencia que se nota en la practica: llamar a un procedimiento con SELECT sp_agendar_cita(...) devuelve un error explicito de PostgreSQL, que dice que sp_agendar_cita es un procedimiento y sugiere usar CALL.</a:t>
-            </a:r>
-          </a:p>
-          <a:p>
-            <a:r>
-              <a:t>Vale mostrarlo a proposito, porque es un mensaje que el estudiante va a encontrar y conviene que lo reconozca en vez de asustarse.</a:t>
-            </a:r>
-          </a:p>
-          <a:p>
-            <a:r>
-              <a:t>La funcion llega en la Clase 4 con fn_precio_consulta, y ahi la comparacion ya estara hecha.</a:t>
-            </a:r>
-          </a:p>
-          <a:p>
-            <a:r>
-              <a:t>Una FUNCTION devuelve un valor y se usa dentro de una consulta: FROM....</a:t>
-            </a:r>
-          </a:p>
-          <a:p>
-            <a:r>
-              <a:t>Un PROCEDURE no devuelve valor y se invoca como sentencia suelta:.</a:t>
-            </a:r>
-          </a:p>
-          <a:p>
-            <a:r>
-              <a:t>Llamar un procedimiento con SELECT es un error de PostgreSQL, no una variante.</a:t>
+              <a:t>Un segundo procedimiento no es relleno: es donde se practica una decision distinta. sp_registrar_consulta escribe en consulta</a:t>
+            </a:r>
+          </a:p>
+          <a:p>
+            <a:r>
+              <a:t>Y la Clase 1 dejo esa tabla con id_cita NOT NULL UNIQUE, porque una consulta pertenece a una cita y una cita tiene a lo sumo una consulta.</a:t>
+            </a:r>
+          </a:p>
+          <a:p>
+            <a:r>
+              <a:t>La pregunta interesante es entonces para que escribir la validacion, si el motor ya defiende el dato.</a:t>
+            </a:r>
+          </a:p>
+          <a:p>
+            <a:r>
+              <a:t>La primera es el mensaje: la restriccion produce un error tecnico que menciona el nombre del indice, y un IF EXISTS () THEN RAISE EXCEPTION 'ERROR: la cita % ya tiene consulta registrada', p_id_cita; produce el mensaje que la recepcionista puede entender.</a:t>
+            </a:r>
+          </a:p>
+          <a:p>
+            <a:r>
+              <a:t>La segunda es que el procedimiento puede validar lo que la restriccion no ve: que la cita exista, y que su estado no sea 'CANCELADA', porque no se documenta la atencion de una cita que se cancelo.</a:t>
+            </a:r>
+          </a:p>
+          <a:p>
+            <a:r>
+              <a:t>La restriccion es la ultima linea de defensa y sigue actuando cuando alguien entra por fuera; el procedimiento mejora el mensaje, no reemplaza la garantia.</a:t>
+            </a:r>
+          </a:p>
+          <a:p>
+            <a:r>
+              <a:t>El orden importa: comprobar con IF EXISTS () antes de insertar permite responder con un mensaje de negocio claro; dejar que choque contra el UNIQUE produce un error del motor que la aplicacion no sabe traducir.</a:t>
             </a:r>
           </a:p>
           <a:p>
@@ -1169,7 +1240,22 @@
           </a:p>
           <a:p>
             <a:r>
-              <a:t>Conviene cerrar la teoria con esta distincion, y decirla HOY.</a:t>
+              <a:t>Eso significa que registrar dos veces la consulta de la misma cita ya esta impedido por el motor: el segundo INSERT choca contra la restriccion de unicidad y falla.</a:t>
+            </a:r>
+          </a:p>
+          <a:p>
+            <a:r>
+              <a:t>La respuesta tiene dos partes y las dos valen.</a:t>
+            </a:r>
+          </a:p>
+          <a:p>
+            <a:r>
+              <a:t>Conviene decir tambien lo que NO hay que hacer: quitar la restriccion porque ya esta el procedimiento.</a:t>
+            </a:r>
+          </a:p>
+          <a:p>
+            <a:r>
+              <a:t>Esa jerarquia —declarativo primero, procedimiento encima— es exactamente lo que la Clase 4 va a formalizar.</a:t>
             </a:r>
           </a:p>
           <a:p>
@@ -1179,17 +1265,12 @@
           </a:p>
           <a:p>
             <a:r>
-              <a:t>SELECT nombre, fn_precio_consulta(...)</a:t>
-            </a:r>
-          </a:p>
-          <a:p>
-            <a:r>
-              <a:t>CALL sp_agendar_cita(3, 1, TIMESTAMP '2026-09-01 09:00')</a:t>
-            </a:r>
-          </a:p>
-          <a:p>
-            <a:r>
-              <a:t>Fuera de la lamina (habla de la practica): Conviene cerrar la teoria con esta distincion, y decirla HOY, porque el estudiante la va a necesitar en el taller de hoy y no la semana entrante.</a:t>
+              <a:t>SELECT 1 FROM consulta WHERE id_cita = p_id_cita</a:t>
+            </a:r>
+          </a:p>
+          <a:p>
+            <a:r>
+              <a:t>SELECT 1 FROM consulta WHERE id_cita = p_id_cita</a:t>
             </a:r>
           </a:p>
         </p:txBody>
@@ -1259,486 +1340,6 @@
           <a:lstStyle/>
           <a:p>
             <a:r>
-              <a:t>TEXTO COMPLETO DE LA LÁMINA (se proyecta resumido):</a:t>
-            </a:r>
-          </a:p>
-          <a:p/>
-          <a:p>
-            <a:r>
-              <a:t>`FUNCTION`: devuelve un valor y se invoca DENTRO de una consulta. `CREATE FUNCTION fn_precio(p_especie TEXT) RETURNS NUMERIC LANGUAGE plpgsql AS $fn$ ... RETURN v_precio; ... $fn$;` y se usa `SELECT nombre, fn_precio(especie) FROM mascota;`. Es la unica de las dos que cabe en la lista de columnas de un `SELECT`, en un `WHERE` o en un `ORDER BY`.</a:t>
-            </a:r>
-          </a:p>
-          <a:p/>
-          <a:p>
-            <a:r>
-              <a:t>`PROCEDURE`: ejecuta pasos y se invoca como sentencia suelta. `CALL sp_agendar_cita(3, 7, '2026-09-01 10:00');`. No se puede poner en un `SELECT`. Si lo intentas, el motor responde `sp_agendar_cita(...) is not a function`.</a:t>
-            </a:r>
-          </a:p>
-          <a:p/>
-          <a:p>
-            <a:r>
-              <a:t>Las dos pueden ser `LANGUAGE plpgsql`. El lenguaje no decide nada: es falso que una funcion necesite `LANGUAGE sql` para poder retornar un valor. `sp_agendar_cita` y `fn_precio` son las dos `plpgsql`.</a:t>
-            </a:r>
-          </a:p>
-          <a:p/>
-          <a:p>
-            <a:r>
-              <a:t>Un `PROCEDURE` si admite parametros `OUT` —y aun asi sigue sin poder usarse dentro de un `SELECT`. Devolver por `OUT` no es lo mismo que ser invocable en una consulta, y no es «la unica forma de retornar un valor».</a:t>
-            </a:r>
-          </a:p>
-          <a:p/>
-          <a:p>
-            <a:r>
-              <a:t>Lo que solo puede el procedimiento: manejar la transaccion. Un `PROCEDURE` puede hacer `COMMIT` o `ROLLBACK` adentro; una `FUNCTION` corre dentro de la transaccion de quien la llamo. Por eso agendar es procedimiento y la tarifa de la Clase 4 sera funcion.</a:t>
-            </a:r>
-          </a:p>
-        </p:txBody>
-      </p:sp>
-      <p:sp>
-        <p:nvSpPr>
-          <p:cNvPr id="4" name="Slide Number Placeholder 3"/>
-          <p:cNvSpPr>
-            <a:spLocks noGrp="1"/>
-          </p:cNvSpPr>
-          <p:nvPr>
-            <p:ph type="sldNum" idx="5" sz="quarter"/>
-          </p:nvPr>
-        </p:nvSpPr>
-        <p:spPr/>
-      </p:sp>
-    </p:spTree>
-  </p:cSld>
-  <p:clrMapOvr>
-    <a:masterClrMapping/>
-  </p:clrMapOvr>
-</p:notes>
-</file>
-
-<file path=ppt/notesSlides/notesSlide16.xml><?xml version="1.0" encoding="utf-8"?>
-<p:notes xmlns:a="http://schemas.openxmlformats.org/drawingml/2006/main" xmlns:p="http://schemas.openxmlformats.org/presentationml/2006/main" xmlns:r="http://schemas.openxmlformats.org/officeDocument/2006/relationships">
-  <p:cSld>
-    <p:spTree>
-      <p:nvGrpSpPr>
-        <p:cNvPr id="1" name=""/>
-        <p:cNvGrpSpPr/>
-        <p:nvPr/>
-      </p:nvGrpSpPr>
-      <p:grpSpPr>
-        <a:xfrm>
-          <a:off x="0" y="0"/>
-          <a:ext cx="0" cy="0"/>
-          <a:chOff x="0" y="0"/>
-          <a:chExt cx="0" cy="0"/>
-        </a:xfrm>
-      </p:grpSpPr>
-      <p:sp>
-        <p:nvSpPr>
-          <p:cNvPr id="2" name="Slide Image Placeholder 1"/>
-          <p:cNvSpPr>
-            <a:spLocks noGrp="1"/>
-          </p:cNvSpPr>
-          <p:nvPr>
-            <p:ph type="sldImg" idx="2"/>
-          </p:nvPr>
-        </p:nvSpPr>
-        <p:spPr/>
-      </p:sp>
-      <p:sp>
-        <p:nvSpPr>
-          <p:cNvPr id="3" name="Notes Placeholder 2"/>
-          <p:cNvSpPr>
-            <a:spLocks noGrp="1"/>
-          </p:cNvSpPr>
-          <p:nvPr>
-            <p:ph type="body" idx="3" sz="quarter"/>
-          </p:nvPr>
-        </p:nvSpPr>
-        <p:spPr/>
-        <p:txBody>
-          <a:bodyPr/>
-          <a:lstStyle/>
-          <a:p>
-            <a:r>
-              <a:t>DESARROLLO (para explicarlo, no se proyecta):</a:t>
-            </a:r>
-          </a:p>
-          <a:p>
-            <a:r>
-              <a:t>Depurar sin depurador es una habilidad concreta y se ensena en cuatro movimientos.</a:t>
-            </a:r>
-          </a:p>
-          <a:p>
-            <a:r>
-              <a:t>Primero, entender que error se esta leyendo, porque hay dos momentos distintos: el error de creacion, que es de sintaxis y lo devuelve el CREATE PROCEDURE senalando linea y posicion</a:t>
-            </a:r>
-          </a:p>
-          <a:p>
-            <a:r>
-              <a:t>Y el error de ejecucion, que es el que aparece con el CALL y es donde salen los nombres de tabla o columna equivocados.</a:t>
-            </a:r>
-          </a:p>
-          <a:p>
-            <a:r>
-              <a:t>A diferencia de Oracle no hay que consultar ninguna vista de errores ni verificar si el objeto quedo invalido: si el CREATE no protesto, el objeto esta creado; lo que no significa que funcione.</a:t>
-            </a:r>
-          </a:p>
-          <a:p>
-            <a:r>
-              <a:t>Segundo, dejar trazas con RAISE NOTICE 'llegue al paso 2, v_activa = %', v_activa; que imprime en la salida de mensajes sin abortar nada, y es el equivalente directo de lo que en Oracle se hace con la salida de servidor.</a:t>
-            </a:r>
-          </a:p>
-          <a:p>
-            <a:r>
-              <a:t>Tercero, aislar: tomar el SELECT activa INTO v_activa FROM mascota WHERE id_mascota = 3 y ejecutarlo suelto con el valor que fallo, para saber si el problema esta en la consulta o en la logica que la rodea.</a:t>
-            </a:r>
-          </a:p>
-          <a:p>
-            <a:r>
-              <a:t>Cuarto, probar con casos deliberados: un caso correcto y tres de error, cada uno en su bloque, escritos en resultado_prueba.</a:t>
-            </a:r>
-          </a:p>
-          <a:p>
-            <a:r>
-              <a:t>Un procedimiento con solo la captura del caso feliz no demuestra manejo de errores, y el Parcial 1 lo pregunta de frente.</a:t>
-            </a:r>
-          </a:p>
-          <a:p>
-            <a:r>
-              <a:t>NOTAS:</a:t>
-            </a:r>
-          </a:p>
-          <a:p>
-            <a:r>
-              <a:t>Conviene mencionar que RAISE tiene niveles —NOTICE, WARNING, EXCEPTION— y que solo el ultimo aborta.</a:t>
-            </a:r>
-          </a:p>
-        </p:txBody>
-      </p:sp>
-      <p:sp>
-        <p:nvSpPr>
-          <p:cNvPr id="4" name="Slide Number Placeholder 3"/>
-          <p:cNvSpPr>
-            <a:spLocks noGrp="1"/>
-          </p:cNvSpPr>
-          <p:nvPr>
-            <p:ph type="sldNum" idx="5" sz="quarter"/>
-          </p:nvPr>
-        </p:nvSpPr>
-        <p:spPr/>
-      </p:sp>
-    </p:spTree>
-  </p:cSld>
-  <p:clrMapOvr>
-    <a:masterClrMapping/>
-  </p:clrMapOvr>
-</p:notes>
-</file>
-
-<file path=ppt/notesSlides/notesSlide17.xml><?xml version="1.0" encoding="utf-8"?>
-<p:notes xmlns:a="http://schemas.openxmlformats.org/drawingml/2006/main" xmlns:p="http://schemas.openxmlformats.org/presentationml/2006/main" xmlns:r="http://schemas.openxmlformats.org/officeDocument/2006/relationships">
-  <p:cSld>
-    <p:spTree>
-      <p:nvGrpSpPr>
-        <p:cNvPr id="1" name=""/>
-        <p:cNvGrpSpPr/>
-        <p:nvPr/>
-      </p:nvGrpSpPr>
-      <p:grpSpPr>
-        <a:xfrm>
-          <a:off x="0" y="0"/>
-          <a:ext cx="0" cy="0"/>
-          <a:chOff x="0" y="0"/>
-          <a:chExt cx="0" cy="0"/>
-        </a:xfrm>
-      </p:grpSpPr>
-      <p:sp>
-        <p:nvSpPr>
-          <p:cNvPr id="2" name="Slide Image Placeholder 1"/>
-          <p:cNvSpPr>
-            <a:spLocks noGrp="1"/>
-          </p:cNvSpPr>
-          <p:nvPr>
-            <p:ph type="sldImg" idx="2"/>
-          </p:nvPr>
-        </p:nvSpPr>
-        <p:spPr/>
-      </p:sp>
-      <p:sp>
-        <p:nvSpPr>
-          <p:cNvPr id="3" name="Notes Placeholder 2"/>
-          <p:cNvSpPr>
-            <a:spLocks noGrp="1"/>
-          </p:cNvSpPr>
-          <p:nvPr>
-            <p:ph type="body" idx="3" sz="quarter"/>
-          </p:nvPr>
-        </p:nvSpPr>
-        <p:spPr/>
-        <p:txBody>
-          <a:bodyPr/>
-          <a:lstStyle/>
-          <a:p>
-            <a:r>
-              <a:t>DESARROLLO (para explicarlo, no se proyecta):</a:t>
-            </a:r>
-          </a:p>
-          <a:p>
-            <a:r>
-              <a:t>El motor de la clase es PostgreSQL, que corre dentro del navegador, y por lo tanto todo el codigo de hoy es PL/pgSQL.</a:t>
-            </a:r>
-          </a:p>
-          <a:p>
-            <a:r>
-              <a:t>Vale un minuto de clase senalar las cuatro diferencias que mas cuestan —IS en lugar de AS, VARCHAR2 y NUMBER en lugar de TEXT e INT, RAISE_APPLICATION_ERROR en lugar de RAISE EXCEPTION</a:t>
-            </a:r>
-          </a:p>
-          <a:p>
-            <a:r>
-              <a:t>Y la barra final que aqui es un error— y no vale mas, porque cada minuto invertido en sintaxis del otro motor es un minuto que el estudiante no dedica a lo que se le va a evaluar.</a:t>
-            </a:r>
-          </a:p>
-          <a:p>
-            <a:r>
-              <a:t>La regla operativa del curso se mantiene: la fuente de verdad es el archivo sql en la carpeta del proyecto, nunca la pestana del navegador, y el estudiante va bien si reconstruye procedimiento, pruebas y datos pegando su propio guion.</a:t>
-            </a:r>
-          </a:p>
-          <a:p>
-            <a:r>
-              <a:t>NOTAS:</a:t>
-            </a:r>
-          </a:p>
-          <a:p>
-            <a:r>
-              <a:t>Ahi funcionan CREATE PROCEDURE, el dollar-quoting, RAISE EXCEPTION, los bloques DO, SQLERRM y SQLSTATE, y la tabla resultado_prueba: la evidencia de la clase es la salida del motor y no una promesa.</a:t>
-            </a:r>
-          </a:p>
-          <a:p>
-            <a:r>
-              <a:t>Oracle Live SQL sigue en el kit, pero cambia de papel y hay que decirlo sin ambiguedad: sirve como CONTRASTE de sintaxis para quien se vaya a encontrar Oracle en el trabajo.</a:t>
-            </a:r>
-          </a:p>
-          <a:p>
-            <a:r>
-              <a:t>Fuera de la lamina (habla de la practica): Este punto hay que decirlo con precision porque una version anterior de esta guia decia lo contrario y costaria puntos repetirla.</a:t>
-            </a:r>
-          </a:p>
-          <a:p>
-            <a:r>
-              <a:t>Fuera de la lamina (habla de la practica): Oracle Live SQL sigue en el kit, pero cambia de papel y hay que decirlo sin ambiguedad: sirve como CONTRASTE de sintaxis para quien se vaya a encontrar Oracle en el trabajo, no como sitio donde se hace el taller.</a:t>
-            </a:r>
-          </a:p>
-        </p:txBody>
-      </p:sp>
-      <p:sp>
-        <p:nvSpPr>
-          <p:cNvPr id="4" name="Slide Number Placeholder 3"/>
-          <p:cNvSpPr>
-            <a:spLocks noGrp="1"/>
-          </p:cNvSpPr>
-          <p:nvPr>
-            <p:ph type="sldNum" idx="5" sz="quarter"/>
-          </p:nvPr>
-        </p:nvSpPr>
-        <p:spPr/>
-      </p:sp>
-    </p:spTree>
-  </p:cSld>
-  <p:clrMapOvr>
-    <a:masterClrMapping/>
-  </p:clrMapOvr>
-</p:notes>
-</file>
-
-<file path=ppt/notesSlides/notesSlide18.xml><?xml version="1.0" encoding="utf-8"?>
-<p:notes xmlns:a="http://schemas.openxmlformats.org/drawingml/2006/main" xmlns:p="http://schemas.openxmlformats.org/presentationml/2006/main" xmlns:r="http://schemas.openxmlformats.org/officeDocument/2006/relationships">
-  <p:cSld>
-    <p:spTree>
-      <p:nvGrpSpPr>
-        <p:cNvPr id="1" name=""/>
-        <p:cNvGrpSpPr/>
-        <p:nvPr/>
-      </p:nvGrpSpPr>
-      <p:grpSpPr>
-        <a:xfrm>
-          <a:off x="0" y="0"/>
-          <a:ext cx="0" cy="0"/>
-          <a:chOff x="0" y="0"/>
-          <a:chExt cx="0" cy="0"/>
-        </a:xfrm>
-      </p:grpSpPr>
-      <p:sp>
-        <p:nvSpPr>
-          <p:cNvPr id="2" name="Slide Image Placeholder 1"/>
-          <p:cNvSpPr>
-            <a:spLocks noGrp="1"/>
-          </p:cNvSpPr>
-          <p:nvPr>
-            <p:ph type="sldImg" idx="2"/>
-          </p:nvPr>
-        </p:nvSpPr>
-        <p:spPr/>
-      </p:sp>
-      <p:sp>
-        <p:nvSpPr>
-          <p:cNvPr id="3" name="Notes Placeholder 2"/>
-          <p:cNvSpPr>
-            <a:spLocks noGrp="1"/>
-          </p:cNvSpPr>
-          <p:nvPr>
-            <p:ph type="body" idx="3" sz="quarter"/>
-          </p:nvPr>
-        </p:nvSpPr>
-        <p:spPr/>
-        <p:txBody>
-          <a:bodyPr/>
-          <a:lstStyle/>
-          <a:p>
-            <a:r>
-              <a:t>DESARROLLO (para explicarlo, no se proyecta):</a:t>
-            </a:r>
-          </a:p>
-          <a:p>
-            <a:r>
-              <a:t>Un segundo procedimiento no es relleno: es donde se practica una decision distinta. sp_registrar_consulta escribe en consulta</a:t>
-            </a:r>
-          </a:p>
-          <a:p>
-            <a:r>
-              <a:t>Y la Clase 1 dejo esa tabla con id_cita NOT NULL UNIQUE, porque una consulta pertenece a una cita y una cita tiene a lo sumo una consulta.</a:t>
-            </a:r>
-          </a:p>
-          <a:p>
-            <a:r>
-              <a:t>La pregunta interesante es entonces para que escribir la validacion, si el motor ya defiende el dato.</a:t>
-            </a:r>
-          </a:p>
-          <a:p>
-            <a:r>
-              <a:t>La primera es el mensaje: la restriccion produce un error tecnico que menciona el nombre del indice, y un IF EXISTS () THEN RAISE EXCEPTION 'ERROR: la cita % ya tiene consulta registrada', p_id_cita; produce el mensaje que la recepcionista puede entender.</a:t>
-            </a:r>
-          </a:p>
-          <a:p>
-            <a:r>
-              <a:t>La segunda es que el procedimiento puede validar lo que la restriccion no ve: que la cita exista, y que su estado no sea 'CANCELADA', porque no se documenta la atencion de una cita que se cancelo.</a:t>
-            </a:r>
-          </a:p>
-          <a:p>
-            <a:r>
-              <a:t>La restriccion es la ultima linea de defensa y sigue actuando cuando alguien entra por fuera; el procedimiento mejora el mensaje, no reemplaza la garantia.</a:t>
-            </a:r>
-          </a:p>
-          <a:p>
-            <a:r>
-              <a:t>El orden importa: comprobar con IF EXISTS () antes de insertar permite responder con un mensaje de negocio claro; dejar que choque contra el UNIQUE produce un error del motor que la aplicacion no sabe traducir.</a:t>
-            </a:r>
-          </a:p>
-          <a:p>
-            <a:r>
-              <a:t>NOTAS:</a:t>
-            </a:r>
-          </a:p>
-          <a:p>
-            <a:r>
-              <a:t>Eso significa que registrar dos veces la consulta de la misma cita ya esta impedido por el motor: el segundo INSERT choca contra la restriccion de unicidad y falla.</a:t>
-            </a:r>
-          </a:p>
-          <a:p>
-            <a:r>
-              <a:t>La respuesta tiene dos partes y las dos valen.</a:t>
-            </a:r>
-          </a:p>
-          <a:p>
-            <a:r>
-              <a:t>Conviene decir tambien lo que NO hay que hacer: quitar la restriccion porque ya esta el procedimiento.</a:t>
-            </a:r>
-          </a:p>
-          <a:p>
-            <a:r>
-              <a:t>Esa jerarquia —declarativo primero, procedimiento encima— es exactamente lo que la Clase 4 va a formalizar.</a:t>
-            </a:r>
-          </a:p>
-          <a:p>
-            <a:r>
-              <a:t>CÓDIGO CITADO (referencia):</a:t>
-            </a:r>
-          </a:p>
-          <a:p>
-            <a:r>
-              <a:t>SELECT 1 FROM consulta WHERE id_cita = p_id_cita</a:t>
-            </a:r>
-          </a:p>
-          <a:p>
-            <a:r>
-              <a:t>SELECT 1 FROM consulta WHERE id_cita = p_id_cita</a:t>
-            </a:r>
-          </a:p>
-        </p:txBody>
-      </p:sp>
-      <p:sp>
-        <p:nvSpPr>
-          <p:cNvPr id="4" name="Slide Number Placeholder 3"/>
-          <p:cNvSpPr>
-            <a:spLocks noGrp="1"/>
-          </p:cNvSpPr>
-          <p:nvPr>
-            <p:ph type="sldNum" idx="5" sz="quarter"/>
-          </p:nvPr>
-        </p:nvSpPr>
-        <p:spPr/>
-      </p:sp>
-    </p:spTree>
-  </p:cSld>
-  <p:clrMapOvr>
-    <a:masterClrMapping/>
-  </p:clrMapOvr>
-</p:notes>
-</file>
-
-<file path=ppt/notesSlides/notesSlide19.xml><?xml version="1.0" encoding="utf-8"?>
-<p:notes xmlns:a="http://schemas.openxmlformats.org/drawingml/2006/main" xmlns:p="http://schemas.openxmlformats.org/presentationml/2006/main" xmlns:r="http://schemas.openxmlformats.org/officeDocument/2006/relationships">
-  <p:cSld>
-    <p:spTree>
-      <p:nvGrpSpPr>
-        <p:cNvPr id="1" name=""/>
-        <p:cNvGrpSpPr/>
-        <p:nvPr/>
-      </p:nvGrpSpPr>
-      <p:grpSpPr>
-        <a:xfrm>
-          <a:off x="0" y="0"/>
-          <a:ext cx="0" cy="0"/>
-          <a:chOff x="0" y="0"/>
-          <a:chExt cx="0" cy="0"/>
-        </a:xfrm>
-      </p:grpSpPr>
-      <p:sp>
-        <p:nvSpPr>
-          <p:cNvPr id="2" name="Slide Image Placeholder 1"/>
-          <p:cNvSpPr>
-            <a:spLocks noGrp="1"/>
-          </p:cNvSpPr>
-          <p:nvPr>
-            <p:ph type="sldImg" idx="2"/>
-          </p:nvPr>
-        </p:nvSpPr>
-        <p:spPr/>
-      </p:sp>
-      <p:sp>
-        <p:nvSpPr>
-          <p:cNvPr id="3" name="Notes Placeholder 2"/>
-          <p:cNvSpPr>
-            <a:spLocks noGrp="1"/>
-          </p:cNvSpPr>
-          <p:nvPr>
-            <p:ph type="body" idx="3" sz="quarter"/>
-          </p:nvPr>
-        </p:nvSpPr>
-        <p:spPr/>
-        <p:txBody>
-          <a:bodyPr/>
-          <a:lstStyle/>
-          <a:p>
-            <a:r>
               <a:t>DESARROLLO (para explicarlo, no se proyecta):</a:t>
             </a:r>
           </a:p>
@@ -1914,47 +1515,57 @@
           </a:p>
           <a:p>
             <a:r>
-              <a:t>Un procedimiento almacenado es un bloque de codigo con nombre propio que vive dentro de la base de datos, y las dos palabras que hay que desempacar son guardado e invocado, porque son las que lo separan de un archivo sql en el computador de alguien.</a:t>
-            </a:r>
-          </a:p>
-          <a:p>
-            <a:r>
-              <a:t>Guardado significa que el fuente queda en el catalogo del motor y se puede recuperar sin depender de que su autor siga en el proyecto: en PostgreSQL, SELECT prosrc FROM pg_proc WHERE proname = 'sp_agendar_cita' devuelve el cuerpo</a:t>
-            </a:r>
-          </a:p>
-          <a:p>
-            <a:r>
-              <a:t>Y SELECT pg_get_functiondef('sp_agendar_cita'::regproc) devuelve la definicion completa lista para volver a ejecutar.</a:t>
-            </a:r>
-          </a:p>
-          <a:p>
-            <a:r>
-              <a:t>Consecuencia practica: si el estudiante cierra la pestana, el procedimiento no se perdio, esta en el motor.</a:t>
-            </a:r>
-          </a:p>
-          <a:p>
-            <a:r>
-              <a:t>Invocado significa que hay una sola linea que dispara varias sentencias:.</a:t>
-            </a:r>
-          </a:p>
-          <a:p>
-            <a:r>
-              <a:t>Y hay algo mas importante que el ahorro: la regla queda escrita UNA vez y ninguna pantalla puede saltarsela.</a:t>
-            </a:r>
-          </a:p>
-          <a:p>
-            <a:r>
-              <a:t>La Clase 1 dejo el esquema y la Clase 2 la matriz de roles; esta clase es donde la base de datos deja de ser un almacen pasivo y empieza a contener comportamiento.</a:t>
-            </a:r>
-          </a:p>
-          <a:p>
-            <a:r>
-              <a:t>En PostgreSQL no existe ese estado intermedio: el CREATE PROCEDURE valida la SINTAXIS del cuerpo y, si esta bien escrito, el objeto queda creado y valido, pero las tablas y columnas que el cuerpo menciona NO se verifican hasta la primera ejecucion.</a:t>
-            </a:r>
-          </a:p>
-          <a:p>
-            <a:r>
-              <a:t>La consecuencia practica es concreta y hay que anticiparla: un procedimiento que escribe INSERT INTO citas en lugar de cita se crea sin una sola queja y falla la primera vez que se lo llama.</a:t>
+              <a:t>Se escribe LANGUAGE plpgsql AS $proc$ DECLARE...</a:t>
+            </a:r>
+          </a:p>
+          <a:p>
+            <a:r>
+              <a:t>AS introduce el cuerpo, y aqui esta la trampa de sintaxis mas comun para quien viene de Oracle: alla se escribe IS, aqui IS no existe en este lugar.</a:t>
+            </a:r>
+          </a:p>
+          <a:p>
+            <a:r>
+              <a:t>Los delimitadores $proc$ son lo que se llama dollar-quoting y existen por una razon mecanica: el cuerpo es, para el motor, una cadena de texto</a:t>
+            </a:r>
+          </a:p>
+          <a:p>
+            <a:r>
+              <a:t>Y esa cadena contiene punto y coma y comillas simples; si se delimitara con comillas habria que duplicar cada comilla interna.</a:t>
+            </a:r>
+          </a:p>
+          <a:p>
+            <a:r>
+              <a:t>Con $proc$ el motor sabe que todo lo que hay hasta el siguiente $proc$ es el cuerpo.</a:t>
+            </a:r>
+          </a:p>
+          <a:p>
+            <a:r>
+              <a:t>La etiqueta entre los dolares es arbitraria: $$ funciona igual, y se usa una etiqueta con nombre cuando hay bloques anidados.</a:t>
+            </a:r>
+          </a:p>
+          <a:p>
+            <a:r>
+              <a:t>El punto y coma final despues del ultimo $proc$ si es obligatorio, y en cambio la barra sola en una linea, que en Oracle cierra el bloque, aqui es un error de sintaxis.</a:t>
+            </a:r>
+          </a:p>
+          <a:p>
+            <a:r>
+              <a:t>Los nombres de los tipos son la otra mitad de la lista: INT, NUMERIC, TEXT, VARCHAR(n), TIMESTAMP, BOOLEAN, DATE.</a:t>
+            </a:r>
+          </a:p>
+          <a:p>
+            <a:r>
+              <a:t>VARCHAR2 y NUMBER no existen en PostgreSQL.</a:t>
+            </a:r>
+          </a:p>
+          <a:p>
+            <a:r>
+              <a:t>Y hay un detalle del proyecto que vale mas que la sintaxis: el procedimiento recibe TRES parametros y no cuatro, porque id_cita es SERIAL, es decir el motor genera el valor.</a:t>
+            </a:r>
+          </a:p>
+          <a:p>
+            <a:r>
+              <a:t>Pasarle el identificador desde afuera obliga a la aplicacion a saber cual sigue, que es exactamente el problema que la columna SERIAL resuelve.</a:t>
             </a:r>
           </a:p>
           <a:p>
@@ -1964,22 +1575,22 @@
           </a:p>
           <a:p>
             <a:r>
-              <a:t>En lugar de enviar cuatro sentencias y esperar cuatro respuestas por la red, la aplicacion envia una y recibe un resultado.</a:t>
-            </a:r>
-          </a:p>
-          <a:p>
-            <a:r>
-              <a:t>Conviene senalar de entrada una diferencia con Oracle que importa hoy, porque cambia como se depura.</a:t>
-            </a:r>
-          </a:p>
-          <a:p>
-            <a:r>
-              <a:t>En Oracle el procedimiento se compila al crearlo y, si algo esta mal, el objeto queda creado pero invalido.</a:t>
-            </a:r>
-          </a:p>
-          <a:p>
-            <a:r>
-              <a:t>Por eso la regla del dia es que crear el procedimiento no es evidencia de nada; la evidencia es el CALL corriendo.</a:t>
+              <a:t>El molde es fijo y conviene dictarlo entero antes de escribir una sola validacion.</a:t>
+            </a:r>
+          </a:p>
+          <a:p>
+            <a:r>
+              <a:t>END; $proc$; y cada pieza tiene su razon.</a:t>
+            </a:r>
+          </a:p>
+          <a:p>
+            <a:r>
+              <a:t>LANGUAGE plpgsql hace falta porque PostgreSQL admite varios lenguajes procedimentales y no adivina cual se esta usando.</a:t>
+            </a:r>
+          </a:p>
+          <a:p>
+            <a:r>
+              <a:t>Un estudiante que agregue p_id_cita no comete un error de sintaxis, comete un error de diseno.</a:t>
             </a:r>
           </a:p>
           <a:p>
@@ -1989,107 +1600,17 @@
           </a:p>
           <a:p>
             <a:r>
-              <a:t>CALL sp_agendar_cita(1, 2, TIMESTAMP '2026-09-15 10:00:00')</a:t>
-            </a:r>
-          </a:p>
-        </p:txBody>
-      </p:sp>
-      <p:sp>
-        <p:nvSpPr>
-          <p:cNvPr id="4" name="Slide Number Placeholder 3"/>
-          <p:cNvSpPr>
-            <a:spLocks noGrp="1"/>
-          </p:cNvSpPr>
-          <p:nvPr>
-            <p:ph type="sldNum" idx="5" sz="quarter"/>
-          </p:nvPr>
-        </p:nvSpPr>
-        <p:spPr/>
-      </p:sp>
-    </p:spTree>
-  </p:cSld>
-  <p:clrMapOvr>
-    <a:masterClrMapping/>
-  </p:clrMapOvr>
-</p:notes>
-</file>
-
-<file path=ppt/notesSlides/notesSlide20.xml><?xml version="1.0" encoding="utf-8"?>
-<p:notes xmlns:a="http://schemas.openxmlformats.org/drawingml/2006/main" xmlns:p="http://schemas.openxmlformats.org/presentationml/2006/main" xmlns:r="http://schemas.openxmlformats.org/officeDocument/2006/relationships">
-  <p:cSld>
-    <p:spTree>
-      <p:nvGrpSpPr>
-        <p:cNvPr id="1" name=""/>
-        <p:cNvGrpSpPr/>
-        <p:nvPr/>
-      </p:nvGrpSpPr>
-      <p:grpSpPr>
-        <a:xfrm>
-          <a:off x="0" y="0"/>
-          <a:ext cx="0" cy="0"/>
-          <a:chOff x="0" y="0"/>
-          <a:chExt cx="0" cy="0"/>
-        </a:xfrm>
-      </p:grpSpPr>
-      <p:sp>
-        <p:nvSpPr>
-          <p:cNvPr id="2" name="Slide Image Placeholder 1"/>
-          <p:cNvSpPr>
-            <a:spLocks noGrp="1"/>
-          </p:cNvSpPr>
-          <p:nvPr>
-            <p:ph type="sldImg" idx="2"/>
-          </p:nvPr>
-        </p:nvSpPr>
-        <p:spPr/>
-      </p:sp>
-      <p:sp>
-        <p:nvSpPr>
-          <p:cNvPr id="3" name="Notes Placeholder 2"/>
-          <p:cNvSpPr>
-            <a:spLocks noGrp="1"/>
-          </p:cNvSpPr>
-          <p:nvPr>
-            <p:ph type="body" idx="3" sz="quarter"/>
-          </p:nvPr>
-        </p:nvSpPr>
-        <p:spPr/>
-        <p:txBody>
-          <a:bodyPr/>
-          <a:lstStyle/>
-          <a:p>
-            <a:r>
-              <a:t>TEXTO COMPLETO DE LA LÁMINA (se proyecta resumido):</a:t>
-            </a:r>
-          </a:p>
-          <a:p/>
-          <a:p>
-            <a:r>
-              <a:t>Herramienta: PostgreSQL + Google Docs</a:t>
-            </a:r>
-          </a:p>
-          <a:p/>
-          <a:p>
-            <a:r>
-              <a:t>Demo: sp_agendar_cita en PL/pgSQL: las 3 validaciones con RAISE EXCEPTION y la bateria de bloques DO que las prueba.</a:t>
-            </a:r>
-          </a:p>
-          <a:p/>
-          <a:p>
-            <a:r>
-              <a:t>Sigan el mismo dominio de la clínica (no inventen otro caso).</a:t>
-            </a:r>
-          </a:p>
-          <a:p/>
-          <a:p>
-            <a:r>
-              <a:t>Qué observar: el CALL valido inserta una cita y los invalidos abortan con su mensaje literal; el `COUNT(*)` de cita confirma que los fallidos no dejaron nada.</a:t>
-            </a:r>
-          </a:p>
-          <a:p/>
-          <a:p>
-            <a:r>
-              <a:t>Qué observar: el procedimiento queda guardado en el motor: cerrar la sesion no lo borra, y cualquier cliente lo invoca con CALL.</a:t>
+              <a:t>CREATE OR REPLACE PROCEDURE sp_agendar_cita(p_id_mascota INT, p_id_veterinario INT, p_fecha_hora TIMESTAMP)</a:t>
+            </a:r>
+          </a:p>
+          <a:p>
+            <a:r>
+              <a:t>Fuera de la lamina (habla de la practica): El molde es fijo y conviene dictarlo entero antes de escribir una sola validacion, porque es donde se pierden los puntos sin haber entendido nada mal.</a:t>
+            </a:r>
+          </a:p>
+          <a:p>
+            <a:r>
+              <a:t>Fuera de la lamina (habla de la practica): Un estudiante que agregue p_id_cita no comete un error de sintaxis, comete un error de diseno, y la rubrica lo mira.</a:t>
             </a:r>
           </a:p>
         </p:txBody>
@@ -2164,57 +1685,42 @@
           </a:p>
           <a:p>
             <a:r>
-              <a:t>Se escribe LANGUAGE plpgsql AS $proc$ DECLARE...</a:t>
-            </a:r>
-          </a:p>
-          <a:p>
-            <a:r>
-              <a:t>AS introduce el cuerpo, y aqui esta la trampa de sintaxis mas comun para quien viene de Oracle: alla se escribe IS, aqui IS no existe en este lugar.</a:t>
-            </a:r>
-          </a:p>
-          <a:p>
-            <a:r>
-              <a:t>Los delimitadores $proc$ son lo que se llama dollar-quoting y existen por una razon mecanica: el cuerpo es, para el motor, una cadena de texto</a:t>
-            </a:r>
-          </a:p>
-          <a:p>
-            <a:r>
-              <a:t>Y esa cadena contiene punto y coma y comillas simples; si se delimitara con comillas habria que duplicar cada comilla interna.</a:t>
-            </a:r>
-          </a:p>
-          <a:p>
-            <a:r>
-              <a:t>Con $proc$ el motor sabe que todo lo que hay hasta el siguiente $proc$ es el cuerpo.</a:t>
-            </a:r>
-          </a:p>
-          <a:p>
-            <a:r>
-              <a:t>La etiqueta entre los dolares es arbitraria: $$ funciona igual, y se usa una etiqueta con nombre cuando hay bloques anidados.</a:t>
-            </a:r>
-          </a:p>
-          <a:p>
-            <a:r>
-              <a:t>El punto y coma final despues del ultimo $proc$ si es obligatorio, y en cambio la barra sola en una linea, que en Oracle cierra el bloque, aqui es un error de sintaxis.</a:t>
-            </a:r>
-          </a:p>
-          <a:p>
-            <a:r>
-              <a:t>Los nombres de los tipos son la otra mitad de la lista: INT, NUMERIC, TEXT, VARCHAR(n), TIMESTAMP, BOOLEAN, DATE.</a:t>
-            </a:r>
-          </a:p>
-          <a:p>
-            <a:r>
-              <a:t>VARCHAR2 y NUMBER no existen en PostgreSQL.</a:t>
-            </a:r>
-          </a:p>
-          <a:p>
-            <a:r>
-              <a:t>Y hay un detalle del proyecto que vale mas que la sintaxis: el procedimiento recibe TRES parametros y no cuatro, porque id_cita es SERIAL, es decir el motor genera el valor.</a:t>
-            </a:r>
-          </a:p>
-          <a:p>
-            <a:r>
-              <a:t>Pasarle el identificador desde afuera obliga a la aplicacion a saber cual sigue, que es exactamente el problema que la columna SERIAL resuelve.</a:t>
+              <a:t>Los parametros tienen modo, y el modo es la direccion en la que viaja el dato.</a:t>
+            </a:r>
+          </a:p>
+          <a:p>
+            <a:r>
+              <a:t>IN es el modo por omision y no se escribe: p_id_mascota INT ya es IN.</a:t>
+            </a:r>
+          </a:p>
+          <a:p>
+            <a:r>
+              <a:t>Si no la mira —y nadie mira lo que no falla— la regla de negocio no se cumplio.</a:t>
+            </a:r>
+          </a:p>
+          <a:p>
+            <a:r>
+              <a:t>Abortar con RAISE EXCEPTION invierte la carga: la aplicacion no puede ignorar el error porque el motor le devolvio un fallo, y ademas nada quedo escrito.</a:t>
+            </a:r>
+          </a:p>
+          <a:p>
+            <a:r>
+              <a:t>El encabezado, en todo caso, es un contrato: nombre, orden y tipos.</a:t>
+            </a:r>
+          </a:p>
+          <a:p>
+            <a:r>
+              <a:t>Vale decirlo con crudeza porque impacta la Clase 12, cuando la aplicacion consuma estos procedimientos: si alguien intercambia el orden de dos parametros del mismo tipo</a:t>
+            </a:r>
+          </a:p>
+          <a:p>
+            <a:r>
+              <a:t>El procedimiento se crea igual, la aplicacion sigue llamandolo sin error y agenda la cita para la mascota equivocada.</a:t>
+            </a:r>
+          </a:p>
+          <a:p>
+            <a:r>
+              <a:t>La proteccion practica, convencion recomendada y no regla dura, es llamar con notacion nombrada,, porque asi el orden deja de importar y la llamada se lee sola seis meses despues.</a:t>
             </a:r>
           </a:p>
           <a:p>
@@ -2224,22 +1730,27 @@
           </a:p>
           <a:p>
             <a:r>
-              <a:t>El molde es fijo y conviene dictarlo entero antes de escribir una sola validacion.</a:t>
-            </a:r>
-          </a:p>
-          <a:p>
-            <a:r>
-              <a:t>END; $proc$; y cada pieza tiene su razon.</a:t>
-            </a:r>
-          </a:p>
-          <a:p>
-            <a:r>
-              <a:t>LANGUAGE plpgsql hace falta porque PostgreSQL admite varios lenguajes procedimentales y no adivina cual se esta usando.</a:t>
-            </a:r>
-          </a:p>
-          <a:p>
-            <a:r>
-              <a:t>Un estudiante que agregue p_id_cita no comete un error de sintaxis, comete un error de diseno.</a:t>
+              <a:t>Dentro del cuerpo un parametro IN se comporta como una variable local, asi que se le puede asignar, aunque hacerlo confunde a quien lee y no cambia nada afuera.</a:t>
+            </a:r>
+          </a:p>
+          <a:p>
+            <a:r>
+              <a:t>OUT devuelve un valor a quien llama, e INOUT entra con valor y sale modificado.</a:t>
+            </a:r>
+          </a:p>
+          <a:p>
+            <a:r>
+              <a:t>Hay una particularidad de PostgreSQL que conviene decir porque el estudiante que busque en internet va a tropezar con ella: en un procedimiento, un parametro OUT tambien hay que pasarlo en la llamada, de modo que la sintaxis termina siendo CALL sp_x(1, 2, NULL) con un NULL de relleno; es incomodo, y es una de las razones por las que hoy no se usan.</a:t>
+            </a:r>
+          </a:p>
+          <a:p>
+            <a:r>
+              <a:t>La otra razon es de diseno y es la que hay que defender en clase.</a:t>
+            </a:r>
+          </a:p>
+          <a:p>
+            <a:r>
+              <a:t>Devolver el error en un parametro OUT significa que el procedimiento hizo su trabajo, dejo la fila insertada y ademas puso un texto en una variable que la aplicacion PUEDE mirar.</a:t>
             </a:r>
           </a:p>
           <a:p>
@@ -2249,17 +1760,12 @@
           </a:p>
           <a:p>
             <a:r>
-              <a:t>CREATE OR REPLACE PROCEDURE sp_agendar_cita(p_id_mascota INT, p_id_veterinario INT, p_fecha_hora TIMESTAMP)</a:t>
-            </a:r>
-          </a:p>
-          <a:p>
-            <a:r>
-              <a:t>Fuera de la lamina (habla de la practica): El molde es fijo y conviene dictarlo entero antes de escribir una sola validacion, porque es donde se pierden los puntos sin haber entendido nada mal.</a:t>
-            </a:r>
-          </a:p>
-          <a:p>
-            <a:r>
-              <a:t>Fuera de la lamina (habla de la practica): Un estudiante que agregue p_id_cita no comete un error de sintaxis, comete un error de diseno, y la rubrica lo mira.</a:t>
+              <a:t>CALL sp_agendar_cita(p_id_mascota =&gt; 1, p_id_veterinario =&gt; 2, p_fecha_hora =&gt; TIMESTAMP '2026-09-15 10:00:00')</a:t>
+            </a:r>
+          </a:p>
+          <a:p>
+            <a:r>
+              <a:t>Fuera de la lamina (habla de la practica): La otra razon es de diseno y es la que hay que defender en clase, porque es la decision que la solucion docente califica.</a:t>
             </a:r>
           </a:p>
         </p:txBody>
@@ -2334,42 +1840,67 @@
           </a:p>
           <a:p>
             <a:r>
-              <a:t>Los parametros tienen modo, y el modo es la direccion en la que viaja el dato.</a:t>
-            </a:r>
-          </a:p>
-          <a:p>
-            <a:r>
-              <a:t>IN es el modo por omision y no se escribe: p_id_mascota INT ya es IN.</a:t>
-            </a:r>
-          </a:p>
-          <a:p>
-            <a:r>
-              <a:t>Si no la mira —y nadie mira lo que no falla— la regla de negocio no se cumplio.</a:t>
-            </a:r>
-          </a:p>
-          <a:p>
-            <a:r>
-              <a:t>Abortar con RAISE EXCEPTION invierte la carga: la aplicacion no puede ignorar el error porque el motor le devolvio un fallo, y ademas nada quedo escrito.</a:t>
-            </a:r>
-          </a:p>
-          <a:p>
-            <a:r>
-              <a:t>El encabezado, en todo caso, es un contrato: nombre, orden y tipos.</a:t>
-            </a:r>
-          </a:p>
-          <a:p>
-            <a:r>
-              <a:t>Vale decirlo con crudeza porque impacta la Clase 12, cuando la aplicacion consuma estos procedimientos: si alguien intercambia el orden de dos parametros del mismo tipo</a:t>
-            </a:r>
-          </a:p>
-          <a:p>
-            <a:r>
-              <a:t>El procedimiento se crea igual, la aplicacion sigue llamandolo sin error y agenda la cita para la mascota equivocada.</a:t>
-            </a:r>
-          </a:p>
-          <a:p>
-            <a:r>
-              <a:t>La proteccion practica, convencion recomendada y no regla dura, es llamar con notacion nombrada,, porque asi el orden deja de importar y la llamada se lee sola seis meses despues.</a:t>
+              <a:t>Esta es la parte que convierte una consulta con nombre en logica de negocio.</a:t>
+            </a:r>
+          </a:p>
+          <a:p>
+            <a:r>
+              <a:t>La forma es RAISE EXCEPTION 'ERROR: la mascota % no existe', p_id_mascota; y hay cuatro cosas que decir sobre esa linea.</a:t>
+            </a:r>
+          </a:p>
+          <a:p>
+            <a:r>
+              <a:t>Primera, el signo de porcentaje es el marcador de sustitucion de PL/pgSQL: se reemplaza, en orden, por las expresiones que siguen a la coma, y si hay mas marcadores que expresiones el motor lanza un error de formato.</a:t>
+            </a:r>
+          </a:p>
+          <a:p>
+            <a:r>
+              <a:t>Para imprimir un porcentaje literal se escribe dos veces.</a:t>
+            </a:r>
+          </a:p>
+          <a:p>
+            <a:r>
+              <a:t>Segunda, el mensaje es parte de la interfaz publica del procedimiento: es lo que la aplicacion va a mostrar y lo que la bateria de pruebas va a verificar, asi que se escribe pensando en la recepcionista de la clínica y no en el programador.</a:t>
+            </a:r>
+          </a:p>
+          <a:p>
+            <a:r>
+              <a:t>Tercera, y es lo decisivo: RAISE EXCEPTION aborta.</a:t>
+            </a:r>
+          </a:p>
+          <a:p>
+            <a:r>
+              <a:t>Es imposible que quede una cita a medias, y no porque el codigo lo cuide, sino porque el motor lo garantiza.</a:t>
+            </a:r>
+          </a:p>
+          <a:p>
+            <a:r>
+              <a:t>Cuarta, cada excepcion lleva un codigo SQLSTATE; el de un RAISE EXCEPTION sin mas indicaciones es P0001</a:t>
+            </a:r>
+          </a:p>
+          <a:p>
+            <a:r>
+              <a:t>Y se puede fijar uno propio con USING ERRCODE, lo cual permite que la aplicacion distinga un error de negocio de un fallo de la base sin leer el texto del mensaje.</a:t>
+            </a:r>
+          </a:p>
+          <a:p>
+            <a:r>
+              <a:t>Falta la mecanica de la primera validacion, que es donde el grupo se atora.</a:t>
+            </a:r>
+          </a:p>
+          <a:p>
+            <a:r>
+              <a:t>Se escribe y despues IF NOT FOUND THEN.</a:t>
+            </a:r>
+          </a:p>
+          <a:p>
+            <a:r>
+              <a:t>Ese es el error silencioso mas caro del dia y la razon por la que IF NOT FOUND va primero.</a:t>
+            </a:r>
+          </a:p>
+          <a:p>
+            <a:r>
+              <a:t>Con clave primaria en el WHERE eso no puede ocurrir, y por eso hoy no se usa STRICT.</a:t>
             </a:r>
           </a:p>
           <a:p>
@@ -2379,27 +1910,32 @@
           </a:p>
           <a:p>
             <a:r>
-              <a:t>Dentro del cuerpo un parametro IN se comporta como una variable local, asi que se le puede asignar, aunque hacerlo confunde a quien lee y no cambia nada afuera.</a:t>
-            </a:r>
-          </a:p>
-          <a:p>
-            <a:r>
-              <a:t>OUT devuelve un valor a quien llama, e INOUT entra con valor y sale modificado.</a:t>
-            </a:r>
-          </a:p>
-          <a:p>
-            <a:r>
-              <a:t>Hay una particularidad de PostgreSQL que conviene decir porque el estudiante que busque en internet va a tropezar con ella: en un procedimiento, un parametro OUT tambien hay que pasarlo en la llamada, de modo que la sintaxis termina siendo CALL sp_x(1, 2, NULL) con un NULL de relleno; es incomodo, y es una de las razones por las que hoy no se usan.</a:t>
-            </a:r>
-          </a:p>
-          <a:p>
-            <a:r>
-              <a:t>La otra razon es de diseno y es la que hay que defender en clase.</a:t>
-            </a:r>
-          </a:p>
-          <a:p>
-            <a:r>
-              <a:t>Devolver el error en un parametro OUT significa que el procedimiento hizo su trabajo, dejo la fila insertada y ademas puso un texto en una variable que la aplicacion PUEDE mirar.</a:t>
+              <a:t>No sale del procedimiento con un aviso, lanza un error que propaga hasta quien llamo, y todo lo que el procedimiento hubiera escrito antes se deshace.</a:t>
+            </a:r>
+          </a:p>
+          <a:p>
+            <a:r>
+              <a:t>Eso ultimo se menciona y no se desarrolla: hoy basta con el texto.</a:t>
+            </a:r>
+          </a:p>
+          <a:p>
+            <a:r>
+              <a:t>Hay que explicar por que funciona, porque no es evidente: en PL/pgSQL, un SELECT INTO deja una variable especial llamada FOUND en verdadero si devolvio al menos una fila y en falso si no devolvio ninguna, y NOT FOUND es simplemente su negacion.</a:t>
+            </a:r>
+          </a:p>
+          <a:p>
+            <a:r>
+              <a:t>Y hay que decir tambien lo que NO pasa, porque es lo contrario de Oracle: si el SELECT INTO no encuentra nada, PL/pgSQL no lanza NO_DATA_FOUND, deja la variable en nulo y sigue adelante.</a:t>
+            </a:r>
+          </a:p>
+          <a:p>
+            <a:r>
+              <a:t>Quien espere la excepcion de Oracle escribe un procedimiento que, ante una mascota inexistente, compara nulo contra 'S', obtiene nulo, entra por el ELSE y termina insertando la cita.</a:t>
+            </a:r>
+          </a:p>
+          <a:p>
+            <a:r>
+              <a:t>Si el SELECT devuelve varias filas, en cambio, PL/pgSQL se queda con la primera sin avisar, salvo que se escriba STRICT, que entonces si lanza excepcion en los dos casos.</a:t>
             </a:r>
           </a:p>
           <a:p>
@@ -2409,12 +1945,12 @@
           </a:p>
           <a:p>
             <a:r>
-              <a:t>CALL sp_agendar_cita(p_id_mascota =&gt; 1, p_id_veterinario =&gt; 2, p_fecha_hora =&gt; TIMESTAMP '2026-09-15 10:00:00')</a:t>
-            </a:r>
-          </a:p>
-          <a:p>
-            <a:r>
-              <a:t>Fuera de la lamina (habla de la practica): La otra razon es de diseno y es la que hay que defender en clase, porque es la decision que la solucion docente califica.</a:t>
+              <a:t>SELECT activa INTO v_activa FROM mascota WHERE id_mascota = p_id_mascota</a:t>
+            </a:r>
+          </a:p>
+          <a:p>
+            <a:r>
+              <a:t>Fuera de la lamina (habla de la practica): Esta es la parte que convierte una consulta con nombre en logica de negocio, y es el mecanismo que la pregunta 1 de la clase califica con treinta y cinco puntos.</a:t>
             </a:r>
           </a:p>
         </p:txBody>
@@ -2489,67 +2025,57 @@
           </a:p>
           <a:p>
             <a:r>
-              <a:t>Esta es la parte que convierte una consulta con nombre en logica de negocio.</a:t>
-            </a:r>
-          </a:p>
-          <a:p>
-            <a:r>
-              <a:t>La forma es RAISE EXCEPTION 'ERROR: la mascota % no existe', p_id_mascota; y hay cuatro cosas que decir sobre esa linea.</a:t>
-            </a:r>
-          </a:p>
-          <a:p>
-            <a:r>
-              <a:t>Primera, el signo de porcentaje es el marcador de sustitucion de PL/pgSQL: se reemplaza, en orden, por las expresiones que siguen a la coma, y si hay mas marcadores que expresiones el motor lanza un error de formato.</a:t>
-            </a:r>
-          </a:p>
-          <a:p>
-            <a:r>
-              <a:t>Para imprimir un porcentaje literal se escribe dos veces.</a:t>
-            </a:r>
-          </a:p>
-          <a:p>
-            <a:r>
-              <a:t>Segunda, el mensaje es parte de la interfaz publica del procedimiento: es lo que la aplicacion va a mostrar y lo que la bateria de pruebas va a verificar, asi que se escribe pensando en la recepcionista de la clínica y no en el programador.</a:t>
-            </a:r>
-          </a:p>
-          <a:p>
-            <a:r>
-              <a:t>Tercera, y es lo decisivo: RAISE EXCEPTION aborta.</a:t>
-            </a:r>
-          </a:p>
-          <a:p>
-            <a:r>
-              <a:t>Es imposible que quede una cita a medias, y no porque el codigo lo cuide, sino porque el motor lo garantiza.</a:t>
-            </a:r>
-          </a:p>
-          <a:p>
-            <a:r>
-              <a:t>Cuarta, cada excepcion lleva un codigo SQLSTATE; el de un RAISE EXCEPTION sin mas indicaciones es P0001</a:t>
-            </a:r>
-          </a:p>
-          <a:p>
-            <a:r>
-              <a:t>Y se puede fijar uno propio con USING ERRCODE, lo cual permite que la aplicacion distinga un error de negocio de un fallo de la base sin leer el texto del mensaje.</a:t>
-            </a:r>
-          </a:p>
-          <a:p>
-            <a:r>
-              <a:t>Falta la mecanica de la primera validacion, que es donde el grupo se atora.</a:t>
-            </a:r>
-          </a:p>
-          <a:p>
-            <a:r>
-              <a:t>Se escribe y despues IF NOT FOUND THEN.</a:t>
-            </a:r>
-          </a:p>
-          <a:p>
-            <a:r>
-              <a:t>Ese es el error silencioso mas caro del dia y la razon por la que IF NOT FOUND va primero.</a:t>
-            </a:r>
-          </a:p>
-          <a:p>
-            <a:r>
-              <a:t>Con clave primaria en el WHERE eso no puede ocurrir, y por eso hoy no se usa STRICT.</a:t>
+              <a:t>La pregunta de fondo es donde debe vivir la logica de negocio, y merece respuesta honesta y no dogmatica, porque hay equipos serios en las dos orillas.</a:t>
+            </a:r>
+          </a:p>
+          <a:p>
+            <a:r>
+              <a:t>Primero, la regla se cumple aunque alguien entre por fuera de la aplicacion: un guion de migracion, una herramienta de administracion, una segunda aplicacion escrita el proximo semestre.</a:t>
+            </a:r>
+          </a:p>
+          <a:p>
+            <a:r>
+              <a:t>Tercero, y aqui se amarra con la Clase 2, permite un modelo de permisos mas fino: se puede hacer GRANT EXECUTE ON PROCEDURE sp_agendar_cita TO recepcion y a la vez no otorgar INSERT sobre cita</a:t>
+            </a:r>
+          </a:p>
+          <a:p>
+            <a:r>
+              <a:t>Con lo cual la recepcionista agenda citas pero no inserta filas arbitrarias ni corrige estados a mano.</a:t>
+            </a:r>
+          </a:p>
+          <a:p>
+            <a:r>
+              <a:t>Se nombra hoy y se usa en la Clase 12.</a:t>
+            </a:r>
+          </a:p>
+          <a:p>
+            <a:r>
+              <a:t>En contra hay argumentos igual de legitimos: el codigo del procedimiento no se versiona con la naturalidad del codigo de aplicacion</a:t>
+            </a:r>
+          </a:p>
+          <a:p>
+            <a:r>
+              <a:t>Porque si nadie guarda el archivo sql en un repositorio la unica copia esta dentro del motor; probarlo automaticamente es mas incomodo</a:t>
+            </a:r>
+          </a:p>
+          <a:p>
+            <a:r>
+              <a:t>Y por eso la bateria de hoy se escribe a mano; y ata el sistema al motor, ya que llevar estos procedimientos a Oracle o a MySQL implica reescribirlos, no traducirlos.</a:t>
+            </a:r>
+          </a:p>
+          <a:p>
+            <a:r>
+              <a:t>El criterio de oficio, no ley, es este: en la base van los invariantes que no pueden violarse nunca, como que el stock no quede negativo o que una mascota inactiva no agende</a:t>
+            </a:r>
+          </a:p>
+          <a:p>
+            <a:r>
+              <a:t>Y las operaciones de varias sentencias que deben ocurrir juntas; en la aplicacion van la orquestacion, la interfaz y las reglas volatiles.</a:t>
+            </a:r>
+          </a:p>
+          <a:p>
+            <a:r>
+              <a:t>Senal de alerta util: si una regla cambio mas de una vez en el semestre, probablemente no debia estar fija dentro de un procedimiento.</a:t>
             </a:r>
           </a:p>
           <a:p>
@@ -2559,47 +2085,22 @@
           </a:p>
           <a:p>
             <a:r>
-              <a:t>No sale del procedimiento con un aviso, lanza un error que propaga hasta quien llamo, y todo lo que el procedimiento hubiera escrito antes se deshace.</a:t>
-            </a:r>
-          </a:p>
-          <a:p>
-            <a:r>
-              <a:t>Eso ultimo se menciona y no se desarrolla: hoy basta con el texto.</a:t>
-            </a:r>
-          </a:p>
-          <a:p>
-            <a:r>
-              <a:t>Hay que explicar por que funciona, porque no es evidente: en PL/pgSQL, un SELECT INTO deja una variable especial llamada FOUND en verdadero si devolvio al menos una fila y en falso si no devolvio ninguna, y NOT FOUND es simplemente su negacion.</a:t>
-            </a:r>
-          </a:p>
-          <a:p>
-            <a:r>
-              <a:t>Y hay que decir tambien lo que NO pasa, porque es lo contrario de Oracle: si el SELECT INTO no encuentra nada, PL/pgSQL no lanza NO_DATA_FOUND, deja la variable en nulo y sigue adelante.</a:t>
-            </a:r>
-          </a:p>
-          <a:p>
-            <a:r>
-              <a:t>Quien espere la excepcion de Oracle escribe un procedimiento que, ante una mascota inexistente, compara nulo contra 'S', obtiene nulo, entra por el ELSE y termina insertando la cita.</a:t>
-            </a:r>
-          </a:p>
-          <a:p>
-            <a:r>
-              <a:t>Si el SELECT devuelve varias filas, en cambio, PL/pgSQL se queda con la primera sin avisar, salvo que se escriba STRICT, que entonces si lanza excepcion en los dos casos.</a:t>
-            </a:r>
-          </a:p>
-          <a:p>
-            <a:r>
-              <a:t>CÓDIGO CITADO (referencia):</a:t>
-            </a:r>
-          </a:p>
-          <a:p>
-            <a:r>
-              <a:t>SELECT activa INTO v_activa FROM mascota WHERE id_mascota = p_id_mascota</a:t>
-            </a:r>
-          </a:p>
-          <a:p>
-            <a:r>
-              <a:t>Fuera de la lamina (habla de la practica): Esta es la parte que convierte una consulta con nombre en logica de negocio, y es el mecanismo que la pregunta 1 de la clase califica con treinta y cinco puntos.</a:t>
+              <a:t>A favor de la base de datos hay tres argumentos duros.</a:t>
+            </a:r>
+          </a:p>
+          <a:p>
+            <a:r>
+              <a:t>Segundo, se ahorran viajes de red cuando la operacion implica varias sentencias encadenadas.</a:t>
+            </a:r>
+          </a:p>
+          <a:p>
+            <a:r>
+              <a:t>Eso es minimo privilegio hecho codigo, y conviene senalar el matiz: en PostgreSQL el cuerpo se ejecuta con los privilegios de quien llama, salvo que el procedimiento se declare SECURITY DEFINER, que es lo que lo hace ejecutarse con los del propietario.</a:t>
+            </a:r>
+          </a:p>
+          <a:p>
+            <a:r>
+              <a:t>Sin esa clausula, dar EXECUTE no alcanza.</a:t>
             </a:r>
           </a:p>
         </p:txBody>
@@ -2674,57 +2175,47 @@
           </a:p>
           <a:p>
             <a:r>
-              <a:t>La pregunta de fondo es donde debe vivir la logica de negocio, y merece respuesta honesta y no dogmatica, porque hay equipos serios en las dos orillas.</a:t>
-            </a:r>
-          </a:p>
-          <a:p>
-            <a:r>
-              <a:t>Primero, la regla se cumple aunque alguien entre por fuera de la aplicacion: un guion de migracion, una herramienta de administracion, una segunda aplicacion escrita el proximo semestre.</a:t>
-            </a:r>
-          </a:p>
-          <a:p>
-            <a:r>
-              <a:t>Tercero, y aqui se amarra con la Clase 2, permite un modelo de permisos mas fino: se puede hacer GRANT EXECUTE ON PROCEDURE sp_agendar_cita TO recepcion y a la vez no otorgar INSERT sobre cita</a:t>
-            </a:r>
-          </a:p>
-          <a:p>
-            <a:r>
-              <a:t>Con lo cual la recepcionista agenda citas pero no inserta filas arbitrarias ni corrige estados a mano.</a:t>
-            </a:r>
-          </a:p>
-          <a:p>
-            <a:r>
-              <a:t>Se nombra hoy y se usa en la Clase 12.</a:t>
-            </a:r>
-          </a:p>
-          <a:p>
-            <a:r>
-              <a:t>En contra hay argumentos igual de legitimos: el codigo del procedimiento no se versiona con la naturalidad del codigo de aplicacion</a:t>
-            </a:r>
-          </a:p>
-          <a:p>
-            <a:r>
-              <a:t>Porque si nadie guarda el archivo sql en un repositorio la unica copia esta dentro del motor; probarlo automaticamente es mas incomodo</a:t>
-            </a:r>
-          </a:p>
-          <a:p>
-            <a:r>
-              <a:t>Y por eso la bateria de hoy se escribe a mano; y ata el sistema al motor, ya que llevar estos procedimientos a Oracle o a MySQL implica reescribirlos, no traducirlos.</a:t>
-            </a:r>
-          </a:p>
-          <a:p>
-            <a:r>
-              <a:t>El criterio de oficio, no ley, es este: en la base van los invariantes que no pueden violarse nunca, como que el stock no quede negativo o que una mascota inactiva no agende</a:t>
-            </a:r>
-          </a:p>
-          <a:p>
-            <a:r>
-              <a:t>Y las operaciones de varias sentencias que deben ocurrir juntas; en la aplicacion van la orquestacion, la interfaz y las reglas volatiles.</a:t>
-            </a:r>
-          </a:p>
-          <a:p>
-            <a:r>
-              <a:t>Senal de alerta util: si una regla cambio mas de una vez en el semestre, probablemente no debia estar fija dentro de un procedimiento.</a:t>
+              <a:t>La inyeccion de SQL merece parrafo propio porque es el argumento de seguridad mas concreto de la clase y casi siempre se menciona sin explicarlo.</a:t>
+            </a:r>
+          </a:p>
+          <a:p>
+            <a:r>
+              <a:t>Si escribe Luna todo va bien; si escribe Luna' OR '1'='1 la condicion se vuelve siempre verdadera y la pantalla devuelve el listado completo de mascotas de la clinica; si escribe '</a:t>
+            </a:r>
+          </a:p>
+          <a:p>
+            <a:r>
+              <a:t>Un procedimiento con parametros cierra ese agujero por un motivo tecnico preciso: el valor viaja como parametro</a:t>
+            </a:r>
+          </a:p>
+          <a:p>
+            <a:r>
+              <a:t>Es decir el motor ya analizo y planifico la sentencia antes de conocer el contenido, asi que ese contenido no vuelve a pasar por el analizador sintactico y no puede convertirse en instrucciones.</a:t>
+            </a:r>
+          </a:p>
+          <a:p>
+            <a:r>
+              <a:t>Aqui hace falta el matiz que distingue una clase buena de una recitada: el procedimiento no es inmune por ser procedimiento.</a:t>
+            </a:r>
+          </a:p>
+          <a:p>
+            <a:r>
+              <a:t>En PL/pgSQL la forma correcta de armar una sentencia dinamica es EXECUTE 'SELECT...</a:t>
+            </a:r>
+          </a:p>
+          <a:p>
+            <a:r>
+              <a:t>WHERE nombre = $1' USING p_nombre, o construir el texto con format y los marcadores %L para valores y %I para identificadores, que escapan lo que reciben.</a:t>
+            </a:r>
+          </a:p>
+          <a:p>
+            <a:r>
+              <a:t>Regla dura para el proyecto: ningun dato de usuario se concatena dentro de una sentencia, ni en la aplicacion ni dentro del procedimiento.</a:t>
+            </a:r>
+          </a:p>
+          <a:p>
+            <a:r>
+              <a:t>Ese principio se retoma en la Clase 12.</a:t>
             </a:r>
           </a:p>
           <a:p>
@@ -2734,22 +2225,27 @@
           </a:p>
           <a:p>
             <a:r>
-              <a:t>A favor de la base de datos hay tres argumentos duros.</a:t>
-            </a:r>
-          </a:p>
-          <a:p>
-            <a:r>
-              <a:t>Segundo, se ahorran viajes de red cuando la operacion implica varias sentencias encadenadas.</a:t>
-            </a:r>
-          </a:p>
-          <a:p>
-            <a:r>
-              <a:t>Eso es minimo privilegio hecho codigo, y conviene senalar el matiz: en PostgreSQL el cuerpo se ejecuta con los privilegios de quien llama, salvo que el procedimiento se declare SECURITY DEFINER, que es lo que lo hace ejecutarse con los del propietario.</a:t>
-            </a:r>
-          </a:p>
-          <a:p>
-            <a:r>
-              <a:t>Sin esa clausula, dar EXECUTE no alcanza.</a:t>
+              <a:t>Ocurre cuando la aplicacion arma la consulta pegando texto que escribio el usuario, y ese texto termina interpretado por el motor como codigo y no como dato.</a:t>
+            </a:r>
+          </a:p>
+          <a:p>
+            <a:r>
+              <a:t>En la clínica seria una pantalla de busqueda que construye SELECT * FROM mascota WHERE nombre = seguido de lo que el usuario digito entre comillas.</a:t>
+            </a:r>
+          </a:p>
+          <a:p>
+            <a:r>
+              <a:t>DELETE FROM cita; -- el motor recibe dos sentencias y la segunda borra la agenda.</a:t>
+            </a:r>
+          </a:p>
+          <a:p>
+            <a:r>
+              <a:t>Si dentro del cuerpo alguien escribe EXECUTE 'SELECT...</a:t>
+            </a:r>
+          </a:p>
+          <a:p>
+            <a:r>
+              <a:t>WHERE nombre = ' || p_nombre, el agujero se reabre igual, ahora escondido un nivel mas abajo y por lo tanto mas dificil de auditar.</a:t>
             </a:r>
           </a:p>
         </p:txBody>
@@ -2824,47 +2320,62 @@
           </a:p>
           <a:p>
             <a:r>
-              <a:t>La inyeccion de SQL merece parrafo propio porque es el argumento de seguridad mas concreto de la clase y casi siempre se menciona sin explicarlo.</a:t>
-            </a:r>
-          </a:p>
-          <a:p>
-            <a:r>
-              <a:t>Si escribe Luna todo va bien; si escribe Luna' OR '1'='1 la condicion se vuelve siempre verdadera y la pantalla devuelve el listado completo de mascotas de la clinica; si escribe '</a:t>
-            </a:r>
-          </a:p>
-          <a:p>
-            <a:r>
-              <a:t>Un procedimiento con parametros cierra ese agujero por un motivo tecnico preciso: el valor viaja como parametro</a:t>
-            </a:r>
-          </a:p>
-          <a:p>
-            <a:r>
-              <a:t>Es decir el motor ya analizo y planifico la sentencia antes de conocer el contenido, asi que ese contenido no vuelve a pasar por el analizador sintactico y no puede convertirse en instrucciones.</a:t>
-            </a:r>
-          </a:p>
-          <a:p>
-            <a:r>
-              <a:t>Aqui hace falta el matiz que distingue una clase buena de una recitada: el procedimiento no es inmune por ser procedimiento.</a:t>
-            </a:r>
-          </a:p>
-          <a:p>
-            <a:r>
-              <a:t>En PL/pgSQL la forma correcta de armar una sentencia dinamica es EXECUTE 'SELECT...</a:t>
-            </a:r>
-          </a:p>
-          <a:p>
-            <a:r>
-              <a:t>WHERE nombre = $1' USING p_nombre, o construir el texto con format y los marcadores %L para valores y %I para identificadores, que escapan lo que reciben.</a:t>
-            </a:r>
-          </a:p>
-          <a:p>
-            <a:r>
-              <a:t>Regla dura para el proyecto: ningun dato de usuario se concatena dentro de una sentencia, ni en la aplicacion ni dentro del procedimiento.</a:t>
-            </a:r>
-          </a:p>
-          <a:p>
-            <a:r>
-              <a:t>Ese principio se retoma en la Clase 12.</a:t>
+              <a:t>El punto de partida es un problema practico: si el estudiante escribe los cuatro CALL uno tras otro y ejecuta todo de un tiro, el primero que falla aborta la ejecucion y los siguientes no corren.</a:t>
+            </a:r>
+          </a:p>
+          <a:p>
+            <a:r>
+              <a:t>La solucion es el bloque anonimo: DO $$ BEGIN...</a:t>
+            </a:r>
+          </a:p>
+          <a:p>
+            <a:r>
+              <a:t>END $$; es un bloque de PL/pgSQL que se ejecuta una vez y no se guarda en ningun catalogo.</a:t>
+            </a:r>
+          </a:p>
+          <a:p>
+            <a:r>
+              <a:t>Los resultados van a una tabla, no a la pantalla, y eso tambien tiene razon: una captura de cuatro mensajes sueltos no se puede comparar contra nada</a:t>
+            </a:r>
+          </a:p>
+          <a:p>
+            <a:r>
+              <a:t>Mientras que un SELECT sobre resultado_prueba(id_prueba, caso, esperado, obtenido, paso) es una sola imagen que muestra los cuatro casos con su veredicto.</a:t>
+            </a:r>
+          </a:p>
+          <a:p>
+            <a:r>
+              <a:t>Los cuatro casos del proyecto son el positivo, con una mascota activa y una franja libre, y los tres negativos: mascota inactiva —Rocky, identificador 3</a:t>
+            </a:r>
+          </a:p>
+          <a:p>
+            <a:r>
+              <a:t>Y Kiara, identificador 8, estan inactivas en los datos sembrados—, mascota inexistente con el identificador 99, y franja ocupada, para la que sirve la cita que el veterinario 1 ya tiene el 2026-09-01 a las 08:00.</a:t>
+            </a:r>
+          </a:p>
+          <a:p>
+            <a:r>
+              <a:t>Y hay que cerrar con la prueba que nadie piensa: un SELECT COUNT(*) FROM cita que demuestre que la tabla paso de diez filas a once y no a catorce.</a:t>
+            </a:r>
+          </a:p>
+          <a:p>
+            <a:r>
+              <a:t>Ese conteo es lo que evidencia que los tres errores no dejaron basura, es decir que RAISE EXCEPTION hizo lo que se dijo que hacia.</a:t>
+            </a:r>
+          </a:p>
+          <a:p>
+            <a:r>
+              <a:t>Hay un detalle de mecanica que conviene conocer porque explica por que esto funciona: un bloque de PL/pgSQL con clausula EXCEPTION abre internamente un punto de retorno, un savepoint, de modo que al capturar el error se deshace solo lo que ese bloque hizo.</a:t>
+            </a:r>
+          </a:p>
+          <a:p>
+            <a:r>
+              <a:t>Una, que la captura tiene un costo y por eso no se envuelve todo el codigo en manejadores por si acaso.</a:t>
+            </a:r>
+          </a:p>
+          <a:p>
+            <a:r>
+              <a:t>Es un buen momento para sembrar la Clase 8: quien confirma la transaccion es quien orquesta la operacion completa, no cada pieza por su cuenta.</a:t>
             </a:r>
           </a:p>
           <a:p>
@@ -2874,27 +2385,47 @@
           </a:p>
           <a:p>
             <a:r>
-              <a:t>Ocurre cuando la aplicacion arma la consulta pegando texto que escribio el usuario, y ese texto termina interpretado por el motor como codigo y no como dato.</a:t>
-            </a:r>
-          </a:p>
-          <a:p>
-            <a:r>
-              <a:t>En la clínica seria una pantalla de busqueda que construye SELECT * FROM mascota WHERE nombre = seguido de lo que el usuario digito entre comillas.</a:t>
-            </a:r>
-          </a:p>
-          <a:p>
-            <a:r>
-              <a:t>DELETE FROM cita; -- el motor recibe dos sentencias y la segunda borra la agenda.</a:t>
-            </a:r>
-          </a:p>
-          <a:p>
-            <a:r>
-              <a:t>Si dentro del cuerpo alguien escribe EXECUTE 'SELECT...</a:t>
-            </a:r>
-          </a:p>
-          <a:p>
-            <a:r>
-              <a:t>WHERE nombre = ' || p_nombre, el agujero se reabre igual, ahora escondido un nivel mas abajo y por lo tanto mas dificil de auditar.</a:t>
+              <a:t>Un procedimiento sin prueba no esta terminado.</a:t>
+            </a:r>
+          </a:p>
+          <a:p>
+            <a:r>
+              <a:t>Aparecen tres casos sin probar y una captura que no demuestra nada.</a:t>
+            </a:r>
+          </a:p>
+          <a:p>
+            <a:r>
+              <a:t>EXCEPTION WHEN OTHERS THEN...</a:t>
+            </a:r>
+          </a:p>
+          <a:p>
+            <a:r>
+              <a:t>Su clausula EXCEPTION atrapa el error, lo convierte en una fila de resultado y deja que el siguiente bloque corra.</a:t>
+            </a:r>
+          </a:p>
+          <a:p>
+            <a:r>
+              <a:t>Un bloque por caso, cuatro bloques, cuatro filas.</a:t>
+            </a:r>
+          </a:p>
+          <a:p>
+            <a:r>
+              <a:t>Una bateria sin ese conteo prueba que el procedimiento se queja, no que no escribe.</a:t>
+            </a:r>
+          </a:p>
+          <a:p>
+            <a:r>
+              <a:t>Tiene dos consecuencias.</a:t>
+            </a:r>
+          </a:p>
+          <a:p>
+            <a:r>
+              <a:t>Dos, y es la que importa hoy, que el procedimiento de la clase NO lleva COMMIT: si lo llevara, llamarlo desde dentro de un bloque con EXCEPTION fallaria, porque PostgreSQL no permite confirmar la transaccion mientras hay un savepoint activo.</a:t>
+            </a:r>
+          </a:p>
+          <a:p>
+            <a:r>
+              <a:t>Fuera de la lamina (habla de la practica): Un procedimiento sin prueba no esta terminado, y esta parte vale veinticinco de los cien puntos de la clase, asi que hay que dictarla como tema y no como recomendacion.</a:t>
             </a:r>
           </a:p>
         </p:txBody>
@@ -2969,62 +2500,47 @@
           </a:p>
           <a:p>
             <a:r>
-              <a:t>El punto de partida es un problema practico: si el estudiante escribe los cuatro CALL uno tras otro y ejecuta todo de un tiro, el primero que falla aborta la ejecucion y los siguientes no corren.</a:t>
-            </a:r>
-          </a:p>
-          <a:p>
-            <a:r>
-              <a:t>La solucion es el bloque anonimo: DO $$ BEGIN...</a:t>
-            </a:r>
-          </a:p>
-          <a:p>
-            <a:r>
-              <a:t>END $$; es un bloque de PL/pgSQL que se ejecuta una vez y no se guarda en ningun catalogo.</a:t>
-            </a:r>
-          </a:p>
-          <a:p>
-            <a:r>
-              <a:t>Los resultados van a una tabla, no a la pantalla, y eso tambien tiene razon: una captura de cuatro mensajes sueltos no se puede comparar contra nada</a:t>
-            </a:r>
-          </a:p>
-          <a:p>
-            <a:r>
-              <a:t>Mientras que un SELECT sobre resultado_prueba(id_prueba, caso, esperado, obtenido, paso) es una sola imagen que muestra los cuatro casos con su veredicto.</a:t>
-            </a:r>
-          </a:p>
-          <a:p>
-            <a:r>
-              <a:t>Los cuatro casos del proyecto son el positivo, con una mascota activa y una franja libre, y los tres negativos: mascota inactiva —Rocky, identificador 3</a:t>
-            </a:r>
-          </a:p>
-          <a:p>
-            <a:r>
-              <a:t>Y Kiara, identificador 8, estan inactivas en los datos sembrados—, mascota inexistente con el identificador 99, y franja ocupada, para la que sirve la cita que el veterinario 1 ya tiene el 2026-09-01 a las 08:00.</a:t>
-            </a:r>
-          </a:p>
-          <a:p>
-            <a:r>
-              <a:t>Y hay que cerrar con la prueba que nadie piensa: un SELECT COUNT(*) FROM cita que demuestre que la tabla paso de diez filas a once y no a catorce.</a:t>
-            </a:r>
-          </a:p>
-          <a:p>
-            <a:r>
-              <a:t>Ese conteo es lo que evidencia que los tres errores no dejaron basura, es decir que RAISE EXCEPTION hizo lo que se dijo que hacia.</a:t>
-            </a:r>
-          </a:p>
-          <a:p>
-            <a:r>
-              <a:t>Hay un detalle de mecanica que conviene conocer porque explica por que esto funciona: un bloque de PL/pgSQL con clausula EXCEPTION abre internamente un punto de retorno, un savepoint, de modo que al capturar el error se deshace solo lo que ese bloque hizo.</a:t>
-            </a:r>
-          </a:p>
-          <a:p>
-            <a:r>
-              <a:t>Una, que la captura tiene un costo y por eso no se envuelve todo el codigo en manejadores por si acaso.</a:t>
-            </a:r>
-          </a:p>
-          <a:p>
-            <a:r>
-              <a:t>Es un buen momento para sembrar la Clase 8: quien confirma la transaccion es quien orquesta la operacion completa, no cada pieza por su cuenta.</a:t>
+              <a:t>Capturar WHEN OTHERS y escribir paso = TRUE porque hubo excepcion es insuficiente: una excepcion tambien la lanza un nombre de columna mal escrito, un tipo que no convierte o una tabla que no existe.</a:t>
+            </a:r>
+          </a:p>
+          <a:p>
+            <a:r>
+              <a:t>Con ese criterio, un procedimiento roto pasaria las tres pruebas negativas.</a:t>
+            </a:r>
+          </a:p>
+          <a:p>
+            <a:r>
+              <a:t>La forma es paso = SQLERRM ILIKE '%inactiva%', que es una comparacion insensible a mayusculas: se afirma que fallo Y que fallo por lo que se esperaba.</a:t>
+            </a:r>
+          </a:p>
+          <a:p>
+            <a:r>
+              <a:t>La segunda mitad es que la columna paso admite dos lecturas legitimas y hay que elegir una.</a:t>
+            </a:r>
+          </a:p>
+          <a:p>
+            <a:r>
+              <a:t>Si paso significa el resultado coincidio con lo esperado, las cuatro filas quedan en verdadero cuando todo esta bien, porque en un caso negativo lo esperado es la excepcion.</a:t>
+            </a:r>
+          </a:p>
+          <a:p>
+            <a:r>
+              <a:t>Las dos son defendibles; lo que no es defendible es no decir cual.</a:t>
+            </a:r>
+          </a:p>
+          <a:p>
+            <a:r>
+              <a:t>La regla del curso es explicita: se usa la misma lectura para las cuatro filas y se declara en una linea junto a la tabla.</a:t>
+            </a:r>
+          </a:p>
+          <a:p>
+            <a:r>
+              <a:t>Salida esperada de una bateria sana: 4 filas, el caso valido con paso TRUE y los 3 invalidos con paso TRUE y el SQLERRM literal del procedimiento.</a:t>
+            </a:r>
+          </a:p>
+          <a:p>
+            <a:r>
+              <a:t>Un caso invalido con paso FALSE es un hallazgo: el procedimiento dejo pasar algo que debia rechazar.</a:t>
             </a:r>
           </a:p>
           <a:p>
@@ -3034,47 +2550,32 @@
           </a:p>
           <a:p>
             <a:r>
-              <a:t>Un procedimiento sin prueba no esta terminado.</a:t>
-            </a:r>
-          </a:p>
-          <a:p>
-            <a:r>
-              <a:t>Aparecen tres casos sin probar y una captura que no demuestra nada.</a:t>
-            </a:r>
-          </a:p>
-          <a:p>
-            <a:r>
-              <a:t>EXCEPTION WHEN OTHERS THEN...</a:t>
-            </a:r>
-          </a:p>
-          <a:p>
-            <a:r>
-              <a:t>Su clausula EXCEPTION atrapa el error, lo convierte en una fila de resultado y deja que el siguiente bloque corra.</a:t>
-            </a:r>
-          </a:p>
-          <a:p>
-            <a:r>
-              <a:t>Un bloque por caso, cuatro bloques, cuatro filas.</a:t>
-            </a:r>
-          </a:p>
-          <a:p>
-            <a:r>
-              <a:t>Una bateria sin ese conteo prueba que el procedimiento se queja, no que no escribe.</a:t>
-            </a:r>
-          </a:p>
-          <a:p>
-            <a:r>
-              <a:t>Tiene dos consecuencias.</a:t>
-            </a:r>
-          </a:p>
-          <a:p>
-            <a:r>
-              <a:t>Dos, y es la que importa hoy, que el procedimiento de la clase NO lleva COMMIT: si lo llevara, llamarlo desde dentro de un bloque con EXCEPTION fallaria, porque PostgreSQL no permite confirmar la transaccion mientras hay un savepoint activo.</a:t>
-            </a:r>
-          </a:p>
-          <a:p>
-            <a:r>
-              <a:t>Fuera de la lamina (habla de la practica): Un procedimiento sin prueba no esta terminado, y esta parte vale veinticinco de los cien puntos de la clase, asi que hay que dictarla como tema y no como recomendacion.</a:t>
+              <a:t>Aqui esta el matiz que separa una bateria que prueba algo de una que se prueba a si misma.</a:t>
+            </a:r>
+          </a:p>
+          <a:p>
+            <a:r>
+              <a:t>Lo que hay que verificar es el TEXTO de la excepcion, y para eso PL/pgSQL expone la variable SQLERRM con el mensaje y SQLSTATE con el codigo.</a:t>
+            </a:r>
+          </a:p>
+          <a:p>
+            <a:r>
+              <a:t>Si paso significa la operacion se completo, los tres casos negativos quedan en falso incluso con el procedimiento perfecto.</a:t>
+            </a:r>
+          </a:p>
+          <a:p>
+            <a:r>
+              <a:t>Conviene decir en voz alta la consecuencia, porque es la que evita reclamos: no se descuenta por elegir una u otra, se descuenta por las cuatro filas en verdadero sin haber verificado el texto.</a:t>
+            </a:r>
+          </a:p>
+          <a:p>
+            <a:r>
+              <a:t>Fuera de la lamina (habla de la practica): Aqui esta el matiz que separa una bateria que prueba algo de una que se prueba a si misma, y conviene dictarlo despacio porque la solucion docente lo califica.</a:t>
+            </a:r>
+          </a:p>
+          <a:p>
+            <a:r>
+              <a:t>Fuera de la lamina (habla de la practica): Las dos son defendibles; lo que no es defendible es no decir cual, porque entonces la columna no significa nada y el docente no puede calificar la captura.</a:t>
             </a:r>
           </a:p>
         </p:txBody>
@@ -3144,25 +2645,12 @@
           <a:lstStyle/>
           <a:p>
             <a:r>
-              <a:t>TEXTO COMPLETO DE LA LÁMINA (se proyecta resumido):</a:t>
-            </a:r>
-          </a:p>
-          <a:p/>
-          <a:p>
-            <a:r>
-              <a:t>Por que un bloque por caso. Si los cuatro `CALL` van seguidos, el primero que falla aborta el resto y la evidencia queda a medias. `DO $$ ... $$;` es un bloque anonimo —se ejecuta una vez y no se guarda— y su `EXCEPTION` atrapa el error y deja seguir al siguiente caso.</a:t>
-            </a:r>
-          </a:p>
-          <a:p/>
-          <a:p>
-            <a:r>
-              <a:t>El molde de un caso error. `DO $$ BEGIN CALL sp_agendar_cita(...); INSERT INTO resultado_prueba VALUES (..., 'FALLO: no lanzo error', FALSE); EXCEPTION WHEN OTHERS THEN INSERT INTO resultado_prueba VALUES (..., SQLERRM, TRUE); END $$;` — `SQLERRM` es el texto del error que se acaba de capturar.</a:t>
-            </a:r>
-          </a:p>
-          <a:p/>
-          <a:p>
-            <a:r>
-              <a:t>Los 4 casos, y la prueba de que si inserto. 1 caso OK + mascota inexistente + mascota inactiva + franja ocupada. Y un `COUNT(*)` sobre `cita` antes y despues: tiene que pasar de 10 a 11 filas. Sin ese conteo nada demuestra que el caso OK hizo algo.</a:t>
+              <a:t>Fuera de la lamina (habla de la practica, no del tema):</a:t>
+            </a:r>
+          </a:p>
+          <a:p>
+            <a:r>
+              <a:t>- Los 25 puntos se califican por esta tabla, no por el CALL suelto</a:t>
             </a:r>
           </a:p>
         </p:txBody>
@@ -13146,118 +12634,14 @@
       </p:sp>
       <p:sp>
         <p:nvSpPr>
-          <p:cNvPr id="6" name="Rounded Rectangle 5"/>
-          <p:cNvSpPr/>
-          <p:nvPr/>
-        </p:nvSpPr>
-        <p:spPr>
-          <a:xfrm>
-            <a:off x="5797149" y="1984655"/>
-            <a:ext cx="6010497" cy="3446472"/>
-          </a:xfrm>
-          <a:prstGeom prst="roundRect">
-            <a:avLst>
-              <a:gd name="adj" fmla="val 4000"/>
-            </a:avLst>
-          </a:prstGeom>
-          <a:solidFill>
-            <a:srgbClr val="E8EEF4"/>
-          </a:solidFill>
-          <a:ln>
-            <a:noFill/>
-          </a:ln>
-        </p:spPr>
-        <p:style>
-          <a:lnRef idx="1">
-            <a:schemeClr val="accent1"/>
-          </a:lnRef>
-          <a:fillRef idx="3">
-            <a:schemeClr val="accent1"/>
-          </a:fillRef>
-          <a:effectRef idx="2">
-            <a:schemeClr val="accent1"/>
-          </a:effectRef>
-          <a:fontRef idx="minor">
-            <a:schemeClr val="lt1"/>
-          </a:fontRef>
-        </p:style>
-        <p:txBody>
-          <a:bodyPr rtlCol="0" anchor="ctr"/>
-          <a:lstStyle/>
-          <a:p>
-            <a:pPr algn="ctr"/>
-          </a:p>
-        </p:txBody>
-      </p:sp>
-      <p:pic>
-        <p:nvPicPr>
-          <p:cNvPr id="7" name="Picture 6" descr="test-tubes-laboratory.jpg"/>
-          <p:cNvPicPr>
-            <a:picLocks noChangeAspect="1"/>
-          </p:cNvPicPr>
-          <p:nvPr/>
-        </p:nvPicPr>
-        <p:blipFill>
-          <a:blip r:embed="rId2"/>
-          <a:stretch>
-            <a:fillRect/>
-          </a:stretch>
-        </p:blipFill>
-        <p:spPr>
-          <a:xfrm>
-            <a:off x="5870301" y="2057807"/>
-            <a:ext cx="5864193" cy="3300168"/>
-          </a:xfrm>
-          <a:prstGeom prst="rect">
-            <a:avLst/>
-          </a:prstGeom>
-        </p:spPr>
-      </p:pic>
-      <p:sp>
-        <p:nvSpPr>
-          <p:cNvPr id="8" name="TextBox 7"/>
+          <p:cNvPr id="6" name="TextBox 5"/>
           <p:cNvSpPr txBox="1"/>
           <p:nvPr/>
         </p:nvSpPr>
         <p:spPr>
           <a:xfrm>
-            <a:off x="5870301" y="5961888"/>
-            <a:ext cx="5864193" cy="320040"/>
-          </a:xfrm>
-          <a:prstGeom prst="rect">
-            <a:avLst/>
-          </a:prstGeom>
-          <a:noFill/>
-        </p:spPr>
-        <p:txBody>
-          <a:bodyPr wrap="square">
-            <a:spAutoFit/>
-          </a:bodyPr>
-          <a:lstStyle/>
-          <a:p>
-            <a:pPr algn="ctr"/>
-            <a:r>
-              <a:rPr sz="1100" b="0" i="1">
-                <a:solidFill>
-                  <a:srgbClr val="666666"/>
-                </a:solidFill>
-                <a:latin typeface="Calibri"/>
-              </a:rPr>
-              <a:t>Foto: Artem Podrez · Pexels</a:t>
-            </a:r>
-          </a:p>
-        </p:txBody>
-      </p:sp>
-      <p:sp>
-        <p:nvSpPr>
-          <p:cNvPr id="9" name="TextBox 8"/>
-          <p:cNvSpPr txBox="1"/>
-          <p:nvPr/>
-        </p:nvSpPr>
-        <p:spPr>
-          <a:xfrm>
-            <a:off x="457200" y="1563624"/>
-            <a:ext cx="5093061" cy="4837176"/>
+            <a:off x="457200" y="1380744"/>
+            <a:ext cx="11277295" cy="5020056"/>
           </a:xfrm>
           <a:prstGeom prst="rect">
             <a:avLst/>
@@ -13318,7 +12702,7 @@
                 </a:solidFill>
                 <a:latin typeface="Calibri"/>
               </a:rPr>
-              <a:t> y la evidencia queda a medias.</a:t>
+              <a:t> y la evidencia queda a medias. «DO $$ ... $$;» es un bloque anonimo —se ejecuta una vez y no se guarda— y su «EXCEPTION» atrapa el error y deja seguir al siguiente caso.</a:t>
             </a:r>
           </a:p>
           <a:p>
@@ -13345,6 +12729,15 @@
               </a:rPr>
               <a:t>El molde de un caso error.</a:t>
             </a:r>
+            <a:r>
+              <a:rPr sz="2000" b="0" i="0">
+                <a:solidFill>
+                  <a:srgbClr val="333333"/>
+                </a:solidFill>
+                <a:latin typeface="Calibri"/>
+              </a:rPr>
+              <a:t> «DO $$ BEGIN CALL sp_agendar_cita(...); INSERT INTO resultado_prueba VALUES (..., 'FALLO: no lanzo error', FALSE); EXCEPTION WHEN OTHERS THEN INSERT INTO resultado_prueba VALUES (..., SQLERRM, TRUE); END $$;» — «SQLERRM» es el texto del error que se acaba de capturar.</a:t>
+            </a:r>
           </a:p>
           <a:p>
             <a:pPr>
@@ -13377,14 +12770,50 @@
                 </a:solidFill>
                 <a:latin typeface="Calibri"/>
               </a:rPr>
-              <a:t> 1 caso OK + mascota inexistente + mascota inactiva + franja ocupada.</a:t>
-            </a:r>
-          </a:p>
-        </p:txBody>
-      </p:sp>
-      <p:sp>
-        <p:nvSpPr>
-          <p:cNvPr id="10" name="TextBox 9"/>
+              <a:t> 1 caso OK + mascota inexistente + mascota inactiva + franja ocupada. Y un «COUNT(*)» sobre «cita» </a:t>
+            </a:r>
+            <a:r>
+              <a:rPr sz="2000" b="1" i="0">
+                <a:solidFill>
+                  <a:srgbClr val="333333"/>
+                </a:solidFill>
+                <a:latin typeface="Calibri"/>
+              </a:rPr>
+              <a:t>antes y despues</a:t>
+            </a:r>
+            <a:r>
+              <a:rPr sz="2000" b="0" i="0">
+                <a:solidFill>
+                  <a:srgbClr val="333333"/>
+                </a:solidFill>
+                <a:latin typeface="Calibri"/>
+              </a:rPr>
+              <a:t>: tiene que pasar de </a:t>
+            </a:r>
+            <a:r>
+              <a:rPr sz="2000" b="1" i="0">
+                <a:solidFill>
+                  <a:srgbClr val="333333"/>
+                </a:solidFill>
+                <a:latin typeface="Calibri"/>
+              </a:rPr>
+              <a:t>10 a 11</a:t>
+            </a:r>
+            <a:r>
+              <a:rPr sz="2000" b="0" i="0">
+                <a:solidFill>
+                  <a:srgbClr val="333333"/>
+                </a:solidFill>
+                <a:latin typeface="Calibri"/>
+              </a:rPr>
+              <a:t> filas. Sin ese conteo nada demuestra que el caso OK hizo algo.</a:t>
+            </a:r>
+          </a:p>
+        </p:txBody>
+      </p:sp>
+      <p:sp>
+        <p:nvSpPr>
+          <p:cNvPr id="7" name="TextBox 6"/>
           <p:cNvSpPr txBox="1"/>
           <p:nvPr/>
         </p:nvSpPr>
@@ -14198,118 +13627,14 @@
       </p:sp>
       <p:sp>
         <p:nvSpPr>
-          <p:cNvPr id="5" name="Rounded Rectangle 4"/>
-          <p:cNvSpPr/>
-          <p:nvPr/>
-        </p:nvSpPr>
-        <p:spPr>
-          <a:xfrm>
-            <a:off x="5797149" y="1573813"/>
-            <a:ext cx="6010497" cy="4057845"/>
-          </a:xfrm>
-          <a:prstGeom prst="roundRect">
-            <a:avLst>
-              <a:gd name="adj" fmla="val 4000"/>
-            </a:avLst>
-          </a:prstGeom>
-          <a:solidFill>
-            <a:srgbClr val="E8EEF4"/>
-          </a:solidFill>
-          <a:ln>
-            <a:noFill/>
-          </a:ln>
-        </p:spPr>
-        <p:style>
-          <a:lnRef idx="1">
-            <a:schemeClr val="accent1"/>
-          </a:lnRef>
-          <a:fillRef idx="3">
-            <a:schemeClr val="accent1"/>
-          </a:fillRef>
-          <a:effectRef idx="2">
-            <a:schemeClr val="accent1"/>
-          </a:effectRef>
-          <a:fontRef idx="minor">
-            <a:schemeClr val="lt1"/>
-          </a:fontRef>
-        </p:style>
-        <p:txBody>
-          <a:bodyPr rtlCol="0" anchor="ctr"/>
-          <a:lstStyle/>
-          <a:p>
-            <a:pPr algn="ctr"/>
-          </a:p>
-        </p:txBody>
-      </p:sp>
-      <p:pic>
-        <p:nvPicPr>
-          <p:cNvPr id="6" name="Picture 5" descr="warning-sign-trap.jpg"/>
-          <p:cNvPicPr>
-            <a:picLocks noChangeAspect="1"/>
-          </p:cNvPicPr>
-          <p:nvPr/>
-        </p:nvPicPr>
-        <p:blipFill>
-          <a:blip r:embed="rId2"/>
-          <a:stretch>
-            <a:fillRect/>
-          </a:stretch>
-        </p:blipFill>
-        <p:spPr>
-          <a:xfrm>
-            <a:off x="5870301" y="1646965"/>
-            <a:ext cx="5864193" cy="3911541"/>
-          </a:xfrm>
-          <a:prstGeom prst="rect">
-            <a:avLst/>
-          </a:prstGeom>
-        </p:spPr>
-      </p:pic>
-      <p:sp>
-        <p:nvSpPr>
-          <p:cNvPr id="7" name="TextBox 6"/>
+          <p:cNvPr id="5" name="TextBox 4"/>
           <p:cNvSpPr txBox="1"/>
           <p:nvPr/>
         </p:nvSpPr>
         <p:spPr>
           <a:xfrm>
-            <a:off x="5870301" y="5961888"/>
-            <a:ext cx="5864193" cy="320040"/>
-          </a:xfrm>
-          <a:prstGeom prst="rect">
-            <a:avLst/>
-          </a:prstGeom>
-          <a:noFill/>
-        </p:spPr>
-        <p:txBody>
-          <a:bodyPr wrap="square">
-            <a:spAutoFit/>
-          </a:bodyPr>
-          <a:lstStyle/>
-          <a:p>
-            <a:pPr algn="ctr"/>
-            <a:r>
-              <a:rPr sz="1100" b="0" i="1">
-                <a:solidFill>
-                  <a:srgbClr val="666666"/>
-                </a:solidFill>
-                <a:latin typeface="Calibri"/>
-              </a:rPr>
-              <a:t>Foto: Rapty · Pexels</a:t>
-            </a:r>
-          </a:p>
-        </p:txBody>
-      </p:sp>
-      <p:sp>
-        <p:nvSpPr>
-          <p:cNvPr id="8" name="TextBox 7"/>
-          <p:cNvSpPr txBox="1"/>
-          <p:nvPr/>
-        </p:nvSpPr>
-        <p:spPr>
-          <a:xfrm>
-            <a:off x="457200" y="1353312"/>
-            <a:ext cx="5093061" cy="5047488"/>
+            <a:off x="457200" y="1170432"/>
+            <a:ext cx="11277295" cy="5230368"/>
           </a:xfrm>
           <a:prstGeom prst="rect">
             <a:avLst/>
@@ -14370,7 +13695,25 @@
                 </a:solidFill>
                 <a:latin typeface="Calibri"/>
               </a:rPr>
-              <a:t>.</a:t>
+              <a:t>. Y no basta con que falle: hay que verificar </a:t>
+            </a:r>
+            <a:r>
+              <a:rPr sz="2000" b="1" i="0">
+                <a:solidFill>
+                  <a:srgbClr val="333333"/>
+                </a:solidFill>
+                <a:latin typeface="Calibri"/>
+              </a:rPr>
+              <a:t>que falle por lo esperado</a:t>
+            </a:r>
+            <a:r>
+              <a:rPr sz="2000" b="0" i="0">
+                <a:solidFill>
+                  <a:srgbClr val="333333"/>
+                </a:solidFill>
+                <a:latin typeface="Calibri"/>
+              </a:rPr>
+              <a:t> («SQLERRM ILIKE '%inactiva%'»), porque un typo en un nombre de columna tambien lanza excepcion y se reportaria como prueba superada.</a:t>
             </a:r>
           </a:p>
           <a:p>
@@ -14397,12 +13740,39 @@
               </a:rPr>
               <a:t>La tabla de resultados.</a:t>
             </a:r>
-          </a:p>
-        </p:txBody>
-      </p:sp>
-      <p:sp>
-        <p:nvSpPr>
-          <p:cNvPr id="9" name="TextBox 8"/>
+            <a:r>
+              <a:rPr sz="2000" b="0" i="0">
+                <a:solidFill>
+                  <a:srgbClr val="333333"/>
+                </a:solidFill>
+                <a:latin typeface="Calibri"/>
+              </a:rPr>
+              <a:t> «resultado_prueba(id_prueba SERIAL, caso TEXT, esperado TEXT, obtenido TEXT, paso BOOLEAN)», y un «SELECT * ... ORDER BY id_prueba;» con las 4 filas. «paso» admite dos lecturas —«coincidio con lo esperado» o «la operacion se completo»— y las dos valen; lo que se exige es </a:t>
+            </a:r>
+            <a:r>
+              <a:rPr sz="2000" b="1" i="0">
+                <a:solidFill>
+                  <a:srgbClr val="333333"/>
+                </a:solidFill>
+                <a:latin typeface="Calibri"/>
+              </a:rPr>
+              <a:t>usar la misma para las 4 y decir cual</a:t>
+            </a:r>
+            <a:r>
+              <a:rPr sz="2000" b="0" i="0">
+                <a:solidFill>
+                  <a:srgbClr val="333333"/>
+                </a:solidFill>
+                <a:latin typeface="Calibri"/>
+              </a:rPr>
+              <a:t>.</a:t>
+            </a:r>
+          </a:p>
+        </p:txBody>
+      </p:sp>
+      <p:sp>
+        <p:nvSpPr>
+          <p:cNvPr id="6" name="TextBox 5"/>
           <p:cNvSpPr txBox="1"/>
           <p:nvPr/>
         </p:nvSpPr>
@@ -15139,118 +14509,14 @@
       </p:sp>
       <p:sp>
         <p:nvSpPr>
-          <p:cNvPr id="5" name="Rounded Rectangle 4"/>
-          <p:cNvSpPr/>
-          <p:nvPr/>
-        </p:nvSpPr>
-        <p:spPr>
-          <a:xfrm>
-            <a:off x="5797149" y="1573813"/>
-            <a:ext cx="6010497" cy="4057845"/>
-          </a:xfrm>
-          <a:prstGeom prst="roundRect">
-            <a:avLst>
-              <a:gd name="adj" fmla="val 4000"/>
-            </a:avLst>
-          </a:prstGeom>
-          <a:solidFill>
-            <a:srgbClr val="E8EEF4"/>
-          </a:solidFill>
-          <a:ln>
-            <a:noFill/>
-          </a:ln>
-        </p:spPr>
-        <p:style>
-          <a:lnRef idx="1">
-            <a:schemeClr val="accent1"/>
-          </a:lnRef>
-          <a:fillRef idx="3">
-            <a:schemeClr val="accent1"/>
-          </a:fillRef>
-          <a:effectRef idx="2">
-            <a:schemeClr val="accent1"/>
-          </a:effectRef>
-          <a:fontRef idx="minor">
-            <a:schemeClr val="lt1"/>
-          </a:fontRef>
-        </p:style>
-        <p:txBody>
-          <a:bodyPr rtlCol="0" anchor="ctr"/>
-          <a:lstStyle/>
-          <a:p>
-            <a:pPr algn="ctr"/>
-          </a:p>
-        </p:txBody>
-      </p:sp>
-      <p:pic>
-        <p:nvPicPr>
-          <p:cNvPr id="6" name="Picture 5" descr="notebook-planning-desk-coffee.jpg"/>
-          <p:cNvPicPr>
-            <a:picLocks noChangeAspect="1"/>
-          </p:cNvPicPr>
-          <p:nvPr/>
-        </p:nvPicPr>
-        <p:blipFill>
-          <a:blip r:embed="rId2"/>
-          <a:stretch>
-            <a:fillRect/>
-          </a:stretch>
-        </p:blipFill>
-        <p:spPr>
-          <a:xfrm>
-            <a:off x="5870301" y="1646965"/>
-            <a:ext cx="5864193" cy="3911541"/>
-          </a:xfrm>
-          <a:prstGeom prst="rect">
-            <a:avLst/>
-          </a:prstGeom>
-        </p:spPr>
-      </p:pic>
-      <p:sp>
-        <p:nvSpPr>
-          <p:cNvPr id="7" name="TextBox 6"/>
+          <p:cNvPr id="5" name="TextBox 4"/>
           <p:cNvSpPr txBox="1"/>
           <p:nvPr/>
         </p:nvSpPr>
         <p:spPr>
           <a:xfrm>
-            <a:off x="5870301" y="5961888"/>
-            <a:ext cx="5864193" cy="320040"/>
-          </a:xfrm>
-          <a:prstGeom prst="rect">
-            <a:avLst/>
-          </a:prstGeom>
-          <a:noFill/>
-        </p:spPr>
-        <p:txBody>
-          <a:bodyPr wrap="square">
-            <a:spAutoFit/>
-          </a:bodyPr>
-          <a:lstStyle/>
-          <a:p>
-            <a:pPr algn="ctr"/>
-            <a:r>
-              <a:rPr sz="1100" b="0" i="1">
-                <a:solidFill>
-                  <a:srgbClr val="666666"/>
-                </a:solidFill>
-                <a:latin typeface="Calibri"/>
-              </a:rPr>
-              <a:t>Foto: Cup of  Couple · Pexels</a:t>
-            </a:r>
-          </a:p>
-        </p:txBody>
-      </p:sp>
-      <p:sp>
-        <p:nvSpPr>
-          <p:cNvPr id="8" name="TextBox 7"/>
-          <p:cNvSpPr txBox="1"/>
-          <p:nvPr/>
-        </p:nvSpPr>
-        <p:spPr>
-          <a:xfrm>
-            <a:off x="457200" y="1353312"/>
-            <a:ext cx="5093061" cy="5047488"/>
+            <a:off x="457200" y="1170432"/>
+            <a:ext cx="11277295" cy="5230368"/>
           </a:xfrm>
           <a:prstGeom prst="rect">
             <a:avLst/>
@@ -15371,11 +14637,61 @@
               <a:t>–   Recorrido: teoría del tema, una lámina por concepto, y demo del docente sobre la base de la clínica.</a:t>
             </a:r>
           </a:p>
-        </p:txBody>
-      </p:sp>
-      <p:sp>
-        <p:nvSpPr>
-          <p:cNvPr id="9" name="TextBox 8"/>
+          <a:p>
+            <a:pPr>
+              <a:spcAft>
+                <a:spcPts val="800"/>
+              </a:spcAft>
+            </a:pPr>
+            <a:r>
+              <a:rPr sz="2000" b="0" i="0">
+                <a:solidFill>
+                  <a:srgbClr val="333333"/>
+                </a:solidFill>
+                <a:latin typeface="Calibri"/>
+              </a:rPr>
+              <a:t>–   Cada lámina se sostiene sola: sirve para repasar aunque hayas faltado.</a:t>
+            </a:r>
+          </a:p>
+          <a:p>
+            <a:pPr>
+              <a:spcAft>
+                <a:spcPts val="800"/>
+              </a:spcAft>
+            </a:pPr>
+            <a:r>
+              <a:rPr sz="2000" b="0" i="0">
+                <a:solidFill>
+                  <a:srgbClr val="333333"/>
+                </a:solidFill>
+                <a:latin typeface="Calibri"/>
+              </a:rPr>
+              <a:t>–   </a:t>
+            </a:r>
+            <a:r>
+              <a:rPr sz="2000" b="1" i="0">
+                <a:solidFill>
+                  <a:srgbClr val="333333"/>
+                </a:solidFill>
+                <a:latin typeface="Calibri"/>
+              </a:rPr>
+              <a:t>Conceptos de hoy:</a:t>
+            </a:r>
+            <a:r>
+              <a:rPr sz="2000" b="0" i="0">
+                <a:solidFill>
+                  <a:srgbClr val="333333"/>
+                </a:solidFill>
+                <a:latin typeface="Calibri"/>
+              </a:rPr>
+              <a:t> Que es un procedimiento almacenado, y las dos palabras que importan · El molde de PL/pgSQL, y por que el cuerpo va entre signos de dolar · El molde de un procedimiento en PL/pgSQL · Los modos de parametro, y por que hoy no se usa OUT.</a:t>
+            </a:r>
+          </a:p>
+        </p:txBody>
+      </p:sp>
+      <p:sp>
+        <p:nvSpPr>
+          <p:cNvPr id="6" name="TextBox 5"/>
           <p:cNvSpPr txBox="1"/>
           <p:nvPr/>
         </p:nvSpPr>
@@ -15590,118 +14906,14 @@
       </p:sp>
       <p:sp>
         <p:nvSpPr>
-          <p:cNvPr id="6" name="Rounded Rectangle 5"/>
-          <p:cNvSpPr/>
-          <p:nvPr/>
-        </p:nvSpPr>
-        <p:spPr>
-          <a:xfrm>
-            <a:off x="5797149" y="1678969"/>
-            <a:ext cx="6010497" cy="4057845"/>
-          </a:xfrm>
-          <a:prstGeom prst="roundRect">
-            <a:avLst>
-              <a:gd name="adj" fmla="val 4000"/>
-            </a:avLst>
-          </a:prstGeom>
-          <a:solidFill>
-            <a:srgbClr val="E8EEF4"/>
-          </a:solidFill>
-          <a:ln>
-            <a:noFill/>
-          </a:ln>
-        </p:spPr>
-        <p:style>
-          <a:lnRef idx="1">
-            <a:schemeClr val="accent1"/>
-          </a:lnRef>
-          <a:fillRef idx="3">
-            <a:schemeClr val="accent1"/>
-          </a:fillRef>
-          <a:effectRef idx="2">
-            <a:schemeClr val="accent1"/>
-          </a:effectRef>
-          <a:fontRef idx="minor">
-            <a:schemeClr val="lt1"/>
-          </a:fontRef>
-        </p:style>
-        <p:txBody>
-          <a:bodyPr rtlCol="0" anchor="ctr"/>
-          <a:lstStyle/>
-          <a:p>
-            <a:pPr algn="ctr"/>
-          </a:p>
-        </p:txBody>
-      </p:sp>
-      <p:pic>
-        <p:nvPicPr>
-          <p:cNvPr id="7" name="Picture 6" descr="contract-signing-document.jpg"/>
-          <p:cNvPicPr>
-            <a:picLocks noChangeAspect="1"/>
-          </p:cNvPicPr>
-          <p:nvPr/>
-        </p:nvPicPr>
-        <p:blipFill>
-          <a:blip r:embed="rId2"/>
-          <a:stretch>
-            <a:fillRect/>
-          </a:stretch>
-        </p:blipFill>
-        <p:spPr>
-          <a:xfrm>
-            <a:off x="5870301" y="1752121"/>
-            <a:ext cx="5864193" cy="3911541"/>
-          </a:xfrm>
-          <a:prstGeom prst="rect">
-            <a:avLst/>
-          </a:prstGeom>
-        </p:spPr>
-      </p:pic>
-      <p:sp>
-        <p:nvSpPr>
-          <p:cNvPr id="8" name="TextBox 7"/>
+          <p:cNvPr id="6" name="TextBox 5"/>
           <p:cNvSpPr txBox="1"/>
           <p:nvPr/>
         </p:nvSpPr>
         <p:spPr>
           <a:xfrm>
-            <a:off x="5870301" y="5961888"/>
-            <a:ext cx="5864193" cy="320040"/>
-          </a:xfrm>
-          <a:prstGeom prst="rect">
-            <a:avLst/>
-          </a:prstGeom>
-          <a:noFill/>
-        </p:spPr>
-        <p:txBody>
-          <a:bodyPr wrap="square">
-            <a:spAutoFit/>
-          </a:bodyPr>
-          <a:lstStyle/>
-          <a:p>
-            <a:pPr algn="ctr"/>
-            <a:r>
-              <a:rPr sz="1100" b="0" i="1">
-                <a:solidFill>
-                  <a:srgbClr val="666666"/>
-                </a:solidFill>
-                <a:latin typeface="Calibri"/>
-              </a:rPr>
-              <a:t>Foto: https://kaboompics.com/ · Pexels</a:t>
-            </a:r>
-          </a:p>
-        </p:txBody>
-      </p:sp>
-      <p:sp>
-        <p:nvSpPr>
-          <p:cNvPr id="9" name="TextBox 8"/>
-          <p:cNvSpPr txBox="1"/>
-          <p:nvPr/>
-        </p:nvSpPr>
-        <p:spPr>
-          <a:xfrm>
-            <a:off x="457200" y="1563624"/>
-            <a:ext cx="5093061" cy="4837176"/>
+            <a:off x="457200" y="1380744"/>
+            <a:ext cx="11277295" cy="5020056"/>
           </a:xfrm>
           <a:prstGeom prst="rect">
             <a:avLst/>
@@ -15744,7 +14956,43 @@
                 </a:solidFill>
                 <a:latin typeface="Calibri"/>
               </a:rPr>
-              <a:t> «sp_agendar_cita(p_id_mascota INT, p_id_veterinario INT, p_fecha_hora TIMESTAMP)»:</a:t>
+              <a:t> «sp_agendar_cita(p_id_mascota INT, p_id_veterinario INT, p_fecha_hora TIMESTAMP)»: nombre, orden y </a:t>
+            </a:r>
+            <a:r>
+              <a:rPr sz="2000" b="1" i="0">
+                <a:solidFill>
+                  <a:srgbClr val="333333"/>
+                </a:solidFill>
+                <a:latin typeface="Calibri"/>
+              </a:rPr>
+              <a:t>tipo</a:t>
+            </a:r>
+            <a:r>
+              <a:rPr sz="2000" b="0" i="0">
+                <a:solidFill>
+                  <a:srgbClr val="333333"/>
+                </a:solidFill>
+                <a:latin typeface="Calibri"/>
+              </a:rPr>
+              <a:t> de cada parametro. Sin los tipos no es un contrato, es una descripcion. </a:t>
+            </a:r>
+            <a:r>
+              <a:rPr sz="2000" b="1" i="0">
+                <a:solidFill>
+                  <a:srgbClr val="333333"/>
+                </a:solidFill>
+                <a:latin typeface="Calibri"/>
+              </a:rPr>
+              <a:t>2. Como se llama:</a:t>
+            </a:r>
+            <a:r>
+              <a:rPr sz="2000" b="0" i="0">
+                <a:solidFill>
+                  <a:srgbClr val="333333"/>
+                </a:solidFill>
+                <a:latin typeface="Calibri"/>
+              </a:rPr>
+              <a:t> un «CALL» de ejemplo con valores reales, copiable tal cual.</a:t>
             </a:r>
           </a:p>
           <a:p>
@@ -15778,7 +15026,7 @@
                 </a:solidFill>
                 <a:latin typeface="Calibri"/>
               </a:rPr>
-              <a:t> — lo que garantiza quien llama:</a:t>
+              <a:t> — lo que garantiza quien llama: la mascota existe y esta activa, la franja del veterinario esta libre.</a:t>
             </a:r>
           </a:p>
           <a:p>
@@ -15812,7 +15060,25 @@
                 </a:solidFill>
                 <a:latin typeface="Calibri"/>
               </a:rPr>
-              <a:t> — lo que queda cierto si termina bien:</a:t>
+              <a:t> — lo que queda cierto si termina bien: una fila nueva en «cita» con estado «PROGRAMADA», y </a:t>
+            </a:r>
+            <a:r>
+              <a:rPr sz="2000" b="1" i="0">
+                <a:solidFill>
+                  <a:srgbClr val="333333"/>
+                </a:solidFill>
+                <a:latin typeface="Calibri"/>
+              </a:rPr>
+              <a:t>ninguna</a:t>
+            </a:r>
+            <a:r>
+              <a:rPr sz="2000" b="0" i="0">
+                <a:solidFill>
+                  <a:srgbClr val="333333"/>
+                </a:solidFill>
+                <a:latin typeface="Calibri"/>
+              </a:rPr>
+              <a:t> si termina mal.</a:t>
             </a:r>
           </a:p>
           <a:p>
@@ -15864,14 +15130,66 @@
                 </a:solidFill>
                 <a:latin typeface="Calibri"/>
               </a:rPr>
-              <a:t> y que debe hacer la app al recibirlo.</a:t>
-            </a:r>
-          </a:p>
-        </p:txBody>
-      </p:sp>
-      <p:sp>
-        <p:nvSpPr>
-          <p:cNvPr id="10" name="TextBox 9"/>
+              <a:t> y que debe hacer la app al recibirlo. Es lo que vuelve programable el contrato: sin el texto exacto, la app no puede distinguir un error de otro.</a:t>
+            </a:r>
+          </a:p>
+          <a:p>
+            <a:pPr>
+              <a:spcAft>
+                <a:spcPts val="800"/>
+              </a:spcAft>
+            </a:pPr>
+            <a:r>
+              <a:rPr sz="2000" b="0" i="0">
+                <a:solidFill>
+                  <a:srgbClr val="333333"/>
+                </a:solidFill>
+                <a:latin typeface="Calibri"/>
+              </a:rPr>
+              <a:t>–   </a:t>
+            </a:r>
+            <a:r>
+              <a:rPr sz="2000" b="1" i="0">
+                <a:solidFill>
+                  <a:srgbClr val="333333"/>
+                </a:solidFill>
+                <a:latin typeface="Calibri"/>
+              </a:rPr>
+              <a:t>6. Decision de diseno.</a:t>
+            </a:r>
+            <a:r>
+              <a:rPr sz="2000" b="0" i="0">
+                <a:solidFill>
+                  <a:srgbClr val="333333"/>
+                </a:solidFill>
+                <a:latin typeface="Calibri"/>
+              </a:rPr>
+              <a:t> Por que se aborta en vez de devolver un codigo en un «OUT»: porque abortar </a:t>
+            </a:r>
+            <a:r>
+              <a:rPr sz="2000" b="1" i="0">
+                <a:solidFill>
+                  <a:srgbClr val="333333"/>
+                </a:solidFill>
+                <a:latin typeface="Calibri"/>
+              </a:rPr>
+              <a:t>deshace</a:t>
+            </a:r>
+            <a:r>
+              <a:rPr sz="2000" b="0" i="0">
+                <a:solidFill>
+                  <a:srgbClr val="333333"/>
+                </a:solidFill>
+                <a:latin typeface="Calibri"/>
+              </a:rPr>
+              <a:t> lo hecho, y un codigo que nadie revise deja la cita creada igual.</a:t>
+            </a:r>
+          </a:p>
+        </p:txBody>
+      </p:sp>
+      <p:sp>
+        <p:nvSpPr>
+          <p:cNvPr id="7" name="TextBox 6"/>
           <p:cNvSpPr txBox="1"/>
           <p:nvPr/>
         </p:nvSpPr>
@@ -17978,118 +17296,14 @@
       </p:sp>
       <p:sp>
         <p:nvSpPr>
-          <p:cNvPr id="6" name="Rounded Rectangle 5"/>
-          <p:cNvSpPr/>
-          <p:nvPr/>
-        </p:nvSpPr>
-        <p:spPr>
-          <a:xfrm>
-            <a:off x="5797149" y="1816216"/>
-            <a:ext cx="6010497" cy="3783351"/>
-          </a:xfrm>
-          <a:prstGeom prst="roundRect">
-            <a:avLst>
-              <a:gd name="adj" fmla="val 4000"/>
-            </a:avLst>
-          </a:prstGeom>
-          <a:solidFill>
-            <a:srgbClr val="E8EEF4"/>
-          </a:solidFill>
-          <a:ln>
-            <a:noFill/>
-          </a:ln>
-        </p:spPr>
-        <p:style>
-          <a:lnRef idx="1">
-            <a:schemeClr val="accent1"/>
-          </a:lnRef>
-          <a:fillRef idx="3">
-            <a:schemeClr val="accent1"/>
-          </a:fillRef>
-          <a:effectRef idx="2">
-            <a:schemeClr val="accent1"/>
-          </a:effectRef>
-          <a:fontRef idx="minor">
-            <a:schemeClr val="lt1"/>
-          </a:fontRef>
-        </p:style>
-        <p:txBody>
-          <a:bodyPr rtlCol="0" anchor="ctr"/>
-          <a:lstStyle/>
-          <a:p>
-            <a:pPr algn="ctr"/>
-          </a:p>
-        </p:txBody>
-      </p:sp>
-      <p:pic>
-        <p:nvPicPr>
-          <p:cNvPr id="7" name="Picture 6" descr="fork-in-the-road-choice.jpg"/>
-          <p:cNvPicPr>
-            <a:picLocks noChangeAspect="1"/>
-          </p:cNvPicPr>
-          <p:nvPr/>
-        </p:nvPicPr>
-        <p:blipFill>
-          <a:blip r:embed="rId2"/>
-          <a:stretch>
-            <a:fillRect/>
-          </a:stretch>
-        </p:blipFill>
-        <p:spPr>
-          <a:xfrm>
-            <a:off x="5870301" y="1889368"/>
-            <a:ext cx="5864193" cy="3637047"/>
-          </a:xfrm>
-          <a:prstGeom prst="rect">
-            <a:avLst/>
-          </a:prstGeom>
-        </p:spPr>
-      </p:pic>
-      <p:sp>
-        <p:nvSpPr>
-          <p:cNvPr id="8" name="TextBox 7"/>
+          <p:cNvPr id="6" name="TextBox 5"/>
           <p:cNvSpPr txBox="1"/>
           <p:nvPr/>
         </p:nvSpPr>
         <p:spPr>
           <a:xfrm>
-            <a:off x="5870301" y="5961888"/>
-            <a:ext cx="5864193" cy="320040"/>
-          </a:xfrm>
-          <a:prstGeom prst="rect">
-            <a:avLst/>
-          </a:prstGeom>
-          <a:noFill/>
-        </p:spPr>
-        <p:txBody>
-          <a:bodyPr wrap="square">
-            <a:spAutoFit/>
-          </a:bodyPr>
-          <a:lstStyle/>
-          <a:p>
-            <a:pPr algn="ctr"/>
-            <a:r>
-              <a:rPr sz="1100" b="0" i="1">
-                <a:solidFill>
-                  <a:srgbClr val="666666"/>
-                </a:solidFill>
-                <a:latin typeface="Calibri"/>
-              </a:rPr>
-              <a:t>Foto: ilkin yagubov · Pexels</a:t>
-            </a:r>
-          </a:p>
-        </p:txBody>
-      </p:sp>
-      <p:sp>
-        <p:nvSpPr>
-          <p:cNvPr id="9" name="TextBox 8"/>
-          <p:cNvSpPr txBox="1"/>
-          <p:nvPr/>
-        </p:nvSpPr>
-        <p:spPr>
-          <a:xfrm>
-            <a:off x="457200" y="1563624"/>
-            <a:ext cx="5093061" cy="4837176"/>
+            <a:off x="457200" y="1380744"/>
+            <a:ext cx="11277295" cy="5020056"/>
           </a:xfrm>
           <a:prstGeom prst="rect">
             <a:avLst/>
@@ -18108,7 +17322,7 @@
               </a:spcAft>
             </a:pPr>
             <a:r>
-              <a:rPr sz="2000" b="0" i="0">
+              <a:rPr sz="1900" b="0" i="0">
                 <a:solidFill>
                   <a:srgbClr val="333333"/>
                 </a:solidFill>
@@ -18117,13 +17331,40 @@
               <a:t>–   </a:t>
             </a:r>
             <a:r>
-              <a:rPr sz="2000" b="1" i="0">
+              <a:rPr sz="1900" b="1" i="0">
                 <a:solidFill>
                   <a:srgbClr val="333333"/>
                 </a:solidFill>
                 <a:latin typeface="Calibri"/>
               </a:rPr>
               <a:t>«FUNCTION»: devuelve un valor y se invoca DENTRO de una consulta.</a:t>
+            </a:r>
+            <a:r>
+              <a:rPr sz="1900" b="0" i="0">
+                <a:solidFill>
+                  <a:srgbClr val="333333"/>
+                </a:solidFill>
+                <a:latin typeface="Calibri"/>
+              </a:rPr>
+              <a:t> «CREATE FUNCTION fn_precio(p_especie TEXT) RETURNS NUMERIC LANGUAGE plpgsql AS $fn$ ... RETURN v_precio; ... $fn$;» y se usa «SELECT nombre, fn_precio(especie) FROM mascota;». Es la </a:t>
+            </a:r>
+            <a:r>
+              <a:rPr sz="1900" b="1" i="0">
+                <a:solidFill>
+                  <a:srgbClr val="333333"/>
+                </a:solidFill>
+                <a:latin typeface="Calibri"/>
+              </a:rPr>
+              <a:t>unica de las dos</a:t>
+            </a:r>
+            <a:r>
+              <a:rPr sz="1900" b="0" i="0">
+                <a:solidFill>
+                  <a:srgbClr val="333333"/>
+                </a:solidFill>
+                <a:latin typeface="Calibri"/>
+              </a:rPr>
+              <a:t> que cabe en la lista de columnas de un «SELECT», en un «WHERE» o en un «ORDER BY».</a:t>
             </a:r>
           </a:p>
           <a:p>
@@ -18133,7 +17374,7 @@
               </a:spcAft>
             </a:pPr>
             <a:r>
-              <a:rPr sz="2000" b="0" i="0">
+              <a:rPr sz="1900" b="0" i="0">
                 <a:solidFill>
                   <a:srgbClr val="333333"/>
                 </a:solidFill>
@@ -18142,7 +17383,7 @@
               <a:t>–   </a:t>
             </a:r>
             <a:r>
-              <a:rPr sz="2000" b="1" i="0">
+              <a:rPr sz="1900" b="1" i="0">
                 <a:solidFill>
                   <a:srgbClr val="333333"/>
                 </a:solidFill>
@@ -18151,13 +17392,31 @@
               <a:t>«PROCEDURE»: ejecuta pasos y se invoca como sentencia suelta.</a:t>
             </a:r>
             <a:r>
-              <a:rPr sz="2000" b="0" i="0">
+              <a:rPr sz="1900" b="0" i="0">
                 <a:solidFill>
                   <a:srgbClr val="333333"/>
                 </a:solidFill>
                 <a:latin typeface="Calibri"/>
               </a:rPr>
-              <a:t> «CALL sp_agendar_cita(3, 7, '2026-09-01 10:00');».</a:t>
+              <a:t> «CALL sp_agendar_cita(3, 7, '2026-09-01 10:00');». </a:t>
+            </a:r>
+            <a:r>
+              <a:rPr sz="1900" b="1" i="0">
+                <a:solidFill>
+                  <a:srgbClr val="333333"/>
+                </a:solidFill>
+                <a:latin typeface="Calibri"/>
+              </a:rPr>
+              <a:t>No</a:t>
+            </a:r>
+            <a:r>
+              <a:rPr sz="1900" b="0" i="0">
+                <a:solidFill>
+                  <a:srgbClr val="333333"/>
+                </a:solidFill>
+                <a:latin typeface="Calibri"/>
+              </a:rPr>
+              <a:t> se puede poner en un «SELECT». Si lo intentas, el motor responde «sp_agendar_cita(...) is not a function».</a:t>
             </a:r>
           </a:p>
           <a:p>
@@ -18167,7 +17426,7 @@
               </a:spcAft>
             </a:pPr>
             <a:r>
-              <a:rPr sz="2000" b="0" i="0">
+              <a:rPr sz="1900" b="0" i="0">
                 <a:solidFill>
                   <a:srgbClr val="333333"/>
                 </a:solidFill>
@@ -18176,7 +17435,7 @@
               <a:t>–   </a:t>
             </a:r>
             <a:r>
-              <a:rPr sz="2000" b="1" i="0">
+              <a:rPr sz="1900" b="1" i="0">
                 <a:solidFill>
                   <a:srgbClr val="333333"/>
                 </a:solidFill>
@@ -18185,13 +17444,13 @@
               <a:t>Las dos pueden ser «LANGUAGE plpgsql».</a:t>
             </a:r>
             <a:r>
-              <a:rPr sz="2000" b="0" i="0">
+              <a:rPr sz="1900" b="0" i="0">
                 <a:solidFill>
                   <a:srgbClr val="333333"/>
                 </a:solidFill>
                 <a:latin typeface="Calibri"/>
               </a:rPr>
-              <a:t> El lenguaje no decide nada:</a:t>
+              <a:t> El lenguaje no decide nada: es falso que una funcion necesite «LANGUAGE sql» para poder retornar un valor. «sp_agendar_cita» y «fn_precio» son las dos «plpgsql».</a:t>
             </a:r>
           </a:p>
           <a:p>
@@ -18201,7 +17460,7 @@
               </a:spcAft>
             </a:pPr>
             <a:r>
-              <a:rPr sz="2000" b="0" i="0">
+              <a:rPr sz="1900" b="0" i="0">
                 <a:solidFill>
                   <a:srgbClr val="333333"/>
                 </a:solidFill>
@@ -18210,7 +17469,7 @@
               <a:t>–   </a:t>
             </a:r>
             <a:r>
-              <a:rPr sz="2000" b="1" i="0">
+              <a:rPr sz="1900" b="1" i="0">
                 <a:solidFill>
                   <a:srgbClr val="333333"/>
                 </a:solidFill>
@@ -18219,7 +17478,7 @@
               <a:t>Un «PROCEDURE» si admite parametros «OUT»</a:t>
             </a:r>
             <a:r>
-              <a:rPr sz="2000" b="0" i="0">
+              <a:rPr sz="1900" b="0" i="0">
                 <a:solidFill>
                   <a:srgbClr val="333333"/>
                 </a:solidFill>
@@ -18228,7 +17487,7 @@
               <a:t> —y aun asi </a:t>
             </a:r>
             <a:r>
-              <a:rPr sz="2000" b="1" i="0">
+              <a:rPr sz="1900" b="1" i="0">
                 <a:solidFill>
                   <a:srgbClr val="333333"/>
                 </a:solidFill>
@@ -18237,12 +17496,64 @@
               <a:t>sigue sin poder usarse dentro de un «SELECT»</a:t>
             </a:r>
             <a:r>
-              <a:rPr sz="2000" b="0" i="0">
+              <a:rPr sz="1900" b="0" i="0">
                 <a:solidFill>
                   <a:srgbClr val="333333"/>
                 </a:solidFill>
                 <a:latin typeface="Calibri"/>
               </a:rPr>
+              <a:t>. Devolver por «OUT» no es lo mismo que ser invocable en una consulta, y no es «la unica forma de retornar un valor».</a:t>
+            </a:r>
+          </a:p>
+          <a:p>
+            <a:pPr>
+              <a:spcAft>
+                <a:spcPts val="800"/>
+              </a:spcAft>
+            </a:pPr>
+            <a:r>
+              <a:rPr sz="1900" b="0" i="0">
+                <a:solidFill>
+                  <a:srgbClr val="333333"/>
+                </a:solidFill>
+                <a:latin typeface="Calibri"/>
+              </a:rPr>
+              <a:t>–   </a:t>
+            </a:r>
+            <a:r>
+              <a:rPr sz="1900" b="1" i="0">
+                <a:solidFill>
+                  <a:srgbClr val="333333"/>
+                </a:solidFill>
+                <a:latin typeface="Calibri"/>
+              </a:rPr>
+              <a:t>Lo que solo puede el procedimiento: manejar la transaccion.</a:t>
+            </a:r>
+            <a:r>
+              <a:rPr sz="1900" b="0" i="0">
+                <a:solidFill>
+                  <a:srgbClr val="333333"/>
+                </a:solidFill>
+                <a:latin typeface="Calibri"/>
+              </a:rPr>
+              <a:t> Un «PROCEDURE» puede hacer «COMMIT» o «ROLLBACK» adentro; una «FUNCTION» corre dentro de la transaccion de quien la llamo. Por eso agendar es procedimiento y </a:t>
+            </a:r>
+            <a:r>
+              <a:rPr sz="1900" b="1" i="0">
+                <a:solidFill>
+                  <a:srgbClr val="333333"/>
+                </a:solidFill>
+                <a:latin typeface="Calibri"/>
+              </a:rPr>
+              <a:t>la tarifa de la Clase 4 sera funcion</a:t>
+            </a:r>
+            <a:r>
+              <a:rPr sz="1900" b="0" i="0">
+                <a:solidFill>
+                  <a:srgbClr val="333333"/>
+                </a:solidFill>
+                <a:latin typeface="Calibri"/>
+              </a:rPr>
               <a:t>.</a:t>
             </a:r>
           </a:p>
@@ -18250,7 +17561,7 @@
       </p:sp>
       <p:sp>
         <p:nvSpPr>
-          <p:cNvPr id="10" name="TextBox 9"/>
+          <p:cNvPr id="7" name="TextBox 6"/>
           <p:cNvSpPr txBox="1"/>
           <p:nvPr/>
         </p:nvSpPr>
@@ -20562,118 +19873,14 @@
       </p:sp>
       <p:sp>
         <p:nvSpPr>
-          <p:cNvPr id="5" name="Rounded Rectangle 4"/>
-          <p:cNvSpPr/>
-          <p:nvPr/>
-        </p:nvSpPr>
-        <p:spPr>
-          <a:xfrm>
-            <a:off x="5797149" y="1573813"/>
-            <a:ext cx="6010497" cy="4057845"/>
-          </a:xfrm>
-          <a:prstGeom prst="roundRect">
-            <a:avLst>
-              <a:gd name="adj" fmla="val 4000"/>
-            </a:avLst>
-          </a:prstGeom>
-          <a:solidFill>
-            <a:srgbClr val="E8EEF4"/>
-          </a:solidFill>
-          <a:ln>
-            <a:noFill/>
-          </a:ln>
-        </p:spPr>
-        <p:style>
-          <a:lnRef idx="1">
-            <a:schemeClr val="accent1"/>
-          </a:lnRef>
-          <a:fillRef idx="3">
-            <a:schemeClr val="accent1"/>
-          </a:fillRef>
-          <a:effectRef idx="2">
-            <a:schemeClr val="accent1"/>
-          </a:effectRef>
-          <a:fontRef idx="minor">
-            <a:schemeClr val="lt1"/>
-          </a:fontRef>
-        </p:style>
-        <p:txBody>
-          <a:bodyPr rtlCol="0" anchor="ctr"/>
-          <a:lstStyle/>
-          <a:p>
-            <a:pPr algn="ctr"/>
-          </a:p>
-        </p:txBody>
-      </p:sp>
-      <p:pic>
-        <p:nvPicPr>
-          <p:cNvPr id="6" name="Picture 5" descr="laptop-code-live-demo.jpg"/>
-          <p:cNvPicPr>
-            <a:picLocks noChangeAspect="1"/>
-          </p:cNvPicPr>
-          <p:nvPr/>
-        </p:nvPicPr>
-        <p:blipFill>
-          <a:blip r:embed="rId2"/>
-          <a:stretch>
-            <a:fillRect/>
-          </a:stretch>
-        </p:blipFill>
-        <p:spPr>
-          <a:xfrm>
-            <a:off x="5870301" y="1646965"/>
-            <a:ext cx="5864193" cy="3911541"/>
-          </a:xfrm>
-          <a:prstGeom prst="rect">
-            <a:avLst/>
-          </a:prstGeom>
-        </p:spPr>
-      </p:pic>
-      <p:sp>
-        <p:nvSpPr>
-          <p:cNvPr id="7" name="TextBox 6"/>
+          <p:cNvPr id="5" name="TextBox 4"/>
           <p:cNvSpPr txBox="1"/>
           <p:nvPr/>
         </p:nvSpPr>
         <p:spPr>
           <a:xfrm>
-            <a:off x="5870301" y="5961888"/>
-            <a:ext cx="5864193" cy="320040"/>
-          </a:xfrm>
-          <a:prstGeom prst="rect">
-            <a:avLst/>
-          </a:prstGeom>
-          <a:noFill/>
-        </p:spPr>
-        <p:txBody>
-          <a:bodyPr wrap="square">
-            <a:spAutoFit/>
-          </a:bodyPr>
-          <a:lstStyle/>
-          <a:p>
-            <a:pPr algn="ctr"/>
-            <a:r>
-              <a:rPr sz="1100" b="0" i="1">
-                <a:solidFill>
-                  <a:srgbClr val="666666"/>
-                </a:solidFill>
-                <a:latin typeface="Calibri"/>
-              </a:rPr>
-              <a:t>Foto: olia danilevich · Pexels</a:t>
-            </a:r>
-          </a:p>
-        </p:txBody>
-      </p:sp>
-      <p:sp>
-        <p:nvSpPr>
-          <p:cNvPr id="8" name="TextBox 7"/>
-          <p:cNvSpPr txBox="1"/>
-          <p:nvPr/>
-        </p:nvSpPr>
-        <p:spPr>
-          <a:xfrm>
-            <a:off x="457200" y="1353312"/>
-            <a:ext cx="5093061" cy="5047488"/>
+            <a:off x="457200" y="1170432"/>
+            <a:ext cx="11277295" cy="5230368"/>
           </a:xfrm>
           <a:prstGeom prst="rect">
             <a:avLst/>
@@ -20750,7 +19957,7 @@
                 </a:solidFill>
                 <a:latin typeface="Calibri"/>
               </a:rPr>
-              <a:t> sp_agendar_cita en PL/pgSQL:</a:t>
+              <a:t> sp_agendar_cita en PL/pgSQL: las 3 validaciones con RAISE EXCEPTION y la bateria de bloques DO que las prueba.</a:t>
             </a:r>
           </a:p>
           <a:p>
@@ -20800,14 +20007,48 @@
                 </a:solidFill>
                 <a:latin typeface="Calibri"/>
               </a:rPr>
-              <a:t> el CALL valido inserta una cita y los invalidos abortan con su mensaje literal;</a:t>
-            </a:r>
-          </a:p>
-        </p:txBody>
-      </p:sp>
-      <p:sp>
-        <p:nvSpPr>
-          <p:cNvPr id="9" name="TextBox 8"/>
+              <a:t> el CALL valido inserta una cita y los invalidos abortan con su mensaje literal; el «COUNT(*)» de cita confirma que los fallidos no dejaron nada.</a:t>
+            </a:r>
+          </a:p>
+          <a:p>
+            <a:pPr>
+              <a:spcAft>
+                <a:spcPts val="800"/>
+              </a:spcAft>
+            </a:pPr>
+            <a:r>
+              <a:rPr sz="2000" b="0" i="0">
+                <a:solidFill>
+                  <a:srgbClr val="333333"/>
+                </a:solidFill>
+                <a:latin typeface="Calibri"/>
+              </a:rPr>
+              <a:t>–   </a:t>
+            </a:r>
+            <a:r>
+              <a:rPr sz="2000" b="1" i="0">
+                <a:solidFill>
+                  <a:srgbClr val="333333"/>
+                </a:solidFill>
+                <a:latin typeface="Calibri"/>
+              </a:rPr>
+              <a:t>Qué observar:</a:t>
+            </a:r>
+            <a:r>
+              <a:rPr sz="2000" b="0" i="0">
+                <a:solidFill>
+                  <a:srgbClr val="333333"/>
+                </a:solidFill>
+                <a:latin typeface="Calibri"/>
+              </a:rPr>
+              <a:t> el procedimiento queda guardado en el motor: cerrar la sesion no lo borra, y cualquier cliente lo invoca con CALL.</a:t>
+            </a:r>
+          </a:p>
+        </p:txBody>
+      </p:sp>
+      <p:sp>
+        <p:nvSpPr>
+          <p:cNvPr id="6" name="TextBox 5"/>
           <p:cNvSpPr txBox="1"/>
           <p:nvPr/>
         </p:nvSpPr>
